--- a/lecons/F2T/07_S01_L2_P2_Tropical_Grassland_Soils_Vegetation.pptx
+++ b/lecons/F2T/07_S01_L2_P2_Tropical_Grassland_Soils_Vegetation.pptx
@@ -58,9 +58,12 @@
     <p:sldId id="306" r:id="rId52"/>
     <p:sldId id="307" r:id="rId53"/>
     <p:sldId id="308" r:id="rId54"/>
+    <p:sldId id="309" r:id="rId55"/>
+    <p:sldId id="310" r:id="rId56"/>
+    <p:sldId id="311" r:id="rId57"/>
   </p:sldIdLst>
   <p:notesMasterIdLst>
-    <p:notesMasterId r:id="rId55"/>
+    <p:notesMasterId r:id="rId58"/>
   </p:notesMasterIdLst>
   <p:sldSz cx="12192000" cy="6858000"/>
   <p:notesSz cx="6858000" cy="12192000"/>
@@ -730,7 +733,7 @@
           <a:p>
             <a:r>
               <a:rPr lang="en-US" dirty="0"/>
-              <a:t>Listen carefully to this situation from real life. In January, Hawa travels from Garoua to Ngaoundéré. The grass is dry and yellow, and many trees have no leaves. But one big tree, the shea tree, still has leaves, and its bark is not burnt. Think about it, because I am going to ask you some questions.</a:t>
+              <a:t>Listen carefully to this situation from real life. In January, Hawa travels from Garoua to Ngaoundéré. The grass is dry and yellow, and many trees have no leaves, but the shea tree still has leaves and its bark is not burnt. Hawa asks: "How do the plants of the savanna survive the long dry season and the bush fires?" Think about it, because I am going to ask you some questions.</a:t>
             </a:r>
             <a:endParaRPr lang="en-US" dirty="0"/>
           </a:p>
@@ -906,7 +909,7 @@
           <a:p>
             <a:r>
               <a:rPr lang="en-US" dirty="0"/>
-              <a:t>Good. Hawa does not know how savanna plants survive the dry season.</a:t>
+              <a:t>Good. Hawa does not know how savanna plants survive the dry season and fires.</a:t>
             </a:r>
             <a:endParaRPr lang="en-US" dirty="0"/>
           </a:p>
@@ -994,7 +997,7 @@
           <a:p>
             <a:r>
               <a:rPr lang="en-US" dirty="0"/>
-              <a:t>Question 2: What did Hawa see? Think for a moment, then raise your hand to answer.</a:t>
+              <a:t>Question 2: What colour is the grass in January? Think for a moment, then raise your hand to answer.</a:t>
             </a:r>
             <a:endParaRPr lang="en-US" dirty="0"/>
           </a:p>
@@ -1082,7 +1085,7 @@
           <a:p>
             <a:r>
               <a:rPr lang="en-US" dirty="0"/>
-              <a:t>Good. Dry grass and trees without leaves.</a:t>
+              <a:t>Good. Yellow (dry).</a:t>
             </a:r>
             <a:endParaRPr lang="en-US" dirty="0"/>
           </a:p>
@@ -1170,7 +1173,7 @@
           <a:p>
             <a:r>
               <a:rPr lang="en-US" dirty="0"/>
-              <a:t>Question 3: How can we protect the trees from fire? Think for a moment, then raise your hand to answer.</a:t>
+              <a:t>Question 3: Which tree still has leaves? Think for a moment, then raise your hand to answer.</a:t>
             </a:r>
             <a:endParaRPr lang="en-US" dirty="0"/>
           </a:p>
@@ -1258,7 +1261,7 @@
           <a:p>
             <a:r>
               <a:rPr lang="en-US" dirty="0"/>
-              <a:t>Good. We can avoid bush fires and make firebreaks.</a:t>
+              <a:t>Good. The shea tree.</a:t>
             </a:r>
             <a:endParaRPr lang="en-US" dirty="0"/>
           </a:p>
@@ -1610,7 +1613,7 @@
           <a:p>
             <a:r>
               <a:rPr lang="en-US" dirty="0"/>
-              <a:t>Activity 1. Look carefully at this picture: a baobab tree. Observe every detail before I ask the question.</a:t>
+              <a:t>Activity 1. Look carefully at this picture: a baobab. Observe every detail before I ask the question.</a:t>
             </a:r>
             <a:endParaRPr lang="en-US" dirty="0"/>
           </a:p>
@@ -1698,7 +1701,7 @@
           <a:p>
             <a:r>
               <a:rPr lang="en-US" dirty="0"/>
-              <a:t>Here is the question for Activity 1: Look at the trunk of the baobab. How does it help the tree in the dry season? Take one minute to think and write your answer in your rough notebook.</a:t>
+              <a:t>Here is the question for Activity 1: How does the big trunk of the baobab help it in the dry season? Take one minute to think and write your answer in your rough notebook.</a:t>
             </a:r>
             <a:endParaRPr lang="en-US" dirty="0"/>
           </a:p>
@@ -1786,7 +1789,7 @@
           <a:p>
             <a:r>
               <a:rPr lang="en-US" dirty="0"/>
-              <a:t>Let us check the answer together. The big trunk keeps water for the dry season.</a:t>
+              <a:t>Let us check the answer together. It stores water.</a:t>
             </a:r>
             <a:endParaRPr lang="en-US" dirty="0"/>
           </a:p>
@@ -1874,7 +1877,7 @@
           <a:p>
             <a:r>
               <a:rPr lang="en-US" dirty="0"/>
-              <a:t>Activity 2. Look carefully at this picture: a tree without leaves in the dry season. Observe every detail before I ask the question.</a:t>
+              <a:t>Activity 2. Look carefully at this picture: trees without leaves. Observe every detail before I ask the question.</a:t>
             </a:r>
             <a:endParaRPr lang="en-US" dirty="0"/>
           </a:p>
@@ -2050,7 +2053,7 @@
           <a:p>
             <a:r>
               <a:rPr lang="en-US" dirty="0"/>
-              <a:t>Let us check the answer together. To lose less water when there is no rain.</a:t>
+              <a:t>Let us check the answer together. To lose less water.</a:t>
             </a:r>
             <a:endParaRPr lang="en-US" dirty="0"/>
           </a:p>
@@ -2138,7 +2141,7 @@
           <a:p>
             <a:r>
               <a:rPr lang="en-US" dirty="0"/>
-              <a:t>Activity 3. Look carefully at this picture: a shea tree (karité). Observe every detail before I ask the question.</a:t>
+              <a:t>Activity 3. Look carefully at this picture: a shea tree. Observe every detail before I ask the question.</a:t>
             </a:r>
             <a:endParaRPr lang="en-US" dirty="0"/>
           </a:p>
@@ -2226,7 +2229,7 @@
           <a:p>
             <a:r>
               <a:rPr lang="en-US" dirty="0"/>
-              <a:t>Here is the question for Activity 3: The shea tree has a thick bark. How does it help the tree? Take one minute to think and write your answer in your rough notebook.</a:t>
+              <a:t>Here is the question for Activity 3: How does the thick bark help the shea tree? Take one minute to think and write your answer in your rough notebook.</a:t>
             </a:r>
             <a:endParaRPr lang="en-US" dirty="0"/>
           </a:p>
@@ -2314,7 +2317,7 @@
           <a:p>
             <a:r>
               <a:rPr lang="en-US" dirty="0"/>
-              <a:t>Let us check the answer together. The thick bark protects the tree from bush fires.</a:t>
+              <a:t>Let us check the answer together. It protects the tree from bush fires.</a:t>
             </a:r>
             <a:endParaRPr lang="en-US" dirty="0"/>
           </a:p>
@@ -2402,7 +2405,7 @@
           <a:p>
             <a:r>
               <a:rPr lang="en-US" dirty="0"/>
-              <a:t>Activity 4. Look carefully at this picture: bricks cut from red laterite. Observe every detail before I ask the question.</a:t>
+              <a:t>Activity 4. Look carefully at this picture: a red, hard soil. Observe every detail before I ask the question.</a:t>
             </a:r>
             <a:endParaRPr lang="en-US" dirty="0"/>
           </a:p>
@@ -2578,7 +2581,7 @@
           <a:p>
             <a:r>
               <a:rPr lang="en-US" dirty="0"/>
-              <a:t>Here is the question for Activity 4: This red soil becomes very hard when it dries. What is it called? What do we use it for? Take one minute to think and write your answer in your rough notebook.</a:t>
+              <a:t>Here is the question for Activity 4: What is this red soil that becomes hard when it dries? Take one minute to think and write your answer in your rough notebook.</a:t>
             </a:r>
             <a:endParaRPr lang="en-US" dirty="0"/>
           </a:p>
@@ -2666,7 +2669,7 @@
           <a:p>
             <a:r>
               <a:rPr lang="en-US" dirty="0"/>
-              <a:t>Let us check the answer together. It is laterite. We use it for roads and bricks.</a:t>
+              <a:t>Let us check the answer together. Laterite.</a:t>
             </a:r>
             <a:endParaRPr lang="en-US" dirty="0"/>
           </a:p>
@@ -2754,7 +2757,7 @@
           <a:p>
             <a:r>
               <a:rPr lang="en-US" dirty="0"/>
-              <a:t>Activity 5. Look carefully at this picture: clay soil with big cracks in the dry season. Observe every detail before I ask the question.</a:t>
+              <a:t>Activity 5. Look carefully at this picture: a black soil that cracks. Observe every detail before I ask the question.</a:t>
             </a:r>
             <a:endParaRPr lang="en-US" dirty="0"/>
           </a:p>
@@ -2842,7 +2845,7 @@
           <a:p>
             <a:r>
               <a:rPr lang="en-US" dirty="0"/>
-              <a:t>Here is the question for Activity 5: Black cotton soils are clay soils that crack when dry. Why do farmers like them? Take one minute to think and write your answer in your rough notebook.</a:t>
+              <a:t>Here is the question for Activity 5: Why do farmers like black cotton soils? Take one minute to think and write your answer in your rough notebook.</a:t>
             </a:r>
             <a:endParaRPr lang="en-US" dirty="0"/>
           </a:p>
@@ -2930,7 +2933,7 @@
           <a:p>
             <a:r>
               <a:rPr lang="en-US" dirty="0"/>
-              <a:t>Let us check the answer together. It is fertile and keeps water. It is good for cotton and sorghum.</a:t>
+              <a:t>Let us check the answer together. They are fertile and keep water.</a:t>
             </a:r>
             <a:endParaRPr lang="en-US" dirty="0"/>
           </a:p>
@@ -3106,7 +3109,7 @@
           <a:p>
             <a:r>
               <a:rPr lang="en-US" dirty="0"/>
-              <a:t>Let us copy the definitions. The key terms of this lesson are defined as follows. On this slide we have Deciduous tree and Laterite. Write each point on a new line, with the key term first, and explain it in your own words when we revise. When you finish, we go to the next slide.</a:t>
+              <a:t>Let us copy the definitions. The key terms of this lesson are defined as follows. On this slide we have Savanna and Laterite. Write each point on a new line, with the key term first, and explain it in your own words when we revise.</a:t>
             </a:r>
             <a:endParaRPr lang="en-US" dirty="0"/>
           </a:p>
@@ -3194,7 +3197,7 @@
           <a:p>
             <a:r>
               <a:rPr lang="en-US" dirty="0"/>
-              <a:t>We continue with the definitions. On this slide we have Leaching. Write each point on a new line, with the key term first, and explain it in your own words when we revise.</a:t>
+              <a:t>Let us copy Vegetation. The savanna vegetation has the following characteristics. Copy the point on Tall grass on the left, then draw the diagram on the right: the savanna. Give it a title and label it clearly.</a:t>
             </a:r>
             <a:endParaRPr lang="en-US" dirty="0"/>
           </a:p>
@@ -3282,7 +3285,7 @@
           <a:p>
             <a:r>
               <a:rPr lang="en-US" dirty="0"/>
-              <a:t>Let us copy Vegetation. The vegetation of the savanna has the following characteristics. On this slide we have Grass and Trees. Write each point on a new line, with the key term first, and explain it in your own words when we revise. When you finish, we go to the next slide.</a:t>
+              <a:t>We continue with Vegetation. On this slide we have Scattered trees and Deciduous trees. Write each point on a new line, with the key term first, and explain it in your own words when we revise.</a:t>
             </a:r>
             <a:endParaRPr lang="en-US" dirty="0"/>
           </a:p>
@@ -3370,7 +3373,7 @@
           <a:p>
             <a:r>
               <a:rPr lang="en-US" dirty="0"/>
-              <a:t>We continue with Vegetation. On this slide we have Deciduous trees and Thick bark. Write each point on a new line, with the key term first, and explain it in your own words when we revise.</a:t>
+              <a:t>Copy the point on Water storage on the left, then draw the diagram on the right: a baobab. Give it a title and label it clearly.</a:t>
             </a:r>
             <a:endParaRPr lang="en-US" dirty="0"/>
           </a:p>
@@ -3546,7 +3549,7 @@
           <a:p>
             <a:r>
               <a:rPr lang="en-US" dirty="0"/>
-              <a:t>Let us copy Soils. The soils of the savanna have the following characteristics. On this slide we have Red soils and Laterite. Write each point on a new line, with the key term first, and explain it in your own words when we revise. When you finish, we go to the next slide.</a:t>
+              <a:t>We continue with Vegetation. On this slide we have Protection. Write each point on a new line, with the key term first, and explain it in your own words when we revise.</a:t>
             </a:r>
             <a:endParaRPr lang="en-US" dirty="0"/>
           </a:p>
@@ -3634,7 +3637,7 @@
           <a:p>
             <a:r>
               <a:rPr lang="en-US" dirty="0"/>
-              <a:t>We continue with Soils. On this slide we have Black cotton soils and Little humus. Write each point on a new line, with the key term first, and explain it in your own words when we revise.</a:t>
+              <a:t>Let us copy Soils. The savanna soils have the following characteristics. On this slide we have Ferruginous soils. Write each point on a new line, with the key term first, and explain it in your own words when we revise.</a:t>
             </a:r>
             <a:endParaRPr lang="en-US" dirty="0"/>
           </a:p>
@@ -3722,7 +3725,7 @@
           <a:p>
             <a:r>
               <a:rPr lang="en-US" dirty="0"/>
-              <a:t>Now let us check what you have understood. Question 1: Give two ways savanna trees survive the dry season. Answer in your exercise book.</a:t>
+              <a:t>Copy the point on Laterite on the left, then draw the diagram on the right: laterite. Give it a title and label it clearly.</a:t>
             </a:r>
             <a:endParaRPr lang="en-US" dirty="0"/>
           </a:p>
@@ -3810,7 +3813,7 @@
           <a:p>
             <a:r>
               <a:rPr lang="en-US" dirty="0"/>
-              <a:t>The expected answer is: they lose their leaves; the baobab keeps water in its trunk. If you got it right, well done.</a:t>
+              <a:t>We continue with Soils. On this slide we have Black cotton soils and Little humus. Write each point on a new line, with the key term first, and explain it in your own words when we revise.</a:t>
             </a:r>
             <a:endParaRPr lang="en-US" dirty="0"/>
           </a:p>
@@ -3898,7 +3901,7 @@
           <a:p>
             <a:r>
               <a:rPr lang="en-US" dirty="0"/>
-              <a:t>Now let us check what you have understood. Question 2: What is laterite used for? Answer in your exercise book.</a:t>
+              <a:t>Now let us check what you have understood. Question 1: Give two ways savanna trees survive the dry season. Answer in your exercise book.</a:t>
             </a:r>
             <a:endParaRPr lang="en-US" dirty="0"/>
           </a:p>
@@ -3986,7 +3989,7 @@
           <a:p>
             <a:r>
               <a:rPr lang="en-US" dirty="0"/>
-              <a:t>The expected answer is: for roads and bricks. If you got it right, well done.</a:t>
+              <a:t>The expected answer is: they lose their leaves; the baobab keeps water in its trunk. If you got it right, well done.</a:t>
             </a:r>
             <a:endParaRPr lang="en-US" dirty="0"/>
           </a:p>
@@ -4074,7 +4077,7 @@
           <a:p>
             <a:r>
               <a:rPr lang="en-US" dirty="0"/>
-              <a:t>For those who need more practice, fill in the blanks in your exercise book. The answers are: number 1, deciduous; number 2, baobab; number 3, laterite.</a:t>
+              <a:t>Now let us check what you have understood. Question 2: What is laterite used for? Answer in your exercise book.</a:t>
             </a:r>
             <a:endParaRPr lang="en-US" dirty="0"/>
           </a:p>
@@ -4162,7 +4165,7 @@
           <a:p>
             <a:r>
               <a:rPr lang="en-US" dirty="0"/>
-              <a:t>For your homework: List three things that people in your family get from the savanna around Garoua, for example food, wood or animals. We shall correct it at the beginning of our next lesson.</a:t>
+              <a:t>The expected answer is: for roads and bricks. If you got it right, well done.</a:t>
             </a:r>
             <a:endParaRPr lang="en-US" dirty="0"/>
           </a:p>
@@ -4250,7 +4253,7 @@
           <a:p>
             <a:r>
               <a:rPr lang="en-US" dirty="0"/>
-              <a:t>Our next lesson will be on Lesson 2 (Part 3): The Tropical Grassland Region: Types of Resources and Methods of Exploitation. Thank you for your attention, and see you next time.</a:t>
+              <a:t>For those who need more practice, fill in the blanks in your exercise book. The answers are: number 1, deciduous; number 2, baobab; number 3, laterite.</a:t>
             </a:r>
             <a:endParaRPr lang="en-US" dirty="0"/>
           </a:p>
@@ -4338,7 +4341,7 @@
           <a:p>
             <a:r>
               <a:rPr lang="en-US" dirty="0"/>
-              <a:t>Let us play the bilingual game. I say a word in English, and you give me the French word. Then we do the reverse.</a:t>
+              <a:t>For your homework: List three things that people in your family get from the savanna around Garoua, for example food, wood or animals. We shall correct it at the beginning of our next lesson.</a:t>
             </a:r>
             <a:endParaRPr lang="en-US" dirty="0"/>
           </a:p>
@@ -4514,7 +4517,7 @@
           <a:p>
             <a:r>
               <a:rPr lang="en-US" dirty="0"/>
-              <a:t>I record this information in the official logbook of the class after the lesson.</a:t>
+              <a:t>Our next lesson will be on Lesson 2 (Part 3): The Tropical Grassland Region: Types of Resources and Methods of Exploitation. Thank you for your attention, and see you next time.</a:t>
             </a:r>
             <a:endParaRPr lang="en-US" dirty="0"/>
           </a:p>
@@ -4602,7 +4605,7 @@
           <a:p>
             <a:r>
               <a:rPr lang="en-US" dirty="0"/>
-              <a:t>I complete the second page of the logbook: the matter taught, the evaluation, the homework and the attendance.</a:t>
+              <a:t>Let us play the bilingual game. I say a word in English, and you give me the French word. Then we do the reverse.</a:t>
             </a:r>
             <a:endParaRPr lang="en-US" dirty="0"/>
           </a:p>
@@ -4690,7 +4693,7 @@
           <a:p>
             <a:r>
               <a:rPr lang="en-US" dirty="0"/>
-              <a:t>This slide is for me, the teacher: it gives the timing of the lesson and what to do if the projector is not available.</a:t>
+              <a:t>I record this information in the official logbook of the class after the lesson.</a:t>
             </a:r>
             <a:endParaRPr lang="en-US" dirty="0"/>
           </a:p>
@@ -4778,7 +4781,7 @@
           <a:p>
             <a:r>
               <a:rPr lang="en-US" dirty="0"/>
-              <a:t>These are the references and picture credits used to prepare this lesson.</a:t>
+              <a:t>I complete the second page of the logbook: the matter taught, the evaluation, the homework and the attendance.</a:t>
             </a:r>
             <a:endParaRPr lang="en-US" dirty="0"/>
           </a:p>
@@ -4802,6 +4805,270 @@
             <a:fld id="{F7021451-1387-4CA6-816F-3879F97B5CBC}" type="slidenum">
               <a:rPr lang="en-US"/>
               <a:t>53</a:t>
+            </a:fld>
+            <a:endParaRPr lang="en-US"/>
+          </a:p>
+        </p:txBody>
+      </p:sp>
+    </p:spTree>
+    <p:extLst>
+      <p:ext uri="{BB962C8B-B14F-4D97-AF65-F5344CB8AC3E}">
+        <p14:creationId xmlns:p14="http://schemas.microsoft.com/office/powerpoint/2010/main" val="1024086991"/>
+      </p:ext>
+    </p:extLst>
+  </p:cSld>
+  <p:clrMapOvr>
+    <a:masterClrMapping/>
+  </p:clrMapOvr>
+</p:notes>
+</file>
+
+<file path=ppt/notesSlides/notesSlide54.xml><?xml version="1.0" encoding="utf-8"?>
+<p:notes xmlns:a="http://schemas.openxmlformats.org/drawingml/2006/main" xmlns:r="http://schemas.openxmlformats.org/officeDocument/2006/relationships" xmlns:p="http://schemas.openxmlformats.org/presentationml/2006/main">
+  <p:cSld>
+    <p:spTree>
+      <p:nvGrpSpPr>
+        <p:cNvPr id="1" name=""/>
+        <p:cNvGrpSpPr/>
+        <p:nvPr/>
+      </p:nvGrpSpPr>
+      <p:grpSpPr>
+        <a:xfrm>
+          <a:off x="0" y="0"/>
+          <a:ext cx="0" cy="0"/>
+          <a:chOff x="0" y="0"/>
+          <a:chExt cx="0" cy="0"/>
+        </a:xfrm>
+      </p:grpSpPr>
+      <p:sp>
+        <p:nvSpPr>
+          <p:cNvPr id="2" name="Slide Image Placeholder 1"/>
+          <p:cNvSpPr>
+            <a:spLocks noGrp="1" noRot="1" noChangeAspect="1"/>
+          </p:cNvSpPr>
+          <p:nvPr>
+            <p:ph type="sldImg"/>
+          </p:nvPr>
+        </p:nvSpPr>
+        <p:spPr/>
+      </p:sp>
+      <p:sp>
+        <p:nvSpPr>
+          <p:cNvPr id="3" name="Notes Placeholder 2"/>
+          <p:cNvSpPr>
+            <a:spLocks noGrp="1"/>
+          </p:cNvSpPr>
+          <p:nvPr>
+            <p:ph type="body" idx="1"/>
+          </p:nvPr>
+        </p:nvSpPr>
+        <p:spPr/>
+        <p:txBody>
+          <a:bodyPr/>
+          <a:lstStyle/>
+          <a:p>
+            <a:r>
+              <a:rPr lang="en-US" dirty="0"/>
+              <a:t>This slide is for me, the teacher: it gives the timing of the lesson and what to do if the projector is not available.</a:t>
+            </a:r>
+            <a:endParaRPr lang="en-US" dirty="0"/>
+          </a:p>
+        </p:txBody>
+      </p:sp>
+      <p:sp>
+        <p:nvSpPr>
+          <p:cNvPr id="4" name="Slide Number Placeholder 3"/>
+          <p:cNvSpPr>
+            <a:spLocks noGrp="1"/>
+          </p:cNvSpPr>
+          <p:nvPr>
+            <p:ph type="sldNum" sz="quarter" idx="10"/>
+          </p:nvPr>
+        </p:nvSpPr>
+        <p:spPr/>
+        <p:txBody>
+          <a:bodyPr/>
+          <a:lstStyle/>
+          <a:p>
+            <a:fld id="{F7021451-1387-4CA6-816F-3879F97B5CBC}" type="slidenum">
+              <a:rPr lang="en-US"/>
+              <a:t>54</a:t>
+            </a:fld>
+            <a:endParaRPr lang="en-US"/>
+          </a:p>
+        </p:txBody>
+      </p:sp>
+    </p:spTree>
+    <p:extLst>
+      <p:ext uri="{BB962C8B-B14F-4D97-AF65-F5344CB8AC3E}">
+        <p14:creationId xmlns:p14="http://schemas.microsoft.com/office/powerpoint/2010/main" val="1024086991"/>
+      </p:ext>
+    </p:extLst>
+  </p:cSld>
+  <p:clrMapOvr>
+    <a:masterClrMapping/>
+  </p:clrMapOvr>
+</p:notes>
+</file>
+
+<file path=ppt/notesSlides/notesSlide55.xml><?xml version="1.0" encoding="utf-8"?>
+<p:notes xmlns:a="http://schemas.openxmlformats.org/drawingml/2006/main" xmlns:r="http://schemas.openxmlformats.org/officeDocument/2006/relationships" xmlns:p="http://schemas.openxmlformats.org/presentationml/2006/main">
+  <p:cSld>
+    <p:spTree>
+      <p:nvGrpSpPr>
+        <p:cNvPr id="1" name=""/>
+        <p:cNvGrpSpPr/>
+        <p:nvPr/>
+      </p:nvGrpSpPr>
+      <p:grpSpPr>
+        <a:xfrm>
+          <a:off x="0" y="0"/>
+          <a:ext cx="0" cy="0"/>
+          <a:chOff x="0" y="0"/>
+          <a:chExt cx="0" cy="0"/>
+        </a:xfrm>
+      </p:grpSpPr>
+      <p:sp>
+        <p:nvSpPr>
+          <p:cNvPr id="2" name="Slide Image Placeholder 1"/>
+          <p:cNvSpPr>
+            <a:spLocks noGrp="1" noRot="1" noChangeAspect="1"/>
+          </p:cNvSpPr>
+          <p:nvPr>
+            <p:ph type="sldImg"/>
+          </p:nvPr>
+        </p:nvSpPr>
+        <p:spPr/>
+      </p:sp>
+      <p:sp>
+        <p:nvSpPr>
+          <p:cNvPr id="3" name="Notes Placeholder 2"/>
+          <p:cNvSpPr>
+            <a:spLocks noGrp="1"/>
+          </p:cNvSpPr>
+          <p:nvPr>
+            <p:ph type="body" idx="1"/>
+          </p:nvPr>
+        </p:nvSpPr>
+        <p:spPr/>
+        <p:txBody>
+          <a:bodyPr/>
+          <a:lstStyle/>
+          <a:p>
+            <a:r>
+              <a:rPr lang="en-US" dirty="0"/>
+              <a:t>Take your time to copy this part; we will continue together.</a:t>
+            </a:r>
+            <a:endParaRPr lang="en-US" dirty="0"/>
+          </a:p>
+        </p:txBody>
+      </p:sp>
+      <p:sp>
+        <p:nvSpPr>
+          <p:cNvPr id="4" name="Slide Number Placeholder 3"/>
+          <p:cNvSpPr>
+            <a:spLocks noGrp="1"/>
+          </p:cNvSpPr>
+          <p:nvPr>
+            <p:ph type="sldNum" sz="quarter" idx="10"/>
+          </p:nvPr>
+        </p:nvSpPr>
+        <p:spPr/>
+        <p:txBody>
+          <a:bodyPr/>
+          <a:lstStyle/>
+          <a:p>
+            <a:fld id="{F7021451-1387-4CA6-816F-3879F97B5CBC}" type="slidenum">
+              <a:rPr lang="en-US"/>
+              <a:t>55</a:t>
+            </a:fld>
+            <a:endParaRPr lang="en-US"/>
+          </a:p>
+        </p:txBody>
+      </p:sp>
+    </p:spTree>
+    <p:extLst>
+      <p:ext uri="{BB962C8B-B14F-4D97-AF65-F5344CB8AC3E}">
+        <p14:creationId xmlns:p14="http://schemas.microsoft.com/office/powerpoint/2010/main" val="1024086991"/>
+      </p:ext>
+    </p:extLst>
+  </p:cSld>
+  <p:clrMapOvr>
+    <a:masterClrMapping/>
+  </p:clrMapOvr>
+</p:notes>
+</file>
+
+<file path=ppt/notesSlides/notesSlide56.xml><?xml version="1.0" encoding="utf-8"?>
+<p:notes xmlns:a="http://schemas.openxmlformats.org/drawingml/2006/main" xmlns:r="http://schemas.openxmlformats.org/officeDocument/2006/relationships" xmlns:p="http://schemas.openxmlformats.org/presentationml/2006/main">
+  <p:cSld>
+    <p:spTree>
+      <p:nvGrpSpPr>
+        <p:cNvPr id="1" name=""/>
+        <p:cNvGrpSpPr/>
+        <p:nvPr/>
+      </p:nvGrpSpPr>
+      <p:grpSpPr>
+        <a:xfrm>
+          <a:off x="0" y="0"/>
+          <a:ext cx="0" cy="0"/>
+          <a:chOff x="0" y="0"/>
+          <a:chExt cx="0" cy="0"/>
+        </a:xfrm>
+      </p:grpSpPr>
+      <p:sp>
+        <p:nvSpPr>
+          <p:cNvPr id="2" name="Slide Image Placeholder 1"/>
+          <p:cNvSpPr>
+            <a:spLocks noGrp="1" noRot="1" noChangeAspect="1"/>
+          </p:cNvSpPr>
+          <p:nvPr>
+            <p:ph type="sldImg"/>
+          </p:nvPr>
+        </p:nvSpPr>
+        <p:spPr/>
+      </p:sp>
+      <p:sp>
+        <p:nvSpPr>
+          <p:cNvPr id="3" name="Notes Placeholder 2"/>
+          <p:cNvSpPr>
+            <a:spLocks noGrp="1"/>
+          </p:cNvSpPr>
+          <p:nvPr>
+            <p:ph type="body" idx="1"/>
+          </p:nvPr>
+        </p:nvSpPr>
+        <p:spPr/>
+        <p:txBody>
+          <a:bodyPr/>
+          <a:lstStyle/>
+          <a:p>
+            <a:r>
+              <a:rPr lang="en-US" dirty="0"/>
+              <a:t>These are the references and picture credits used to prepare this lesson.</a:t>
+            </a:r>
+            <a:endParaRPr lang="en-US" dirty="0"/>
+          </a:p>
+        </p:txBody>
+      </p:sp>
+      <p:sp>
+        <p:nvSpPr>
+          <p:cNvPr id="4" name="Slide Number Placeholder 3"/>
+          <p:cNvSpPr>
+            <a:spLocks noGrp="1"/>
+          </p:cNvSpPr>
+          <p:nvPr>
+            <p:ph type="sldNum" sz="quarter" idx="10"/>
+          </p:nvPr>
+        </p:nvSpPr>
+        <p:spPr/>
+        <p:txBody>
+          <a:bodyPr/>
+          <a:lstStyle/>
+          <a:p>
+            <a:fld id="{F7021451-1387-4CA6-816F-3879F97B5CBC}" type="slidenum">
+              <a:rPr lang="en-US"/>
+              <a:t>56</a:t>
             </a:fld>
             <a:endParaRPr lang="en-US"/>
           </a:p>
@@ -6772,7 +7039,7 @@
         <p:spPr>
           <a:xfrm>
             <a:off x="0" y="658368"/>
-            <a:ext cx="3840480" cy="5833872"/>
+            <a:ext cx="2468880" cy="5833872"/>
           </a:xfrm>
           <a:prstGeom prst="rect">
             <a:avLst/>
@@ -6787,8 +7054,8 @@
         </p:nvSpPr>
         <p:spPr>
           <a:xfrm>
-            <a:off x="4069080" y="1005840"/>
-            <a:ext cx="7802575" cy="731520"/>
+            <a:off x="2697480" y="1005840"/>
+            <a:ext cx="9174175" cy="731520"/>
           </a:xfrm>
           <a:prstGeom prst="rect">
             <a:avLst/>
@@ -6828,8 +7095,8 @@
         </p:nvSpPr>
         <p:spPr>
           <a:xfrm>
-            <a:off x="4069080" y="1783080"/>
-            <a:ext cx="7802575" cy="4663440"/>
+            <a:off x="2697480" y="1783080"/>
+            <a:ext cx="9174175" cy="4663440"/>
           </a:xfrm>
           <a:prstGeom prst="rect">
             <a:avLst/>
@@ -6856,7 +7123,7 @@
                 <a:ea typeface="Times New Roman" pitchFamily="34" charset="-122"/>
                 <a:cs typeface="Times New Roman" pitchFamily="34" charset="-120"/>
               </a:rPr>
-              <a:t>In January, Hawa travels from Garoua to Ngaoundéré. The grass is dry and yellow, and many trees have no leaves. But one big tree, the shea tree, still has leaves, and its bark is not burnt.</a:t>
+              <a:t>In January, Hawa travels from Garoua to Ngaoundéré. The grass is dry and yellow, and many trees have no leaves, but the shea tree still has leaves and its bark is not burnt. Hawa asks: "How do the plants of the savanna survive the long dry season and the bush fires?"</a:t>
             </a:r>
             <a:endParaRPr lang="en-US" sz="4000" dirty="0"/>
           </a:p>
@@ -7294,7 +7561,7 @@
                 <a:ea typeface="Times New Roman" pitchFamily="34" charset="-122"/>
                 <a:cs typeface="Times New Roman" pitchFamily="34" charset="-120"/>
               </a:rPr>
-              <a:t>Hawa does not know how savanna plants survive the dry season.</a:t>
+              <a:t>Hawa does not know how savanna plants survive the dry season and fires.</a:t>
             </a:r>
             <a:endParaRPr lang="en-US" sz="4000" dirty="0"/>
           </a:p>
@@ -7513,7 +7780,7 @@
                 <a:ea typeface="Times New Roman" pitchFamily="34" charset="-122"/>
                 <a:cs typeface="Times New Roman" pitchFamily="34" charset="-120"/>
               </a:rPr>
-              <a:t>What did Hawa see?</a:t>
+              <a:t>What colour is the grass in January?</a:t>
             </a:r>
             <a:endParaRPr lang="en-US" sz="4000" dirty="0"/>
           </a:p>
@@ -7732,7 +7999,7 @@
                 <a:ea typeface="Times New Roman" pitchFamily="34" charset="-122"/>
                 <a:cs typeface="Times New Roman" pitchFamily="34" charset="-120"/>
               </a:rPr>
-              <a:t>Dry grass and trees without leaves.</a:t>
+              <a:t>Yellow (dry).</a:t>
             </a:r>
             <a:endParaRPr lang="en-US" sz="4000" dirty="0"/>
           </a:p>
@@ -7951,7 +8218,7 @@
                 <a:ea typeface="Times New Roman" pitchFamily="34" charset="-122"/>
                 <a:cs typeface="Times New Roman" pitchFamily="34" charset="-120"/>
               </a:rPr>
-              <a:t>How can we protect the trees from fire?</a:t>
+              <a:t>Which tree still has leaves?</a:t>
             </a:r>
             <a:endParaRPr lang="en-US" sz="4000" dirty="0"/>
           </a:p>
@@ -8170,7 +8437,7 @@
                 <a:ea typeface="Times New Roman" pitchFamily="34" charset="-122"/>
                 <a:cs typeface="Times New Roman" pitchFamily="34" charset="-120"/>
               </a:rPr>
-              <a:t>We can avoid bush fires and make firebreaks.</a:t>
+              <a:t>The shea tree.</a:t>
             </a:r>
             <a:endParaRPr lang="en-US" sz="4000" dirty="0"/>
           </a:p>
@@ -9417,7 +9684,7 @@
                 <a:ea typeface="Times New Roman" pitchFamily="34" charset="-122"/>
                 <a:cs typeface="Times New Roman" pitchFamily="34" charset="-120"/>
               </a:rPr>
-              <a:t>A baobab tree.</a:t>
+              <a:t>A baobab.</a:t>
             </a:r>
             <a:endParaRPr lang="en-US" sz="1800" dirty="0"/>
           </a:p>
@@ -9636,7 +9903,7 @@
                 <a:ea typeface="Times New Roman" pitchFamily="34" charset="-122"/>
                 <a:cs typeface="Times New Roman" pitchFamily="34" charset="-120"/>
               </a:rPr>
-              <a:t>Look at the trunk of the baobab. How does it help the tree in the dry season?</a:t>
+              <a:t>How does the big trunk of the baobab help it in the dry season?</a:t>
             </a:r>
             <a:endParaRPr lang="en-US" sz="4000" dirty="0"/>
           </a:p>
@@ -9855,7 +10122,7 @@
                 <a:ea typeface="Times New Roman" pitchFamily="34" charset="-122"/>
                 <a:cs typeface="Times New Roman" pitchFamily="34" charset="-120"/>
               </a:rPr>
-              <a:t>The big trunk keeps water for the dry season.</a:t>
+              <a:t>It stores water.</a:t>
             </a:r>
             <a:endParaRPr lang="en-US" sz="4000" dirty="0"/>
           </a:p>
@@ -10069,7 +10336,7 @@
                 <a:ea typeface="Times New Roman" pitchFamily="34" charset="-122"/>
                 <a:cs typeface="Times New Roman" pitchFamily="34" charset="-120"/>
               </a:rPr>
-              <a:t>A tree without leaves in the dry season.</a:t>
+              <a:t>Trees without leaves.</a:t>
             </a:r>
             <a:endParaRPr lang="en-US" sz="1800" dirty="0"/>
           </a:p>
@@ -10507,7 +10774,7 @@
                 <a:ea typeface="Times New Roman" pitchFamily="34" charset="-122"/>
                 <a:cs typeface="Times New Roman" pitchFamily="34" charset="-120"/>
               </a:rPr>
-              <a:t>To lose less water when there is no rain.</a:t>
+              <a:t>To lose less water.</a:t>
             </a:r>
             <a:endParaRPr lang="en-US" sz="4000" dirty="0"/>
           </a:p>
@@ -10721,7 +10988,7 @@
                 <a:ea typeface="Times New Roman" pitchFamily="34" charset="-122"/>
                 <a:cs typeface="Times New Roman" pitchFamily="34" charset="-120"/>
               </a:rPr>
-              <a:t>A shea tree (karité).</a:t>
+              <a:t>A shea tree.</a:t>
             </a:r>
             <a:endParaRPr lang="en-US" sz="1800" dirty="0"/>
           </a:p>
@@ -10940,7 +11207,7 @@
                 <a:ea typeface="Times New Roman" pitchFamily="34" charset="-122"/>
                 <a:cs typeface="Times New Roman" pitchFamily="34" charset="-120"/>
               </a:rPr>
-              <a:t>The shea tree has a thick bark. How does it help the tree?</a:t>
+              <a:t>How does the thick bark help the shea tree?</a:t>
             </a:r>
             <a:endParaRPr lang="en-US" sz="4000" dirty="0"/>
           </a:p>
@@ -11159,7 +11426,7 @@
                 <a:ea typeface="Times New Roman" pitchFamily="34" charset="-122"/>
                 <a:cs typeface="Times New Roman" pitchFamily="34" charset="-120"/>
               </a:rPr>
-              <a:t>The thick bark protects the tree from bush fires.</a:t>
+              <a:t>It protects the tree from bush fires.</a:t>
             </a:r>
             <a:endParaRPr lang="en-US" sz="4000" dirty="0"/>
           </a:p>
@@ -11373,7 +11640,7 @@
                 <a:ea typeface="Times New Roman" pitchFamily="34" charset="-122"/>
                 <a:cs typeface="Times New Roman" pitchFamily="34" charset="-120"/>
               </a:rPr>
-              <a:t>Bricks cut from red laterite.</a:t>
+              <a:t>A red, hard soil.</a:t>
             </a:r>
             <a:endParaRPr lang="en-US" sz="1800" dirty="0"/>
           </a:p>
@@ -12601,7 +12868,7 @@
                 <a:ea typeface="Times New Roman" pitchFamily="34" charset="-122"/>
                 <a:cs typeface="Times New Roman" pitchFamily="34" charset="-120"/>
               </a:rPr>
-              <a:t>This red soil becomes very hard when it dries. What is it called? What do we use it for?</a:t>
+              <a:t>What is this red soil that becomes hard when it dries?</a:t>
             </a:r>
             <a:endParaRPr lang="en-US" sz="4000" dirty="0"/>
           </a:p>
@@ -12820,7 +13087,7 @@
                 <a:ea typeface="Times New Roman" pitchFamily="34" charset="-122"/>
                 <a:cs typeface="Times New Roman" pitchFamily="34" charset="-120"/>
               </a:rPr>
-              <a:t>It is laterite. We use it for roads and bricks.</a:t>
+              <a:t>Laterite.</a:t>
             </a:r>
             <a:endParaRPr lang="en-US" sz="4000" dirty="0"/>
           </a:p>
@@ -13034,7 +13301,7 @@
                 <a:ea typeface="Times New Roman" pitchFamily="34" charset="-122"/>
                 <a:cs typeface="Times New Roman" pitchFamily="34" charset="-120"/>
               </a:rPr>
-              <a:t>Clay soil with big cracks in the dry season.</a:t>
+              <a:t>A black soil that cracks.</a:t>
             </a:r>
             <a:endParaRPr lang="en-US" sz="1800" dirty="0"/>
           </a:p>
@@ -13253,7 +13520,7 @@
                 <a:ea typeface="Times New Roman" pitchFamily="34" charset="-122"/>
                 <a:cs typeface="Times New Roman" pitchFamily="34" charset="-120"/>
               </a:rPr>
-              <a:t>Black cotton soils are clay soils that crack when dry. Why do farmers like them?</a:t>
+              <a:t>Why do farmers like black cotton soils?</a:t>
             </a:r>
             <a:endParaRPr lang="en-US" sz="4000" dirty="0"/>
           </a:p>
@@ -13472,7 +13739,7 @@
                 <a:ea typeface="Times New Roman" pitchFamily="34" charset="-122"/>
                 <a:cs typeface="Times New Roman" pitchFamily="34" charset="-120"/>
               </a:rPr>
-              <a:t>It is fertile and keeps water. It is good for cotton and sorghum.</a:t>
+              <a:t>They are fertile and keep water.</a:t>
             </a:r>
             <a:endParaRPr lang="en-US" sz="4000" dirty="0"/>
           </a:p>
@@ -13683,7 +13950,7 @@
               <a:buNone/>
             </a:pPr>
             <a:r>
-              <a:rPr lang="en-US" sz="4000" b="1" dirty="0">
+              <a:rPr lang="en-US" sz="3200" b="1" dirty="0">
                 <a:solidFill>
                   <a:srgbClr val="111111"/>
                 </a:solidFill>
@@ -13693,7 +13960,7 @@
               </a:rPr>
               <a:t>Topic: Man in His Environment</a:t>
             </a:r>
-            <a:endParaRPr lang="en-US" sz="4000" dirty="0"/>
+            <a:endParaRPr lang="en-US" sz="3200" dirty="0"/>
           </a:p>
           <a:p>
             <a:pPr algn="l" indent="0" marL="0">
@@ -13703,7 +13970,7 @@
               <a:buNone/>
             </a:pPr>
             <a:r>
-              <a:rPr lang="en-US" sz="4000" b="1" dirty="0">
+              <a:rPr lang="en-US" sz="3200" b="1" dirty="0">
                 <a:solidFill>
                   <a:srgbClr val="111111"/>
                 </a:solidFill>
@@ -13713,7 +13980,7 @@
               </a:rPr>
               <a:t>Sub-topic: Natural Regions</a:t>
             </a:r>
-            <a:endParaRPr lang="en-US" sz="4000" dirty="0"/>
+            <a:endParaRPr lang="en-US" sz="3200" dirty="0"/>
           </a:p>
           <a:p>
             <a:pPr algn="l" indent="0" marL="0">
@@ -13723,7 +13990,7 @@
               <a:buNone/>
             </a:pPr>
             <a:r>
-              <a:rPr lang="en-US" sz="4000" b="1" dirty="0">
+              <a:rPr lang="en-US" sz="3200" b="1" dirty="0">
                 <a:solidFill>
                   <a:srgbClr val="990011"/>
                 </a:solidFill>
@@ -13733,7 +14000,7 @@
               </a:rPr>
               <a:t>Lesson 2 (Part 2): The Tropical Grassland Region: Characteristics (Soils and Vegetation)</a:t>
             </a:r>
-            <a:endParaRPr lang="en-US" sz="4000" dirty="0"/>
+            <a:endParaRPr lang="en-US" sz="3200" dirty="0"/>
           </a:p>
         </p:txBody>
       </p:sp>
@@ -13866,7 +14133,7 @@
         <p:spPr>
           <a:xfrm>
             <a:off x="0" y="658368"/>
-            <a:ext cx="5120640" cy="5833872"/>
+            <a:ext cx="3840480" cy="5833872"/>
           </a:xfrm>
           <a:prstGeom prst="rect">
             <a:avLst/>
@@ -13881,8 +14148,8 @@
         </p:nvSpPr>
         <p:spPr>
           <a:xfrm>
-            <a:off x="5349240" y="1005840"/>
-            <a:ext cx="6522415" cy="731520"/>
+            <a:off x="4069080" y="1005840"/>
+            <a:ext cx="7802575" cy="731520"/>
           </a:xfrm>
           <a:prstGeom prst="rect">
             <a:avLst/>
@@ -13922,8 +14189,8 @@
         </p:nvSpPr>
         <p:spPr>
           <a:xfrm>
-            <a:off x="5349240" y="1783080"/>
-            <a:ext cx="6522415" cy="4663440"/>
+            <a:off x="4069080" y="1783080"/>
+            <a:ext cx="7802575" cy="4663440"/>
           </a:xfrm>
           <a:prstGeom prst="rect">
             <a:avLst/>
@@ -13955,11 +14222,12 @@
             <a:endParaRPr lang="en-US" sz="4000" dirty="0"/>
           </a:p>
           <a:p>
-            <a:pPr algn="l" indent="0" marL="0">
+            <a:pPr algn="l" marL="342900" indent="-342900">
               <a:spcAft>
                 <a:spcPts val="800"/>
               </a:spcAft>
-              <a:buNone/>
+              <a:buSzPct val="100000"/>
+              <a:buChar char="•"/>
             </a:pPr>
             <a:r>
               <a:rPr lang="en-US" sz="4000" b="1" dirty="0">
@@ -13970,13 +14238,14 @@
                 <a:ea typeface="Times New Roman" pitchFamily="34" charset="-122"/>
                 <a:cs typeface="Times New Roman" pitchFamily="34" charset="-120"/>
               </a:rPr>
-              <a:t>Deciduous tree: </a:t>
-            </a:r>
-            <a:pPr algn="l" indent="0" marL="0">
+              <a:t>Savanna: </a:t>
+            </a:r>
+            <a:pPr algn="l" marL="342900" indent="-342900">
               <a:spcAft>
                 <a:spcPts val="800"/>
               </a:spcAft>
-              <a:buNone/>
+              <a:buSzPct val="100000"/>
+              <a:buChar char="•"/>
             </a:pPr>
             <a:r>
               <a:rPr lang="en-US" sz="4000" dirty="0">
@@ -13987,16 +14256,17 @@
                 <a:ea typeface="Times New Roman" pitchFamily="34" charset="-122"/>
                 <a:cs typeface="Times New Roman" pitchFamily="34" charset="-120"/>
               </a:rPr>
-              <a:t>It is a tree that loses its leaves in the dry season.</a:t>
+              <a:t>It is a vegetation of tall grass with scattered trees.</a:t>
             </a:r>
             <a:endParaRPr lang="en-US" sz="4000" dirty="0"/>
           </a:p>
           <a:p>
-            <a:pPr algn="l" indent="0" marL="0">
+            <a:pPr algn="l" marL="342900" indent="-342900">
               <a:spcAft>
                 <a:spcPts val="800"/>
               </a:spcAft>
-              <a:buNone/>
+              <a:buSzPct val="100000"/>
+              <a:buChar char="•"/>
             </a:pPr>
             <a:r>
               <a:rPr lang="en-US" sz="4000" b="1" dirty="0">
@@ -14009,11 +14279,12 @@
               </a:rPr>
               <a:t>Laterite: </a:t>
             </a:r>
-            <a:pPr algn="l" indent="0" marL="0">
+            <a:pPr algn="l" marL="342900" indent="-342900">
               <a:spcAft>
                 <a:spcPts val="800"/>
               </a:spcAft>
-              <a:buNone/>
+              <a:buSzPct val="100000"/>
+              <a:buChar char="•"/>
             </a:pPr>
             <a:r>
               <a:rPr lang="en-US" sz="4000" dirty="0">
@@ -14024,7 +14295,7 @@
                 <a:ea typeface="Times New Roman" pitchFamily="34" charset="-122"/>
                 <a:cs typeface="Times New Roman" pitchFamily="34" charset="-120"/>
               </a:rPr>
-              <a:t>It is a hard, red layer in the soil.</a:t>
+              <a:t>It is a red soil that becomes very hard when it dries.</a:t>
             </a:r>
             <a:endParaRPr lang="en-US" sz="4000" dirty="0"/>
           </a:p>
@@ -14142,9 +14413,131 @@
           </a:p>
         </p:txBody>
       </p:sp>
+      <p:sp>
+        <p:nvSpPr>
+          <p:cNvPr id="3" name="Text 1"/>
+          <p:cNvSpPr/>
+          <p:nvPr/>
+        </p:nvSpPr>
+        <p:spPr>
+          <a:xfrm>
+            <a:off x="365760" y="1005840"/>
+            <a:ext cx="11460175" cy="731520"/>
+          </a:xfrm>
+          <a:prstGeom prst="rect">
+            <a:avLst/>
+          </a:prstGeom>
+          <a:noFill/>
+          <a:ln/>
+        </p:spPr>
+        <p:txBody>
+          <a:bodyPr wrap="square" lIns="0" tIns="0" rIns="0" bIns="0" rtlCol="0" anchor="ctr">
+            <a:normAutofit/>
+          </a:bodyPr>
+          <a:lstStyle/>
+          <a:p>
+            <a:pPr algn="ctr" indent="0" marL="0">
+              <a:buNone/>
+            </a:pPr>
+            <a:r>
+              <a:rPr lang="en-US" sz="3600" b="1" dirty="0">
+                <a:solidFill>
+                  <a:srgbClr val="990011"/>
+                </a:solidFill>
+                <a:latin typeface="Times New Roman" pitchFamily="34" charset="0"/>
+                <a:ea typeface="Times New Roman" pitchFamily="34" charset="-122"/>
+                <a:cs typeface="Times New Roman" pitchFamily="34" charset="-120"/>
+              </a:rPr>
+              <a:t>1. Vegetation</a:t>
+            </a:r>
+            <a:endParaRPr lang="en-US" sz="3600" dirty="0"/>
+          </a:p>
+        </p:txBody>
+      </p:sp>
+      <p:sp>
+        <p:nvSpPr>
+          <p:cNvPr id="4" name="Text 2"/>
+          <p:cNvSpPr/>
+          <p:nvPr/>
+        </p:nvSpPr>
+        <p:spPr>
+          <a:xfrm>
+            <a:off x="365760" y="1783080"/>
+            <a:ext cx="4846320" cy="4617720"/>
+          </a:xfrm>
+          <a:prstGeom prst="rect">
+            <a:avLst/>
+          </a:prstGeom>
+          <a:noFill/>
+          <a:ln/>
+        </p:spPr>
+        <p:txBody>
+          <a:bodyPr wrap="square" lIns="0" tIns="0" rIns="0" bIns="0" rtlCol="0" anchor="t"/>
+          <a:lstStyle/>
+          <a:p>
+            <a:pPr algn="l" indent="0" marL="0">
+              <a:spcAft>
+                <a:spcPts val="800"/>
+              </a:spcAft>
+              <a:buNone/>
+            </a:pPr>
+            <a:r>
+              <a:rPr lang="en-US" sz="3600" i="1" dirty="0">
+                <a:solidFill>
+                  <a:srgbClr val="111111"/>
+                </a:solidFill>
+                <a:latin typeface="Times New Roman" pitchFamily="34" charset="0"/>
+                <a:ea typeface="Times New Roman" pitchFamily="34" charset="-122"/>
+                <a:cs typeface="Times New Roman" pitchFamily="34" charset="-120"/>
+              </a:rPr>
+              <a:t>The savanna vegetation has the following characteristics:</a:t>
+            </a:r>
+            <a:endParaRPr lang="en-US" sz="3600" dirty="0"/>
+          </a:p>
+          <a:p>
+            <a:pPr algn="l" marL="342900" indent="-342900">
+              <a:spcAft>
+                <a:spcPts val="800"/>
+              </a:spcAft>
+              <a:buSzPct val="100000"/>
+              <a:buChar char="•"/>
+            </a:pPr>
+            <a:r>
+              <a:rPr lang="en-US" sz="3600" b="1" dirty="0">
+                <a:solidFill>
+                  <a:srgbClr val="111111"/>
+                </a:solidFill>
+                <a:latin typeface="Times New Roman" pitchFamily="34" charset="0"/>
+                <a:ea typeface="Times New Roman" pitchFamily="34" charset="-122"/>
+                <a:cs typeface="Times New Roman" pitchFamily="34" charset="-120"/>
+              </a:rPr>
+              <a:t>Tall grass: </a:t>
+            </a:r>
+            <a:pPr algn="l" marL="342900" indent="-342900">
+              <a:spcAft>
+                <a:spcPts val="800"/>
+              </a:spcAft>
+              <a:buSzPct val="100000"/>
+              <a:buChar char="•"/>
+            </a:pPr>
+            <a:r>
+              <a:rPr lang="en-US" sz="3600" dirty="0">
+                <a:solidFill>
+                  <a:srgbClr val="111111"/>
+                </a:solidFill>
+                <a:latin typeface="Times New Roman" pitchFamily="34" charset="0"/>
+                <a:ea typeface="Times New Roman" pitchFamily="34" charset="-122"/>
+                <a:cs typeface="Times New Roman" pitchFamily="34" charset="-120"/>
+              </a:rPr>
+              <a:t>Elephant grass grows up to 3 m high.</a:t>
+            </a:r>
+            <a:endParaRPr lang="en-US" sz="3600" dirty="0"/>
+          </a:p>
+        </p:txBody>
+      </p:sp>
       <p:pic>
         <p:nvPicPr>
-          <p:cNvPr id="3" name="Image 0" descr="/home/claude/f4/img/minesec_sheet.png">    </p:cNvPr>
+          <p:cNvPr id="5" name="Image 0" descr="/home/claude/f4/img/v2/f2t_savanna.jpg">    </p:cNvPr>
           <p:cNvPicPr>
             <a:picLocks noChangeAspect="1"/>
           </p:cNvPicPr>
@@ -14158,8 +14551,8 @@
         </p:blipFill>
         <p:spPr>
           <a:xfrm>
-            <a:off x="0" y="658368"/>
-            <a:ext cx="5120640" cy="5833872"/>
+            <a:off x="5349240" y="2695548"/>
+            <a:ext cx="6659575" cy="2445313"/>
           </a:xfrm>
           <a:prstGeom prst="rect">
             <a:avLst/>
@@ -14168,14 +14561,14 @@
       </p:pic>
       <p:sp>
         <p:nvSpPr>
-          <p:cNvPr id="4" name="Text 1"/>
+          <p:cNvPr id="6" name="Text 3"/>
           <p:cNvSpPr/>
           <p:nvPr/>
         </p:nvSpPr>
         <p:spPr>
           <a:xfrm>
-            <a:off x="5349240" y="1005840"/>
-            <a:ext cx="6522415" cy="731520"/>
+            <a:off x="5349240" y="6089904"/>
+            <a:ext cx="6659575" cy="347472"/>
           </a:xfrm>
           <a:prstGeom prst="rect">
             <a:avLst/>
@@ -14184,85 +14577,24 @@
           <a:ln/>
         </p:spPr>
         <p:txBody>
-          <a:bodyPr wrap="square" lIns="0" tIns="0" rIns="0" bIns="0" rtlCol="0" anchor="ctr">
-            <a:normAutofit/>
-          </a:bodyPr>
+          <a:bodyPr wrap="square" lIns="0" tIns="0" rIns="0" bIns="0" rtlCol="0" anchor="ctr"/>
           <a:lstStyle/>
           <a:p>
             <a:pPr algn="ctr" indent="0" marL="0">
               <a:buNone/>
             </a:pPr>
             <a:r>
-              <a:rPr lang="en-US" sz="3600" b="1" dirty="0">
-                <a:solidFill>
-                  <a:srgbClr val="990011"/>
+              <a:rPr lang="en-US" sz="1600" i="1" dirty="0">
+                <a:solidFill>
+                  <a:srgbClr val="555555"/>
                 </a:solidFill>
                 <a:latin typeface="Times New Roman" pitchFamily="34" charset="0"/>
                 <a:ea typeface="Times New Roman" pitchFamily="34" charset="-122"/>
                 <a:cs typeface="Times New Roman" pitchFamily="34" charset="-120"/>
               </a:rPr>
-              <a:t>DEFINITIONS (continued)</a:t>
-            </a:r>
-            <a:endParaRPr lang="en-US" sz="3600" dirty="0"/>
-          </a:p>
-        </p:txBody>
-      </p:sp>
-      <p:sp>
-        <p:nvSpPr>
-          <p:cNvPr id="5" name="Text 2"/>
-          <p:cNvSpPr/>
-          <p:nvPr/>
-        </p:nvSpPr>
-        <p:spPr>
-          <a:xfrm>
-            <a:off x="5349240" y="1783080"/>
-            <a:ext cx="6522415" cy="4663440"/>
-          </a:xfrm>
-          <a:prstGeom prst="rect">
-            <a:avLst/>
-          </a:prstGeom>
-          <a:noFill/>
-          <a:ln/>
-        </p:spPr>
-        <p:txBody>
-          <a:bodyPr wrap="square" lIns="0" tIns="0" rIns="0" bIns="0" rtlCol="0" anchor="t"/>
-          <a:lstStyle/>
-          <a:p>
-            <a:pPr algn="l" indent="0" marL="0">
-              <a:spcAft>
-                <a:spcPts val="800"/>
-              </a:spcAft>
-              <a:buNone/>
-            </a:pPr>
-            <a:r>
-              <a:rPr lang="en-US" sz="4000" b="1" dirty="0">
-                <a:solidFill>
-                  <a:srgbClr val="111111"/>
-                </a:solidFill>
-                <a:latin typeface="Times New Roman" pitchFamily="34" charset="0"/>
-                <a:ea typeface="Times New Roman" pitchFamily="34" charset="-122"/>
-                <a:cs typeface="Times New Roman" pitchFamily="34" charset="-120"/>
-              </a:rPr>
-              <a:t>Leaching: </a:t>
-            </a:r>
-            <a:pPr algn="l" indent="0" marL="0">
-              <a:spcAft>
-                <a:spcPts val="800"/>
-              </a:spcAft>
-              <a:buNone/>
-            </a:pPr>
-            <a:r>
-              <a:rPr lang="en-US" sz="4000" dirty="0">
-                <a:solidFill>
-                  <a:srgbClr val="111111"/>
-                </a:solidFill>
-                <a:latin typeface="Times New Roman" pitchFamily="34" charset="0"/>
-                <a:ea typeface="Times New Roman" pitchFamily="34" charset="-122"/>
-                <a:cs typeface="Times New Roman" pitchFamily="34" charset="-120"/>
-              </a:rPr>
-              <a:t>It is the washing of plant food deep into the soil by rain.</a:t>
-            </a:r>
-            <a:endParaRPr lang="en-US" sz="4000" dirty="0"/>
+              <a:t>Illustration: the savanna</a:t>
+            </a:r>
+            <a:endParaRPr lang="en-US" sz="1600" dirty="0"/>
           </a:p>
         </p:txBody>
       </p:sp>
@@ -14395,7 +14727,7 @@
         <p:spPr>
           <a:xfrm>
             <a:off x="0" y="658368"/>
-            <a:ext cx="3840480" cy="5833872"/>
+            <a:ext cx="5120640" cy="5833872"/>
           </a:xfrm>
           <a:prstGeom prst="rect">
             <a:avLst/>
@@ -14410,8 +14742,8 @@
         </p:nvSpPr>
         <p:spPr>
           <a:xfrm>
-            <a:off x="4069080" y="1005840"/>
-            <a:ext cx="7802575" cy="731520"/>
+            <a:off x="5349240" y="1005840"/>
+            <a:ext cx="6522415" cy="731520"/>
           </a:xfrm>
           <a:prstGeom prst="rect">
             <a:avLst/>
@@ -14451,8 +14783,8 @@
         </p:nvSpPr>
         <p:spPr>
           <a:xfrm>
-            <a:off x="4069080" y="1783080"/>
-            <a:ext cx="7802575" cy="4663440"/>
+            <a:off x="5349240" y="1783080"/>
+            <a:ext cx="6522415" cy="4663440"/>
           </a:xfrm>
           <a:prstGeom prst="rect">
             <a:avLst/>
@@ -14464,14 +14796,15 @@
           <a:bodyPr wrap="square" lIns="0" tIns="0" rIns="0" bIns="0" rtlCol="0" anchor="t"/>
           <a:lstStyle/>
           <a:p>
-            <a:pPr algn="l" indent="0" marL="0">
+            <a:pPr algn="l" marL="342900" indent="-342900">
               <a:spcAft>
                 <a:spcPts val="800"/>
               </a:spcAft>
-              <a:buNone/>
+              <a:buSzPct val="100000"/>
+              <a:buChar char="•"/>
             </a:pPr>
             <a:r>
-              <a:rPr lang="en-US" sz="4000" i="1" dirty="0">
+              <a:rPr lang="en-US" sz="4000" b="1" dirty="0">
                 <a:solidFill>
                   <a:srgbClr val="111111"/>
                 </a:solidFill>
@@ -14479,19 +14812,17 @@
                 <a:ea typeface="Times New Roman" pitchFamily="34" charset="-122"/>
                 <a:cs typeface="Times New Roman" pitchFamily="34" charset="-120"/>
               </a:rPr>
-              <a:t>The vegetation of the savanna has the following characteristics:</a:t>
-            </a:r>
-            <a:endParaRPr lang="en-US" sz="4000" dirty="0"/>
-          </a:p>
-          <a:p>
-            <a:pPr algn="l" indent="0" marL="0">
+              <a:t>Scattered trees: </a:t>
+            </a:r>
+            <a:pPr algn="l" marL="342900" indent="-342900">
               <a:spcAft>
                 <a:spcPts val="800"/>
               </a:spcAft>
-              <a:buNone/>
+              <a:buSzPct val="100000"/>
+              <a:buChar char="•"/>
             </a:pPr>
             <a:r>
-              <a:rPr lang="en-US" sz="4000" b="1" dirty="0">
+              <a:rPr lang="en-US" sz="4000" dirty="0">
                 <a:solidFill>
                   <a:srgbClr val="111111"/>
                 </a:solidFill>
@@ -14499,16 +14830,20 @@
                 <a:ea typeface="Times New Roman" pitchFamily="34" charset="-122"/>
                 <a:cs typeface="Times New Roman" pitchFamily="34" charset="-120"/>
               </a:rPr>
-              <a:t>Grass: </a:t>
-            </a:r>
-            <a:pPr algn="l" indent="0" marL="0">
+              <a:t>Baobab, acacia and shea trees.</a:t>
+            </a:r>
+            <a:endParaRPr lang="en-US" sz="4000" dirty="0"/>
+          </a:p>
+          <a:p>
+            <a:pPr algn="l" marL="342900" indent="-342900">
               <a:spcAft>
                 <a:spcPts val="800"/>
               </a:spcAft>
-              <a:buNone/>
+              <a:buSzPct val="100000"/>
+              <a:buChar char="•"/>
             </a:pPr>
             <a:r>
-              <a:rPr lang="en-US" sz="4000" dirty="0">
+              <a:rPr lang="en-US" sz="4000" b="1" dirty="0">
                 <a:solidFill>
                   <a:srgbClr val="111111"/>
                 </a:solidFill>
@@ -14516,19 +14851,17 @@
                 <a:ea typeface="Times New Roman" pitchFamily="34" charset="-122"/>
                 <a:cs typeface="Times New Roman" pitchFamily="34" charset="-120"/>
               </a:rPr>
-              <a:t>Tall grass grows up to 3 metres high in the wet season.</a:t>
-            </a:r>
-            <a:endParaRPr lang="en-US" sz="4000" dirty="0"/>
-          </a:p>
-          <a:p>
-            <a:pPr algn="l" indent="0" marL="0">
+              <a:t>Deciduous trees: </a:t>
+            </a:r>
+            <a:pPr algn="l" marL="342900" indent="-342900">
               <a:spcAft>
                 <a:spcPts val="800"/>
               </a:spcAft>
-              <a:buNone/>
+              <a:buSzPct val="100000"/>
+              <a:buChar char="•"/>
             </a:pPr>
             <a:r>
-              <a:rPr lang="en-US" sz="4000" b="1" dirty="0">
+              <a:rPr lang="en-US" sz="4000" dirty="0">
                 <a:solidFill>
                   <a:srgbClr val="111111"/>
                 </a:solidFill>
@@ -14536,24 +14869,7 @@
                 <a:ea typeface="Times New Roman" pitchFamily="34" charset="-122"/>
                 <a:cs typeface="Times New Roman" pitchFamily="34" charset="-120"/>
               </a:rPr>
-              <a:t>Trees: </a:t>
-            </a:r>
-            <a:pPr algn="l" indent="0" marL="0">
-              <a:spcAft>
-                <a:spcPts val="800"/>
-              </a:spcAft>
-              <a:buNone/>
-            </a:pPr>
-            <a:r>
-              <a:rPr lang="en-US" sz="4000" dirty="0">
-                <a:solidFill>
-                  <a:srgbClr val="111111"/>
-                </a:solidFill>
-                <a:latin typeface="Times New Roman" pitchFamily="34" charset="0"/>
-                <a:ea typeface="Times New Roman" pitchFamily="34" charset="-122"/>
-                <a:cs typeface="Times New Roman" pitchFamily="34" charset="-120"/>
-              </a:rPr>
-              <a:t>Trees such as the baobab, the acacia and the shea tree grow far apart.</a:t>
+              <a:t>Many trees lose their leaves in the dry season.</a:t>
             </a:r>
             <a:endParaRPr lang="en-US" sz="4000" dirty="0"/>
           </a:p>
@@ -14671,9 +14987,111 @@
           </a:p>
         </p:txBody>
       </p:sp>
+      <p:sp>
+        <p:nvSpPr>
+          <p:cNvPr id="3" name="Text 1"/>
+          <p:cNvSpPr/>
+          <p:nvPr/>
+        </p:nvSpPr>
+        <p:spPr>
+          <a:xfrm>
+            <a:off x="365760" y="1005840"/>
+            <a:ext cx="11460175" cy="731520"/>
+          </a:xfrm>
+          <a:prstGeom prst="rect">
+            <a:avLst/>
+          </a:prstGeom>
+          <a:noFill/>
+          <a:ln/>
+        </p:spPr>
+        <p:txBody>
+          <a:bodyPr wrap="square" lIns="0" tIns="0" rIns="0" bIns="0" rtlCol="0" anchor="ctr">
+            <a:normAutofit/>
+          </a:bodyPr>
+          <a:lstStyle/>
+          <a:p>
+            <a:pPr algn="ctr" indent="0" marL="0">
+              <a:buNone/>
+            </a:pPr>
+            <a:r>
+              <a:rPr lang="en-US" sz="3600" b="1" dirty="0">
+                <a:solidFill>
+                  <a:srgbClr val="990011"/>
+                </a:solidFill>
+                <a:latin typeface="Times New Roman" pitchFamily="34" charset="0"/>
+                <a:ea typeface="Times New Roman" pitchFamily="34" charset="-122"/>
+                <a:cs typeface="Times New Roman" pitchFamily="34" charset="-120"/>
+              </a:rPr>
+              <a:t>1. Vegetation</a:t>
+            </a:r>
+            <a:endParaRPr lang="en-US" sz="3600" dirty="0"/>
+          </a:p>
+        </p:txBody>
+      </p:sp>
+      <p:sp>
+        <p:nvSpPr>
+          <p:cNvPr id="4" name="Text 2"/>
+          <p:cNvSpPr/>
+          <p:nvPr/>
+        </p:nvSpPr>
+        <p:spPr>
+          <a:xfrm>
+            <a:off x="365760" y="1783080"/>
+            <a:ext cx="4846320" cy="4617720"/>
+          </a:xfrm>
+          <a:prstGeom prst="rect">
+            <a:avLst/>
+          </a:prstGeom>
+          <a:noFill/>
+          <a:ln/>
+        </p:spPr>
+        <p:txBody>
+          <a:bodyPr wrap="square" lIns="0" tIns="0" rIns="0" bIns="0" rtlCol="0" anchor="t"/>
+          <a:lstStyle/>
+          <a:p>
+            <a:pPr algn="l" marL="342900" indent="-342900">
+              <a:spcAft>
+                <a:spcPts val="800"/>
+              </a:spcAft>
+              <a:buSzPct val="100000"/>
+              <a:buChar char="•"/>
+            </a:pPr>
+            <a:r>
+              <a:rPr lang="en-US" sz="3600" b="1" dirty="0">
+                <a:solidFill>
+                  <a:srgbClr val="111111"/>
+                </a:solidFill>
+                <a:latin typeface="Times New Roman" pitchFamily="34" charset="0"/>
+                <a:ea typeface="Times New Roman" pitchFamily="34" charset="-122"/>
+                <a:cs typeface="Times New Roman" pitchFamily="34" charset="-120"/>
+              </a:rPr>
+              <a:t>Water storage: </a:t>
+            </a:r>
+            <a:pPr algn="l" marL="342900" indent="-342900">
+              <a:spcAft>
+                <a:spcPts val="800"/>
+              </a:spcAft>
+              <a:buSzPct val="100000"/>
+              <a:buChar char="•"/>
+            </a:pPr>
+            <a:r>
+              <a:rPr lang="en-US" sz="3600" dirty="0">
+                <a:solidFill>
+                  <a:srgbClr val="111111"/>
+                </a:solidFill>
+                <a:latin typeface="Times New Roman" pitchFamily="34" charset="0"/>
+                <a:ea typeface="Times New Roman" pitchFamily="34" charset="-122"/>
+                <a:cs typeface="Times New Roman" pitchFamily="34" charset="-120"/>
+              </a:rPr>
+              <a:t>The baobab stores water in its trunk.</a:t>
+            </a:r>
+            <a:endParaRPr lang="en-US" sz="3600" dirty="0"/>
+          </a:p>
+        </p:txBody>
+      </p:sp>
       <p:pic>
         <p:nvPicPr>
-          <p:cNvPr id="3" name="Image 0" descr="/home/claude/f4/img/minesec_sheet.png">    </p:cNvPr>
+          <p:cNvPr id="5" name="Image 0" descr="/home/claude/f4/img/v2/f2t_baobab.jpg">    </p:cNvPr>
           <p:cNvPicPr>
             <a:picLocks noChangeAspect="1"/>
           </p:cNvPicPr>
@@ -14687,8 +15105,8 @@
         </p:blipFill>
         <p:spPr>
           <a:xfrm>
-            <a:off x="0" y="658368"/>
-            <a:ext cx="5120640" cy="5833872"/>
+            <a:off x="5349240" y="2071212"/>
+            <a:ext cx="6659575" cy="3693983"/>
           </a:xfrm>
           <a:prstGeom prst="rect">
             <a:avLst/>
@@ -14697,14 +15115,14 @@
       </p:pic>
       <p:sp>
         <p:nvSpPr>
-          <p:cNvPr id="4" name="Text 1"/>
+          <p:cNvPr id="6" name="Text 3"/>
           <p:cNvSpPr/>
           <p:nvPr/>
         </p:nvSpPr>
         <p:spPr>
           <a:xfrm>
-            <a:off x="5349240" y="1005840"/>
-            <a:ext cx="6522415" cy="731520"/>
+            <a:off x="5349240" y="6089904"/>
+            <a:ext cx="6659575" cy="347472"/>
           </a:xfrm>
           <a:prstGeom prst="rect">
             <a:avLst/>
@@ -14713,122 +15131,24 @@
           <a:ln/>
         </p:spPr>
         <p:txBody>
-          <a:bodyPr wrap="square" lIns="0" tIns="0" rIns="0" bIns="0" rtlCol="0" anchor="ctr">
-            <a:normAutofit/>
-          </a:bodyPr>
+          <a:bodyPr wrap="square" lIns="0" tIns="0" rIns="0" bIns="0" rtlCol="0" anchor="ctr"/>
           <a:lstStyle/>
           <a:p>
             <a:pPr algn="ctr" indent="0" marL="0">
               <a:buNone/>
             </a:pPr>
             <a:r>
-              <a:rPr lang="en-US" sz="3600" b="1" dirty="0">
-                <a:solidFill>
-                  <a:srgbClr val="990011"/>
+              <a:rPr lang="en-US" sz="1600" i="1" dirty="0">
+                <a:solidFill>
+                  <a:srgbClr val="555555"/>
                 </a:solidFill>
                 <a:latin typeface="Times New Roman" pitchFamily="34" charset="0"/>
                 <a:ea typeface="Times New Roman" pitchFamily="34" charset="-122"/>
                 <a:cs typeface="Times New Roman" pitchFamily="34" charset="-120"/>
               </a:rPr>
-              <a:t>1. Vegetation (continued)</a:t>
-            </a:r>
-            <a:endParaRPr lang="en-US" sz="3600" dirty="0"/>
-          </a:p>
-        </p:txBody>
-      </p:sp>
-      <p:sp>
-        <p:nvSpPr>
-          <p:cNvPr id="5" name="Text 2"/>
-          <p:cNvSpPr/>
-          <p:nvPr/>
-        </p:nvSpPr>
-        <p:spPr>
-          <a:xfrm>
-            <a:off x="5349240" y="1783080"/>
-            <a:ext cx="6522415" cy="4663440"/>
-          </a:xfrm>
-          <a:prstGeom prst="rect">
-            <a:avLst/>
-          </a:prstGeom>
-          <a:noFill/>
-          <a:ln/>
-        </p:spPr>
-        <p:txBody>
-          <a:bodyPr wrap="square" lIns="0" tIns="0" rIns="0" bIns="0" rtlCol="0" anchor="t"/>
-          <a:lstStyle/>
-          <a:p>
-            <a:pPr algn="l" indent="0" marL="0">
-              <a:spcAft>
-                <a:spcPts val="800"/>
-              </a:spcAft>
-              <a:buNone/>
-            </a:pPr>
-            <a:r>
-              <a:rPr lang="en-US" sz="4000" b="1" dirty="0">
-                <a:solidFill>
-                  <a:srgbClr val="111111"/>
-                </a:solidFill>
-                <a:latin typeface="Times New Roman" pitchFamily="34" charset="0"/>
-                <a:ea typeface="Times New Roman" pitchFamily="34" charset="-122"/>
-                <a:cs typeface="Times New Roman" pitchFamily="34" charset="-120"/>
-              </a:rPr>
-              <a:t>Deciduous trees: </a:t>
-            </a:r>
-            <a:pPr algn="l" indent="0" marL="0">
-              <a:spcAft>
-                <a:spcPts val="800"/>
-              </a:spcAft>
-              <a:buNone/>
-            </a:pPr>
-            <a:r>
-              <a:rPr lang="en-US" sz="4000" dirty="0">
-                <a:solidFill>
-                  <a:srgbClr val="111111"/>
-                </a:solidFill>
-                <a:latin typeface="Times New Roman" pitchFamily="34" charset="0"/>
-                <a:ea typeface="Times New Roman" pitchFamily="34" charset="-122"/>
-                <a:cs typeface="Times New Roman" pitchFamily="34" charset="-120"/>
-              </a:rPr>
-              <a:t>Many trees lose their leaves in the dry season to save water.</a:t>
-            </a:r>
-            <a:endParaRPr lang="en-US" sz="4000" dirty="0"/>
-          </a:p>
-          <a:p>
-            <a:pPr algn="l" indent="0" marL="0">
-              <a:spcAft>
-                <a:spcPts val="800"/>
-              </a:spcAft>
-              <a:buNone/>
-            </a:pPr>
-            <a:r>
-              <a:rPr lang="en-US" sz="4000" b="1" dirty="0">
-                <a:solidFill>
-                  <a:srgbClr val="111111"/>
-                </a:solidFill>
-                <a:latin typeface="Times New Roman" pitchFamily="34" charset="0"/>
-                <a:ea typeface="Times New Roman" pitchFamily="34" charset="-122"/>
-                <a:cs typeface="Times New Roman" pitchFamily="34" charset="-120"/>
-              </a:rPr>
-              <a:t>Thick bark: </a:t>
-            </a:r>
-            <a:pPr algn="l" indent="0" marL="0">
-              <a:spcAft>
-                <a:spcPts val="800"/>
-              </a:spcAft>
-              <a:buNone/>
-            </a:pPr>
-            <a:r>
-              <a:rPr lang="en-US" sz="4000" dirty="0">
-                <a:solidFill>
-                  <a:srgbClr val="111111"/>
-                </a:solidFill>
-                <a:latin typeface="Times New Roman" pitchFamily="34" charset="0"/>
-                <a:ea typeface="Times New Roman" pitchFamily="34" charset="-122"/>
-                <a:cs typeface="Times New Roman" pitchFamily="34" charset="-120"/>
-              </a:rPr>
-              <a:t>Thick bark protects trees from bush fires.</a:t>
-            </a:r>
-            <a:endParaRPr lang="en-US" sz="4000" dirty="0"/>
+              <a:t>Illustration: a baobab</a:t>
+            </a:r>
+            <a:endParaRPr lang="en-US" sz="1600" dirty="0"/>
           </a:p>
         </p:txBody>
       </p:sp>
@@ -15180,7 +15500,7 @@
         <p:spPr>
           <a:xfrm>
             <a:off x="0" y="658368"/>
-            <a:ext cx="3840480" cy="5833872"/>
+            <a:ext cx="5120640" cy="5833872"/>
           </a:xfrm>
           <a:prstGeom prst="rect">
             <a:avLst/>
@@ -15195,8 +15515,8 @@
         </p:nvSpPr>
         <p:spPr>
           <a:xfrm>
-            <a:off x="4069080" y="1005840"/>
-            <a:ext cx="7802575" cy="731520"/>
+            <a:off x="5349240" y="1005840"/>
+            <a:ext cx="6522415" cy="731520"/>
           </a:xfrm>
           <a:prstGeom prst="rect">
             <a:avLst/>
@@ -15222,7 +15542,7 @@
                 <a:ea typeface="Times New Roman" pitchFamily="34" charset="-122"/>
                 <a:cs typeface="Times New Roman" pitchFamily="34" charset="-120"/>
               </a:rPr>
-              <a:t>2. Soils</a:t>
+              <a:t>1. Vegetation</a:t>
             </a:r>
             <a:endParaRPr lang="en-US" sz="3600" dirty="0"/>
           </a:p>
@@ -15236,8 +15556,8 @@
         </p:nvSpPr>
         <p:spPr>
           <a:xfrm>
-            <a:off x="4069080" y="1783080"/>
-            <a:ext cx="7802575" cy="4663440"/>
+            <a:off x="5349240" y="1783080"/>
+            <a:ext cx="6522415" cy="4663440"/>
           </a:xfrm>
           <a:prstGeom prst="rect">
             <a:avLst/>
@@ -15249,14 +15569,15 @@
           <a:bodyPr wrap="square" lIns="0" tIns="0" rIns="0" bIns="0" rtlCol="0" anchor="t"/>
           <a:lstStyle/>
           <a:p>
-            <a:pPr algn="l" indent="0" marL="0">
+            <a:pPr algn="l" marL="342900" indent="-342900">
               <a:spcAft>
                 <a:spcPts val="800"/>
               </a:spcAft>
-              <a:buNone/>
+              <a:buSzPct val="100000"/>
+              <a:buChar char="•"/>
             </a:pPr>
             <a:r>
-              <a:rPr lang="en-US" sz="4000" i="1" dirty="0">
+              <a:rPr lang="en-US" sz="4000" b="1" dirty="0">
                 <a:solidFill>
                   <a:srgbClr val="111111"/>
                 </a:solidFill>
@@ -15264,19 +15585,17 @@
                 <a:ea typeface="Times New Roman" pitchFamily="34" charset="-122"/>
                 <a:cs typeface="Times New Roman" pitchFamily="34" charset="-120"/>
               </a:rPr>
-              <a:t>The soils of the savanna have the following characteristics:</a:t>
-            </a:r>
-            <a:endParaRPr lang="en-US" sz="4000" dirty="0"/>
-          </a:p>
-          <a:p>
-            <a:pPr algn="l" indent="0" marL="0">
+              <a:t>Protection: </a:t>
+            </a:r>
+            <a:pPr algn="l" marL="342900" indent="-342900">
               <a:spcAft>
                 <a:spcPts val="800"/>
               </a:spcAft>
-              <a:buNone/>
+              <a:buSzPct val="100000"/>
+              <a:buChar char="•"/>
             </a:pPr>
             <a:r>
-              <a:rPr lang="en-US" sz="4000" b="1" dirty="0">
+              <a:rPr lang="en-US" sz="4000" dirty="0">
                 <a:solidFill>
                   <a:srgbClr val="111111"/>
                 </a:solidFill>
@@ -15284,61 +15603,7 @@
                 <a:ea typeface="Times New Roman" pitchFamily="34" charset="-122"/>
                 <a:cs typeface="Times New Roman" pitchFamily="34" charset="-120"/>
               </a:rPr>
-              <a:t>Red soils: </a:t>
-            </a:r>
-            <a:pPr algn="l" indent="0" marL="0">
-              <a:spcAft>
-                <a:spcPts val="800"/>
-              </a:spcAft>
-              <a:buNone/>
-            </a:pPr>
-            <a:r>
-              <a:rPr lang="en-US" sz="4000" dirty="0">
-                <a:solidFill>
-                  <a:srgbClr val="111111"/>
-                </a:solidFill>
-                <a:latin typeface="Times New Roman" pitchFamily="34" charset="0"/>
-                <a:ea typeface="Times New Roman" pitchFamily="34" charset="-122"/>
-                <a:cs typeface="Times New Roman" pitchFamily="34" charset="-120"/>
-              </a:rPr>
-              <a:t>They are red because of iron and are only fairly fertile.</a:t>
-            </a:r>
-            <a:endParaRPr lang="en-US" sz="4000" dirty="0"/>
-          </a:p>
-          <a:p>
-            <a:pPr algn="l" indent="0" marL="0">
-              <a:spcAft>
-                <a:spcPts val="800"/>
-              </a:spcAft>
-              <a:buNone/>
-            </a:pPr>
-            <a:r>
-              <a:rPr lang="en-US" sz="4000" b="1" dirty="0">
-                <a:solidFill>
-                  <a:srgbClr val="111111"/>
-                </a:solidFill>
-                <a:latin typeface="Times New Roman" pitchFamily="34" charset="0"/>
-                <a:ea typeface="Times New Roman" pitchFamily="34" charset="-122"/>
-                <a:cs typeface="Times New Roman" pitchFamily="34" charset="-120"/>
-              </a:rPr>
-              <a:t>Laterite: </a:t>
-            </a:r>
-            <a:pPr algn="l" indent="0" marL="0">
-              <a:spcAft>
-                <a:spcPts val="800"/>
-              </a:spcAft>
-              <a:buNone/>
-            </a:pPr>
-            <a:r>
-              <a:rPr lang="en-US" sz="4000" dirty="0">
-                <a:solidFill>
-                  <a:srgbClr val="111111"/>
-                </a:solidFill>
-                <a:latin typeface="Times New Roman" pitchFamily="34" charset="0"/>
-                <a:ea typeface="Times New Roman" pitchFamily="34" charset="-122"/>
-                <a:cs typeface="Times New Roman" pitchFamily="34" charset="-120"/>
-              </a:rPr>
-              <a:t>It is a hard layer used to make roads and bricks.</a:t>
+              <a:t>Thick bark protects trees from fire.</a:t>
             </a:r>
             <a:endParaRPr lang="en-US" sz="4000" dirty="0"/>
           </a:p>
@@ -15515,7 +15780,7 @@
                 <a:ea typeface="Times New Roman" pitchFamily="34" charset="-122"/>
                 <a:cs typeface="Times New Roman" pitchFamily="34" charset="-120"/>
               </a:rPr>
-              <a:t>2. Soils (continued)</a:t>
+              <a:t>2. Soils</a:t>
             </a:r>
             <a:endParaRPr lang="en-US" sz="3600" dirty="0"/>
           </a:p>
@@ -15549,7 +15814,7 @@
               <a:buNone/>
             </a:pPr>
             <a:r>
-              <a:rPr lang="en-US" sz="4000" b="1" dirty="0">
+              <a:rPr lang="en-US" sz="4000" i="1" dirty="0">
                 <a:solidFill>
                   <a:srgbClr val="111111"/>
                 </a:solidFill>
@@ -15557,16 +15822,20 @@
                 <a:ea typeface="Times New Roman" pitchFamily="34" charset="-122"/>
                 <a:cs typeface="Times New Roman" pitchFamily="34" charset="-120"/>
               </a:rPr>
-              <a:t>Black cotton soils: </a:t>
-            </a:r>
-            <a:pPr algn="l" indent="0" marL="0">
+              <a:t>The savanna soils have the following characteristics:</a:t>
+            </a:r>
+            <a:endParaRPr lang="en-US" sz="4000" dirty="0"/>
+          </a:p>
+          <a:p>
+            <a:pPr algn="l" marL="342900" indent="-342900">
               <a:spcAft>
                 <a:spcPts val="800"/>
               </a:spcAft>
-              <a:buNone/>
+              <a:buSzPct val="100000"/>
+              <a:buChar char="•"/>
             </a:pPr>
             <a:r>
-              <a:rPr lang="en-US" sz="4000" dirty="0">
+              <a:rPr lang="en-US" sz="4000" b="1" dirty="0">
                 <a:solidFill>
                   <a:srgbClr val="111111"/>
                 </a:solidFill>
@@ -15574,19 +15843,17 @@
                 <a:ea typeface="Times New Roman" pitchFamily="34" charset="-122"/>
                 <a:cs typeface="Times New Roman" pitchFamily="34" charset="-120"/>
               </a:rPr>
-              <a:t>They are fertile clay soils that keep water well.</a:t>
-            </a:r>
-            <a:endParaRPr lang="en-US" sz="4000" dirty="0"/>
-          </a:p>
-          <a:p>
-            <a:pPr algn="l" indent="0" marL="0">
+              <a:t>Ferruginous soils: </a:t>
+            </a:r>
+            <a:pPr algn="l" marL="342900" indent="-342900">
               <a:spcAft>
                 <a:spcPts val="800"/>
               </a:spcAft>
-              <a:buNone/>
+              <a:buSzPct val="100000"/>
+              <a:buChar char="•"/>
             </a:pPr>
             <a:r>
-              <a:rPr lang="en-US" sz="4000" b="1" dirty="0">
+              <a:rPr lang="en-US" sz="4000" dirty="0">
                 <a:solidFill>
                   <a:srgbClr val="111111"/>
                 </a:solidFill>
@@ -15594,24 +15861,7 @@
                 <a:ea typeface="Times New Roman" pitchFamily="34" charset="-122"/>
                 <a:cs typeface="Times New Roman" pitchFamily="34" charset="-120"/>
               </a:rPr>
-              <a:t>Little humus: </a:t>
-            </a:r>
-            <a:pPr algn="l" indent="0" marL="0">
-              <a:spcAft>
-                <a:spcPts val="800"/>
-              </a:spcAft>
-              <a:buNone/>
-            </a:pPr>
-            <a:r>
-              <a:rPr lang="en-US" sz="4000" dirty="0">
-                <a:solidFill>
-                  <a:srgbClr val="111111"/>
-                </a:solidFill>
-                <a:latin typeface="Times New Roman" pitchFamily="34" charset="0"/>
-                <a:ea typeface="Times New Roman" pitchFamily="34" charset="-122"/>
-                <a:cs typeface="Times New Roman" pitchFamily="34" charset="-120"/>
-              </a:rPr>
-              <a:t>The soils have little humus because bush fires burn the dead plants.</a:t>
+              <a:t>Red soils rich in iron.</a:t>
             </a:r>
             <a:endParaRPr lang="en-US" sz="4000" dirty="0"/>
           </a:p>
@@ -15723,15 +15973,117 @@
                 <a:ea typeface="Calibri" pitchFamily="34" charset="-122"/>
                 <a:cs typeface="Calibri" pitchFamily="34" charset="-120"/>
               </a:rPr>
-              <a:t>FORMATIVE EVALUATION</a:t>
+              <a:t>BOARD SUMMARY</a:t>
             </a:r>
             <a:endParaRPr lang="en-US" sz="1400" dirty="0"/>
+          </a:p>
+        </p:txBody>
+      </p:sp>
+      <p:sp>
+        <p:nvSpPr>
+          <p:cNvPr id="3" name="Text 1"/>
+          <p:cNvSpPr/>
+          <p:nvPr/>
+        </p:nvSpPr>
+        <p:spPr>
+          <a:xfrm>
+            <a:off x="365760" y="1005840"/>
+            <a:ext cx="11460175" cy="731520"/>
+          </a:xfrm>
+          <a:prstGeom prst="rect">
+            <a:avLst/>
+          </a:prstGeom>
+          <a:noFill/>
+          <a:ln/>
+        </p:spPr>
+        <p:txBody>
+          <a:bodyPr wrap="square" lIns="0" tIns="0" rIns="0" bIns="0" rtlCol="0" anchor="ctr">
+            <a:normAutofit/>
+          </a:bodyPr>
+          <a:lstStyle/>
+          <a:p>
+            <a:pPr algn="ctr" indent="0" marL="0">
+              <a:buNone/>
+            </a:pPr>
+            <a:r>
+              <a:rPr lang="en-US" sz="3600" b="1" dirty="0">
+                <a:solidFill>
+                  <a:srgbClr val="990011"/>
+                </a:solidFill>
+                <a:latin typeface="Times New Roman" pitchFamily="34" charset="0"/>
+                <a:ea typeface="Times New Roman" pitchFamily="34" charset="-122"/>
+                <a:cs typeface="Times New Roman" pitchFamily="34" charset="-120"/>
+              </a:rPr>
+              <a:t>2. Soils</a:t>
+            </a:r>
+            <a:endParaRPr lang="en-US" sz="3600" dirty="0"/>
+          </a:p>
+        </p:txBody>
+      </p:sp>
+      <p:sp>
+        <p:nvSpPr>
+          <p:cNvPr id="4" name="Text 2"/>
+          <p:cNvSpPr/>
+          <p:nvPr/>
+        </p:nvSpPr>
+        <p:spPr>
+          <a:xfrm>
+            <a:off x="365760" y="1783080"/>
+            <a:ext cx="4846320" cy="4617720"/>
+          </a:xfrm>
+          <a:prstGeom prst="rect">
+            <a:avLst/>
+          </a:prstGeom>
+          <a:noFill/>
+          <a:ln/>
+        </p:spPr>
+        <p:txBody>
+          <a:bodyPr wrap="square" lIns="0" tIns="0" rIns="0" bIns="0" rtlCol="0" anchor="t"/>
+          <a:lstStyle/>
+          <a:p>
+            <a:pPr algn="l" marL="342900" indent="-342900">
+              <a:spcAft>
+                <a:spcPts val="800"/>
+              </a:spcAft>
+              <a:buSzPct val="100000"/>
+              <a:buChar char="•"/>
+            </a:pPr>
+            <a:r>
+              <a:rPr lang="en-US" sz="3600" b="1" dirty="0">
+                <a:solidFill>
+                  <a:srgbClr val="111111"/>
+                </a:solidFill>
+                <a:latin typeface="Times New Roman" pitchFamily="34" charset="0"/>
+                <a:ea typeface="Times New Roman" pitchFamily="34" charset="-122"/>
+                <a:cs typeface="Times New Roman" pitchFamily="34" charset="-120"/>
+              </a:rPr>
+              <a:t>Laterite: </a:t>
+            </a:r>
+            <a:pPr algn="l" marL="342900" indent="-342900">
+              <a:spcAft>
+                <a:spcPts val="800"/>
+              </a:spcAft>
+              <a:buSzPct val="100000"/>
+              <a:buChar char="•"/>
+            </a:pPr>
+            <a:r>
+              <a:rPr lang="en-US" sz="3600" dirty="0">
+                <a:solidFill>
+                  <a:srgbClr val="111111"/>
+                </a:solidFill>
+                <a:latin typeface="Times New Roman" pitchFamily="34" charset="0"/>
+                <a:ea typeface="Times New Roman" pitchFamily="34" charset="-122"/>
+                <a:cs typeface="Times New Roman" pitchFamily="34" charset="-120"/>
+              </a:rPr>
+              <a:t>A hard red crust used for roads and bricks.</a:t>
+            </a:r>
+            <a:endParaRPr lang="en-US" sz="3600" dirty="0"/>
           </a:p>
         </p:txBody>
       </p:sp>
       <p:pic>
         <p:nvPicPr>
-          <p:cNvPr id="3" name="Image 0" descr="/home/claude/f4/img/minesec_sheet.png">    </p:cNvPr>
+          <p:cNvPr id="5" name="Image 0" descr="/home/claude/f4/img/v2/f2t_laterite.jpg">    </p:cNvPr>
           <p:cNvPicPr>
             <a:picLocks noChangeAspect="1"/>
           </p:cNvPicPr>
@@ -15745,8 +16097,8 @@
         </p:blipFill>
         <p:spPr>
           <a:xfrm>
-            <a:off x="0" y="658368"/>
-            <a:ext cx="5120640" cy="5833872"/>
+            <a:off x="5349240" y="2070172"/>
+            <a:ext cx="6659575" cy="3696064"/>
           </a:xfrm>
           <a:prstGeom prst="rect">
             <a:avLst/>
@@ -15755,14 +16107,14 @@
       </p:pic>
       <p:sp>
         <p:nvSpPr>
-          <p:cNvPr id="4" name="Text 1"/>
+          <p:cNvPr id="6" name="Text 3"/>
           <p:cNvSpPr/>
           <p:nvPr/>
         </p:nvSpPr>
         <p:spPr>
           <a:xfrm>
-            <a:off x="5349240" y="1005840"/>
-            <a:ext cx="6522415" cy="731520"/>
+            <a:off x="5349240" y="6089904"/>
+            <a:ext cx="6659575" cy="347472"/>
           </a:xfrm>
           <a:prstGeom prst="rect">
             <a:avLst/>
@@ -15771,68 +16123,24 @@
           <a:ln/>
         </p:spPr>
         <p:txBody>
-          <a:bodyPr wrap="square" lIns="0" tIns="0" rIns="0" bIns="0" rtlCol="0" anchor="ctr">
-            <a:normAutofit/>
-          </a:bodyPr>
+          <a:bodyPr wrap="square" lIns="0" tIns="0" rIns="0" bIns="0" rtlCol="0" anchor="ctr"/>
           <a:lstStyle/>
           <a:p>
             <a:pPr algn="ctr" indent="0" marL="0">
               <a:buNone/>
             </a:pPr>
             <a:r>
-              <a:rPr lang="en-US" sz="3600" b="1" dirty="0">
-                <a:solidFill>
-                  <a:srgbClr val="990011"/>
+              <a:rPr lang="en-US" sz="1600" i="1" dirty="0">
+                <a:solidFill>
+                  <a:srgbClr val="555555"/>
                 </a:solidFill>
                 <a:latin typeface="Times New Roman" pitchFamily="34" charset="0"/>
                 <a:ea typeface="Times New Roman" pitchFamily="34" charset="-122"/>
                 <a:cs typeface="Times New Roman" pitchFamily="34" charset="-120"/>
               </a:rPr>
-              <a:t>Evaluation 1</a:t>
-            </a:r>
-            <a:endParaRPr lang="en-US" sz="3600" dirty="0"/>
-          </a:p>
-        </p:txBody>
-      </p:sp>
-      <p:sp>
-        <p:nvSpPr>
-          <p:cNvPr id="5" name="Text 2"/>
-          <p:cNvSpPr/>
-          <p:nvPr/>
-        </p:nvSpPr>
-        <p:spPr>
-          <a:xfrm>
-            <a:off x="5349240" y="1783080"/>
-            <a:ext cx="6522415" cy="4663440"/>
-          </a:xfrm>
-          <a:prstGeom prst="rect">
-            <a:avLst/>
-          </a:prstGeom>
-          <a:noFill/>
-          <a:ln/>
-        </p:spPr>
-        <p:txBody>
-          <a:bodyPr wrap="square" lIns="0" tIns="0" rIns="0" bIns="0" rtlCol="0" anchor="t"/>
-          <a:lstStyle/>
-          <a:p>
-            <a:pPr algn="l" indent="0" marL="0">
-              <a:spcAft>
-                <a:spcPts val="800"/>
-              </a:spcAft>
-              <a:buNone/>
-            </a:pPr>
-            <a:r>
-              <a:rPr lang="en-US" sz="4000" dirty="0">
-                <a:solidFill>
-                  <a:srgbClr val="111111"/>
-                </a:solidFill>
-                <a:latin typeface="Times New Roman" pitchFamily="34" charset="0"/>
-                <a:ea typeface="Times New Roman" pitchFamily="34" charset="-122"/>
-                <a:cs typeface="Times New Roman" pitchFamily="34" charset="-120"/>
-              </a:rPr>
-              <a:t>Give two ways savanna trees survive the dry season.</a:t>
-            </a:r>
-            <a:endParaRPr lang="en-US" sz="4000" dirty="0"/>
+              <a:t>Illustration: laterite</a:t>
+            </a:r>
+            <a:endParaRPr lang="en-US" sz="1600" dirty="0"/>
           </a:p>
         </p:txBody>
       </p:sp>
@@ -15942,7 +16250,7 @@
                 <a:ea typeface="Calibri" pitchFamily="34" charset="-122"/>
                 <a:cs typeface="Calibri" pitchFamily="34" charset="-120"/>
               </a:rPr>
-              <a:t>FORMATIVE EVALUATION</a:t>
+              <a:t>BOARD SUMMARY</a:t>
             </a:r>
             <a:endParaRPr lang="en-US" sz="1400" dirty="0"/>
           </a:p>
@@ -16007,7 +16315,7 @@
                 <a:ea typeface="Times New Roman" pitchFamily="34" charset="-122"/>
                 <a:cs typeface="Times New Roman" pitchFamily="34" charset="-120"/>
               </a:rPr>
-              <a:t>Expected Answer</a:t>
+              <a:t>2. Soils</a:t>
             </a:r>
             <a:endParaRPr lang="en-US" sz="3600" dirty="0"/>
           </a:p>
@@ -16034,14 +16342,15 @@
           <a:bodyPr wrap="square" lIns="0" tIns="0" rIns="0" bIns="0" rtlCol="0" anchor="t"/>
           <a:lstStyle/>
           <a:p>
-            <a:pPr algn="l" indent="0" marL="0">
+            <a:pPr algn="l" marL="342900" indent="-342900">
               <a:spcAft>
                 <a:spcPts val="800"/>
               </a:spcAft>
-              <a:buNone/>
+              <a:buSzPct val="100000"/>
+              <a:buChar char="•"/>
             </a:pPr>
             <a:r>
-              <a:rPr lang="en-US" sz="4000" dirty="0">
+              <a:rPr lang="en-US" sz="4000" b="1" dirty="0">
                 <a:solidFill>
                   <a:srgbClr val="111111"/>
                 </a:solidFill>
@@ -16049,7 +16358,64 @@
                 <a:ea typeface="Times New Roman" pitchFamily="34" charset="-122"/>
                 <a:cs typeface="Times New Roman" pitchFamily="34" charset="-120"/>
               </a:rPr>
-              <a:t>They lose their leaves; the baobab keeps water in its trunk.</a:t>
+              <a:t>Black cotton soils: </a:t>
+            </a:r>
+            <a:pPr algn="l" marL="342900" indent="-342900">
+              <a:spcAft>
+                <a:spcPts val="800"/>
+              </a:spcAft>
+              <a:buSzPct val="100000"/>
+              <a:buChar char="•"/>
+            </a:pPr>
+            <a:r>
+              <a:rPr lang="en-US" sz="4000" dirty="0">
+                <a:solidFill>
+                  <a:srgbClr val="111111"/>
+                </a:solidFill>
+                <a:latin typeface="Times New Roman" pitchFamily="34" charset="0"/>
+                <a:ea typeface="Times New Roman" pitchFamily="34" charset="-122"/>
+                <a:cs typeface="Times New Roman" pitchFamily="34" charset="-120"/>
+              </a:rPr>
+              <a:t>Fertile clay soils that crack when dry.</a:t>
+            </a:r>
+            <a:endParaRPr lang="en-US" sz="4000" dirty="0"/>
+          </a:p>
+          <a:p>
+            <a:pPr algn="l" marL="342900" indent="-342900">
+              <a:spcAft>
+                <a:spcPts val="800"/>
+              </a:spcAft>
+              <a:buSzPct val="100000"/>
+              <a:buChar char="•"/>
+            </a:pPr>
+            <a:r>
+              <a:rPr lang="en-US" sz="4000" b="1" dirty="0">
+                <a:solidFill>
+                  <a:srgbClr val="111111"/>
+                </a:solidFill>
+                <a:latin typeface="Times New Roman" pitchFamily="34" charset="0"/>
+                <a:ea typeface="Times New Roman" pitchFamily="34" charset="-122"/>
+                <a:cs typeface="Times New Roman" pitchFamily="34" charset="-120"/>
+              </a:rPr>
+              <a:t>Little humus: </a:t>
+            </a:r>
+            <a:pPr algn="l" marL="342900" indent="-342900">
+              <a:spcAft>
+                <a:spcPts val="800"/>
+              </a:spcAft>
+              <a:buSzPct val="100000"/>
+              <a:buChar char="•"/>
+            </a:pPr>
+            <a:r>
+              <a:rPr lang="en-US" sz="4000" dirty="0">
+                <a:solidFill>
+                  <a:srgbClr val="111111"/>
+                </a:solidFill>
+                <a:latin typeface="Times New Roman" pitchFamily="34" charset="0"/>
+                <a:ea typeface="Times New Roman" pitchFamily="34" charset="-122"/>
+                <a:cs typeface="Times New Roman" pitchFamily="34" charset="-120"/>
+              </a:rPr>
+              <a:t>Bush fires burn dead plants.</a:t>
             </a:r>
             <a:endParaRPr lang="en-US" sz="4000" dirty="0"/>
           </a:p>
@@ -16226,7 +16592,7 @@
                 <a:ea typeface="Times New Roman" pitchFamily="34" charset="-122"/>
                 <a:cs typeface="Times New Roman" pitchFamily="34" charset="-120"/>
               </a:rPr>
-              <a:t>Evaluation 2</a:t>
+              <a:t>Evaluation 1</a:t>
             </a:r>
             <a:endParaRPr lang="en-US" sz="3600" dirty="0"/>
           </a:p>
@@ -16268,7 +16634,7 @@
                 <a:ea typeface="Times New Roman" pitchFamily="34" charset="-122"/>
                 <a:cs typeface="Times New Roman" pitchFamily="34" charset="-120"/>
               </a:rPr>
-              <a:t>What is laterite used for?</a:t>
+              <a:t>Give two ways savanna trees survive the dry season.</a:t>
             </a:r>
             <a:endParaRPr lang="en-US" sz="4000" dirty="0"/>
           </a:p>
@@ -16487,7 +16853,7 @@
                 <a:ea typeface="Times New Roman" pitchFamily="34" charset="-122"/>
                 <a:cs typeface="Times New Roman" pitchFamily="34" charset="-120"/>
               </a:rPr>
-              <a:t>For roads and bricks.</a:t>
+              <a:t>They lose their leaves; the baobab keeps water in its trunk.</a:t>
             </a:r>
             <a:endParaRPr lang="en-US" sz="4000" dirty="0"/>
           </a:p>
@@ -16599,7 +16965,7 @@
                 <a:ea typeface="Calibri" pitchFamily="34" charset="-122"/>
                 <a:cs typeface="Calibri" pitchFamily="34" charset="-120"/>
               </a:rPr>
-              <a:t>REMEDIATION</a:t>
+              <a:t>FORMATIVE EVALUATION</a:t>
             </a:r>
             <a:endParaRPr lang="en-US" sz="1400" dirty="0"/>
           </a:p>
@@ -16622,7 +16988,7 @@
         <p:spPr>
           <a:xfrm>
             <a:off x="0" y="658368"/>
-            <a:ext cx="1463040" cy="5833872"/>
+            <a:ext cx="5120640" cy="5833872"/>
           </a:xfrm>
           <a:prstGeom prst="rect">
             <a:avLst/>
@@ -16637,8 +17003,8 @@
         </p:nvSpPr>
         <p:spPr>
           <a:xfrm>
-            <a:off x="1691640" y="1005840"/>
-            <a:ext cx="10180015" cy="731520"/>
+            <a:off x="5349240" y="1005840"/>
+            <a:ext cx="6522415" cy="731520"/>
           </a:xfrm>
           <a:prstGeom prst="rect">
             <a:avLst/>
@@ -16664,7 +17030,7 @@
                 <a:ea typeface="Times New Roman" pitchFamily="34" charset="-122"/>
                 <a:cs typeface="Times New Roman" pitchFamily="34" charset="-120"/>
               </a:rPr>
-              <a:t>Remediation</a:t>
+              <a:t>Evaluation 2</a:t>
             </a:r>
             <a:endParaRPr lang="en-US" sz="3600" dirty="0"/>
           </a:p>
@@ -16678,8 +17044,8 @@
         </p:nvSpPr>
         <p:spPr>
           <a:xfrm>
-            <a:off x="1691640" y="1783080"/>
-            <a:ext cx="10180015" cy="4663440"/>
+            <a:off x="5349240" y="1783080"/>
+            <a:ext cx="6522415" cy="4663440"/>
           </a:xfrm>
           <a:prstGeom prst="rect">
             <a:avLst/>
@@ -16698,7 +17064,7 @@
               <a:buNone/>
             </a:pPr>
             <a:r>
-              <a:rPr lang="en-US" sz="4000" b="1" dirty="0">
+              <a:rPr lang="en-US" sz="4000" dirty="0">
                 <a:solidFill>
                   <a:srgbClr val="111111"/>
                 </a:solidFill>
@@ -16706,73 +17072,7 @@
                 <a:ea typeface="Times New Roman" pitchFamily="34" charset="-122"/>
                 <a:cs typeface="Times New Roman" pitchFamily="34" charset="-120"/>
               </a:rPr>
-              <a:t>Fill in the blanks:</a:t>
-            </a:r>
-            <a:endParaRPr lang="en-US" sz="4000" dirty="0"/>
-          </a:p>
-          <a:p>
-            <a:pPr algn="l" marL="342900" indent="-342900">
-              <a:spcAft>
-                <a:spcPts val="800"/>
-              </a:spcAft>
-              <a:buSzPct val="100000"/>
-              <a:buFont typeface="+mj-lt"/>
-              <a:buAutoNum type="arabicPeriod" startAt="1"/>
-            </a:pPr>
-            <a:r>
-              <a:rPr lang="en-US" sz="4000" dirty="0">
-                <a:solidFill>
-                  <a:srgbClr val="111111"/>
-                </a:solidFill>
-                <a:latin typeface="Times New Roman" pitchFamily="34" charset="0"/>
-                <a:ea typeface="Times New Roman" pitchFamily="34" charset="-122"/>
-                <a:cs typeface="Times New Roman" pitchFamily="34" charset="-120"/>
-              </a:rPr>
-              <a:t>Trees that lose their leaves are ______ trees.</a:t>
-            </a:r>
-            <a:endParaRPr lang="en-US" sz="4000" dirty="0"/>
-          </a:p>
-          <a:p>
-            <a:pPr algn="l" marL="342900" indent="-342900">
-              <a:spcAft>
-                <a:spcPts val="800"/>
-              </a:spcAft>
-              <a:buSzPct val="100000"/>
-              <a:buFont typeface="+mj-lt"/>
-              <a:buAutoNum type="arabicPeriod" startAt="1"/>
-            </a:pPr>
-            <a:r>
-              <a:rPr lang="en-US" sz="4000" dirty="0">
-                <a:solidFill>
-                  <a:srgbClr val="111111"/>
-                </a:solidFill>
-                <a:latin typeface="Times New Roman" pitchFamily="34" charset="0"/>
-                <a:ea typeface="Times New Roman" pitchFamily="34" charset="-122"/>
-                <a:cs typeface="Times New Roman" pitchFamily="34" charset="-120"/>
-              </a:rPr>
-              <a:t>The tree that keeps water in its trunk is the ______.</a:t>
-            </a:r>
-            <a:endParaRPr lang="en-US" sz="4000" dirty="0"/>
-          </a:p>
-          <a:p>
-            <a:pPr algn="l" marL="342900" indent="-342900">
-              <a:spcAft>
-                <a:spcPts val="800"/>
-              </a:spcAft>
-              <a:buSzPct val="100000"/>
-              <a:buFont typeface="+mj-lt"/>
-              <a:buAutoNum type="arabicPeriod" startAt="1"/>
-            </a:pPr>
-            <a:r>
-              <a:rPr lang="en-US" sz="4000" dirty="0">
-                <a:solidFill>
-                  <a:srgbClr val="111111"/>
-                </a:solidFill>
-                <a:latin typeface="Times New Roman" pitchFamily="34" charset="0"/>
-                <a:ea typeface="Times New Roman" pitchFamily="34" charset="-122"/>
-                <a:cs typeface="Times New Roman" pitchFamily="34" charset="-120"/>
-              </a:rPr>
-              <a:t>The hard red layer in the soil is ______.</a:t>
+              <a:t>What is laterite used for?</a:t>
             </a:r>
             <a:endParaRPr lang="en-US" sz="4000" dirty="0"/>
           </a:p>
@@ -16884,7 +17184,7 @@
                 <a:ea typeface="Calibri" pitchFamily="34" charset="-122"/>
                 <a:cs typeface="Calibri" pitchFamily="34" charset="-120"/>
               </a:rPr>
-              <a:t>HOMEWORK</a:t>
+              <a:t>FORMATIVE EVALUATION</a:t>
             </a:r>
             <a:endParaRPr lang="en-US" sz="1400" dirty="0"/>
           </a:p>
@@ -16949,7 +17249,7 @@
                 <a:ea typeface="Times New Roman" pitchFamily="34" charset="-122"/>
                 <a:cs typeface="Times New Roman" pitchFamily="34" charset="-120"/>
               </a:rPr>
-              <a:t>Homework</a:t>
+              <a:t>Expected Answer</a:t>
             </a:r>
             <a:endParaRPr lang="en-US" sz="3600" dirty="0"/>
           </a:p>
@@ -16991,7 +17291,7 @@
                 <a:ea typeface="Times New Roman" pitchFamily="34" charset="-122"/>
                 <a:cs typeface="Times New Roman" pitchFamily="34" charset="-120"/>
               </a:rPr>
-              <a:t>List three things that people in your family get from the savanna around Garoua, for example food, wood or animals.</a:t>
+              <a:t>For roads and bricks.</a:t>
             </a:r>
             <a:endParaRPr lang="en-US" sz="4000" dirty="0"/>
           </a:p>
@@ -17103,7 +17403,7 @@
                 <a:ea typeface="Calibri" pitchFamily="34" charset="-122"/>
                 <a:cs typeface="Calibri" pitchFamily="34" charset="-120"/>
               </a:rPr>
-              <a:t>NEXT LESSON</a:t>
+              <a:t>REMEDIATION</a:t>
             </a:r>
             <a:endParaRPr lang="en-US" sz="1400" dirty="0"/>
           </a:p>
@@ -17126,7 +17426,7 @@
         <p:spPr>
           <a:xfrm>
             <a:off x="0" y="658368"/>
-            <a:ext cx="5120640" cy="5833872"/>
+            <a:ext cx="1463040" cy="5833872"/>
           </a:xfrm>
           <a:prstGeom prst="rect">
             <a:avLst/>
@@ -17141,8 +17441,8 @@
         </p:nvSpPr>
         <p:spPr>
           <a:xfrm>
-            <a:off x="5349240" y="1005840"/>
-            <a:ext cx="6522415" cy="731520"/>
+            <a:off x="1691640" y="1005840"/>
+            <a:ext cx="10180015" cy="731520"/>
           </a:xfrm>
           <a:prstGeom prst="rect">
             <a:avLst/>
@@ -17168,7 +17468,7 @@
                 <a:ea typeface="Times New Roman" pitchFamily="34" charset="-122"/>
                 <a:cs typeface="Times New Roman" pitchFamily="34" charset="-120"/>
               </a:rPr>
-              <a:t>Next Lesson</a:t>
+              <a:t>Remediation</a:t>
             </a:r>
             <a:endParaRPr lang="en-US" sz="3600" dirty="0"/>
           </a:p>
@@ -17182,8 +17482,8 @@
         </p:nvSpPr>
         <p:spPr>
           <a:xfrm>
-            <a:off x="5349240" y="1783080"/>
-            <a:ext cx="6522415" cy="4663440"/>
+            <a:off x="1691640" y="1783080"/>
+            <a:ext cx="10180015" cy="4663440"/>
           </a:xfrm>
           <a:prstGeom prst="rect">
             <a:avLst/>
@@ -17192,10 +17492,10 @@
           <a:ln/>
         </p:spPr>
         <p:txBody>
-          <a:bodyPr wrap="square" lIns="0" tIns="0" rIns="0" bIns="0" rtlCol="0" anchor="ctr"/>
-          <a:lstStyle/>
-          <a:p>
-            <a:pPr algn="ctr" indent="0" marL="0">
+          <a:bodyPr wrap="square" lIns="0" tIns="0" rIns="0" bIns="0" rtlCol="0" anchor="t"/>
+          <a:lstStyle/>
+          <a:p>
+            <a:pPr algn="l" indent="0" marL="0">
               <a:spcAft>
                 <a:spcPts val="800"/>
               </a:spcAft>
@@ -17210,27 +17510,73 @@
                 <a:ea typeface="Times New Roman" pitchFamily="34" charset="-122"/>
                 <a:cs typeface="Times New Roman" pitchFamily="34" charset="-120"/>
               </a:rPr>
-              <a:t>Our next lesson will be on:</a:t>
+              <a:t>Fill in the blanks:</a:t>
             </a:r>
             <a:endParaRPr lang="en-US" sz="4000" dirty="0"/>
           </a:p>
           <a:p>
-            <a:pPr algn="ctr" indent="0" marL="0">
+            <a:pPr algn="l" marL="342900" indent="-342900">
               <a:spcAft>
                 <a:spcPts val="800"/>
               </a:spcAft>
-              <a:buNone/>
+              <a:buSzPct val="100000"/>
+              <a:buFont typeface="+mj-lt"/>
+              <a:buAutoNum type="arabicPeriod" startAt="1"/>
             </a:pPr>
             <a:r>
-              <a:rPr lang="en-US" sz="4000" b="1" dirty="0">
-                <a:solidFill>
-                  <a:srgbClr val="990011"/>
+              <a:rPr lang="en-US" sz="4000" dirty="0">
+                <a:solidFill>
+                  <a:srgbClr val="111111"/>
                 </a:solidFill>
                 <a:latin typeface="Times New Roman" pitchFamily="34" charset="0"/>
                 <a:ea typeface="Times New Roman" pitchFamily="34" charset="-122"/>
                 <a:cs typeface="Times New Roman" pitchFamily="34" charset="-120"/>
               </a:rPr>
-              <a:t>Lesson 2 (Part 3): The Tropical Grassland Region: Types of Resources and Methods of Exploitation</a:t>
+              <a:t>Trees that lose their leaves are ______ trees.</a:t>
+            </a:r>
+            <a:endParaRPr lang="en-US" sz="4000" dirty="0"/>
+          </a:p>
+          <a:p>
+            <a:pPr algn="l" marL="342900" indent="-342900">
+              <a:spcAft>
+                <a:spcPts val="800"/>
+              </a:spcAft>
+              <a:buSzPct val="100000"/>
+              <a:buFont typeface="+mj-lt"/>
+              <a:buAutoNum type="arabicPeriod" startAt="1"/>
+            </a:pPr>
+            <a:r>
+              <a:rPr lang="en-US" sz="4000" dirty="0">
+                <a:solidFill>
+                  <a:srgbClr val="111111"/>
+                </a:solidFill>
+                <a:latin typeface="Times New Roman" pitchFamily="34" charset="0"/>
+                <a:ea typeface="Times New Roman" pitchFamily="34" charset="-122"/>
+                <a:cs typeface="Times New Roman" pitchFamily="34" charset="-120"/>
+              </a:rPr>
+              <a:t>The tree that keeps water in its trunk is the ______.</a:t>
+            </a:r>
+            <a:endParaRPr lang="en-US" sz="4000" dirty="0"/>
+          </a:p>
+          <a:p>
+            <a:pPr algn="l" marL="342900" indent="-342900">
+              <a:spcAft>
+                <a:spcPts val="800"/>
+              </a:spcAft>
+              <a:buSzPct val="100000"/>
+              <a:buFont typeface="+mj-lt"/>
+              <a:buAutoNum type="arabicPeriod" startAt="1"/>
+            </a:pPr>
+            <a:r>
+              <a:rPr lang="en-US" sz="4000" dirty="0">
+                <a:solidFill>
+                  <a:srgbClr val="111111"/>
+                </a:solidFill>
+                <a:latin typeface="Times New Roman" pitchFamily="34" charset="0"/>
+                <a:ea typeface="Times New Roman" pitchFamily="34" charset="-122"/>
+                <a:cs typeface="Times New Roman" pitchFamily="34" charset="-120"/>
+              </a:rPr>
+              <a:t>The hard red layer in the soil is ______.</a:t>
             </a:r>
             <a:endParaRPr lang="en-US" sz="4000" dirty="0"/>
           </a:p>
@@ -17342,6 +17688,683 @@
                 <a:ea typeface="Calibri" pitchFamily="34" charset="-122"/>
                 <a:cs typeface="Calibri" pitchFamily="34" charset="-120"/>
               </a:rPr>
+              <a:t>HOMEWORK</a:t>
+            </a:r>
+            <a:endParaRPr lang="en-US" sz="1400" dirty="0"/>
+          </a:p>
+        </p:txBody>
+      </p:sp>
+      <p:pic>
+        <p:nvPicPr>
+          <p:cNvPr id="3" name="Image 0" descr="/home/claude/f4/img/minesec_sheet.png">    </p:cNvPr>
+          <p:cNvPicPr>
+            <a:picLocks noChangeAspect="1"/>
+          </p:cNvPicPr>
+          <p:nvPr/>
+        </p:nvPicPr>
+        <p:blipFill>
+          <a:blip r:embed="rId1"/>
+          <a:stretch>
+            <a:fillRect/>
+          </a:stretch>
+        </p:blipFill>
+        <p:spPr>
+          <a:xfrm>
+            <a:off x="0" y="658368"/>
+            <a:ext cx="5120640" cy="5833872"/>
+          </a:xfrm>
+          <a:prstGeom prst="rect">
+            <a:avLst/>
+          </a:prstGeom>
+        </p:spPr>
+      </p:pic>
+      <p:sp>
+        <p:nvSpPr>
+          <p:cNvPr id="4" name="Text 1"/>
+          <p:cNvSpPr/>
+          <p:nvPr/>
+        </p:nvSpPr>
+        <p:spPr>
+          <a:xfrm>
+            <a:off x="5349240" y="1005840"/>
+            <a:ext cx="6522415" cy="731520"/>
+          </a:xfrm>
+          <a:prstGeom prst="rect">
+            <a:avLst/>
+          </a:prstGeom>
+          <a:noFill/>
+          <a:ln/>
+        </p:spPr>
+        <p:txBody>
+          <a:bodyPr wrap="square" lIns="0" tIns="0" rIns="0" bIns="0" rtlCol="0" anchor="ctr">
+            <a:normAutofit/>
+          </a:bodyPr>
+          <a:lstStyle/>
+          <a:p>
+            <a:pPr algn="ctr" indent="0" marL="0">
+              <a:buNone/>
+            </a:pPr>
+            <a:r>
+              <a:rPr lang="en-US" sz="3600" b="1" dirty="0">
+                <a:solidFill>
+                  <a:srgbClr val="990011"/>
+                </a:solidFill>
+                <a:latin typeface="Times New Roman" pitchFamily="34" charset="0"/>
+                <a:ea typeface="Times New Roman" pitchFamily="34" charset="-122"/>
+                <a:cs typeface="Times New Roman" pitchFamily="34" charset="-120"/>
+              </a:rPr>
+              <a:t>Homework</a:t>
+            </a:r>
+            <a:endParaRPr lang="en-US" sz="3600" dirty="0"/>
+          </a:p>
+        </p:txBody>
+      </p:sp>
+      <p:sp>
+        <p:nvSpPr>
+          <p:cNvPr id="5" name="Text 2"/>
+          <p:cNvSpPr/>
+          <p:nvPr/>
+        </p:nvSpPr>
+        <p:spPr>
+          <a:xfrm>
+            <a:off x="5349240" y="1783080"/>
+            <a:ext cx="6522415" cy="4663440"/>
+          </a:xfrm>
+          <a:prstGeom prst="rect">
+            <a:avLst/>
+          </a:prstGeom>
+          <a:noFill/>
+          <a:ln/>
+        </p:spPr>
+        <p:txBody>
+          <a:bodyPr wrap="square" lIns="0" tIns="0" rIns="0" bIns="0" rtlCol="0" anchor="t"/>
+          <a:lstStyle/>
+          <a:p>
+            <a:pPr algn="l" indent="0" marL="0">
+              <a:spcAft>
+                <a:spcPts val="800"/>
+              </a:spcAft>
+              <a:buNone/>
+            </a:pPr>
+            <a:r>
+              <a:rPr lang="en-US" sz="4000" dirty="0">
+                <a:solidFill>
+                  <a:srgbClr val="111111"/>
+                </a:solidFill>
+                <a:latin typeface="Times New Roman" pitchFamily="34" charset="0"/>
+                <a:ea typeface="Times New Roman" pitchFamily="34" charset="-122"/>
+                <a:cs typeface="Times New Roman" pitchFamily="34" charset="-120"/>
+              </a:rPr>
+              <a:t>List three things that people in your family get from the savanna around Garoua, for example food, wood or animals.</a:t>
+            </a:r>
+            <a:endParaRPr lang="en-US" sz="4000" dirty="0"/>
+          </a:p>
+        </p:txBody>
+      </p:sp>
+      <p:sp>
+        <p:nvSpPr>
+          <p:cNvPr id="25" name="Slide Number Placeholder 0"/>
+          <p:cNvSpPr>
+            <a:spLocks noGrp="1"/>
+          </p:cNvSpPr>
+          <p:nvPr>
+            <p:ph type="sldNum" sz="quarter" idx="4294967295"/>
+          </p:nvPr>
+        </p:nvSpPr>
+        <p:spPr>
+          <a:xfrm>
+            <a:off x="27432" y="91440"/>
+            <a:ext cx="585216" cy="475488"/>
+          </a:xfrm>
+          <a:prstGeom prst="rect">
+            <a:avLst/>
+          </a:prstGeom>
+          <a:extLst>
+            <a:ext uri="{C572A759-6A51-4108-AA02-DFA0A04FC94B}">
+              <ma14:wrappingTextBoxFlag xmlns:ma14="http://schemas.microsoft.com/office/mac/drawingml/2011/main" val="0"/>
+            </a:ext>
+          </a:extLst>
+        </p:spPr>
+        <p:txBody>
+          <a:bodyPr/>
+          <a:lstStyle>
+            <a:lvl1pPr>
+              <a:defRPr sz="2000">
+                <a:solidFill>
+                  <a:srgbClr val="FFFFFF"/>
+                </a:solidFill>
+                <a:latin typeface="Calibri"/>
+                <a:ea typeface="Calibri"/>
+                <a:cs typeface="Calibri"/>
+              </a:defRPr>
+            </a:lvl1pPr>
+          </a:lstStyle>
+          <a:p>
+            <a:pPr algn="ctr"/>
+            <a:fld id="{F7021451-1387-4CA6-816F-3879F97B5CBC}" type="slidenum">
+              <a:rPr b="1" lang="en-US"/>
+              <a:t>49</a:t>
+            </a:fld>
+            <a:endParaRPr lang="en-US"/>
+          </a:p>
+        </p:txBody>
+      </p:sp>
+    </p:spTree>
+  </p:cSld>
+  <p:clrMapOvr>
+    <a:masterClrMapping/>
+  </p:clrMapOvr>
+</p:sld>
+</file>
+
+<file path=ppt/slides/slide5.xml><?xml version="1.0" encoding="utf-8"?>
+<p:sld xmlns:a="http://schemas.openxmlformats.org/drawingml/2006/main" xmlns:r="http://schemas.openxmlformats.org/officeDocument/2006/relationships" xmlns:p="http://schemas.openxmlformats.org/presentationml/2006/main">
+  <p:cSld name="Slide 5">
+    <p:spTree>
+      <p:nvGrpSpPr>
+        <p:cNvPr id="1" name=""/>
+        <p:cNvGrpSpPr/>
+        <p:nvPr/>
+      </p:nvGrpSpPr>
+      <p:grpSpPr>
+        <a:xfrm>
+          <a:off x="0" y="0"/>
+          <a:ext cx="0" cy="0"/>
+          <a:chOff x="0" y="0"/>
+          <a:chExt cx="0" cy="0"/>
+        </a:xfrm>
+      </p:grpSpPr>
+      <p:sp>
+        <p:nvSpPr>
+          <p:cNvPr id="2" name="Text 0"/>
+          <p:cNvSpPr/>
+          <p:nvPr/>
+        </p:nvSpPr>
+        <p:spPr>
+          <a:xfrm>
+            <a:off x="457200" y="713232"/>
+            <a:ext cx="11368735" cy="274320"/>
+          </a:xfrm>
+          <a:prstGeom prst="rect">
+            <a:avLst/>
+          </a:prstGeom>
+          <a:noFill/>
+          <a:ln/>
+        </p:spPr>
+        <p:txBody>
+          <a:bodyPr wrap="square" lIns="0" tIns="0" rIns="0" bIns="0" rtlCol="0" anchor="ctr"/>
+          <a:lstStyle/>
+          <a:p>
+            <a:pPr algn="r" indent="0" marL="0">
+              <a:buNone/>
+            </a:pPr>
+            <a:r>
+              <a:rPr lang="en-US" sz="1400" b="1" dirty="0">
+                <a:solidFill>
+                  <a:srgbClr val="1C3F6E"/>
+                </a:solidFill>
+                <a:latin typeface="Calibri" pitchFamily="34" charset="0"/>
+                <a:ea typeface="Calibri" pitchFamily="34" charset="-122"/>
+                <a:cs typeface="Calibri" pitchFamily="34" charset="-120"/>
+              </a:rPr>
+              <a:t>HOMEWORK CORRECTION</a:t>
+            </a:r>
+            <a:endParaRPr lang="en-US" sz="1400" dirty="0"/>
+          </a:p>
+        </p:txBody>
+      </p:sp>
+      <p:pic>
+        <p:nvPicPr>
+          <p:cNvPr id="3" name="Image 0" descr="/home/claude/f4/img/minesec_sheet.png">    </p:cNvPr>
+          <p:cNvPicPr>
+            <a:picLocks noChangeAspect="1"/>
+          </p:cNvPicPr>
+          <p:nvPr/>
+        </p:nvPicPr>
+        <p:blipFill>
+          <a:blip r:embed="rId1"/>
+          <a:stretch>
+            <a:fillRect/>
+          </a:stretch>
+        </p:blipFill>
+        <p:spPr>
+          <a:xfrm>
+            <a:off x="0" y="658368"/>
+            <a:ext cx="5120640" cy="5833872"/>
+          </a:xfrm>
+          <a:prstGeom prst="rect">
+            <a:avLst/>
+          </a:prstGeom>
+        </p:spPr>
+      </p:pic>
+      <p:sp>
+        <p:nvSpPr>
+          <p:cNvPr id="4" name="Text 1"/>
+          <p:cNvSpPr/>
+          <p:nvPr/>
+        </p:nvSpPr>
+        <p:spPr>
+          <a:xfrm>
+            <a:off x="5349240" y="1005840"/>
+            <a:ext cx="6522415" cy="731520"/>
+          </a:xfrm>
+          <a:prstGeom prst="rect">
+            <a:avLst/>
+          </a:prstGeom>
+          <a:noFill/>
+          <a:ln/>
+        </p:spPr>
+        <p:txBody>
+          <a:bodyPr wrap="square" lIns="0" tIns="0" rIns="0" bIns="0" rtlCol="0" anchor="ctr">
+            <a:normAutofit/>
+          </a:bodyPr>
+          <a:lstStyle/>
+          <a:p>
+            <a:pPr algn="ctr" indent="0" marL="0">
+              <a:buNone/>
+            </a:pPr>
+            <a:r>
+              <a:rPr lang="en-US" sz="3600" b="1" dirty="0">
+                <a:solidFill>
+                  <a:srgbClr val="990011"/>
+                </a:solidFill>
+                <a:latin typeface="Times New Roman" pitchFamily="34" charset="0"/>
+                <a:ea typeface="Times New Roman" pitchFamily="34" charset="-122"/>
+                <a:cs typeface="Times New Roman" pitchFamily="34" charset="-120"/>
+              </a:rPr>
+              <a:t>Correction of the Homework (continued)</a:t>
+            </a:r>
+            <a:endParaRPr lang="en-US" sz="3600" dirty="0"/>
+          </a:p>
+        </p:txBody>
+      </p:sp>
+      <p:sp>
+        <p:nvSpPr>
+          <p:cNvPr id="5" name="Text 2"/>
+          <p:cNvSpPr/>
+          <p:nvPr/>
+        </p:nvSpPr>
+        <p:spPr>
+          <a:xfrm>
+            <a:off x="5349240" y="1783080"/>
+            <a:ext cx="6522415" cy="4663440"/>
+          </a:xfrm>
+          <a:prstGeom prst="rect">
+            <a:avLst/>
+          </a:prstGeom>
+          <a:noFill/>
+          <a:ln/>
+        </p:spPr>
+        <p:txBody>
+          <a:bodyPr wrap="square" lIns="0" tIns="0" rIns="0" bIns="0" rtlCol="0" anchor="t"/>
+          <a:lstStyle/>
+          <a:p>
+            <a:pPr algn="l" indent="0" marL="0">
+              <a:spcAft>
+                <a:spcPts val="800"/>
+              </a:spcAft>
+              <a:buNone/>
+            </a:pPr>
+            <a:r>
+              <a:rPr lang="en-US" sz="4000" dirty="0">
+                <a:solidFill>
+                  <a:srgbClr val="111111"/>
+                </a:solidFill>
+                <a:latin typeface="Times New Roman" pitchFamily="34" charset="0"/>
+                <a:ea typeface="Times New Roman" pitchFamily="34" charset="-122"/>
+                <a:cs typeface="Times New Roman" pitchFamily="34" charset="-120"/>
+              </a:rPr>
+              <a:t>Look at the trees and grass around your home. Which trees keep their leaves in the dry season, and which lose them? Is the grass green or dry now? Write your observations.</a:t>
+            </a:r>
+            <a:endParaRPr lang="en-US" sz="4000" dirty="0"/>
+          </a:p>
+        </p:txBody>
+      </p:sp>
+      <p:sp>
+        <p:nvSpPr>
+          <p:cNvPr id="25" name="Slide Number Placeholder 0"/>
+          <p:cNvSpPr>
+            <a:spLocks noGrp="1"/>
+          </p:cNvSpPr>
+          <p:nvPr>
+            <p:ph type="sldNum" sz="quarter" idx="4294967295"/>
+          </p:nvPr>
+        </p:nvSpPr>
+        <p:spPr>
+          <a:xfrm>
+            <a:off x="27432" y="91440"/>
+            <a:ext cx="585216" cy="475488"/>
+          </a:xfrm>
+          <a:prstGeom prst="rect">
+            <a:avLst/>
+          </a:prstGeom>
+          <a:extLst>
+            <a:ext uri="{C572A759-6A51-4108-AA02-DFA0A04FC94B}">
+              <ma14:wrappingTextBoxFlag xmlns:ma14="http://schemas.microsoft.com/office/mac/drawingml/2011/main" val="0"/>
+            </a:ext>
+          </a:extLst>
+        </p:spPr>
+        <p:txBody>
+          <a:bodyPr/>
+          <a:lstStyle>
+            <a:lvl1pPr>
+              <a:defRPr sz="2000">
+                <a:solidFill>
+                  <a:srgbClr val="FFFFFF"/>
+                </a:solidFill>
+                <a:latin typeface="Calibri"/>
+                <a:ea typeface="Calibri"/>
+                <a:cs typeface="Calibri"/>
+              </a:defRPr>
+            </a:lvl1pPr>
+          </a:lstStyle>
+          <a:p>
+            <a:pPr algn="ctr"/>
+            <a:fld id="{F7021451-1387-4CA6-816F-3879F97B5CBC}" type="slidenum">
+              <a:rPr b="1" lang="en-US"/>
+              <a:t>5</a:t>
+            </a:fld>
+            <a:endParaRPr lang="en-US"/>
+          </a:p>
+        </p:txBody>
+      </p:sp>
+    </p:spTree>
+  </p:cSld>
+  <p:clrMapOvr>
+    <a:masterClrMapping/>
+  </p:clrMapOvr>
+</p:sld>
+</file>
+
+<file path=ppt/slides/slide50.xml><?xml version="1.0" encoding="utf-8"?>
+<p:sld xmlns:a="http://schemas.openxmlformats.org/drawingml/2006/main" xmlns:r="http://schemas.openxmlformats.org/officeDocument/2006/relationships" xmlns:p="http://schemas.openxmlformats.org/presentationml/2006/main">
+  <p:cSld name="Slide 50">
+    <p:spTree>
+      <p:nvGrpSpPr>
+        <p:cNvPr id="1" name=""/>
+        <p:cNvGrpSpPr/>
+        <p:nvPr/>
+      </p:nvGrpSpPr>
+      <p:grpSpPr>
+        <a:xfrm>
+          <a:off x="0" y="0"/>
+          <a:ext cx="0" cy="0"/>
+          <a:chOff x="0" y="0"/>
+          <a:chExt cx="0" cy="0"/>
+        </a:xfrm>
+      </p:grpSpPr>
+      <p:sp>
+        <p:nvSpPr>
+          <p:cNvPr id="2" name="Text 0"/>
+          <p:cNvSpPr/>
+          <p:nvPr/>
+        </p:nvSpPr>
+        <p:spPr>
+          <a:xfrm>
+            <a:off x="457200" y="713232"/>
+            <a:ext cx="11368735" cy="274320"/>
+          </a:xfrm>
+          <a:prstGeom prst="rect">
+            <a:avLst/>
+          </a:prstGeom>
+          <a:noFill/>
+          <a:ln/>
+        </p:spPr>
+        <p:txBody>
+          <a:bodyPr wrap="square" lIns="0" tIns="0" rIns="0" bIns="0" rtlCol="0" anchor="ctr"/>
+          <a:lstStyle/>
+          <a:p>
+            <a:pPr algn="r" indent="0" marL="0">
+              <a:buNone/>
+            </a:pPr>
+            <a:r>
+              <a:rPr lang="en-US" sz="1400" b="1" dirty="0">
+                <a:solidFill>
+                  <a:srgbClr val="1C3F6E"/>
+                </a:solidFill>
+                <a:latin typeface="Calibri" pitchFamily="34" charset="0"/>
+                <a:ea typeface="Calibri" pitchFamily="34" charset="-122"/>
+                <a:cs typeface="Calibri" pitchFamily="34" charset="-120"/>
+              </a:rPr>
+              <a:t>NEXT LESSON</a:t>
+            </a:r>
+            <a:endParaRPr lang="en-US" sz="1400" dirty="0"/>
+          </a:p>
+        </p:txBody>
+      </p:sp>
+      <p:pic>
+        <p:nvPicPr>
+          <p:cNvPr id="3" name="Image 0" descr="/home/claude/f4/img/minesec_sheet.png">    </p:cNvPr>
+          <p:cNvPicPr>
+            <a:picLocks noChangeAspect="1"/>
+          </p:cNvPicPr>
+          <p:nvPr/>
+        </p:nvPicPr>
+        <p:blipFill>
+          <a:blip r:embed="rId1"/>
+          <a:stretch>
+            <a:fillRect/>
+          </a:stretch>
+        </p:blipFill>
+        <p:spPr>
+          <a:xfrm>
+            <a:off x="0" y="658368"/>
+            <a:ext cx="5120640" cy="5833872"/>
+          </a:xfrm>
+          <a:prstGeom prst="rect">
+            <a:avLst/>
+          </a:prstGeom>
+        </p:spPr>
+      </p:pic>
+      <p:sp>
+        <p:nvSpPr>
+          <p:cNvPr id="4" name="Text 1"/>
+          <p:cNvSpPr/>
+          <p:nvPr/>
+        </p:nvSpPr>
+        <p:spPr>
+          <a:xfrm>
+            <a:off x="5349240" y="1005840"/>
+            <a:ext cx="6522415" cy="731520"/>
+          </a:xfrm>
+          <a:prstGeom prst="rect">
+            <a:avLst/>
+          </a:prstGeom>
+          <a:noFill/>
+          <a:ln/>
+        </p:spPr>
+        <p:txBody>
+          <a:bodyPr wrap="square" lIns="0" tIns="0" rIns="0" bIns="0" rtlCol="0" anchor="ctr">
+            <a:normAutofit/>
+          </a:bodyPr>
+          <a:lstStyle/>
+          <a:p>
+            <a:pPr algn="ctr" indent="0" marL="0">
+              <a:buNone/>
+            </a:pPr>
+            <a:r>
+              <a:rPr lang="en-US" sz="3600" b="1" dirty="0">
+                <a:solidFill>
+                  <a:srgbClr val="990011"/>
+                </a:solidFill>
+                <a:latin typeface="Times New Roman" pitchFamily="34" charset="0"/>
+                <a:ea typeface="Times New Roman" pitchFamily="34" charset="-122"/>
+                <a:cs typeface="Times New Roman" pitchFamily="34" charset="-120"/>
+              </a:rPr>
+              <a:t>Next Lesson</a:t>
+            </a:r>
+            <a:endParaRPr lang="en-US" sz="3600" dirty="0"/>
+          </a:p>
+        </p:txBody>
+      </p:sp>
+      <p:sp>
+        <p:nvSpPr>
+          <p:cNvPr id="5" name="Text 2"/>
+          <p:cNvSpPr/>
+          <p:nvPr/>
+        </p:nvSpPr>
+        <p:spPr>
+          <a:xfrm>
+            <a:off x="5349240" y="1783080"/>
+            <a:ext cx="6522415" cy="4663440"/>
+          </a:xfrm>
+          <a:prstGeom prst="rect">
+            <a:avLst/>
+          </a:prstGeom>
+          <a:noFill/>
+          <a:ln/>
+        </p:spPr>
+        <p:txBody>
+          <a:bodyPr wrap="square" lIns="0" tIns="0" rIns="0" bIns="0" rtlCol="0" anchor="ctr"/>
+          <a:lstStyle/>
+          <a:p>
+            <a:pPr algn="ctr" indent="0" marL="0">
+              <a:spcAft>
+                <a:spcPts val="800"/>
+              </a:spcAft>
+              <a:buNone/>
+            </a:pPr>
+            <a:r>
+              <a:rPr lang="en-US" sz="4000" b="1" dirty="0">
+                <a:solidFill>
+                  <a:srgbClr val="111111"/>
+                </a:solidFill>
+                <a:latin typeface="Times New Roman" pitchFamily="34" charset="0"/>
+                <a:ea typeface="Times New Roman" pitchFamily="34" charset="-122"/>
+                <a:cs typeface="Times New Roman" pitchFamily="34" charset="-120"/>
+              </a:rPr>
+              <a:t>Our next lesson will be on:</a:t>
+            </a:r>
+            <a:endParaRPr lang="en-US" sz="4000" dirty="0"/>
+          </a:p>
+          <a:p>
+            <a:pPr algn="ctr" indent="0" marL="0">
+              <a:spcAft>
+                <a:spcPts val="800"/>
+              </a:spcAft>
+              <a:buNone/>
+            </a:pPr>
+            <a:r>
+              <a:rPr lang="en-US" sz="4000" b="1" dirty="0">
+                <a:solidFill>
+                  <a:srgbClr val="990011"/>
+                </a:solidFill>
+                <a:latin typeface="Times New Roman" pitchFamily="34" charset="0"/>
+                <a:ea typeface="Times New Roman" pitchFamily="34" charset="-122"/>
+                <a:cs typeface="Times New Roman" pitchFamily="34" charset="-120"/>
+              </a:rPr>
+              <a:t>Lesson 2 (Part 3): The Tropical Grassland Region: Types of Resources and Methods of Exploitation</a:t>
+            </a:r>
+            <a:endParaRPr lang="en-US" sz="4000" dirty="0"/>
+          </a:p>
+        </p:txBody>
+      </p:sp>
+      <p:sp>
+        <p:nvSpPr>
+          <p:cNvPr id="25" name="Slide Number Placeholder 0"/>
+          <p:cNvSpPr>
+            <a:spLocks noGrp="1"/>
+          </p:cNvSpPr>
+          <p:nvPr>
+            <p:ph type="sldNum" sz="quarter" idx="4294967295"/>
+          </p:nvPr>
+        </p:nvSpPr>
+        <p:spPr>
+          <a:xfrm>
+            <a:off x="27432" y="91440"/>
+            <a:ext cx="585216" cy="475488"/>
+          </a:xfrm>
+          <a:prstGeom prst="rect">
+            <a:avLst/>
+          </a:prstGeom>
+          <a:extLst>
+            <a:ext uri="{C572A759-6A51-4108-AA02-DFA0A04FC94B}">
+              <ma14:wrappingTextBoxFlag xmlns:ma14="http://schemas.microsoft.com/office/mac/drawingml/2011/main" val="0"/>
+            </a:ext>
+          </a:extLst>
+        </p:spPr>
+        <p:txBody>
+          <a:bodyPr/>
+          <a:lstStyle>
+            <a:lvl1pPr>
+              <a:defRPr sz="2000">
+                <a:solidFill>
+                  <a:srgbClr val="FFFFFF"/>
+                </a:solidFill>
+                <a:latin typeface="Calibri"/>
+                <a:ea typeface="Calibri"/>
+                <a:cs typeface="Calibri"/>
+              </a:defRPr>
+            </a:lvl1pPr>
+          </a:lstStyle>
+          <a:p>
+            <a:pPr algn="ctr"/>
+            <a:fld id="{F7021451-1387-4CA6-816F-3879F97B5CBC}" type="slidenum">
+              <a:rPr b="1" lang="en-US"/>
+              <a:t>50</a:t>
+            </a:fld>
+            <a:endParaRPr lang="en-US"/>
+          </a:p>
+        </p:txBody>
+      </p:sp>
+    </p:spTree>
+  </p:cSld>
+  <p:clrMapOvr>
+    <a:masterClrMapping/>
+  </p:clrMapOvr>
+</p:sld>
+</file>
+
+<file path=ppt/slides/slide51.xml><?xml version="1.0" encoding="utf-8"?>
+<p:sld xmlns:a="http://schemas.openxmlformats.org/drawingml/2006/main" xmlns:r="http://schemas.openxmlformats.org/officeDocument/2006/relationships" xmlns:p="http://schemas.openxmlformats.org/presentationml/2006/main">
+  <p:cSld name="Slide 51">
+    <p:spTree>
+      <p:nvGrpSpPr>
+        <p:cNvPr id="1" name=""/>
+        <p:cNvGrpSpPr/>
+        <p:nvPr/>
+      </p:nvGrpSpPr>
+      <p:grpSpPr>
+        <a:xfrm>
+          <a:off x="0" y="0"/>
+          <a:ext cx="0" cy="0"/>
+          <a:chOff x="0" y="0"/>
+          <a:chExt cx="0" cy="0"/>
+        </a:xfrm>
+      </p:grpSpPr>
+      <p:sp>
+        <p:nvSpPr>
+          <p:cNvPr id="2" name="Text 0"/>
+          <p:cNvSpPr/>
+          <p:nvPr/>
+        </p:nvSpPr>
+        <p:spPr>
+          <a:xfrm>
+            <a:off x="457200" y="713232"/>
+            <a:ext cx="11368735" cy="274320"/>
+          </a:xfrm>
+          <a:prstGeom prst="rect">
+            <a:avLst/>
+          </a:prstGeom>
+          <a:noFill/>
+          <a:ln/>
+        </p:spPr>
+        <p:txBody>
+          <a:bodyPr wrap="square" lIns="0" tIns="0" rIns="0" bIns="0" rtlCol="0" anchor="ctr"/>
+          <a:lstStyle/>
+          <a:p>
+            <a:pPr algn="r" indent="0" marL="0">
+              <a:buNone/>
+            </a:pPr>
+            <a:r>
+              <a:rPr lang="en-US" sz="1400" b="1" dirty="0">
+                <a:solidFill>
+                  <a:srgbClr val="1C3F6E"/>
+                </a:solidFill>
+                <a:latin typeface="Calibri" pitchFamily="34" charset="0"/>
+                <a:ea typeface="Calibri" pitchFamily="34" charset="-122"/>
+                <a:cs typeface="Calibri" pitchFamily="34" charset="-120"/>
+              </a:rPr>
               <a:t>BILINGUAL GAME</a:t>
             </a:r>
             <a:endParaRPr lang="en-US" sz="1400" dirty="0"/>
@@ -17389,7 +18412,7 @@
       </p:sp>
       <p:graphicFrame>
         <p:nvGraphicFramePr>
-          <p:cNvPr id="50" name="Table 0"/>
+          <p:cNvPr id="52" name="Table 0"/>
           <p:cNvGraphicFramePr>
             <a:graphicFrameLocks noGrp="1"/>
           </p:cNvGraphicFramePr>
@@ -18701,7 +19724,7 @@
             <a:pPr algn="ctr"/>
             <a:fld id="{F7021451-1387-4CA6-816F-3879F97B5CBC}" type="slidenum">
               <a:rPr b="1" lang="en-US"/>
-              <a:t>49</a:t>
+              <a:t>51</a:t>
             </a:fld>
             <a:endParaRPr lang="en-US"/>
           </a:p>
@@ -18715,9 +19738,9 @@
 </p:sld>
 </file>
 
-<file path=ppt/slides/slide5.xml><?xml version="1.0" encoding="utf-8"?>
+<file path=ppt/slides/slide52.xml><?xml version="1.0" encoding="utf-8"?>
 <p:sld xmlns:a="http://schemas.openxmlformats.org/drawingml/2006/main" xmlns:r="http://schemas.openxmlformats.org/officeDocument/2006/relationships" xmlns:p="http://schemas.openxmlformats.org/presentationml/2006/main">
-  <p:cSld name="Slide 5">
+  <p:cSld name="Slide 52">
     <p:spTree>
       <p:nvGrpSpPr>
         <p:cNvPr id="1" name=""/>
@@ -18765,225 +19788,6 @@
                 <a:ea typeface="Calibri" pitchFamily="34" charset="-122"/>
                 <a:cs typeface="Calibri" pitchFamily="34" charset="-120"/>
               </a:rPr>
-              <a:t>HOMEWORK CORRECTION</a:t>
-            </a:r>
-            <a:endParaRPr lang="en-US" sz="1400" dirty="0"/>
-          </a:p>
-        </p:txBody>
-      </p:sp>
-      <p:pic>
-        <p:nvPicPr>
-          <p:cNvPr id="3" name="Image 0" descr="/home/claude/f4/img/minesec_sheet.png">    </p:cNvPr>
-          <p:cNvPicPr>
-            <a:picLocks noChangeAspect="1"/>
-          </p:cNvPicPr>
-          <p:nvPr/>
-        </p:nvPicPr>
-        <p:blipFill>
-          <a:blip r:embed="rId1"/>
-          <a:stretch>
-            <a:fillRect/>
-          </a:stretch>
-        </p:blipFill>
-        <p:spPr>
-          <a:xfrm>
-            <a:off x="0" y="658368"/>
-            <a:ext cx="5120640" cy="5833872"/>
-          </a:xfrm>
-          <a:prstGeom prst="rect">
-            <a:avLst/>
-          </a:prstGeom>
-        </p:spPr>
-      </p:pic>
-      <p:sp>
-        <p:nvSpPr>
-          <p:cNvPr id="4" name="Text 1"/>
-          <p:cNvSpPr/>
-          <p:nvPr/>
-        </p:nvSpPr>
-        <p:spPr>
-          <a:xfrm>
-            <a:off x="5349240" y="1005840"/>
-            <a:ext cx="6522415" cy="731520"/>
-          </a:xfrm>
-          <a:prstGeom prst="rect">
-            <a:avLst/>
-          </a:prstGeom>
-          <a:noFill/>
-          <a:ln/>
-        </p:spPr>
-        <p:txBody>
-          <a:bodyPr wrap="square" lIns="0" tIns="0" rIns="0" bIns="0" rtlCol="0" anchor="ctr">
-            <a:normAutofit/>
-          </a:bodyPr>
-          <a:lstStyle/>
-          <a:p>
-            <a:pPr algn="ctr" indent="0" marL="0">
-              <a:buNone/>
-            </a:pPr>
-            <a:r>
-              <a:rPr lang="en-US" sz="3600" b="1" dirty="0">
-                <a:solidFill>
-                  <a:srgbClr val="990011"/>
-                </a:solidFill>
-                <a:latin typeface="Times New Roman" pitchFamily="34" charset="0"/>
-                <a:ea typeface="Times New Roman" pitchFamily="34" charset="-122"/>
-                <a:cs typeface="Times New Roman" pitchFamily="34" charset="-120"/>
-              </a:rPr>
-              <a:t>Correction of the Homework (continued)</a:t>
-            </a:r>
-            <a:endParaRPr lang="en-US" sz="3600" dirty="0"/>
-          </a:p>
-        </p:txBody>
-      </p:sp>
-      <p:sp>
-        <p:nvSpPr>
-          <p:cNvPr id="5" name="Text 2"/>
-          <p:cNvSpPr/>
-          <p:nvPr/>
-        </p:nvSpPr>
-        <p:spPr>
-          <a:xfrm>
-            <a:off x="5349240" y="1783080"/>
-            <a:ext cx="6522415" cy="4663440"/>
-          </a:xfrm>
-          <a:prstGeom prst="rect">
-            <a:avLst/>
-          </a:prstGeom>
-          <a:noFill/>
-          <a:ln/>
-        </p:spPr>
-        <p:txBody>
-          <a:bodyPr wrap="square" lIns="0" tIns="0" rIns="0" bIns="0" rtlCol="0" anchor="t"/>
-          <a:lstStyle/>
-          <a:p>
-            <a:pPr algn="l" indent="0" marL="0">
-              <a:spcAft>
-                <a:spcPts val="800"/>
-              </a:spcAft>
-              <a:buNone/>
-            </a:pPr>
-            <a:r>
-              <a:rPr lang="en-US" sz="4000" dirty="0">
-                <a:solidFill>
-                  <a:srgbClr val="111111"/>
-                </a:solidFill>
-                <a:latin typeface="Times New Roman" pitchFamily="34" charset="0"/>
-                <a:ea typeface="Times New Roman" pitchFamily="34" charset="-122"/>
-                <a:cs typeface="Times New Roman" pitchFamily="34" charset="-120"/>
-              </a:rPr>
-              <a:t>Look at the trees and grass around your home. Which trees keep their leaves in the dry season, and which lose them? Is the grass green or dry now? Write your observations.</a:t>
-            </a:r>
-            <a:endParaRPr lang="en-US" sz="4000" dirty="0"/>
-          </a:p>
-        </p:txBody>
-      </p:sp>
-      <p:sp>
-        <p:nvSpPr>
-          <p:cNvPr id="25" name="Slide Number Placeholder 0"/>
-          <p:cNvSpPr>
-            <a:spLocks noGrp="1"/>
-          </p:cNvSpPr>
-          <p:nvPr>
-            <p:ph type="sldNum" sz="quarter" idx="4294967295"/>
-          </p:nvPr>
-        </p:nvSpPr>
-        <p:spPr>
-          <a:xfrm>
-            <a:off x="27432" y="91440"/>
-            <a:ext cx="585216" cy="475488"/>
-          </a:xfrm>
-          <a:prstGeom prst="rect">
-            <a:avLst/>
-          </a:prstGeom>
-          <a:extLst>
-            <a:ext uri="{C572A759-6A51-4108-AA02-DFA0A04FC94B}">
-              <ma14:wrappingTextBoxFlag xmlns:ma14="http://schemas.microsoft.com/office/mac/drawingml/2011/main" val="0"/>
-            </a:ext>
-          </a:extLst>
-        </p:spPr>
-        <p:txBody>
-          <a:bodyPr/>
-          <a:lstStyle>
-            <a:lvl1pPr>
-              <a:defRPr sz="2000">
-                <a:solidFill>
-                  <a:srgbClr val="FFFFFF"/>
-                </a:solidFill>
-                <a:latin typeface="Calibri"/>
-                <a:ea typeface="Calibri"/>
-                <a:cs typeface="Calibri"/>
-              </a:defRPr>
-            </a:lvl1pPr>
-          </a:lstStyle>
-          <a:p>
-            <a:pPr algn="ctr"/>
-            <a:fld id="{F7021451-1387-4CA6-816F-3879F97B5CBC}" type="slidenum">
-              <a:rPr b="1" lang="en-US"/>
-              <a:t>5</a:t>
-            </a:fld>
-            <a:endParaRPr lang="en-US"/>
-          </a:p>
-        </p:txBody>
-      </p:sp>
-    </p:spTree>
-  </p:cSld>
-  <p:clrMapOvr>
-    <a:masterClrMapping/>
-  </p:clrMapOvr>
-</p:sld>
-</file>
-
-<file path=ppt/slides/slide50.xml><?xml version="1.0" encoding="utf-8"?>
-<p:sld xmlns:a="http://schemas.openxmlformats.org/drawingml/2006/main" xmlns:r="http://schemas.openxmlformats.org/officeDocument/2006/relationships" xmlns:p="http://schemas.openxmlformats.org/presentationml/2006/main">
-  <p:cSld name="Slide 50">
-    <p:spTree>
-      <p:nvGrpSpPr>
-        <p:cNvPr id="1" name=""/>
-        <p:cNvGrpSpPr/>
-        <p:nvPr/>
-      </p:nvGrpSpPr>
-      <p:grpSpPr>
-        <a:xfrm>
-          <a:off x="0" y="0"/>
-          <a:ext cx="0" cy="0"/>
-          <a:chOff x="0" y="0"/>
-          <a:chExt cx="0" cy="0"/>
-        </a:xfrm>
-      </p:grpSpPr>
-      <p:sp>
-        <p:nvSpPr>
-          <p:cNvPr id="2" name="Text 0"/>
-          <p:cNvSpPr/>
-          <p:nvPr/>
-        </p:nvSpPr>
-        <p:spPr>
-          <a:xfrm>
-            <a:off x="457200" y="713232"/>
-            <a:ext cx="11368735" cy="274320"/>
-          </a:xfrm>
-          <a:prstGeom prst="rect">
-            <a:avLst/>
-          </a:prstGeom>
-          <a:noFill/>
-          <a:ln/>
-        </p:spPr>
-        <p:txBody>
-          <a:bodyPr wrap="square" lIns="0" tIns="0" rIns="0" bIns="0" rtlCol="0" anchor="ctr"/>
-          <a:lstStyle/>
-          <a:p>
-            <a:pPr algn="r" indent="0" marL="0">
-              <a:buNone/>
-            </a:pPr>
-            <a:r>
-              <a:rPr lang="en-US" sz="1400" b="1" dirty="0">
-                <a:solidFill>
-                  <a:srgbClr val="1C3F6E"/>
-                </a:solidFill>
-                <a:latin typeface="Calibri" pitchFamily="34" charset="0"/>
-                <a:ea typeface="Calibri" pitchFamily="34" charset="-122"/>
-                <a:cs typeface="Calibri" pitchFamily="34" charset="-120"/>
-              </a:rPr>
               <a:t>LOGBOOK</a:t>
             </a:r>
             <a:endParaRPr lang="en-US" sz="1400" dirty="0"/>
@@ -19031,7 +19835,7 @@
       </p:sp>
       <p:graphicFrame>
         <p:nvGraphicFramePr>
-          <p:cNvPr id="51" name="Table 0"/>
+          <p:cNvPr id="53" name="Table 0"/>
           <p:cNvGraphicFramePr>
             <a:graphicFrameLocks noGrp="1"/>
           </p:cNvGraphicFramePr>
@@ -19653,7 +20457,7 @@
             <a:pPr algn="ctr"/>
             <a:fld id="{F7021451-1387-4CA6-816F-3879F97B5CBC}" type="slidenum">
               <a:rPr b="1" lang="en-US"/>
-              <a:t>50</a:t>
+              <a:t>52</a:t>
             </a:fld>
             <a:endParaRPr lang="en-US"/>
           </a:p>
@@ -19667,9 +20471,9 @@
 </p:sld>
 </file>
 
-<file path=ppt/slides/slide51.xml><?xml version="1.0" encoding="utf-8"?>
+<file path=ppt/slides/slide53.xml><?xml version="1.0" encoding="utf-8"?>
 <p:sld xmlns:a="http://schemas.openxmlformats.org/drawingml/2006/main" xmlns:r="http://schemas.openxmlformats.org/officeDocument/2006/relationships" xmlns:p="http://schemas.openxmlformats.org/presentationml/2006/main">
-  <p:cSld name="Slide 51">
+  <p:cSld name="Slide 53">
     <p:spTree>
       <p:nvGrpSpPr>
         <p:cNvPr id="1" name=""/>
@@ -19764,7 +20568,7 @@
       </p:sp>
       <p:graphicFrame>
         <p:nvGraphicFramePr>
-          <p:cNvPr id="52" name="Table 0"/>
+          <p:cNvPr id="54" name="Table 0"/>
           <p:cNvGraphicFramePr>
             <a:graphicFrameLocks noGrp="1"/>
           </p:cNvGraphicFramePr>
@@ -20524,7 +21328,7 @@
             <a:pPr algn="ctr"/>
             <a:fld id="{F7021451-1387-4CA6-816F-3879F97B5CBC}" type="slidenum">
               <a:rPr b="1" lang="en-US"/>
-              <a:t>51</a:t>
+              <a:t>53</a:t>
             </a:fld>
             <a:endParaRPr lang="en-US"/>
           </a:p>
@@ -20538,9 +21342,9 @@
 </p:sld>
 </file>
 
-<file path=ppt/slides/slide52.xml><?xml version="1.0" encoding="utf-8"?>
+<file path=ppt/slides/slide54.xml><?xml version="1.0" encoding="utf-8"?>
 <p:sld xmlns:a="http://schemas.openxmlformats.org/drawingml/2006/main" xmlns:r="http://schemas.openxmlformats.org/officeDocument/2006/relationships" xmlns:p="http://schemas.openxmlformats.org/presentationml/2006/main">
-  <p:cSld name="Slide 52">
+  <p:cSld name="Slide 54">
     <p:spTree>
       <p:nvGrpSpPr>
         <p:cNvPr id="1" name=""/>
@@ -20611,7 +21415,7 @@
         <p:spPr>
           <a:xfrm>
             <a:off x="0" y="658368"/>
-            <a:ext cx="2468880" cy="5833872"/>
+            <a:ext cx="3840480" cy="5833872"/>
           </a:xfrm>
           <a:prstGeom prst="rect">
             <a:avLst/>
@@ -20626,8 +21430,8 @@
         </p:nvSpPr>
         <p:spPr>
           <a:xfrm>
-            <a:off x="2697480" y="1005840"/>
-            <a:ext cx="9174175" cy="731520"/>
+            <a:off x="4069080" y="1005840"/>
+            <a:ext cx="7802575" cy="731520"/>
           </a:xfrm>
           <a:prstGeom prst="rect">
             <a:avLst/>
@@ -20667,8 +21471,8 @@
         </p:nvSpPr>
         <p:spPr>
           <a:xfrm>
-            <a:off x="2697480" y="1783080"/>
-            <a:ext cx="9174175" cy="4663440"/>
+            <a:off x="4069080" y="1783080"/>
+            <a:ext cx="7802575" cy="4663440"/>
           </a:xfrm>
           <a:prstGeom prst="rect">
             <a:avLst/>
@@ -20717,7 +21521,7 @@
                 <a:ea typeface="Calibri" pitchFamily="34" charset="-122"/>
                 <a:cs typeface="Calibri" pitchFamily="34" charset="-120"/>
               </a:rPr>
-              <a:t>Without the projector (Activity 1): ask learners where they have seen a baobab.</a:t>
+              <a:t>Without the projector (Activity 1): describe a baobab.</a:t>
             </a:r>
             <a:endParaRPr lang="en-US" sz="2000" dirty="0"/>
           </a:p>
@@ -20738,7 +21542,7 @@
                 <a:ea typeface="Calibri" pitchFamily="34" charset="-122"/>
                 <a:cs typeface="Calibri" pitchFamily="34" charset="-120"/>
               </a:rPr>
-              <a:t>Without the projector (Activity 2): ask learners which trees near their home lose their leaves.</a:t>
+              <a:t>Without the projector (Activity 2): look at the trees of the school.</a:t>
             </a:r>
             <a:endParaRPr lang="en-US" sz="2000" dirty="0"/>
           </a:p>
@@ -20759,7 +21563,7 @@
                 <a:ea typeface="Calibri" pitchFamily="34" charset="-122"/>
                 <a:cs typeface="Calibri" pitchFamily="34" charset="-120"/>
               </a:rPr>
-              <a:t>Without the projector (Activity 3): bring a piece of shea bark or shea butter to class.</a:t>
+              <a:t>Without the projector (Activity 3): touch the bark of a tree.</a:t>
             </a:r>
             <a:endParaRPr lang="en-US" sz="2000" dirty="0"/>
           </a:p>
@@ -20780,7 +21584,7 @@
                 <a:ea typeface="Calibri" pitchFamily="34" charset="-122"/>
                 <a:cs typeface="Calibri" pitchFamily="34" charset="-120"/>
               </a:rPr>
-              <a:t>Without the projector (Activity 4): ask learners the colour of the soil of the school yard.</a:t>
+              <a:t>Without the projector (Activity 4): show a laterite road.</a:t>
             </a:r>
             <a:endParaRPr lang="en-US" sz="2000" dirty="0"/>
           </a:p>
@@ -20801,7 +21605,7 @@
                 <a:ea typeface="Calibri" pitchFamily="34" charset="-122"/>
                 <a:cs typeface="Calibri" pitchFamily="34" charset="-120"/>
               </a:rPr>
-              <a:t>Without the projector (Activity 5): describe the black soils (karal) of the Far North.</a:t>
+              <a:t>Without the projector (Activity 5): name crops grown on black soils.</a:t>
             </a:r>
             <a:endParaRPr lang="en-US" sz="2000" dirty="0"/>
           </a:p>
@@ -20849,7 +21653,7 @@
             <a:pPr algn="ctr"/>
             <a:fld id="{F7021451-1387-4CA6-816F-3879F97B5CBC}" type="slidenum">
               <a:rPr b="1" lang="en-US"/>
-              <a:t>52</a:t>
+              <a:t>54</a:t>
             </a:fld>
             <a:endParaRPr lang="en-US"/>
           </a:p>
@@ -20863,9 +21667,9 @@
 </p:sld>
 </file>
 
-<file path=ppt/slides/slide53.xml><?xml version="1.0" encoding="utf-8"?>
+<file path=ppt/slides/slide55.xml><?xml version="1.0" encoding="utf-8"?>
 <p:sld xmlns:a="http://schemas.openxmlformats.org/drawingml/2006/main" xmlns:r="http://schemas.openxmlformats.org/officeDocument/2006/relationships" xmlns:p="http://schemas.openxmlformats.org/presentationml/2006/main">
-  <p:cSld name="Slide 53">
+  <p:cSld name="Slide 55">
     <p:spTree>
       <p:nvGrpSpPr>
         <p:cNvPr id="1" name=""/>
@@ -21151,6 +21955,205 @@
             </a:r>
             <a:endParaRPr lang="en-US" sz="1800" dirty="0"/>
           </a:p>
+        </p:txBody>
+      </p:sp>
+      <p:sp>
+        <p:nvSpPr>
+          <p:cNvPr id="25" name="Slide Number Placeholder 0"/>
+          <p:cNvSpPr>
+            <a:spLocks noGrp="1"/>
+          </p:cNvSpPr>
+          <p:nvPr>
+            <p:ph type="sldNum" sz="quarter" idx="4294967295"/>
+          </p:nvPr>
+        </p:nvSpPr>
+        <p:spPr>
+          <a:xfrm>
+            <a:off x="27432" y="91440"/>
+            <a:ext cx="585216" cy="475488"/>
+          </a:xfrm>
+          <a:prstGeom prst="rect">
+            <a:avLst/>
+          </a:prstGeom>
+          <a:extLst>
+            <a:ext uri="{C572A759-6A51-4108-AA02-DFA0A04FC94B}">
+              <ma14:wrappingTextBoxFlag xmlns:ma14="http://schemas.microsoft.com/office/mac/drawingml/2011/main" val="0"/>
+            </a:ext>
+          </a:extLst>
+        </p:spPr>
+        <p:txBody>
+          <a:bodyPr/>
+          <a:lstStyle>
+            <a:lvl1pPr>
+              <a:defRPr sz="2000">
+                <a:solidFill>
+                  <a:srgbClr val="FFFFFF"/>
+                </a:solidFill>
+                <a:latin typeface="Calibri"/>
+                <a:ea typeface="Calibri"/>
+                <a:cs typeface="Calibri"/>
+              </a:defRPr>
+            </a:lvl1pPr>
+          </a:lstStyle>
+          <a:p>
+            <a:pPr algn="ctr"/>
+            <a:fld id="{F7021451-1387-4CA6-816F-3879F97B5CBC}" type="slidenum">
+              <a:rPr b="1" lang="en-US"/>
+              <a:t>55</a:t>
+            </a:fld>
+            <a:endParaRPr lang="en-US"/>
+          </a:p>
+        </p:txBody>
+      </p:sp>
+    </p:spTree>
+  </p:cSld>
+  <p:clrMapOvr>
+    <a:masterClrMapping/>
+  </p:clrMapOvr>
+</p:sld>
+</file>
+
+<file path=ppt/slides/slide56.xml><?xml version="1.0" encoding="utf-8"?>
+<p:sld xmlns:a="http://schemas.openxmlformats.org/drawingml/2006/main" xmlns:r="http://schemas.openxmlformats.org/officeDocument/2006/relationships" xmlns:p="http://schemas.openxmlformats.org/presentationml/2006/main">
+  <p:cSld name="Slide 56">
+    <p:spTree>
+      <p:nvGrpSpPr>
+        <p:cNvPr id="1" name=""/>
+        <p:cNvGrpSpPr/>
+        <p:nvPr/>
+      </p:nvGrpSpPr>
+      <p:grpSpPr>
+        <a:xfrm>
+          <a:off x="0" y="0"/>
+          <a:ext cx="0" cy="0"/>
+          <a:chOff x="0" y="0"/>
+          <a:chExt cx="0" cy="0"/>
+        </a:xfrm>
+      </p:grpSpPr>
+      <p:sp>
+        <p:nvSpPr>
+          <p:cNvPr id="2" name="Text 0"/>
+          <p:cNvSpPr/>
+          <p:nvPr/>
+        </p:nvSpPr>
+        <p:spPr>
+          <a:xfrm>
+            <a:off x="457200" y="713232"/>
+            <a:ext cx="11368735" cy="274320"/>
+          </a:xfrm>
+          <a:prstGeom prst="rect">
+            <a:avLst/>
+          </a:prstGeom>
+          <a:noFill/>
+          <a:ln/>
+        </p:spPr>
+        <p:txBody>
+          <a:bodyPr wrap="square" lIns="0" tIns="0" rIns="0" bIns="0" rtlCol="0" anchor="ctr"/>
+          <a:lstStyle/>
+          <a:p>
+            <a:pPr algn="r" indent="0" marL="0">
+              <a:buNone/>
+            </a:pPr>
+            <a:r>
+              <a:rPr lang="en-US" sz="1400" b="1" dirty="0">
+                <a:solidFill>
+                  <a:srgbClr val="1C3F6E"/>
+                </a:solidFill>
+                <a:latin typeface="Calibri" pitchFamily="34" charset="0"/>
+                <a:ea typeface="Calibri" pitchFamily="34" charset="-122"/>
+                <a:cs typeface="Calibri" pitchFamily="34" charset="-120"/>
+              </a:rPr>
+              <a:t>REFERENCES</a:t>
+            </a:r>
+            <a:endParaRPr lang="en-US" sz="1400" dirty="0"/>
+          </a:p>
+        </p:txBody>
+      </p:sp>
+      <p:pic>
+        <p:nvPicPr>
+          <p:cNvPr id="3" name="Image 0" descr="/home/claude/f4/img/minesec_sheet.png">    </p:cNvPr>
+          <p:cNvPicPr>
+            <a:picLocks noChangeAspect="1"/>
+          </p:cNvPicPr>
+          <p:nvPr/>
+        </p:nvPicPr>
+        <p:blipFill>
+          <a:blip r:embed="rId1"/>
+          <a:stretch>
+            <a:fillRect/>
+          </a:stretch>
+        </p:blipFill>
+        <p:spPr>
+          <a:xfrm>
+            <a:off x="0" y="658368"/>
+            <a:ext cx="5120640" cy="5833872"/>
+          </a:xfrm>
+          <a:prstGeom prst="rect">
+            <a:avLst/>
+          </a:prstGeom>
+        </p:spPr>
+      </p:pic>
+      <p:sp>
+        <p:nvSpPr>
+          <p:cNvPr id="4" name="Text 1"/>
+          <p:cNvSpPr/>
+          <p:nvPr/>
+        </p:nvSpPr>
+        <p:spPr>
+          <a:xfrm>
+            <a:off x="5349240" y="1005840"/>
+            <a:ext cx="6522415" cy="731520"/>
+          </a:xfrm>
+          <a:prstGeom prst="rect">
+            <a:avLst/>
+          </a:prstGeom>
+          <a:noFill/>
+          <a:ln/>
+        </p:spPr>
+        <p:txBody>
+          <a:bodyPr wrap="square" lIns="0" tIns="0" rIns="0" bIns="0" rtlCol="0" anchor="ctr">
+            <a:normAutofit/>
+          </a:bodyPr>
+          <a:lstStyle/>
+          <a:p>
+            <a:pPr algn="ctr" indent="0" marL="0">
+              <a:buNone/>
+            </a:pPr>
+            <a:r>
+              <a:rPr lang="en-US" sz="3600" b="1" dirty="0">
+                <a:solidFill>
+                  <a:srgbClr val="990011"/>
+                </a:solidFill>
+                <a:latin typeface="Times New Roman" pitchFamily="34" charset="0"/>
+                <a:ea typeface="Times New Roman" pitchFamily="34" charset="-122"/>
+                <a:cs typeface="Times New Roman" pitchFamily="34" charset="-120"/>
+              </a:rPr>
+              <a:t>References (continued)</a:t>
+            </a:r>
+            <a:endParaRPr lang="en-US" sz="3600" dirty="0"/>
+          </a:p>
+        </p:txBody>
+      </p:sp>
+      <p:sp>
+        <p:nvSpPr>
+          <p:cNvPr id="5" name="Text 2"/>
+          <p:cNvSpPr/>
+          <p:nvPr/>
+        </p:nvSpPr>
+        <p:spPr>
+          <a:xfrm>
+            <a:off x="5349240" y="1783080"/>
+            <a:ext cx="6522415" cy="4663440"/>
+          </a:xfrm>
+          <a:prstGeom prst="rect">
+            <a:avLst/>
+          </a:prstGeom>
+          <a:noFill/>
+          <a:ln/>
+        </p:spPr>
+        <p:txBody>
+          <a:bodyPr wrap="square" lIns="0" tIns="0" rIns="0" bIns="0" rtlCol="0" anchor="t"/>
+          <a:lstStyle/>
           <a:p>
             <a:pPr algn="l" marL="342900" indent="-342900">
               <a:spcAft>
@@ -21168,6 +22171,27 @@
                 <a:ea typeface="Calibri" pitchFamily="34" charset="-122"/>
                 <a:cs typeface="Calibri" pitchFamily="34" charset="-120"/>
               </a:rPr>
+              <a:t>Photo, board summary (Tall grass): “Blue Wildebeest in the Lowveld” by Martin_Heigan, CC BY-NC-ND 2.0, via Flickr (https://www.flickr.com/photos/97303475@N00/2089079933)</a:t>
+            </a:r>
+            <a:endParaRPr lang="en-US" sz="1800" dirty="0"/>
+          </a:p>
+          <a:p>
+            <a:pPr algn="l" marL="342900" indent="-342900">
+              <a:spcAft>
+                <a:spcPts val="800"/>
+              </a:spcAft>
+              <a:buSzPct val="100000"/>
+              <a:buChar char="•"/>
+            </a:pPr>
+            <a:r>
+              <a:rPr lang="en-US" sz="1800" dirty="0">
+                <a:solidFill>
+                  <a:srgbClr val="111111"/>
+                </a:solidFill>
+                <a:latin typeface="Calibri" pitchFamily="34" charset="0"/>
+                <a:ea typeface="Calibri" pitchFamily="34" charset="-122"/>
+                <a:cs typeface="Calibri" pitchFamily="34" charset="-120"/>
+              </a:rPr>
               <a:t>Diagrams and animations: drawn for this lesson (Geography Department).</a:t>
             </a:r>
             <a:endParaRPr lang="en-US" sz="1800" dirty="0"/>
@@ -21216,7 +22240,7 @@
             <a:pPr algn="ctr"/>
             <a:fld id="{F7021451-1387-4CA6-816F-3879F97B5CBC}" type="slidenum">
               <a:rPr b="1" lang="en-US"/>
-              <a:t>53</a:t>
+              <a:t>56</a:t>
             </a:fld>
             <a:endParaRPr lang="en-US"/>
           </a:p>

--- a/lecons/F2T/07_S01_L2_P2_Tropical_Grassland_Soils_Vegetation.pptx
+++ b/lecons/F2T/07_S01_L2_P2_Tropical_Grassland_Soils_Vegetation.pptx
@@ -60,10 +60,9 @@
     <p:sldId id="308" r:id="rId54"/>
     <p:sldId id="309" r:id="rId55"/>
     <p:sldId id="310" r:id="rId56"/>
-    <p:sldId id="311" r:id="rId57"/>
   </p:sldIdLst>
   <p:notesMasterIdLst>
-    <p:notesMasterId r:id="rId58"/>
+    <p:notesMasterId r:id="rId57"/>
   </p:notesMasterIdLst>
   <p:sldSz cx="12192000" cy="6858000"/>
   <p:notesSz cx="6858000" cy="12192000"/>
@@ -645,7 +644,7 @@
           <a:p>
             <a:r>
               <a:rPr lang="en-US" dirty="0"/>
-              <a:t>Let us first remember what you already know. The Tropical Grassland lies between 5° and 15° north and south of the Equator. It has a wet season and a dry season, with 500 to 1,500 mm of rain. Garoua has a dry season from November to March. Keep this in mind, because we shall build on it today.</a:t>
+              <a:t>Listen carefully to this situation from real life. In January, Hawa travels from Garoua to Ngaoundéré. The grass is dry and yellow, and many trees have no leaves, but the shea tree still has leaves and its bark is not burnt. Hawa asks: "How do the plants of the savanna survive the long dry season and the bush fires?" Think about it, because I am going to ask you some questions.</a:t>
             </a:r>
             <a:endParaRPr lang="en-US" dirty="0"/>
           </a:p>
@@ -733,7 +732,7 @@
           <a:p>
             <a:r>
               <a:rPr lang="en-US" dirty="0"/>
-              <a:t>Listen carefully to this situation from real life. In January, Hawa travels from Garoua to Ngaoundéré. The grass is dry and yellow, and many trees have no leaves, but the shea tree still has leaves and its bark is not burnt. Hawa asks: "How do the plants of the savanna survive the long dry season and the bush fires?" Think about it, because I am going to ask you some questions.</a:t>
+              <a:t>Question 1: What is the problem in the situation? Think for a moment, then raise your hand to answer.</a:t>
             </a:r>
             <a:endParaRPr lang="en-US" dirty="0"/>
           </a:p>
@@ -821,7 +820,7 @@
           <a:p>
             <a:r>
               <a:rPr lang="en-US" dirty="0"/>
-              <a:t>Question 1: What is the problem in the situation? Think for a moment, then raise your hand to answer.</a:t>
+              <a:t>Good. Hawa does not know how savanna plants survive the dry season and fires.</a:t>
             </a:r>
             <a:endParaRPr lang="en-US" dirty="0"/>
           </a:p>
@@ -909,7 +908,7 @@
           <a:p>
             <a:r>
               <a:rPr lang="en-US" dirty="0"/>
-              <a:t>Good. Hawa does not know how savanna plants survive the dry season and fires.</a:t>
+              <a:t>Question 2: What colour is the grass in January? Think for a moment, then raise your hand to answer.</a:t>
             </a:r>
             <a:endParaRPr lang="en-US" dirty="0"/>
           </a:p>
@@ -997,7 +996,7 @@
           <a:p>
             <a:r>
               <a:rPr lang="en-US" dirty="0"/>
-              <a:t>Question 2: What colour is the grass in January? Think for a moment, then raise your hand to answer.</a:t>
+              <a:t>Good. Yellow (dry).</a:t>
             </a:r>
             <a:endParaRPr lang="en-US" dirty="0"/>
           </a:p>
@@ -1085,7 +1084,7 @@
           <a:p>
             <a:r>
               <a:rPr lang="en-US" dirty="0"/>
-              <a:t>Good. Yellow (dry).</a:t>
+              <a:t>Question 3: Which tree still has leaves? Think for a moment, then raise your hand to answer.</a:t>
             </a:r>
             <a:endParaRPr lang="en-US" dirty="0"/>
           </a:p>
@@ -1173,7 +1172,7 @@
           <a:p>
             <a:r>
               <a:rPr lang="en-US" dirty="0"/>
-              <a:t>Question 3: Which tree still has leaves? Think for a moment, then raise your hand to answer.</a:t>
+              <a:t>Good. The shea tree.</a:t>
             </a:r>
             <a:endParaRPr lang="en-US" dirty="0"/>
           </a:p>
@@ -1261,7 +1260,7 @@
           <a:p>
             <a:r>
               <a:rPr lang="en-US" dirty="0"/>
-              <a:t>Good. The shea tree.</a:t>
+              <a:t>From this situation, the action we are working towards in this lesson is the following: avoid bush fires, which destroy plants and the humus of the soil.</a:t>
             </a:r>
             <a:endParaRPr lang="en-US" dirty="0"/>
           </a:p>
@@ -1349,7 +1348,7 @@
           <a:p>
             <a:r>
               <a:rPr lang="en-US" dirty="0"/>
-              <a:t>From this situation, the action we are working towards in this lesson is the following: avoid bush fires, which destroy plants and the humus of the soil.</a:t>
+              <a:t>Why is this lesson important for you? This lesson helps us to know the plants and soils around us.</a:t>
             </a:r>
             <a:endParaRPr lang="en-US" dirty="0"/>
           </a:p>
@@ -1437,7 +1436,7 @@
           <a:p>
             <a:r>
               <a:rPr lang="en-US" dirty="0"/>
-              <a:t>Why is this lesson important for you? This lesson helps us to know the plants and soils around us.</a:t>
+              <a:t>Activity 1. Look carefully at this picture: a baobab. Observe every detail before I ask the question.</a:t>
             </a:r>
             <a:endParaRPr lang="en-US" dirty="0"/>
           </a:p>
@@ -1613,7 +1612,7 @@
           <a:p>
             <a:r>
               <a:rPr lang="en-US" dirty="0"/>
-              <a:t>Activity 1. Look carefully at this picture: a baobab. Observe every detail before I ask the question.</a:t>
+              <a:t>Here is the question for Activity 1: How does the big trunk of the baobab help it in the dry season? Take one minute to think and write your answer in your rough notebook.</a:t>
             </a:r>
             <a:endParaRPr lang="en-US" dirty="0"/>
           </a:p>
@@ -1701,7 +1700,7 @@
           <a:p>
             <a:r>
               <a:rPr lang="en-US" dirty="0"/>
-              <a:t>Here is the question for Activity 1: How does the big trunk of the baobab help it in the dry season? Take one minute to think and write your answer in your rough notebook.</a:t>
+              <a:t>Let us check the answer together. It stores water.</a:t>
             </a:r>
             <a:endParaRPr lang="en-US" dirty="0"/>
           </a:p>
@@ -1789,7 +1788,7 @@
           <a:p>
             <a:r>
               <a:rPr lang="en-US" dirty="0"/>
-              <a:t>Let us check the answer together. It stores water.</a:t>
+              <a:t>Activity 2. Look carefully at this picture: trees without leaves. Observe every detail before I ask the question.</a:t>
             </a:r>
             <a:endParaRPr lang="en-US" dirty="0"/>
           </a:p>
@@ -1877,7 +1876,7 @@
           <a:p>
             <a:r>
               <a:rPr lang="en-US" dirty="0"/>
-              <a:t>Activity 2. Look carefully at this picture: trees without leaves. Observe every detail before I ask the question.</a:t>
+              <a:t>Here is the question for Activity 2: Why do many savanna trees lose their leaves in the dry season? Take one minute to think and write your answer in your rough notebook.</a:t>
             </a:r>
             <a:endParaRPr lang="en-US" dirty="0"/>
           </a:p>
@@ -1965,7 +1964,7 @@
           <a:p>
             <a:r>
               <a:rPr lang="en-US" dirty="0"/>
-              <a:t>Here is the question for Activity 2: Why do many savanna trees lose their leaves in the dry season? Take one minute to think and write your answer in your rough notebook.</a:t>
+              <a:t>Let us check the answer together. To lose less water.</a:t>
             </a:r>
             <a:endParaRPr lang="en-US" dirty="0"/>
           </a:p>
@@ -2053,7 +2052,7 @@
           <a:p>
             <a:r>
               <a:rPr lang="en-US" dirty="0"/>
-              <a:t>Let us check the answer together. To lose less water.</a:t>
+              <a:t>Activity 3. Look carefully at this picture: a shea tree. Observe every detail before I ask the question.</a:t>
             </a:r>
             <a:endParaRPr lang="en-US" dirty="0"/>
           </a:p>
@@ -2141,7 +2140,7 @@
           <a:p>
             <a:r>
               <a:rPr lang="en-US" dirty="0"/>
-              <a:t>Activity 3. Look carefully at this picture: a shea tree. Observe every detail before I ask the question.</a:t>
+              <a:t>Here is the question for Activity 3: How does the thick bark help the shea tree? Take one minute to think and write your answer in your rough notebook.</a:t>
             </a:r>
             <a:endParaRPr lang="en-US" dirty="0"/>
           </a:p>
@@ -2229,7 +2228,7 @@
           <a:p>
             <a:r>
               <a:rPr lang="en-US" dirty="0"/>
-              <a:t>Here is the question for Activity 3: How does the thick bark help the shea tree? Take one minute to think and write your answer in your rough notebook.</a:t>
+              <a:t>Let us check the answer together. It protects the tree from bush fires.</a:t>
             </a:r>
             <a:endParaRPr lang="en-US" dirty="0"/>
           </a:p>
@@ -2317,7 +2316,7 @@
           <a:p>
             <a:r>
               <a:rPr lang="en-US" dirty="0"/>
-              <a:t>Let us check the answer together. It protects the tree from bush fires.</a:t>
+              <a:t>Activity 4. Look carefully at this picture: a red, hard soil. Observe every detail before I ask the question.</a:t>
             </a:r>
             <a:endParaRPr lang="en-US" dirty="0"/>
           </a:p>
@@ -2405,7 +2404,7 @@
           <a:p>
             <a:r>
               <a:rPr lang="en-US" dirty="0"/>
-              <a:t>Activity 4. Look carefully at this picture: a red, hard soil. Observe every detail before I ask the question.</a:t>
+              <a:t>Here is the question for Activity 4: What is this red soil that becomes hard when it dries? Take one minute to think and write your answer in your rough notebook.</a:t>
             </a:r>
             <a:endParaRPr lang="en-US" dirty="0"/>
           </a:p>
@@ -2581,7 +2580,7 @@
           <a:p>
             <a:r>
               <a:rPr lang="en-US" dirty="0"/>
-              <a:t>Here is the question for Activity 4: What is this red soil that becomes hard when it dries? Take one minute to think and write your answer in your rough notebook.</a:t>
+              <a:t>Let us check the answer together. Laterite.</a:t>
             </a:r>
             <a:endParaRPr lang="en-US" dirty="0"/>
           </a:p>
@@ -2669,7 +2668,7 @@
           <a:p>
             <a:r>
               <a:rPr lang="en-US" dirty="0"/>
-              <a:t>Let us check the answer together. Laterite.</a:t>
+              <a:t>Activity 5. Look carefully at this picture: a black soil that cracks. Observe every detail before I ask the question.</a:t>
             </a:r>
             <a:endParaRPr lang="en-US" dirty="0"/>
           </a:p>
@@ -2757,7 +2756,7 @@
           <a:p>
             <a:r>
               <a:rPr lang="en-US" dirty="0"/>
-              <a:t>Activity 5. Look carefully at this picture: a black soil that cracks. Observe every detail before I ask the question.</a:t>
+              <a:t>Here is the question for Activity 5: Why do farmers like black cotton soils? Take one minute to think and write your answer in your rough notebook.</a:t>
             </a:r>
             <a:endParaRPr lang="en-US" dirty="0"/>
           </a:p>
@@ -2845,7 +2844,7 @@
           <a:p>
             <a:r>
               <a:rPr lang="en-US" dirty="0"/>
-              <a:t>Here is the question for Activity 5: Why do farmers like black cotton soils? Take one minute to think and write your answer in your rough notebook.</a:t>
+              <a:t>Let us check the answer together. They are fertile and keep water.</a:t>
             </a:r>
             <a:endParaRPr lang="en-US" dirty="0"/>
           </a:p>
@@ -2933,7 +2932,7 @@
           <a:p>
             <a:r>
               <a:rPr lang="en-US" dirty="0"/>
-              <a:t>Let us check the answer together. They are fertile and keep water.</a:t>
+              <a:t>Now we are going to copy the board summary. Write the title and the headings neatly in your notebooks. I will give you enough time for each slide, so do not rush.</a:t>
             </a:r>
             <a:endParaRPr lang="en-US" dirty="0"/>
           </a:p>
@@ -3021,7 +3020,7 @@
           <a:p>
             <a:r>
               <a:rPr lang="en-US" dirty="0"/>
-              <a:t>Now we are going to copy the board summary. Write the title and the headings neatly in your notebooks. I will give you enough time for each slide, so do not rush.</a:t>
+              <a:t>Let us copy the definitions. The key terms of this lesson are defined as follows. On this slide we have Savanna and Laterite. Write each point on a new line, with the key term first, and explain it in your own words when we revise.</a:t>
             </a:r>
             <a:endParaRPr lang="en-US" dirty="0"/>
           </a:p>
@@ -3109,7 +3108,7 @@
           <a:p>
             <a:r>
               <a:rPr lang="en-US" dirty="0"/>
-              <a:t>Let us copy the definitions. The key terms of this lesson are defined as follows. On this slide we have Savanna and Laterite. Write each point on a new line, with the key term first, and explain it in your own words when we revise.</a:t>
+              <a:t>Let us copy Vegetation. The savanna vegetation has the following characteristics. Copy the point on Tall grass on the left, then draw the diagram on the right: the savanna. Give it a title and label it clearly.</a:t>
             </a:r>
             <a:endParaRPr lang="en-US" dirty="0"/>
           </a:p>
@@ -3197,7 +3196,7 @@
           <a:p>
             <a:r>
               <a:rPr lang="en-US" dirty="0"/>
-              <a:t>Let us copy Vegetation. The savanna vegetation has the following characteristics. Copy the point on Tall grass on the left, then draw the diagram on the right: the savanna. Give it a title and label it clearly.</a:t>
+              <a:t>We continue with Vegetation. On this slide we have Scattered trees and Deciduous trees. Write each point on a new line, with the key term first, and explain it in your own words when we revise.</a:t>
             </a:r>
             <a:endParaRPr lang="en-US" dirty="0"/>
           </a:p>
@@ -3285,7 +3284,7 @@
           <a:p>
             <a:r>
               <a:rPr lang="en-US" dirty="0"/>
-              <a:t>We continue with Vegetation. On this slide we have Scattered trees and Deciduous trees. Write each point on a new line, with the key term first, and explain it in your own words when we revise.</a:t>
+              <a:t>Copy the point on Water storage on the left, then draw the diagram on the right: a baobab. Give it a title and label it clearly.</a:t>
             </a:r>
             <a:endParaRPr lang="en-US" dirty="0"/>
           </a:p>
@@ -3373,7 +3372,7 @@
           <a:p>
             <a:r>
               <a:rPr lang="en-US" dirty="0"/>
-              <a:t>Copy the point on Water storage on the left, then draw the diagram on the right: a baobab. Give it a title and label it clearly.</a:t>
+              <a:t>We continue with Vegetation. On this slide we have Protection. Write each point on a new line, with the key term first, and explain it in your own words when we revise.</a:t>
             </a:r>
             <a:endParaRPr lang="en-US" dirty="0"/>
           </a:p>
@@ -3461,7 +3460,7 @@
           <a:p>
             <a:r>
               <a:rPr lang="en-US" dirty="0"/>
-              <a:t>Take your time to copy this part; we will continue together.</a:t>
+              <a:t>Before we start the new lesson, let us correct the homework I gave you at the end of Lesson 2 (Part 1): The Tropical Grassland Region: Location and Characteristics (Climate). The question was: Name two trees of the savanna. Take out your exercise books.</a:t>
             </a:r>
             <a:endParaRPr lang="en-US" dirty="0"/>
           </a:p>
@@ -3549,7 +3548,7 @@
           <a:p>
             <a:r>
               <a:rPr lang="en-US" dirty="0"/>
-              <a:t>We continue with Vegetation. On this slide we have Protection. Write each point on a new line, with the key term first, and explain it in your own words when we revise.</a:t>
+              <a:t>Let us copy Soils. The savanna soils have the following characteristics. On this slide we have Ferruginous soils. Write each point on a new line, with the key term first, and explain it in your own words when we revise.</a:t>
             </a:r>
             <a:endParaRPr lang="en-US" dirty="0"/>
           </a:p>
@@ -3637,7 +3636,7 @@
           <a:p>
             <a:r>
               <a:rPr lang="en-US" dirty="0"/>
-              <a:t>Let us copy Soils. The savanna soils have the following characteristics. On this slide we have Ferruginous soils. Write each point on a new line, with the key term first, and explain it in your own words when we revise.</a:t>
+              <a:t>Copy the point on Laterite on the left, then draw the diagram on the right: laterite. Give it a title and label it clearly.</a:t>
             </a:r>
             <a:endParaRPr lang="en-US" dirty="0"/>
           </a:p>
@@ -3725,7 +3724,7 @@
           <a:p>
             <a:r>
               <a:rPr lang="en-US" dirty="0"/>
-              <a:t>Copy the point on Laterite on the left, then draw the diagram on the right: laterite. Give it a title and label it clearly.</a:t>
+              <a:t>We continue with Soils. On this slide we have Black cotton soils and Little humus. Write each point on a new line, with the key term first, and explain it in your own words when we revise.</a:t>
             </a:r>
             <a:endParaRPr lang="en-US" dirty="0"/>
           </a:p>
@@ -3813,7 +3812,7 @@
           <a:p>
             <a:r>
               <a:rPr lang="en-US" dirty="0"/>
-              <a:t>We continue with Soils. On this slide we have Black cotton soils and Little humus. Write each point on a new line, with the key term first, and explain it in your own words when we revise.</a:t>
+              <a:t>Now let us check what you have understood. Question 1: Give two ways savanna trees survive the dry season. Answer in your exercise book.</a:t>
             </a:r>
             <a:endParaRPr lang="en-US" dirty="0"/>
           </a:p>
@@ -3901,7 +3900,7 @@
           <a:p>
             <a:r>
               <a:rPr lang="en-US" dirty="0"/>
-              <a:t>Now let us check what you have understood. Question 1: Give two ways savanna trees survive the dry season. Answer in your exercise book.</a:t>
+              <a:t>The expected answer is: they lose their leaves; the baobab keeps water in its trunk. If you got it right, well done.</a:t>
             </a:r>
             <a:endParaRPr lang="en-US" dirty="0"/>
           </a:p>
@@ -3989,7 +3988,7 @@
           <a:p>
             <a:r>
               <a:rPr lang="en-US" dirty="0"/>
-              <a:t>The expected answer is: they lose their leaves; the baobab keeps water in its trunk. If you got it right, well done.</a:t>
+              <a:t>Now let us check what you have understood. Question 2: What is laterite used for? Answer in your exercise book.</a:t>
             </a:r>
             <a:endParaRPr lang="en-US" dirty="0"/>
           </a:p>
@@ -4077,7 +4076,7 @@
           <a:p>
             <a:r>
               <a:rPr lang="en-US" dirty="0"/>
-              <a:t>Now let us check what you have understood. Question 2: What is laterite used for? Answer in your exercise book.</a:t>
+              <a:t>The expected answer is: for roads and bricks. If you got it right, well done.</a:t>
             </a:r>
             <a:endParaRPr lang="en-US" dirty="0"/>
           </a:p>
@@ -4165,7 +4164,7 @@
           <a:p>
             <a:r>
               <a:rPr lang="en-US" dirty="0"/>
-              <a:t>The expected answer is: for roads and bricks. If you got it right, well done.</a:t>
+              <a:t>For those who need more practice, fill in the blanks in your exercise book. The answers are: number 1, deciduous; number 2, baobab; number 3, laterite.</a:t>
             </a:r>
             <a:endParaRPr lang="en-US" dirty="0"/>
           </a:p>
@@ -4253,7 +4252,7 @@
           <a:p>
             <a:r>
               <a:rPr lang="en-US" dirty="0"/>
-              <a:t>For those who need more practice, fill in the blanks in your exercise book. The answers are: number 1, deciduous; number 2, baobab; number 3, laterite.</a:t>
+              <a:t>For your homework: Name three resources of the savanna. We shall correct it at the beginning of our next lesson.</a:t>
             </a:r>
             <a:endParaRPr lang="en-US" dirty="0"/>
           </a:p>
@@ -4341,7 +4340,7 @@
           <a:p>
             <a:r>
               <a:rPr lang="en-US" dirty="0"/>
-              <a:t>For your homework: List three things that people in your family get from the savanna around Garoua, for example food, wood or animals. We shall correct it at the beginning of our next lesson.</a:t>
+              <a:t>Our next lesson will be on Lesson 2 (Part 3): The Tropical Grassland Region: Types of Resources and Methods of Exploitation. Thank you for your attention, and see you next time.</a:t>
             </a:r>
             <a:endParaRPr lang="en-US" dirty="0"/>
           </a:p>
@@ -4429,7 +4428,7 @@
           <a:p>
             <a:r>
               <a:rPr lang="en-US" dirty="0"/>
-              <a:t>Before we start the new lesson, let us correct the homework I gave you at the end of Lesson 2 (Part 1): The Tropical Grassland Region: Location and Characteristics (Climate). The question was: Look at the trees and grass around your home. Which trees keep their leaves in the dry season, and which lose them? Is the grass green or dry now? Write your observations. Take out your exercise books.</a:t>
+              <a:t>Here is a good answer. The baobab and the shea tree (also the acacia). Compare it with your own answer and correct your work in red.</a:t>
             </a:r>
             <a:endParaRPr lang="en-US" dirty="0"/>
           </a:p>
@@ -4517,7 +4516,7 @@
           <a:p>
             <a:r>
               <a:rPr lang="en-US" dirty="0"/>
-              <a:t>Our next lesson will be on Lesson 2 (Part 3): The Tropical Grassland Region: Types of Resources and Methods of Exploitation. Thank you for your attention, and see you next time.</a:t>
+              <a:t>Let us play the bilingual game. I say a word in English, and you give me the French word. Then we do the reverse.</a:t>
             </a:r>
             <a:endParaRPr lang="en-US" dirty="0"/>
           </a:p>
@@ -4605,7 +4604,7 @@
           <a:p>
             <a:r>
               <a:rPr lang="en-US" dirty="0"/>
-              <a:t>Let us play the bilingual game. I say a word in English, and you give me the French word. Then we do the reverse.</a:t>
+              <a:t>I record this information in the official logbook of the class after the lesson.</a:t>
             </a:r>
             <a:endParaRPr lang="en-US" dirty="0"/>
           </a:p>
@@ -4693,7 +4692,7 @@
           <a:p>
             <a:r>
               <a:rPr lang="en-US" dirty="0"/>
-              <a:t>I record this information in the official logbook of the class after the lesson.</a:t>
+              <a:t>I complete the second page of the logbook: the matter taught, the evaluation, the homework and the attendance.</a:t>
             </a:r>
             <a:endParaRPr lang="en-US" dirty="0"/>
           </a:p>
@@ -4781,7 +4780,7 @@
           <a:p>
             <a:r>
               <a:rPr lang="en-US" dirty="0"/>
-              <a:t>I complete the second page of the logbook: the matter taught, the evaluation, the homework and the attendance.</a:t>
+              <a:t>This slide is for me, the teacher: it gives the timing of the lesson and what to do if the projector is not available.</a:t>
             </a:r>
             <a:endParaRPr lang="en-US" dirty="0"/>
           </a:p>
@@ -4869,7 +4868,7 @@
           <a:p>
             <a:r>
               <a:rPr lang="en-US" dirty="0"/>
-              <a:t>This slide is for me, the teacher: it gives the timing of the lesson and what to do if the projector is not available.</a:t>
+              <a:t>Take your time to copy this part; we will continue together.</a:t>
             </a:r>
             <a:endParaRPr lang="en-US" dirty="0"/>
           </a:p>
@@ -4957,7 +4956,7 @@
           <a:p>
             <a:r>
               <a:rPr lang="en-US" dirty="0"/>
-              <a:t>Take your time to copy this part; we will continue together.</a:t>
+              <a:t>These are the references and picture credits used to prepare this lesson.</a:t>
             </a:r>
             <a:endParaRPr lang="en-US" dirty="0"/>
           </a:p>
@@ -4981,94 +4980,6 @@
             <a:fld id="{F7021451-1387-4CA6-816F-3879F97B5CBC}" type="slidenum">
               <a:rPr lang="en-US"/>
               <a:t>55</a:t>
-            </a:fld>
-            <a:endParaRPr lang="en-US"/>
-          </a:p>
-        </p:txBody>
-      </p:sp>
-    </p:spTree>
-    <p:extLst>
-      <p:ext uri="{BB962C8B-B14F-4D97-AF65-F5344CB8AC3E}">
-        <p14:creationId xmlns:p14="http://schemas.microsoft.com/office/powerpoint/2010/main" val="1024086991"/>
-      </p:ext>
-    </p:extLst>
-  </p:cSld>
-  <p:clrMapOvr>
-    <a:masterClrMapping/>
-  </p:clrMapOvr>
-</p:notes>
-</file>
-
-<file path=ppt/notesSlides/notesSlide56.xml><?xml version="1.0" encoding="utf-8"?>
-<p:notes xmlns:a="http://schemas.openxmlformats.org/drawingml/2006/main" xmlns:r="http://schemas.openxmlformats.org/officeDocument/2006/relationships" xmlns:p="http://schemas.openxmlformats.org/presentationml/2006/main">
-  <p:cSld>
-    <p:spTree>
-      <p:nvGrpSpPr>
-        <p:cNvPr id="1" name=""/>
-        <p:cNvGrpSpPr/>
-        <p:nvPr/>
-      </p:nvGrpSpPr>
-      <p:grpSpPr>
-        <a:xfrm>
-          <a:off x="0" y="0"/>
-          <a:ext cx="0" cy="0"/>
-          <a:chOff x="0" y="0"/>
-          <a:chExt cx="0" cy="0"/>
-        </a:xfrm>
-      </p:grpSpPr>
-      <p:sp>
-        <p:nvSpPr>
-          <p:cNvPr id="2" name="Slide Image Placeholder 1"/>
-          <p:cNvSpPr>
-            <a:spLocks noGrp="1" noRot="1" noChangeAspect="1"/>
-          </p:cNvSpPr>
-          <p:nvPr>
-            <p:ph type="sldImg"/>
-          </p:nvPr>
-        </p:nvSpPr>
-        <p:spPr/>
-      </p:sp>
-      <p:sp>
-        <p:nvSpPr>
-          <p:cNvPr id="3" name="Notes Placeholder 2"/>
-          <p:cNvSpPr>
-            <a:spLocks noGrp="1"/>
-          </p:cNvSpPr>
-          <p:nvPr>
-            <p:ph type="body" idx="1"/>
-          </p:nvPr>
-        </p:nvSpPr>
-        <p:spPr/>
-        <p:txBody>
-          <a:bodyPr/>
-          <a:lstStyle/>
-          <a:p>
-            <a:r>
-              <a:rPr lang="en-US" dirty="0"/>
-              <a:t>These are the references and picture credits used to prepare this lesson.</a:t>
-            </a:r>
-            <a:endParaRPr lang="en-US" dirty="0"/>
-          </a:p>
-        </p:txBody>
-      </p:sp>
-      <p:sp>
-        <p:nvSpPr>
-          <p:cNvPr id="4" name="Slide Number Placeholder 3"/>
-          <p:cNvSpPr>
-            <a:spLocks noGrp="1"/>
-          </p:cNvSpPr>
-          <p:nvPr>
-            <p:ph type="sldNum" sz="quarter" idx="10"/>
-          </p:nvPr>
-        </p:nvSpPr>
-        <p:spPr/>
-        <p:txBody>
-          <a:bodyPr/>
-          <a:lstStyle/>
-          <a:p>
-            <a:fld id="{F7021451-1387-4CA6-816F-3879F97B5CBC}" type="slidenum">
-              <a:rPr lang="en-US"/>
-              <a:t>56</a:t>
             </a:fld>
             <a:endParaRPr lang="en-US"/>
           </a:p>
@@ -5133,7 +5044,7 @@
           <a:p>
             <a:r>
               <a:rPr lang="en-US" dirty="0"/>
-              <a:t>Here is a good answer. Answers vary. Trees like the mango and the neem keep their leaves, while many trees such as the shea tree and acacias lose them. In the dry season the grass is yellow and dry. Compare it with your own answer and correct your work in red.</a:t>
+              <a:t>Here is the plan of our lesson today. First, we shall correct the homework. Then we shall look at the objectives and recall what you already know. After that, we shall study a situation from real life and the action to take, and do the learning activities. Finally, we shall copy the board summary, do the evaluation and the remediation, and I will give you the homework.</a:t>
             </a:r>
             <a:endParaRPr lang="en-US" dirty="0"/>
           </a:p>
@@ -5221,7 +5132,7 @@
           <a:p>
             <a:r>
               <a:rPr lang="en-US" dirty="0"/>
-              <a:t>Here is the plan of our lesson today. First, we shall correct the homework. Then we shall look at the objectives and recall what you already know. After that, we shall study a situation from real life and the action to take, and do the learning activities. Finally, we shall copy the board summary, do the evaluation and the remediation, and I will give you the homework.</a:t>
+              <a:t>Take your time to copy this part; we will continue together.</a:t>
             </a:r>
             <a:endParaRPr lang="en-US" dirty="0"/>
           </a:p>
@@ -5309,7 +5220,7 @@
           <a:p>
             <a:r>
               <a:rPr lang="en-US" dirty="0"/>
-              <a:t>Take your time to copy this part; we will continue together.</a:t>
+              <a:t>By the end of this lesson, you should be able to do three things. Number 1: describe the vegetation of the Tropical Grassland region. Number 2: explain how savanna plants are adapted to the dry season and to bush fires. Number 3: describe the main soils of the Tropical Grassland region.</a:t>
             </a:r>
             <a:endParaRPr lang="en-US" dirty="0"/>
           </a:p>
@@ -5397,7 +5308,7 @@
           <a:p>
             <a:r>
               <a:rPr lang="en-US" dirty="0"/>
-              <a:t>By the end of this lesson, you should be able to do three things. Number 1: describe the vegetation of the Tropical Grassland region. Number 2: explain how savanna plants are adapted to the dry season and to bush fires. Number 3: describe the main soils of the Tropical Grassland region.</a:t>
+              <a:t>Let us first remember what you already know. The Tropical Grassland lies between 5° and 15° north and south of the Equator. It has a wet season and a dry season, with 500 to 1,500 mm of rain. Garoua has a dry season from November to March. Keep this in mind, because we shall build on it today.</a:t>
             </a:r>
             <a:endParaRPr lang="en-US" dirty="0"/>
           </a:p>
@@ -6754,7 +6665,7 @@
                 <a:ea typeface="Calibri" pitchFamily="34" charset="-122"/>
                 <a:cs typeface="Calibri" pitchFamily="34" charset="-120"/>
               </a:rPr>
-              <a:t>PREVIOUS KNOWLEDGE</a:t>
+              <a:t>REAL-LIFE SITUATION</a:t>
             </a:r>
             <a:endParaRPr lang="en-US" sz="1400" dirty="0"/>
           </a:p>
@@ -6819,7 +6730,7 @@
                 <a:ea typeface="Times New Roman" pitchFamily="34" charset="-122"/>
                 <a:cs typeface="Times New Roman" pitchFamily="34" charset="-120"/>
               </a:rPr>
-              <a:t>Previous Knowledge</a:t>
+              <a:t>Situation in Real Life</a:t>
             </a:r>
             <a:endParaRPr lang="en-US" sz="3600" dirty="0"/>
           </a:p>
@@ -6846,12 +6757,11 @@
           <a:bodyPr wrap="square" lIns="0" tIns="0" rIns="0" bIns="0" rtlCol="0" anchor="t"/>
           <a:lstStyle/>
           <a:p>
-            <a:pPr algn="l" marL="342900" indent="-342900">
+            <a:pPr algn="l" indent="0" marL="0">
               <a:spcAft>
                 <a:spcPts val="800"/>
               </a:spcAft>
-              <a:buSzPct val="100000"/>
-              <a:buChar char="•"/>
+              <a:buNone/>
             </a:pPr>
             <a:r>
               <a:rPr lang="en-US" sz="4000" dirty="0">
@@ -6862,49 +6772,7 @@
                 <a:ea typeface="Times New Roman" pitchFamily="34" charset="-122"/>
                 <a:cs typeface="Times New Roman" pitchFamily="34" charset="-120"/>
               </a:rPr>
-              <a:t>The Tropical Grassland lies between 5° and 15° north and south of the Equator.</a:t>
-            </a:r>
-            <a:endParaRPr lang="en-US" sz="4000" dirty="0"/>
-          </a:p>
-          <a:p>
-            <a:pPr algn="l" marL="342900" indent="-342900">
-              <a:spcAft>
-                <a:spcPts val="800"/>
-              </a:spcAft>
-              <a:buSzPct val="100000"/>
-              <a:buChar char="•"/>
-            </a:pPr>
-            <a:r>
-              <a:rPr lang="en-US" sz="4000" dirty="0">
-                <a:solidFill>
-                  <a:srgbClr val="111111"/>
-                </a:solidFill>
-                <a:latin typeface="Times New Roman" pitchFamily="34" charset="0"/>
-                <a:ea typeface="Times New Roman" pitchFamily="34" charset="-122"/>
-                <a:cs typeface="Times New Roman" pitchFamily="34" charset="-120"/>
-              </a:rPr>
-              <a:t>It has a wet season and a dry season, with 500 to 1,500 mm of rain.</a:t>
-            </a:r>
-            <a:endParaRPr lang="en-US" sz="4000" dirty="0"/>
-          </a:p>
-          <a:p>
-            <a:pPr algn="l" marL="342900" indent="-342900">
-              <a:spcAft>
-                <a:spcPts val="800"/>
-              </a:spcAft>
-              <a:buSzPct val="100000"/>
-              <a:buChar char="•"/>
-            </a:pPr>
-            <a:r>
-              <a:rPr lang="en-US" sz="4000" dirty="0">
-                <a:solidFill>
-                  <a:srgbClr val="111111"/>
-                </a:solidFill>
-                <a:latin typeface="Times New Roman" pitchFamily="34" charset="0"/>
-                <a:ea typeface="Times New Roman" pitchFamily="34" charset="-122"/>
-                <a:cs typeface="Times New Roman" pitchFamily="34" charset="-120"/>
-              </a:rPr>
-              <a:t>Garoua has a dry season from November to March.</a:t>
+              <a:t>In January, Hawa travels from Garoua to Ngaoundéré. The grass is dry and yellow, and many trees have no leaves, but the shea tree still has leaves and its bark is not burnt. Hawa asks: "How do the plants of the savanna survive the long dry season and the bush fires?"</a:t>
             </a:r>
             <a:endParaRPr lang="en-US" sz="4000" dirty="0"/>
           </a:p>
@@ -7039,7 +6907,7 @@
         <p:spPr>
           <a:xfrm>
             <a:off x="0" y="658368"/>
-            <a:ext cx="2468880" cy="5833872"/>
+            <a:ext cx="5120640" cy="5833872"/>
           </a:xfrm>
           <a:prstGeom prst="rect">
             <a:avLst/>
@@ -7054,8 +6922,8 @@
         </p:nvSpPr>
         <p:spPr>
           <a:xfrm>
-            <a:off x="2697480" y="1005840"/>
-            <a:ext cx="9174175" cy="731520"/>
+            <a:off x="5349240" y="1005840"/>
+            <a:ext cx="6522415" cy="731520"/>
           </a:xfrm>
           <a:prstGeom prst="rect">
             <a:avLst/>
@@ -7081,7 +6949,7 @@
                 <a:ea typeface="Times New Roman" pitchFamily="34" charset="-122"/>
                 <a:cs typeface="Times New Roman" pitchFamily="34" charset="-120"/>
               </a:rPr>
-              <a:t>Situation in Real Life</a:t>
+              <a:t>Situation: Question 1</a:t>
             </a:r>
             <a:endParaRPr lang="en-US" sz="3600" dirty="0"/>
           </a:p>
@@ -7095,8 +6963,8 @@
         </p:nvSpPr>
         <p:spPr>
           <a:xfrm>
-            <a:off x="2697480" y="1783080"/>
-            <a:ext cx="9174175" cy="4663440"/>
+            <a:off x="5349240" y="1783080"/>
+            <a:ext cx="6522415" cy="4663440"/>
           </a:xfrm>
           <a:prstGeom prst="rect">
             <a:avLst/>
@@ -7123,7 +6991,7 @@
                 <a:ea typeface="Times New Roman" pitchFamily="34" charset="-122"/>
                 <a:cs typeface="Times New Roman" pitchFamily="34" charset="-120"/>
               </a:rPr>
-              <a:t>In January, Hawa travels from Garoua to Ngaoundéré. The grass is dry and yellow, and many trees have no leaves, but the shea tree still has leaves and its bark is not burnt. Hawa asks: "How do the plants of the savanna survive the long dry season and the bush fires?"</a:t>
+              <a:t>What is the problem in the situation?</a:t>
             </a:r>
             <a:endParaRPr lang="en-US" sz="4000" dirty="0"/>
           </a:p>
@@ -7300,7 +7168,7 @@
                 <a:ea typeface="Times New Roman" pitchFamily="34" charset="-122"/>
                 <a:cs typeface="Times New Roman" pitchFamily="34" charset="-120"/>
               </a:rPr>
-              <a:t>Situation: Question 1</a:t>
+              <a:t>Answer</a:t>
             </a:r>
             <a:endParaRPr lang="en-US" sz="3600" dirty="0"/>
           </a:p>
@@ -7342,7 +7210,7 @@
                 <a:ea typeface="Times New Roman" pitchFamily="34" charset="-122"/>
                 <a:cs typeface="Times New Roman" pitchFamily="34" charset="-120"/>
               </a:rPr>
-              <a:t>What is the problem in the situation?</a:t>
+              <a:t>Hawa does not know how savanna plants survive the dry season and fires.</a:t>
             </a:r>
             <a:endParaRPr lang="en-US" sz="4000" dirty="0"/>
           </a:p>
@@ -7519,7 +7387,7 @@
                 <a:ea typeface="Times New Roman" pitchFamily="34" charset="-122"/>
                 <a:cs typeface="Times New Roman" pitchFamily="34" charset="-120"/>
               </a:rPr>
-              <a:t>Answer</a:t>
+              <a:t>Situation: Question 2</a:t>
             </a:r>
             <a:endParaRPr lang="en-US" sz="3600" dirty="0"/>
           </a:p>
@@ -7561,7 +7429,7 @@
                 <a:ea typeface="Times New Roman" pitchFamily="34" charset="-122"/>
                 <a:cs typeface="Times New Roman" pitchFamily="34" charset="-120"/>
               </a:rPr>
-              <a:t>Hawa does not know how savanna plants survive the dry season and fires.</a:t>
+              <a:t>What colour is the grass in January?</a:t>
             </a:r>
             <a:endParaRPr lang="en-US" sz="4000" dirty="0"/>
           </a:p>
@@ -7738,7 +7606,7 @@
                 <a:ea typeface="Times New Roman" pitchFamily="34" charset="-122"/>
                 <a:cs typeface="Times New Roman" pitchFamily="34" charset="-120"/>
               </a:rPr>
-              <a:t>Situation: Question 2</a:t>
+              <a:t>Answer</a:t>
             </a:r>
             <a:endParaRPr lang="en-US" sz="3600" dirty="0"/>
           </a:p>
@@ -7780,7 +7648,7 @@
                 <a:ea typeface="Times New Roman" pitchFamily="34" charset="-122"/>
                 <a:cs typeface="Times New Roman" pitchFamily="34" charset="-120"/>
               </a:rPr>
-              <a:t>What colour is the grass in January?</a:t>
+              <a:t>Yellow (dry).</a:t>
             </a:r>
             <a:endParaRPr lang="en-US" sz="4000" dirty="0"/>
           </a:p>
@@ -7957,7 +7825,7 @@
                 <a:ea typeface="Times New Roman" pitchFamily="34" charset="-122"/>
                 <a:cs typeface="Times New Roman" pitchFamily="34" charset="-120"/>
               </a:rPr>
-              <a:t>Answer</a:t>
+              <a:t>Situation: Question 3</a:t>
             </a:r>
             <a:endParaRPr lang="en-US" sz="3600" dirty="0"/>
           </a:p>
@@ -7999,7 +7867,7 @@
                 <a:ea typeface="Times New Roman" pitchFamily="34" charset="-122"/>
                 <a:cs typeface="Times New Roman" pitchFamily="34" charset="-120"/>
               </a:rPr>
-              <a:t>Yellow (dry).</a:t>
+              <a:t>Which tree still has leaves?</a:t>
             </a:r>
             <a:endParaRPr lang="en-US" sz="4000" dirty="0"/>
           </a:p>
@@ -8176,7 +8044,7 @@
                 <a:ea typeface="Times New Roman" pitchFamily="34" charset="-122"/>
                 <a:cs typeface="Times New Roman" pitchFamily="34" charset="-120"/>
               </a:rPr>
-              <a:t>Situation: Question 3</a:t>
+              <a:t>Possible Answer</a:t>
             </a:r>
             <a:endParaRPr lang="en-US" sz="3600" dirty="0"/>
           </a:p>
@@ -8218,7 +8086,7 @@
                 <a:ea typeface="Times New Roman" pitchFamily="34" charset="-122"/>
                 <a:cs typeface="Times New Roman" pitchFamily="34" charset="-120"/>
               </a:rPr>
-              <a:t>Which tree still has leaves?</a:t>
+              <a:t>The shea tree.</a:t>
             </a:r>
             <a:endParaRPr lang="en-US" sz="4000" dirty="0"/>
           </a:p>
@@ -8330,7 +8198,7 @@
                 <a:ea typeface="Calibri" pitchFamily="34" charset="-122"/>
                 <a:cs typeface="Calibri" pitchFamily="34" charset="-120"/>
               </a:rPr>
-              <a:t>REAL-LIFE SITUATION</a:t>
+              <a:t>ACTION TO TAKE</a:t>
             </a:r>
             <a:endParaRPr lang="en-US" sz="1400" dirty="0"/>
           </a:p>
@@ -8395,7 +8263,7 @@
                 <a:ea typeface="Times New Roman" pitchFamily="34" charset="-122"/>
                 <a:cs typeface="Times New Roman" pitchFamily="34" charset="-120"/>
               </a:rPr>
-              <a:t>Possible Answer</a:t>
+              <a:t>Action to Take</a:t>
             </a:r>
             <a:endParaRPr lang="en-US" sz="3600" dirty="0"/>
           </a:p>
@@ -8437,7 +8305,7 @@
                 <a:ea typeface="Times New Roman" pitchFamily="34" charset="-122"/>
                 <a:cs typeface="Times New Roman" pitchFamily="34" charset="-120"/>
               </a:rPr>
-              <a:t>The shea tree.</a:t>
+              <a:t>Avoid bush fires, which destroy plants and the humus of the soil.</a:t>
             </a:r>
             <a:endParaRPr lang="en-US" sz="4000" dirty="0"/>
           </a:p>
@@ -8549,7 +8417,7 @@
                 <a:ea typeface="Calibri" pitchFamily="34" charset="-122"/>
                 <a:cs typeface="Calibri" pitchFamily="34" charset="-120"/>
               </a:rPr>
-              <a:t>ACTION TO TAKE</a:t>
+              <a:t>JUSTIFICATION</a:t>
             </a:r>
             <a:endParaRPr lang="en-US" sz="1400" dirty="0"/>
           </a:p>
@@ -8614,7 +8482,7 @@
                 <a:ea typeface="Times New Roman" pitchFamily="34" charset="-122"/>
                 <a:cs typeface="Times New Roman" pitchFamily="34" charset="-120"/>
               </a:rPr>
-              <a:t>Action to Take</a:t>
+              <a:t>Justification of the Lesson</a:t>
             </a:r>
             <a:endParaRPr lang="en-US" sz="3600" dirty="0"/>
           </a:p>
@@ -8656,7 +8524,7 @@
                 <a:ea typeface="Times New Roman" pitchFamily="34" charset="-122"/>
                 <a:cs typeface="Times New Roman" pitchFamily="34" charset="-120"/>
               </a:rPr>
-              <a:t>Avoid bush fires, which destroy plants and the humus of the soil.</a:t>
+              <a:t>This lesson helps us to know the plants and soils around us.</a:t>
             </a:r>
             <a:endParaRPr lang="en-US" sz="4000" dirty="0"/>
           </a:p>
@@ -8768,15 +8636,54 @@
                 <a:ea typeface="Calibri" pitchFamily="34" charset="-122"/>
                 <a:cs typeface="Calibri" pitchFamily="34" charset="-120"/>
               </a:rPr>
-              <a:t>JUSTIFICATION</a:t>
+              <a:t>1. VEGETATION</a:t>
             </a:r>
             <a:endParaRPr lang="en-US" sz="1400" dirty="0"/>
+          </a:p>
+        </p:txBody>
+      </p:sp>
+      <p:sp>
+        <p:nvSpPr>
+          <p:cNvPr id="3" name="Text 1"/>
+          <p:cNvSpPr/>
+          <p:nvPr/>
+        </p:nvSpPr>
+        <p:spPr>
+          <a:xfrm>
+            <a:off x="457200" y="1005840"/>
+            <a:ext cx="11277295" cy="731520"/>
+          </a:xfrm>
+          <a:prstGeom prst="rect">
+            <a:avLst/>
+          </a:prstGeom>
+          <a:noFill/>
+          <a:ln/>
+        </p:spPr>
+        <p:txBody>
+          <a:bodyPr wrap="square" lIns="0" tIns="0" rIns="0" bIns="0" rtlCol="0" anchor="ctr"/>
+          <a:lstStyle/>
+          <a:p>
+            <a:pPr algn="ctr" indent="0" marL="0">
+              <a:buNone/>
+            </a:pPr>
+            <a:r>
+              <a:rPr lang="en-US" sz="3600" b="1" dirty="0">
+                <a:solidFill>
+                  <a:srgbClr val="990011"/>
+                </a:solidFill>
+                <a:latin typeface="Times New Roman" pitchFamily="34" charset="0"/>
+                <a:ea typeface="Times New Roman" pitchFamily="34" charset="-122"/>
+                <a:cs typeface="Times New Roman" pitchFamily="34" charset="-120"/>
+              </a:rPr>
+              <a:t>Activity 1</a:t>
+            </a:r>
+            <a:endParaRPr lang="en-US" sz="3600" dirty="0"/>
           </a:p>
         </p:txBody>
       </p:sp>
       <p:pic>
         <p:nvPicPr>
-          <p:cNvPr id="3" name="Image 0" descr="/home/claude/f4/img/minesec_sheet.png">    </p:cNvPr>
+          <p:cNvPr id="4" name="Image 0" descr="/home/claude/f4/img/v2/f2t_baobab.jpg">    </p:cNvPr>
           <p:cNvPicPr>
             <a:picLocks noChangeAspect="1"/>
           </p:cNvPicPr>
@@ -8790,8 +8697,8 @@
         </p:blipFill>
         <p:spPr>
           <a:xfrm>
-            <a:off x="0" y="658368"/>
-            <a:ext cx="5120640" cy="5833872"/>
+            <a:off x="2246610" y="1783080"/>
+            <a:ext cx="7698475" cy="4270248"/>
           </a:xfrm>
           <a:prstGeom prst="rect">
             <a:avLst/>
@@ -8800,14 +8707,14 @@
       </p:pic>
       <p:sp>
         <p:nvSpPr>
-          <p:cNvPr id="4" name="Text 1"/>
+          <p:cNvPr id="5" name="Text 2"/>
           <p:cNvSpPr/>
           <p:nvPr/>
         </p:nvSpPr>
         <p:spPr>
           <a:xfrm>
-            <a:off x="5349240" y="1005840"/>
-            <a:ext cx="6522415" cy="731520"/>
+            <a:off x="457200" y="6089904"/>
+            <a:ext cx="11277295" cy="347472"/>
           </a:xfrm>
           <a:prstGeom prst="rect">
             <a:avLst/>
@@ -8816,68 +8723,24 @@
           <a:ln/>
         </p:spPr>
         <p:txBody>
-          <a:bodyPr wrap="square" lIns="0" tIns="0" rIns="0" bIns="0" rtlCol="0" anchor="ctr">
-            <a:normAutofit/>
-          </a:bodyPr>
+          <a:bodyPr wrap="square" lIns="0" tIns="0" rIns="0" bIns="0" rtlCol="0" anchor="ctr"/>
           <a:lstStyle/>
           <a:p>
             <a:pPr algn="ctr" indent="0" marL="0">
               <a:buNone/>
             </a:pPr>
             <a:r>
-              <a:rPr lang="en-US" sz="3600" b="1" dirty="0">
-                <a:solidFill>
-                  <a:srgbClr val="990011"/>
+              <a:rPr lang="en-US" sz="1800" i="1" dirty="0">
+                <a:solidFill>
+                  <a:srgbClr val="555555"/>
                 </a:solidFill>
                 <a:latin typeface="Times New Roman" pitchFamily="34" charset="0"/>
                 <a:ea typeface="Times New Roman" pitchFamily="34" charset="-122"/>
                 <a:cs typeface="Times New Roman" pitchFamily="34" charset="-120"/>
               </a:rPr>
-              <a:t>Justification of the Lesson</a:t>
-            </a:r>
-            <a:endParaRPr lang="en-US" sz="3600" dirty="0"/>
-          </a:p>
-        </p:txBody>
-      </p:sp>
-      <p:sp>
-        <p:nvSpPr>
-          <p:cNvPr id="5" name="Text 2"/>
-          <p:cNvSpPr/>
-          <p:nvPr/>
-        </p:nvSpPr>
-        <p:spPr>
-          <a:xfrm>
-            <a:off x="5349240" y="1783080"/>
-            <a:ext cx="6522415" cy="4663440"/>
-          </a:xfrm>
-          <a:prstGeom prst="rect">
-            <a:avLst/>
-          </a:prstGeom>
-          <a:noFill/>
-          <a:ln/>
-        </p:spPr>
-        <p:txBody>
-          <a:bodyPr wrap="square" lIns="0" tIns="0" rIns="0" bIns="0" rtlCol="0" anchor="t"/>
-          <a:lstStyle/>
-          <a:p>
-            <a:pPr algn="l" indent="0" marL="0">
-              <a:spcAft>
-                <a:spcPts val="800"/>
-              </a:spcAft>
-              <a:buNone/>
-            </a:pPr>
-            <a:r>
-              <a:rPr lang="en-US" sz="4000" dirty="0">
-                <a:solidFill>
-                  <a:srgbClr val="111111"/>
-                </a:solidFill>
-                <a:latin typeface="Times New Roman" pitchFamily="34" charset="0"/>
-                <a:ea typeface="Times New Roman" pitchFamily="34" charset="-122"/>
-                <a:cs typeface="Times New Roman" pitchFamily="34" charset="-120"/>
-              </a:rPr>
-              <a:t>This lesson helps us to know the plants and soils around us.</a:t>
-            </a:r>
-            <a:endParaRPr lang="en-US" sz="4000" dirty="0"/>
+              <a:t>A baobab.</a:t>
+            </a:r>
+            <a:endParaRPr lang="en-US" sz="1800" dirty="0"/>
           </a:p>
         </p:txBody>
       </p:sp>
@@ -9588,48 +9451,9 @@
           </a:p>
         </p:txBody>
       </p:sp>
-      <p:sp>
-        <p:nvSpPr>
-          <p:cNvPr id="3" name="Text 1"/>
-          <p:cNvSpPr/>
-          <p:nvPr/>
-        </p:nvSpPr>
-        <p:spPr>
-          <a:xfrm>
-            <a:off x="457200" y="1005840"/>
-            <a:ext cx="11277295" cy="731520"/>
-          </a:xfrm>
-          <a:prstGeom prst="rect">
-            <a:avLst/>
-          </a:prstGeom>
-          <a:noFill/>
-          <a:ln/>
-        </p:spPr>
-        <p:txBody>
-          <a:bodyPr wrap="square" lIns="0" tIns="0" rIns="0" bIns="0" rtlCol="0" anchor="ctr"/>
-          <a:lstStyle/>
-          <a:p>
-            <a:pPr algn="ctr" indent="0" marL="0">
-              <a:buNone/>
-            </a:pPr>
-            <a:r>
-              <a:rPr lang="en-US" sz="3600" b="1" dirty="0">
-                <a:solidFill>
-                  <a:srgbClr val="990011"/>
-                </a:solidFill>
-                <a:latin typeface="Times New Roman" pitchFamily="34" charset="0"/>
-                <a:ea typeface="Times New Roman" pitchFamily="34" charset="-122"/>
-                <a:cs typeface="Times New Roman" pitchFamily="34" charset="-120"/>
-              </a:rPr>
-              <a:t>Activity 1</a:t>
-            </a:r>
-            <a:endParaRPr lang="en-US" sz="3600" dirty="0"/>
-          </a:p>
-        </p:txBody>
-      </p:sp>
       <p:pic>
         <p:nvPicPr>
-          <p:cNvPr id="4" name="Image 0" descr="/home/claude/f4/img/v2/f2t_baobab.jpg">    </p:cNvPr>
+          <p:cNvPr id="3" name="Image 0" descr="/home/claude/f4/img/minesec_sheet.png">    </p:cNvPr>
           <p:cNvPicPr>
             <a:picLocks noChangeAspect="1"/>
           </p:cNvPicPr>
@@ -9643,8 +9467,8 @@
         </p:blipFill>
         <p:spPr>
           <a:xfrm>
-            <a:off x="2246610" y="1783080"/>
-            <a:ext cx="7698475" cy="4270248"/>
+            <a:off x="0" y="658368"/>
+            <a:ext cx="5120640" cy="5833872"/>
           </a:xfrm>
           <a:prstGeom prst="rect">
             <a:avLst/>
@@ -9653,14 +9477,14 @@
       </p:pic>
       <p:sp>
         <p:nvSpPr>
-          <p:cNvPr id="5" name="Text 2"/>
+          <p:cNvPr id="4" name="Text 1"/>
           <p:cNvSpPr/>
           <p:nvPr/>
         </p:nvSpPr>
         <p:spPr>
           <a:xfrm>
-            <a:off x="457200" y="6089904"/>
-            <a:ext cx="11277295" cy="347472"/>
+            <a:off x="5349240" y="1005840"/>
+            <a:ext cx="6522415" cy="731520"/>
           </a:xfrm>
           <a:prstGeom prst="rect">
             <a:avLst/>
@@ -9669,24 +9493,68 @@
           <a:ln/>
         </p:spPr>
         <p:txBody>
-          <a:bodyPr wrap="square" lIns="0" tIns="0" rIns="0" bIns="0" rtlCol="0" anchor="ctr"/>
+          <a:bodyPr wrap="square" lIns="0" tIns="0" rIns="0" bIns="0" rtlCol="0" anchor="ctr">
+            <a:normAutofit/>
+          </a:bodyPr>
           <a:lstStyle/>
           <a:p>
             <a:pPr algn="ctr" indent="0" marL="0">
               <a:buNone/>
             </a:pPr>
             <a:r>
-              <a:rPr lang="en-US" sz="1800" i="1" dirty="0">
-                <a:solidFill>
-                  <a:srgbClr val="555555"/>
+              <a:rPr lang="en-US" sz="3600" b="1" dirty="0">
+                <a:solidFill>
+                  <a:srgbClr val="990011"/>
                 </a:solidFill>
                 <a:latin typeface="Times New Roman" pitchFamily="34" charset="0"/>
                 <a:ea typeface="Times New Roman" pitchFamily="34" charset="-122"/>
                 <a:cs typeface="Times New Roman" pitchFamily="34" charset="-120"/>
               </a:rPr>
-              <a:t>A baobab.</a:t>
-            </a:r>
-            <a:endParaRPr lang="en-US" sz="1800" dirty="0"/>
+              <a:t>Activity 1: Question</a:t>
+            </a:r>
+            <a:endParaRPr lang="en-US" sz="3600" dirty="0"/>
+          </a:p>
+        </p:txBody>
+      </p:sp>
+      <p:sp>
+        <p:nvSpPr>
+          <p:cNvPr id="5" name="Text 2"/>
+          <p:cNvSpPr/>
+          <p:nvPr/>
+        </p:nvSpPr>
+        <p:spPr>
+          <a:xfrm>
+            <a:off x="5349240" y="1783080"/>
+            <a:ext cx="6522415" cy="4663440"/>
+          </a:xfrm>
+          <a:prstGeom prst="rect">
+            <a:avLst/>
+          </a:prstGeom>
+          <a:noFill/>
+          <a:ln/>
+        </p:spPr>
+        <p:txBody>
+          <a:bodyPr wrap="square" lIns="0" tIns="0" rIns="0" bIns="0" rtlCol="0" anchor="t"/>
+          <a:lstStyle/>
+          <a:p>
+            <a:pPr algn="l" indent="0" marL="0">
+              <a:spcAft>
+                <a:spcPts val="800"/>
+              </a:spcAft>
+              <a:buNone/>
+            </a:pPr>
+            <a:r>
+              <a:rPr lang="en-US" sz="4000" dirty="0">
+                <a:solidFill>
+                  <a:srgbClr val="111111"/>
+                </a:solidFill>
+                <a:latin typeface="Times New Roman" pitchFamily="34" charset="0"/>
+                <a:ea typeface="Times New Roman" pitchFamily="34" charset="-122"/>
+                <a:cs typeface="Times New Roman" pitchFamily="34" charset="-120"/>
+              </a:rPr>
+              <a:t>How does the big trunk of the baobab help it in the dry season?</a:t>
+            </a:r>
+            <a:endParaRPr lang="en-US" sz="4000" dirty="0"/>
           </a:p>
         </p:txBody>
       </p:sp>
@@ -9861,7 +9729,7 @@
                 <a:ea typeface="Times New Roman" pitchFamily="34" charset="-122"/>
                 <a:cs typeface="Times New Roman" pitchFamily="34" charset="-120"/>
               </a:rPr>
-              <a:t>Activity 1: Question</a:t>
+              <a:t>Activity 1: Answer</a:t>
             </a:r>
             <a:endParaRPr lang="en-US" sz="3600" dirty="0"/>
           </a:p>
@@ -9903,7 +9771,7 @@
                 <a:ea typeface="Times New Roman" pitchFamily="34" charset="-122"/>
                 <a:cs typeface="Times New Roman" pitchFamily="34" charset="-120"/>
               </a:rPr>
-              <a:t>How does the big trunk of the baobab help it in the dry season?</a:t>
+              <a:t>It stores water.</a:t>
             </a:r>
             <a:endParaRPr lang="en-US" sz="4000" dirty="0"/>
           </a:p>
@@ -10021,9 +9889,48 @@
           </a:p>
         </p:txBody>
       </p:sp>
+      <p:sp>
+        <p:nvSpPr>
+          <p:cNvPr id="3" name="Text 1"/>
+          <p:cNvSpPr/>
+          <p:nvPr/>
+        </p:nvSpPr>
+        <p:spPr>
+          <a:xfrm>
+            <a:off x="457200" y="1005840"/>
+            <a:ext cx="11277295" cy="731520"/>
+          </a:xfrm>
+          <a:prstGeom prst="rect">
+            <a:avLst/>
+          </a:prstGeom>
+          <a:noFill/>
+          <a:ln/>
+        </p:spPr>
+        <p:txBody>
+          <a:bodyPr wrap="square" lIns="0" tIns="0" rIns="0" bIns="0" rtlCol="0" anchor="ctr"/>
+          <a:lstStyle/>
+          <a:p>
+            <a:pPr algn="ctr" indent="0" marL="0">
+              <a:buNone/>
+            </a:pPr>
+            <a:r>
+              <a:rPr lang="en-US" sz="3600" b="1" dirty="0">
+                <a:solidFill>
+                  <a:srgbClr val="990011"/>
+                </a:solidFill>
+                <a:latin typeface="Times New Roman" pitchFamily="34" charset="0"/>
+                <a:ea typeface="Times New Roman" pitchFamily="34" charset="-122"/>
+                <a:cs typeface="Times New Roman" pitchFamily="34" charset="-120"/>
+              </a:rPr>
+              <a:t>Activity 2</a:t>
+            </a:r>
+            <a:endParaRPr lang="en-US" sz="3600" dirty="0"/>
+          </a:p>
+        </p:txBody>
+      </p:sp>
       <p:pic>
         <p:nvPicPr>
-          <p:cNvPr id="3" name="Image 0" descr="/home/claude/f4/img/minesec_sheet.png">    </p:cNvPr>
+          <p:cNvPr id="4" name="Image 0" descr="/home/claude/f4/img/v2/f2t_dry_trees.jpg">    </p:cNvPr>
           <p:cNvPicPr>
             <a:picLocks noChangeAspect="1"/>
           </p:cNvPicPr>
@@ -10037,8 +9944,8 @@
         </p:blipFill>
         <p:spPr>
           <a:xfrm>
-            <a:off x="0" y="658368"/>
-            <a:ext cx="5120640" cy="5833872"/>
+            <a:off x="2246610" y="1783080"/>
+            <a:ext cx="7698475" cy="4270248"/>
           </a:xfrm>
           <a:prstGeom prst="rect">
             <a:avLst/>
@@ -10047,14 +9954,14 @@
       </p:pic>
       <p:sp>
         <p:nvSpPr>
-          <p:cNvPr id="4" name="Text 1"/>
+          <p:cNvPr id="5" name="Text 2"/>
           <p:cNvSpPr/>
           <p:nvPr/>
         </p:nvSpPr>
         <p:spPr>
           <a:xfrm>
-            <a:off x="5349240" y="1005840"/>
-            <a:ext cx="6522415" cy="731520"/>
+            <a:off x="457200" y="6089904"/>
+            <a:ext cx="11277295" cy="347472"/>
           </a:xfrm>
           <a:prstGeom prst="rect">
             <a:avLst/>
@@ -10063,68 +9970,24 @@
           <a:ln/>
         </p:spPr>
         <p:txBody>
-          <a:bodyPr wrap="square" lIns="0" tIns="0" rIns="0" bIns="0" rtlCol="0" anchor="ctr">
-            <a:normAutofit/>
-          </a:bodyPr>
+          <a:bodyPr wrap="square" lIns="0" tIns="0" rIns="0" bIns="0" rtlCol="0" anchor="ctr"/>
           <a:lstStyle/>
           <a:p>
             <a:pPr algn="ctr" indent="0" marL="0">
               <a:buNone/>
             </a:pPr>
             <a:r>
-              <a:rPr lang="en-US" sz="3600" b="1" dirty="0">
-                <a:solidFill>
-                  <a:srgbClr val="990011"/>
+              <a:rPr lang="en-US" sz="1800" i="1" dirty="0">
+                <a:solidFill>
+                  <a:srgbClr val="555555"/>
                 </a:solidFill>
                 <a:latin typeface="Times New Roman" pitchFamily="34" charset="0"/>
                 <a:ea typeface="Times New Roman" pitchFamily="34" charset="-122"/>
                 <a:cs typeface="Times New Roman" pitchFamily="34" charset="-120"/>
               </a:rPr>
-              <a:t>Activity 1: Answer</a:t>
-            </a:r>
-            <a:endParaRPr lang="en-US" sz="3600" dirty="0"/>
-          </a:p>
-        </p:txBody>
-      </p:sp>
-      <p:sp>
-        <p:nvSpPr>
-          <p:cNvPr id="5" name="Text 2"/>
-          <p:cNvSpPr/>
-          <p:nvPr/>
-        </p:nvSpPr>
-        <p:spPr>
-          <a:xfrm>
-            <a:off x="5349240" y="1783080"/>
-            <a:ext cx="6522415" cy="4663440"/>
-          </a:xfrm>
-          <a:prstGeom prst="rect">
-            <a:avLst/>
-          </a:prstGeom>
-          <a:noFill/>
-          <a:ln/>
-        </p:spPr>
-        <p:txBody>
-          <a:bodyPr wrap="square" lIns="0" tIns="0" rIns="0" bIns="0" rtlCol="0" anchor="t"/>
-          <a:lstStyle/>
-          <a:p>
-            <a:pPr algn="l" indent="0" marL="0">
-              <a:spcAft>
-                <a:spcPts val="800"/>
-              </a:spcAft>
-              <a:buNone/>
-            </a:pPr>
-            <a:r>
-              <a:rPr lang="en-US" sz="4000" dirty="0">
-                <a:solidFill>
-                  <a:srgbClr val="111111"/>
-                </a:solidFill>
-                <a:latin typeface="Times New Roman" pitchFamily="34" charset="0"/>
-                <a:ea typeface="Times New Roman" pitchFamily="34" charset="-122"/>
-                <a:cs typeface="Times New Roman" pitchFamily="34" charset="-120"/>
-              </a:rPr>
-              <a:t>It stores water.</a:t>
-            </a:r>
-            <a:endParaRPr lang="en-US" sz="4000" dirty="0"/>
+              <a:t>Trees without leaves.</a:t>
+            </a:r>
+            <a:endParaRPr lang="en-US" sz="1800" dirty="0"/>
           </a:p>
         </p:txBody>
       </p:sp>
@@ -10240,48 +10103,9 @@
           </a:p>
         </p:txBody>
       </p:sp>
-      <p:sp>
-        <p:nvSpPr>
-          <p:cNvPr id="3" name="Text 1"/>
-          <p:cNvSpPr/>
-          <p:nvPr/>
-        </p:nvSpPr>
-        <p:spPr>
-          <a:xfrm>
-            <a:off x="457200" y="1005840"/>
-            <a:ext cx="11277295" cy="731520"/>
-          </a:xfrm>
-          <a:prstGeom prst="rect">
-            <a:avLst/>
-          </a:prstGeom>
-          <a:noFill/>
-          <a:ln/>
-        </p:spPr>
-        <p:txBody>
-          <a:bodyPr wrap="square" lIns="0" tIns="0" rIns="0" bIns="0" rtlCol="0" anchor="ctr"/>
-          <a:lstStyle/>
-          <a:p>
-            <a:pPr algn="ctr" indent="0" marL="0">
-              <a:buNone/>
-            </a:pPr>
-            <a:r>
-              <a:rPr lang="en-US" sz="3600" b="1" dirty="0">
-                <a:solidFill>
-                  <a:srgbClr val="990011"/>
-                </a:solidFill>
-                <a:latin typeface="Times New Roman" pitchFamily="34" charset="0"/>
-                <a:ea typeface="Times New Roman" pitchFamily="34" charset="-122"/>
-                <a:cs typeface="Times New Roman" pitchFamily="34" charset="-120"/>
-              </a:rPr>
-              <a:t>Activity 2</a:t>
-            </a:r>
-            <a:endParaRPr lang="en-US" sz="3600" dirty="0"/>
-          </a:p>
-        </p:txBody>
-      </p:sp>
       <p:pic>
         <p:nvPicPr>
-          <p:cNvPr id="4" name="Image 0" descr="/home/claude/f4/img/v2/f2t_dry_trees.jpg">    </p:cNvPr>
+          <p:cNvPr id="3" name="Image 0" descr="/home/claude/f4/img/minesec_sheet.png">    </p:cNvPr>
           <p:cNvPicPr>
             <a:picLocks noChangeAspect="1"/>
           </p:cNvPicPr>
@@ -10295,8 +10119,8 @@
         </p:blipFill>
         <p:spPr>
           <a:xfrm>
-            <a:off x="2246610" y="1783080"/>
-            <a:ext cx="7698475" cy="4270248"/>
+            <a:off x="0" y="658368"/>
+            <a:ext cx="5120640" cy="5833872"/>
           </a:xfrm>
           <a:prstGeom prst="rect">
             <a:avLst/>
@@ -10305,14 +10129,14 @@
       </p:pic>
       <p:sp>
         <p:nvSpPr>
-          <p:cNvPr id="5" name="Text 2"/>
+          <p:cNvPr id="4" name="Text 1"/>
           <p:cNvSpPr/>
           <p:nvPr/>
         </p:nvSpPr>
         <p:spPr>
           <a:xfrm>
-            <a:off x="457200" y="6089904"/>
-            <a:ext cx="11277295" cy="347472"/>
+            <a:off x="5349240" y="1005840"/>
+            <a:ext cx="6522415" cy="731520"/>
           </a:xfrm>
           <a:prstGeom prst="rect">
             <a:avLst/>
@@ -10321,24 +10145,68 @@
           <a:ln/>
         </p:spPr>
         <p:txBody>
-          <a:bodyPr wrap="square" lIns="0" tIns="0" rIns="0" bIns="0" rtlCol="0" anchor="ctr"/>
+          <a:bodyPr wrap="square" lIns="0" tIns="0" rIns="0" bIns="0" rtlCol="0" anchor="ctr">
+            <a:normAutofit/>
+          </a:bodyPr>
           <a:lstStyle/>
           <a:p>
             <a:pPr algn="ctr" indent="0" marL="0">
               <a:buNone/>
             </a:pPr>
             <a:r>
-              <a:rPr lang="en-US" sz="1800" i="1" dirty="0">
-                <a:solidFill>
-                  <a:srgbClr val="555555"/>
+              <a:rPr lang="en-US" sz="3600" b="1" dirty="0">
+                <a:solidFill>
+                  <a:srgbClr val="990011"/>
                 </a:solidFill>
                 <a:latin typeface="Times New Roman" pitchFamily="34" charset="0"/>
                 <a:ea typeface="Times New Roman" pitchFamily="34" charset="-122"/>
                 <a:cs typeface="Times New Roman" pitchFamily="34" charset="-120"/>
               </a:rPr>
-              <a:t>Trees without leaves.</a:t>
-            </a:r>
-            <a:endParaRPr lang="en-US" sz="1800" dirty="0"/>
+              <a:t>Activity 2: Question</a:t>
+            </a:r>
+            <a:endParaRPr lang="en-US" sz="3600" dirty="0"/>
+          </a:p>
+        </p:txBody>
+      </p:sp>
+      <p:sp>
+        <p:nvSpPr>
+          <p:cNvPr id="5" name="Text 2"/>
+          <p:cNvSpPr/>
+          <p:nvPr/>
+        </p:nvSpPr>
+        <p:spPr>
+          <a:xfrm>
+            <a:off x="5349240" y="1783080"/>
+            <a:ext cx="6522415" cy="4663440"/>
+          </a:xfrm>
+          <a:prstGeom prst="rect">
+            <a:avLst/>
+          </a:prstGeom>
+          <a:noFill/>
+          <a:ln/>
+        </p:spPr>
+        <p:txBody>
+          <a:bodyPr wrap="square" lIns="0" tIns="0" rIns="0" bIns="0" rtlCol="0" anchor="t"/>
+          <a:lstStyle/>
+          <a:p>
+            <a:pPr algn="l" indent="0" marL="0">
+              <a:spcAft>
+                <a:spcPts val="800"/>
+              </a:spcAft>
+              <a:buNone/>
+            </a:pPr>
+            <a:r>
+              <a:rPr lang="en-US" sz="4000" dirty="0">
+                <a:solidFill>
+                  <a:srgbClr val="111111"/>
+                </a:solidFill>
+                <a:latin typeface="Times New Roman" pitchFamily="34" charset="0"/>
+                <a:ea typeface="Times New Roman" pitchFamily="34" charset="-122"/>
+                <a:cs typeface="Times New Roman" pitchFamily="34" charset="-120"/>
+              </a:rPr>
+              <a:t>Why do many savanna trees lose their leaves in the dry season?</a:t>
+            </a:r>
+            <a:endParaRPr lang="en-US" sz="4000" dirty="0"/>
           </a:p>
         </p:txBody>
       </p:sp>
@@ -10513,7 +10381,7 @@
                 <a:ea typeface="Times New Roman" pitchFamily="34" charset="-122"/>
                 <a:cs typeface="Times New Roman" pitchFamily="34" charset="-120"/>
               </a:rPr>
-              <a:t>Activity 2: Question</a:t>
+              <a:t>Activity 2: Answer</a:t>
             </a:r>
             <a:endParaRPr lang="en-US" sz="3600" dirty="0"/>
           </a:p>
@@ -10555,7 +10423,7 @@
                 <a:ea typeface="Times New Roman" pitchFamily="34" charset="-122"/>
                 <a:cs typeface="Times New Roman" pitchFamily="34" charset="-120"/>
               </a:rPr>
-              <a:t>Why do many savanna trees lose their leaves in the dry season?</a:t>
+              <a:t>To lose less water.</a:t>
             </a:r>
             <a:endParaRPr lang="en-US" sz="4000" dirty="0"/>
           </a:p>
@@ -10673,9 +10541,48 @@
           </a:p>
         </p:txBody>
       </p:sp>
+      <p:sp>
+        <p:nvSpPr>
+          <p:cNvPr id="3" name="Text 1"/>
+          <p:cNvSpPr/>
+          <p:nvPr/>
+        </p:nvSpPr>
+        <p:spPr>
+          <a:xfrm>
+            <a:off x="457200" y="1005840"/>
+            <a:ext cx="11277295" cy="731520"/>
+          </a:xfrm>
+          <a:prstGeom prst="rect">
+            <a:avLst/>
+          </a:prstGeom>
+          <a:noFill/>
+          <a:ln/>
+        </p:spPr>
+        <p:txBody>
+          <a:bodyPr wrap="square" lIns="0" tIns="0" rIns="0" bIns="0" rtlCol="0" anchor="ctr"/>
+          <a:lstStyle/>
+          <a:p>
+            <a:pPr algn="ctr" indent="0" marL="0">
+              <a:buNone/>
+            </a:pPr>
+            <a:r>
+              <a:rPr lang="en-US" sz="3600" b="1" dirty="0">
+                <a:solidFill>
+                  <a:srgbClr val="990011"/>
+                </a:solidFill>
+                <a:latin typeface="Times New Roman" pitchFamily="34" charset="0"/>
+                <a:ea typeface="Times New Roman" pitchFamily="34" charset="-122"/>
+                <a:cs typeface="Times New Roman" pitchFamily="34" charset="-120"/>
+              </a:rPr>
+              <a:t>Activity 3</a:t>
+            </a:r>
+            <a:endParaRPr lang="en-US" sz="3600" dirty="0"/>
+          </a:p>
+        </p:txBody>
+      </p:sp>
       <p:pic>
         <p:nvPicPr>
-          <p:cNvPr id="3" name="Image 0" descr="/home/claude/f4/img/minesec_sheet.png">    </p:cNvPr>
+          <p:cNvPr id="4" name="Image 0" descr="/home/claude/f4/img/v2/f2t_shea_tree.jpg">    </p:cNvPr>
           <p:cNvPicPr>
             <a:picLocks noChangeAspect="1"/>
           </p:cNvPicPr>
@@ -10689,8 +10596,8 @@
         </p:blipFill>
         <p:spPr>
           <a:xfrm>
-            <a:off x="0" y="658368"/>
-            <a:ext cx="5120640" cy="5833872"/>
+            <a:off x="2246610" y="1783080"/>
+            <a:ext cx="7698475" cy="4270248"/>
           </a:xfrm>
           <a:prstGeom prst="rect">
             <a:avLst/>
@@ -10699,14 +10606,14 @@
       </p:pic>
       <p:sp>
         <p:nvSpPr>
-          <p:cNvPr id="4" name="Text 1"/>
+          <p:cNvPr id="5" name="Text 2"/>
           <p:cNvSpPr/>
           <p:nvPr/>
         </p:nvSpPr>
         <p:spPr>
           <a:xfrm>
-            <a:off x="5349240" y="1005840"/>
-            <a:ext cx="6522415" cy="731520"/>
+            <a:off x="457200" y="6089904"/>
+            <a:ext cx="11277295" cy="347472"/>
           </a:xfrm>
           <a:prstGeom prst="rect">
             <a:avLst/>
@@ -10715,68 +10622,24 @@
           <a:ln/>
         </p:spPr>
         <p:txBody>
-          <a:bodyPr wrap="square" lIns="0" tIns="0" rIns="0" bIns="0" rtlCol="0" anchor="ctr">
-            <a:normAutofit/>
-          </a:bodyPr>
+          <a:bodyPr wrap="square" lIns="0" tIns="0" rIns="0" bIns="0" rtlCol="0" anchor="ctr"/>
           <a:lstStyle/>
           <a:p>
             <a:pPr algn="ctr" indent="0" marL="0">
               <a:buNone/>
             </a:pPr>
             <a:r>
-              <a:rPr lang="en-US" sz="3600" b="1" dirty="0">
-                <a:solidFill>
-                  <a:srgbClr val="990011"/>
+              <a:rPr lang="en-US" sz="1800" i="1" dirty="0">
+                <a:solidFill>
+                  <a:srgbClr val="555555"/>
                 </a:solidFill>
                 <a:latin typeface="Times New Roman" pitchFamily="34" charset="0"/>
                 <a:ea typeface="Times New Roman" pitchFamily="34" charset="-122"/>
                 <a:cs typeface="Times New Roman" pitchFamily="34" charset="-120"/>
               </a:rPr>
-              <a:t>Activity 2: Answer</a:t>
-            </a:r>
-            <a:endParaRPr lang="en-US" sz="3600" dirty="0"/>
-          </a:p>
-        </p:txBody>
-      </p:sp>
-      <p:sp>
-        <p:nvSpPr>
-          <p:cNvPr id="5" name="Text 2"/>
-          <p:cNvSpPr/>
-          <p:nvPr/>
-        </p:nvSpPr>
-        <p:spPr>
-          <a:xfrm>
-            <a:off x="5349240" y="1783080"/>
-            <a:ext cx="6522415" cy="4663440"/>
-          </a:xfrm>
-          <a:prstGeom prst="rect">
-            <a:avLst/>
-          </a:prstGeom>
-          <a:noFill/>
-          <a:ln/>
-        </p:spPr>
-        <p:txBody>
-          <a:bodyPr wrap="square" lIns="0" tIns="0" rIns="0" bIns="0" rtlCol="0" anchor="t"/>
-          <a:lstStyle/>
-          <a:p>
-            <a:pPr algn="l" indent="0" marL="0">
-              <a:spcAft>
-                <a:spcPts val="800"/>
-              </a:spcAft>
-              <a:buNone/>
-            </a:pPr>
-            <a:r>
-              <a:rPr lang="en-US" sz="4000" dirty="0">
-                <a:solidFill>
-                  <a:srgbClr val="111111"/>
-                </a:solidFill>
-                <a:latin typeface="Times New Roman" pitchFamily="34" charset="0"/>
-                <a:ea typeface="Times New Roman" pitchFamily="34" charset="-122"/>
-                <a:cs typeface="Times New Roman" pitchFamily="34" charset="-120"/>
-              </a:rPr>
-              <a:t>To lose less water.</a:t>
-            </a:r>
-            <a:endParaRPr lang="en-US" sz="4000" dirty="0"/>
+              <a:t>A shea tree.</a:t>
+            </a:r>
+            <a:endParaRPr lang="en-US" sz="1800" dirty="0"/>
           </a:p>
         </p:txBody>
       </p:sp>
@@ -10892,48 +10755,9 @@
           </a:p>
         </p:txBody>
       </p:sp>
-      <p:sp>
-        <p:nvSpPr>
-          <p:cNvPr id="3" name="Text 1"/>
-          <p:cNvSpPr/>
-          <p:nvPr/>
-        </p:nvSpPr>
-        <p:spPr>
-          <a:xfrm>
-            <a:off x="457200" y="1005840"/>
-            <a:ext cx="11277295" cy="731520"/>
-          </a:xfrm>
-          <a:prstGeom prst="rect">
-            <a:avLst/>
-          </a:prstGeom>
-          <a:noFill/>
-          <a:ln/>
-        </p:spPr>
-        <p:txBody>
-          <a:bodyPr wrap="square" lIns="0" tIns="0" rIns="0" bIns="0" rtlCol="0" anchor="ctr"/>
-          <a:lstStyle/>
-          <a:p>
-            <a:pPr algn="ctr" indent="0" marL="0">
-              <a:buNone/>
-            </a:pPr>
-            <a:r>
-              <a:rPr lang="en-US" sz="3600" b="1" dirty="0">
-                <a:solidFill>
-                  <a:srgbClr val="990011"/>
-                </a:solidFill>
-                <a:latin typeface="Times New Roman" pitchFamily="34" charset="0"/>
-                <a:ea typeface="Times New Roman" pitchFamily="34" charset="-122"/>
-                <a:cs typeface="Times New Roman" pitchFamily="34" charset="-120"/>
-              </a:rPr>
-              <a:t>Activity 3</a:t>
-            </a:r>
-            <a:endParaRPr lang="en-US" sz="3600" dirty="0"/>
-          </a:p>
-        </p:txBody>
-      </p:sp>
       <p:pic>
         <p:nvPicPr>
-          <p:cNvPr id="4" name="Image 0" descr="/home/claude/f4/img/v2/f2t_shea_tree.jpg">    </p:cNvPr>
+          <p:cNvPr id="3" name="Image 0" descr="/home/claude/f4/img/minesec_sheet.png">    </p:cNvPr>
           <p:cNvPicPr>
             <a:picLocks noChangeAspect="1"/>
           </p:cNvPicPr>
@@ -10947,8 +10771,8 @@
         </p:blipFill>
         <p:spPr>
           <a:xfrm>
-            <a:off x="2246610" y="1783080"/>
-            <a:ext cx="7698475" cy="4270248"/>
+            <a:off x="0" y="658368"/>
+            <a:ext cx="5120640" cy="5833872"/>
           </a:xfrm>
           <a:prstGeom prst="rect">
             <a:avLst/>
@@ -10957,14 +10781,14 @@
       </p:pic>
       <p:sp>
         <p:nvSpPr>
-          <p:cNvPr id="5" name="Text 2"/>
+          <p:cNvPr id="4" name="Text 1"/>
           <p:cNvSpPr/>
           <p:nvPr/>
         </p:nvSpPr>
         <p:spPr>
           <a:xfrm>
-            <a:off x="457200" y="6089904"/>
-            <a:ext cx="11277295" cy="347472"/>
+            <a:off x="5349240" y="1005840"/>
+            <a:ext cx="6522415" cy="731520"/>
           </a:xfrm>
           <a:prstGeom prst="rect">
             <a:avLst/>
@@ -10973,24 +10797,68 @@
           <a:ln/>
         </p:spPr>
         <p:txBody>
-          <a:bodyPr wrap="square" lIns="0" tIns="0" rIns="0" bIns="0" rtlCol="0" anchor="ctr"/>
+          <a:bodyPr wrap="square" lIns="0" tIns="0" rIns="0" bIns="0" rtlCol="0" anchor="ctr">
+            <a:normAutofit/>
+          </a:bodyPr>
           <a:lstStyle/>
           <a:p>
             <a:pPr algn="ctr" indent="0" marL="0">
               <a:buNone/>
             </a:pPr>
             <a:r>
-              <a:rPr lang="en-US" sz="1800" i="1" dirty="0">
-                <a:solidFill>
-                  <a:srgbClr val="555555"/>
+              <a:rPr lang="en-US" sz="3600" b="1" dirty="0">
+                <a:solidFill>
+                  <a:srgbClr val="990011"/>
                 </a:solidFill>
                 <a:latin typeface="Times New Roman" pitchFamily="34" charset="0"/>
                 <a:ea typeface="Times New Roman" pitchFamily="34" charset="-122"/>
                 <a:cs typeface="Times New Roman" pitchFamily="34" charset="-120"/>
               </a:rPr>
-              <a:t>A shea tree.</a:t>
-            </a:r>
-            <a:endParaRPr lang="en-US" sz="1800" dirty="0"/>
+              <a:t>Activity 3: Question</a:t>
+            </a:r>
+            <a:endParaRPr lang="en-US" sz="3600" dirty="0"/>
+          </a:p>
+        </p:txBody>
+      </p:sp>
+      <p:sp>
+        <p:nvSpPr>
+          <p:cNvPr id="5" name="Text 2"/>
+          <p:cNvSpPr/>
+          <p:nvPr/>
+        </p:nvSpPr>
+        <p:spPr>
+          <a:xfrm>
+            <a:off x="5349240" y="1783080"/>
+            <a:ext cx="6522415" cy="4663440"/>
+          </a:xfrm>
+          <a:prstGeom prst="rect">
+            <a:avLst/>
+          </a:prstGeom>
+          <a:noFill/>
+          <a:ln/>
+        </p:spPr>
+        <p:txBody>
+          <a:bodyPr wrap="square" lIns="0" tIns="0" rIns="0" bIns="0" rtlCol="0" anchor="t"/>
+          <a:lstStyle/>
+          <a:p>
+            <a:pPr algn="l" indent="0" marL="0">
+              <a:spcAft>
+                <a:spcPts val="800"/>
+              </a:spcAft>
+              <a:buNone/>
+            </a:pPr>
+            <a:r>
+              <a:rPr lang="en-US" sz="4000" dirty="0">
+                <a:solidFill>
+                  <a:srgbClr val="111111"/>
+                </a:solidFill>
+                <a:latin typeface="Times New Roman" pitchFamily="34" charset="0"/>
+                <a:ea typeface="Times New Roman" pitchFamily="34" charset="-122"/>
+                <a:cs typeface="Times New Roman" pitchFamily="34" charset="-120"/>
+              </a:rPr>
+              <a:t>How does the thick bark help the shea tree?</a:t>
+            </a:r>
+            <a:endParaRPr lang="en-US" sz="4000" dirty="0"/>
           </a:p>
         </p:txBody>
       </p:sp>
@@ -11165,7 +11033,7 @@
                 <a:ea typeface="Times New Roman" pitchFamily="34" charset="-122"/>
                 <a:cs typeface="Times New Roman" pitchFamily="34" charset="-120"/>
               </a:rPr>
-              <a:t>Activity 3: Question</a:t>
+              <a:t>Activity 3: Answer</a:t>
             </a:r>
             <a:endParaRPr lang="en-US" sz="3600" dirty="0"/>
           </a:p>
@@ -11207,7 +11075,7 @@
                 <a:ea typeface="Times New Roman" pitchFamily="34" charset="-122"/>
                 <a:cs typeface="Times New Roman" pitchFamily="34" charset="-120"/>
               </a:rPr>
-              <a:t>How does the thick bark help the shea tree?</a:t>
+              <a:t>It protects the tree from bush fires.</a:t>
             </a:r>
             <a:endParaRPr lang="en-US" sz="4000" dirty="0"/>
           </a:p>
@@ -11319,15 +11187,54 @@
                 <a:ea typeface="Calibri" pitchFamily="34" charset="-122"/>
                 <a:cs typeface="Calibri" pitchFamily="34" charset="-120"/>
               </a:rPr>
-              <a:t>1. VEGETATION</a:t>
+              <a:t>2. SOILS</a:t>
             </a:r>
             <a:endParaRPr lang="en-US" sz="1400" dirty="0"/>
+          </a:p>
+        </p:txBody>
+      </p:sp>
+      <p:sp>
+        <p:nvSpPr>
+          <p:cNvPr id="3" name="Text 1"/>
+          <p:cNvSpPr/>
+          <p:nvPr/>
+        </p:nvSpPr>
+        <p:spPr>
+          <a:xfrm>
+            <a:off x="457200" y="1005840"/>
+            <a:ext cx="11277295" cy="731520"/>
+          </a:xfrm>
+          <a:prstGeom prst="rect">
+            <a:avLst/>
+          </a:prstGeom>
+          <a:noFill/>
+          <a:ln/>
+        </p:spPr>
+        <p:txBody>
+          <a:bodyPr wrap="square" lIns="0" tIns="0" rIns="0" bIns="0" rtlCol="0" anchor="ctr"/>
+          <a:lstStyle/>
+          <a:p>
+            <a:pPr algn="ctr" indent="0" marL="0">
+              <a:buNone/>
+            </a:pPr>
+            <a:r>
+              <a:rPr lang="en-US" sz="3600" b="1" dirty="0">
+                <a:solidFill>
+                  <a:srgbClr val="990011"/>
+                </a:solidFill>
+                <a:latin typeface="Times New Roman" pitchFamily="34" charset="0"/>
+                <a:ea typeface="Times New Roman" pitchFamily="34" charset="-122"/>
+                <a:cs typeface="Times New Roman" pitchFamily="34" charset="-120"/>
+              </a:rPr>
+              <a:t>Activity 4</a:t>
+            </a:r>
+            <a:endParaRPr lang="en-US" sz="3600" dirty="0"/>
           </a:p>
         </p:txBody>
       </p:sp>
       <p:pic>
         <p:nvPicPr>
-          <p:cNvPr id="3" name="Image 0" descr="/home/claude/f4/img/minesec_sheet.png">    </p:cNvPr>
+          <p:cNvPr id="4" name="Image 0" descr="/home/claude/f4/img/v2/f2t_laterite.jpg">    </p:cNvPr>
           <p:cNvPicPr>
             <a:picLocks noChangeAspect="1"/>
           </p:cNvPicPr>
@@ -11341,8 +11248,8 @@
         </p:blipFill>
         <p:spPr>
           <a:xfrm>
-            <a:off x="0" y="658368"/>
-            <a:ext cx="5120640" cy="5833872"/>
+            <a:off x="2248777" y="1783080"/>
+            <a:ext cx="7694141" cy="4270248"/>
           </a:xfrm>
           <a:prstGeom prst="rect">
             <a:avLst/>
@@ -11351,14 +11258,14 @@
       </p:pic>
       <p:sp>
         <p:nvSpPr>
-          <p:cNvPr id="4" name="Text 1"/>
+          <p:cNvPr id="5" name="Text 2"/>
           <p:cNvSpPr/>
           <p:nvPr/>
         </p:nvSpPr>
         <p:spPr>
           <a:xfrm>
-            <a:off x="5349240" y="1005840"/>
-            <a:ext cx="6522415" cy="731520"/>
+            <a:off x="457200" y="6089904"/>
+            <a:ext cx="11277295" cy="347472"/>
           </a:xfrm>
           <a:prstGeom prst="rect">
             <a:avLst/>
@@ -11367,68 +11274,24 @@
           <a:ln/>
         </p:spPr>
         <p:txBody>
-          <a:bodyPr wrap="square" lIns="0" tIns="0" rIns="0" bIns="0" rtlCol="0" anchor="ctr">
-            <a:normAutofit/>
-          </a:bodyPr>
+          <a:bodyPr wrap="square" lIns="0" tIns="0" rIns="0" bIns="0" rtlCol="0" anchor="ctr"/>
           <a:lstStyle/>
           <a:p>
             <a:pPr algn="ctr" indent="0" marL="0">
               <a:buNone/>
             </a:pPr>
             <a:r>
-              <a:rPr lang="en-US" sz="3600" b="1" dirty="0">
-                <a:solidFill>
-                  <a:srgbClr val="990011"/>
+              <a:rPr lang="en-US" sz="1800" i="1" dirty="0">
+                <a:solidFill>
+                  <a:srgbClr val="555555"/>
                 </a:solidFill>
                 <a:latin typeface="Times New Roman" pitchFamily="34" charset="0"/>
                 <a:ea typeface="Times New Roman" pitchFamily="34" charset="-122"/>
                 <a:cs typeface="Times New Roman" pitchFamily="34" charset="-120"/>
               </a:rPr>
-              <a:t>Activity 3: Answer</a:t>
-            </a:r>
-            <a:endParaRPr lang="en-US" sz="3600" dirty="0"/>
-          </a:p>
-        </p:txBody>
-      </p:sp>
-      <p:sp>
-        <p:nvSpPr>
-          <p:cNvPr id="5" name="Text 2"/>
-          <p:cNvSpPr/>
-          <p:nvPr/>
-        </p:nvSpPr>
-        <p:spPr>
-          <a:xfrm>
-            <a:off x="5349240" y="1783080"/>
-            <a:ext cx="6522415" cy="4663440"/>
-          </a:xfrm>
-          <a:prstGeom prst="rect">
-            <a:avLst/>
-          </a:prstGeom>
-          <a:noFill/>
-          <a:ln/>
-        </p:spPr>
-        <p:txBody>
-          <a:bodyPr wrap="square" lIns="0" tIns="0" rIns="0" bIns="0" rtlCol="0" anchor="t"/>
-          <a:lstStyle/>
-          <a:p>
-            <a:pPr algn="l" indent="0" marL="0">
-              <a:spcAft>
-                <a:spcPts val="800"/>
-              </a:spcAft>
-              <a:buNone/>
-            </a:pPr>
-            <a:r>
-              <a:rPr lang="en-US" sz="4000" dirty="0">
-                <a:solidFill>
-                  <a:srgbClr val="111111"/>
-                </a:solidFill>
-                <a:latin typeface="Times New Roman" pitchFamily="34" charset="0"/>
-                <a:ea typeface="Times New Roman" pitchFamily="34" charset="-122"/>
-                <a:cs typeface="Times New Roman" pitchFamily="34" charset="-120"/>
-              </a:rPr>
-              <a:t>It protects the tree from bush fires.</a:t>
-            </a:r>
-            <a:endParaRPr lang="en-US" sz="4000" dirty="0"/>
+              <a:t>A red, hard soil.</a:t>
+            </a:r>
+            <a:endParaRPr lang="en-US" sz="1800" dirty="0"/>
           </a:p>
         </p:txBody>
       </p:sp>
@@ -11544,48 +11407,9 @@
           </a:p>
         </p:txBody>
       </p:sp>
-      <p:sp>
-        <p:nvSpPr>
-          <p:cNvPr id="3" name="Text 1"/>
-          <p:cNvSpPr/>
-          <p:nvPr/>
-        </p:nvSpPr>
-        <p:spPr>
-          <a:xfrm>
-            <a:off x="457200" y="1005840"/>
-            <a:ext cx="11277295" cy="731520"/>
-          </a:xfrm>
-          <a:prstGeom prst="rect">
-            <a:avLst/>
-          </a:prstGeom>
-          <a:noFill/>
-          <a:ln/>
-        </p:spPr>
-        <p:txBody>
-          <a:bodyPr wrap="square" lIns="0" tIns="0" rIns="0" bIns="0" rtlCol="0" anchor="ctr"/>
-          <a:lstStyle/>
-          <a:p>
-            <a:pPr algn="ctr" indent="0" marL="0">
-              <a:buNone/>
-            </a:pPr>
-            <a:r>
-              <a:rPr lang="en-US" sz="3600" b="1" dirty="0">
-                <a:solidFill>
-                  <a:srgbClr val="990011"/>
-                </a:solidFill>
-                <a:latin typeface="Times New Roman" pitchFamily="34" charset="0"/>
-                <a:ea typeface="Times New Roman" pitchFamily="34" charset="-122"/>
-                <a:cs typeface="Times New Roman" pitchFamily="34" charset="-120"/>
-              </a:rPr>
-              <a:t>Activity 4</a:t>
-            </a:r>
-            <a:endParaRPr lang="en-US" sz="3600" dirty="0"/>
-          </a:p>
-        </p:txBody>
-      </p:sp>
       <p:pic>
         <p:nvPicPr>
-          <p:cNvPr id="4" name="Image 0" descr="/home/claude/f4/img/v2/f2t_laterite.jpg">    </p:cNvPr>
+          <p:cNvPr id="3" name="Image 0" descr="/home/claude/f4/img/minesec_sheet.png">    </p:cNvPr>
           <p:cNvPicPr>
             <a:picLocks noChangeAspect="1"/>
           </p:cNvPicPr>
@@ -11599,8 +11423,8 @@
         </p:blipFill>
         <p:spPr>
           <a:xfrm>
-            <a:off x="2248777" y="1783080"/>
-            <a:ext cx="7694141" cy="4270248"/>
+            <a:off x="0" y="658368"/>
+            <a:ext cx="5120640" cy="5833872"/>
           </a:xfrm>
           <a:prstGeom prst="rect">
             <a:avLst/>
@@ -11609,14 +11433,14 @@
       </p:pic>
       <p:sp>
         <p:nvSpPr>
-          <p:cNvPr id="5" name="Text 2"/>
+          <p:cNvPr id="4" name="Text 1"/>
           <p:cNvSpPr/>
           <p:nvPr/>
         </p:nvSpPr>
         <p:spPr>
           <a:xfrm>
-            <a:off x="457200" y="6089904"/>
-            <a:ext cx="11277295" cy="347472"/>
+            <a:off x="5349240" y="1005840"/>
+            <a:ext cx="6522415" cy="731520"/>
           </a:xfrm>
           <a:prstGeom prst="rect">
             <a:avLst/>
@@ -11625,24 +11449,68 @@
           <a:ln/>
         </p:spPr>
         <p:txBody>
-          <a:bodyPr wrap="square" lIns="0" tIns="0" rIns="0" bIns="0" rtlCol="0" anchor="ctr"/>
+          <a:bodyPr wrap="square" lIns="0" tIns="0" rIns="0" bIns="0" rtlCol="0" anchor="ctr">
+            <a:normAutofit/>
+          </a:bodyPr>
           <a:lstStyle/>
           <a:p>
             <a:pPr algn="ctr" indent="0" marL="0">
               <a:buNone/>
             </a:pPr>
             <a:r>
-              <a:rPr lang="en-US" sz="1800" i="1" dirty="0">
-                <a:solidFill>
-                  <a:srgbClr val="555555"/>
+              <a:rPr lang="en-US" sz="3600" b="1" dirty="0">
+                <a:solidFill>
+                  <a:srgbClr val="990011"/>
                 </a:solidFill>
                 <a:latin typeface="Times New Roman" pitchFamily="34" charset="0"/>
                 <a:ea typeface="Times New Roman" pitchFamily="34" charset="-122"/>
                 <a:cs typeface="Times New Roman" pitchFamily="34" charset="-120"/>
               </a:rPr>
-              <a:t>A red, hard soil.</a:t>
-            </a:r>
-            <a:endParaRPr lang="en-US" sz="1800" dirty="0"/>
+              <a:t>Activity 4: Question</a:t>
+            </a:r>
+            <a:endParaRPr lang="en-US" sz="3600" dirty="0"/>
+          </a:p>
+        </p:txBody>
+      </p:sp>
+      <p:sp>
+        <p:nvSpPr>
+          <p:cNvPr id="5" name="Text 2"/>
+          <p:cNvSpPr/>
+          <p:nvPr/>
+        </p:nvSpPr>
+        <p:spPr>
+          <a:xfrm>
+            <a:off x="5349240" y="1783080"/>
+            <a:ext cx="6522415" cy="4663440"/>
+          </a:xfrm>
+          <a:prstGeom prst="rect">
+            <a:avLst/>
+          </a:prstGeom>
+          <a:noFill/>
+          <a:ln/>
+        </p:spPr>
+        <p:txBody>
+          <a:bodyPr wrap="square" lIns="0" tIns="0" rIns="0" bIns="0" rtlCol="0" anchor="t"/>
+          <a:lstStyle/>
+          <a:p>
+            <a:pPr algn="l" indent="0" marL="0">
+              <a:spcAft>
+                <a:spcPts val="800"/>
+              </a:spcAft>
+              <a:buNone/>
+            </a:pPr>
+            <a:r>
+              <a:rPr lang="en-US" sz="4000" dirty="0">
+                <a:solidFill>
+                  <a:srgbClr val="111111"/>
+                </a:solidFill>
+                <a:latin typeface="Times New Roman" pitchFamily="34" charset="0"/>
+                <a:ea typeface="Times New Roman" pitchFamily="34" charset="-122"/>
+                <a:cs typeface="Times New Roman" pitchFamily="34" charset="-120"/>
+              </a:rPr>
+              <a:t>What is this red soil that becomes hard when it dries?</a:t>
+            </a:r>
+            <a:endParaRPr lang="en-US" sz="4000" dirty="0"/>
           </a:p>
         </p:txBody>
       </p:sp>
@@ -12826,7 +12694,7 @@
                 <a:ea typeface="Times New Roman" pitchFamily="34" charset="-122"/>
                 <a:cs typeface="Times New Roman" pitchFamily="34" charset="-120"/>
               </a:rPr>
-              <a:t>Activity 4: Question</a:t>
+              <a:t>Activity 4: Answer</a:t>
             </a:r>
             <a:endParaRPr lang="en-US" sz="3600" dirty="0"/>
           </a:p>
@@ -12868,7 +12736,7 @@
                 <a:ea typeface="Times New Roman" pitchFamily="34" charset="-122"/>
                 <a:cs typeface="Times New Roman" pitchFamily="34" charset="-120"/>
               </a:rPr>
-              <a:t>What is this red soil that becomes hard when it dries?</a:t>
+              <a:t>Laterite.</a:t>
             </a:r>
             <a:endParaRPr lang="en-US" sz="4000" dirty="0"/>
           </a:p>
@@ -12986,9 +12854,48 @@
           </a:p>
         </p:txBody>
       </p:sp>
+      <p:sp>
+        <p:nvSpPr>
+          <p:cNvPr id="3" name="Text 1"/>
+          <p:cNvSpPr/>
+          <p:nvPr/>
+        </p:nvSpPr>
+        <p:spPr>
+          <a:xfrm>
+            <a:off x="457200" y="1005840"/>
+            <a:ext cx="11277295" cy="731520"/>
+          </a:xfrm>
+          <a:prstGeom prst="rect">
+            <a:avLst/>
+          </a:prstGeom>
+          <a:noFill/>
+          <a:ln/>
+        </p:spPr>
+        <p:txBody>
+          <a:bodyPr wrap="square" lIns="0" tIns="0" rIns="0" bIns="0" rtlCol="0" anchor="ctr"/>
+          <a:lstStyle/>
+          <a:p>
+            <a:pPr algn="ctr" indent="0" marL="0">
+              <a:buNone/>
+            </a:pPr>
+            <a:r>
+              <a:rPr lang="en-US" sz="3600" b="1" dirty="0">
+                <a:solidFill>
+                  <a:srgbClr val="990011"/>
+                </a:solidFill>
+                <a:latin typeface="Times New Roman" pitchFamily="34" charset="0"/>
+                <a:ea typeface="Times New Roman" pitchFamily="34" charset="-122"/>
+                <a:cs typeface="Times New Roman" pitchFamily="34" charset="-120"/>
+              </a:rPr>
+              <a:t>Activity 5</a:t>
+            </a:r>
+            <a:endParaRPr lang="en-US" sz="3600" dirty="0"/>
+          </a:p>
+        </p:txBody>
+      </p:sp>
       <p:pic>
         <p:nvPicPr>
-          <p:cNvPr id="3" name="Image 0" descr="/home/claude/f4/img/minesec_sheet.png">    </p:cNvPr>
+          <p:cNvPr id="4" name="Image 0" descr="/home/claude/f4/img/v2/f2t_cracked_soil.jpg">    </p:cNvPr>
           <p:cNvPicPr>
             <a:picLocks noChangeAspect="1"/>
           </p:cNvPicPr>
@@ -13002,8 +12909,8 @@
         </p:blipFill>
         <p:spPr>
           <a:xfrm>
-            <a:off x="0" y="658368"/>
-            <a:ext cx="5120640" cy="5833872"/>
+            <a:off x="2246610" y="1783080"/>
+            <a:ext cx="7698475" cy="4270248"/>
           </a:xfrm>
           <a:prstGeom prst="rect">
             <a:avLst/>
@@ -13012,14 +12919,14 @@
       </p:pic>
       <p:sp>
         <p:nvSpPr>
-          <p:cNvPr id="4" name="Text 1"/>
+          <p:cNvPr id="5" name="Text 2"/>
           <p:cNvSpPr/>
           <p:nvPr/>
         </p:nvSpPr>
         <p:spPr>
           <a:xfrm>
-            <a:off x="5349240" y="1005840"/>
-            <a:ext cx="6522415" cy="731520"/>
+            <a:off x="457200" y="6089904"/>
+            <a:ext cx="11277295" cy="347472"/>
           </a:xfrm>
           <a:prstGeom prst="rect">
             <a:avLst/>
@@ -13028,68 +12935,24 @@
           <a:ln/>
         </p:spPr>
         <p:txBody>
-          <a:bodyPr wrap="square" lIns="0" tIns="0" rIns="0" bIns="0" rtlCol="0" anchor="ctr">
-            <a:normAutofit/>
-          </a:bodyPr>
+          <a:bodyPr wrap="square" lIns="0" tIns="0" rIns="0" bIns="0" rtlCol="0" anchor="ctr"/>
           <a:lstStyle/>
           <a:p>
             <a:pPr algn="ctr" indent="0" marL="0">
               <a:buNone/>
             </a:pPr>
             <a:r>
-              <a:rPr lang="en-US" sz="3600" b="1" dirty="0">
-                <a:solidFill>
-                  <a:srgbClr val="990011"/>
+              <a:rPr lang="en-US" sz="1800" i="1" dirty="0">
+                <a:solidFill>
+                  <a:srgbClr val="555555"/>
                 </a:solidFill>
                 <a:latin typeface="Times New Roman" pitchFamily="34" charset="0"/>
                 <a:ea typeface="Times New Roman" pitchFamily="34" charset="-122"/>
                 <a:cs typeface="Times New Roman" pitchFamily="34" charset="-120"/>
               </a:rPr>
-              <a:t>Activity 4: Answer</a:t>
-            </a:r>
-            <a:endParaRPr lang="en-US" sz="3600" dirty="0"/>
-          </a:p>
-        </p:txBody>
-      </p:sp>
-      <p:sp>
-        <p:nvSpPr>
-          <p:cNvPr id="5" name="Text 2"/>
-          <p:cNvSpPr/>
-          <p:nvPr/>
-        </p:nvSpPr>
-        <p:spPr>
-          <a:xfrm>
-            <a:off x="5349240" y="1783080"/>
-            <a:ext cx="6522415" cy="4663440"/>
-          </a:xfrm>
-          <a:prstGeom prst="rect">
-            <a:avLst/>
-          </a:prstGeom>
-          <a:noFill/>
-          <a:ln/>
-        </p:spPr>
-        <p:txBody>
-          <a:bodyPr wrap="square" lIns="0" tIns="0" rIns="0" bIns="0" rtlCol="0" anchor="t"/>
-          <a:lstStyle/>
-          <a:p>
-            <a:pPr algn="l" indent="0" marL="0">
-              <a:spcAft>
-                <a:spcPts val="800"/>
-              </a:spcAft>
-              <a:buNone/>
-            </a:pPr>
-            <a:r>
-              <a:rPr lang="en-US" sz="4000" dirty="0">
-                <a:solidFill>
-                  <a:srgbClr val="111111"/>
-                </a:solidFill>
-                <a:latin typeface="Times New Roman" pitchFamily="34" charset="0"/>
-                <a:ea typeface="Times New Roman" pitchFamily="34" charset="-122"/>
-                <a:cs typeface="Times New Roman" pitchFamily="34" charset="-120"/>
-              </a:rPr>
-              <a:t>Laterite.</a:t>
-            </a:r>
-            <a:endParaRPr lang="en-US" sz="4000" dirty="0"/>
+              <a:t>A black soil that cracks.</a:t>
+            </a:r>
+            <a:endParaRPr lang="en-US" sz="1800" dirty="0"/>
           </a:p>
         </p:txBody>
       </p:sp>
@@ -13205,48 +13068,9 @@
           </a:p>
         </p:txBody>
       </p:sp>
-      <p:sp>
-        <p:nvSpPr>
-          <p:cNvPr id="3" name="Text 1"/>
-          <p:cNvSpPr/>
-          <p:nvPr/>
-        </p:nvSpPr>
-        <p:spPr>
-          <a:xfrm>
-            <a:off x="457200" y="1005840"/>
-            <a:ext cx="11277295" cy="731520"/>
-          </a:xfrm>
-          <a:prstGeom prst="rect">
-            <a:avLst/>
-          </a:prstGeom>
-          <a:noFill/>
-          <a:ln/>
-        </p:spPr>
-        <p:txBody>
-          <a:bodyPr wrap="square" lIns="0" tIns="0" rIns="0" bIns="0" rtlCol="0" anchor="ctr"/>
-          <a:lstStyle/>
-          <a:p>
-            <a:pPr algn="ctr" indent="0" marL="0">
-              <a:buNone/>
-            </a:pPr>
-            <a:r>
-              <a:rPr lang="en-US" sz="3600" b="1" dirty="0">
-                <a:solidFill>
-                  <a:srgbClr val="990011"/>
-                </a:solidFill>
-                <a:latin typeface="Times New Roman" pitchFamily="34" charset="0"/>
-                <a:ea typeface="Times New Roman" pitchFamily="34" charset="-122"/>
-                <a:cs typeface="Times New Roman" pitchFamily="34" charset="-120"/>
-              </a:rPr>
-              <a:t>Activity 5</a:t>
-            </a:r>
-            <a:endParaRPr lang="en-US" sz="3600" dirty="0"/>
-          </a:p>
-        </p:txBody>
-      </p:sp>
       <p:pic>
         <p:nvPicPr>
-          <p:cNvPr id="4" name="Image 0" descr="/home/claude/f4/img/v2/f2t_cracked_soil.jpg">    </p:cNvPr>
+          <p:cNvPr id="3" name="Image 0" descr="/home/claude/f4/img/minesec_sheet.png">    </p:cNvPr>
           <p:cNvPicPr>
             <a:picLocks noChangeAspect="1"/>
           </p:cNvPicPr>
@@ -13260,8 +13084,8 @@
         </p:blipFill>
         <p:spPr>
           <a:xfrm>
-            <a:off x="2246610" y="1783080"/>
-            <a:ext cx="7698475" cy="4270248"/>
+            <a:off x="0" y="658368"/>
+            <a:ext cx="5120640" cy="5833872"/>
           </a:xfrm>
           <a:prstGeom prst="rect">
             <a:avLst/>
@@ -13270,14 +13094,14 @@
       </p:pic>
       <p:sp>
         <p:nvSpPr>
-          <p:cNvPr id="5" name="Text 2"/>
+          <p:cNvPr id="4" name="Text 1"/>
           <p:cNvSpPr/>
           <p:nvPr/>
         </p:nvSpPr>
         <p:spPr>
           <a:xfrm>
-            <a:off x="457200" y="6089904"/>
-            <a:ext cx="11277295" cy="347472"/>
+            <a:off x="5349240" y="1005840"/>
+            <a:ext cx="6522415" cy="731520"/>
           </a:xfrm>
           <a:prstGeom prst="rect">
             <a:avLst/>
@@ -13286,24 +13110,68 @@
           <a:ln/>
         </p:spPr>
         <p:txBody>
-          <a:bodyPr wrap="square" lIns="0" tIns="0" rIns="0" bIns="0" rtlCol="0" anchor="ctr"/>
+          <a:bodyPr wrap="square" lIns="0" tIns="0" rIns="0" bIns="0" rtlCol="0" anchor="ctr">
+            <a:normAutofit/>
+          </a:bodyPr>
           <a:lstStyle/>
           <a:p>
             <a:pPr algn="ctr" indent="0" marL="0">
               <a:buNone/>
             </a:pPr>
             <a:r>
-              <a:rPr lang="en-US" sz="1800" i="1" dirty="0">
-                <a:solidFill>
-                  <a:srgbClr val="555555"/>
+              <a:rPr lang="en-US" sz="3600" b="1" dirty="0">
+                <a:solidFill>
+                  <a:srgbClr val="990011"/>
                 </a:solidFill>
                 <a:latin typeface="Times New Roman" pitchFamily="34" charset="0"/>
                 <a:ea typeface="Times New Roman" pitchFamily="34" charset="-122"/>
                 <a:cs typeface="Times New Roman" pitchFamily="34" charset="-120"/>
               </a:rPr>
-              <a:t>A black soil that cracks.</a:t>
-            </a:r>
-            <a:endParaRPr lang="en-US" sz="1800" dirty="0"/>
+              <a:t>Activity 5: Question</a:t>
+            </a:r>
+            <a:endParaRPr lang="en-US" sz="3600" dirty="0"/>
+          </a:p>
+        </p:txBody>
+      </p:sp>
+      <p:sp>
+        <p:nvSpPr>
+          <p:cNvPr id="5" name="Text 2"/>
+          <p:cNvSpPr/>
+          <p:nvPr/>
+        </p:nvSpPr>
+        <p:spPr>
+          <a:xfrm>
+            <a:off x="5349240" y="1783080"/>
+            <a:ext cx="6522415" cy="4663440"/>
+          </a:xfrm>
+          <a:prstGeom prst="rect">
+            <a:avLst/>
+          </a:prstGeom>
+          <a:noFill/>
+          <a:ln/>
+        </p:spPr>
+        <p:txBody>
+          <a:bodyPr wrap="square" lIns="0" tIns="0" rIns="0" bIns="0" rtlCol="0" anchor="t"/>
+          <a:lstStyle/>
+          <a:p>
+            <a:pPr algn="l" indent="0" marL="0">
+              <a:spcAft>
+                <a:spcPts val="800"/>
+              </a:spcAft>
+              <a:buNone/>
+            </a:pPr>
+            <a:r>
+              <a:rPr lang="en-US" sz="4000" dirty="0">
+                <a:solidFill>
+                  <a:srgbClr val="111111"/>
+                </a:solidFill>
+                <a:latin typeface="Times New Roman" pitchFamily="34" charset="0"/>
+                <a:ea typeface="Times New Roman" pitchFamily="34" charset="-122"/>
+                <a:cs typeface="Times New Roman" pitchFamily="34" charset="-120"/>
+              </a:rPr>
+              <a:t>Why do farmers like black cotton soils?</a:t>
+            </a:r>
+            <a:endParaRPr lang="en-US" sz="4000" dirty="0"/>
           </a:p>
         </p:txBody>
       </p:sp>
@@ -13478,7 +13346,7 @@
                 <a:ea typeface="Times New Roman" pitchFamily="34" charset="-122"/>
                 <a:cs typeface="Times New Roman" pitchFamily="34" charset="-120"/>
               </a:rPr>
-              <a:t>Activity 5: Question</a:t>
+              <a:t>Activity 5: Answer</a:t>
             </a:r>
             <a:endParaRPr lang="en-US" sz="3600" dirty="0"/>
           </a:p>
@@ -13520,7 +13388,7 @@
                 <a:ea typeface="Times New Roman" pitchFamily="34" charset="-122"/>
                 <a:cs typeface="Times New Roman" pitchFamily="34" charset="-120"/>
               </a:rPr>
-              <a:t>Why do farmers like black cotton soils?</a:t>
+              <a:t>They are fertile and keep water.</a:t>
             </a:r>
             <a:endParaRPr lang="en-US" sz="4000" dirty="0"/>
           </a:p>
@@ -13632,7 +13500,7 @@
                 <a:ea typeface="Calibri" pitchFamily="34" charset="-122"/>
                 <a:cs typeface="Calibri" pitchFamily="34" charset="-120"/>
               </a:rPr>
-              <a:t>2. SOILS</a:t>
+              <a:t>BOARD SUMMARY</a:t>
             </a:r>
             <a:endParaRPr lang="en-US" sz="1400" dirty="0"/>
           </a:p>
@@ -13697,7 +13565,7 @@
                 <a:ea typeface="Times New Roman" pitchFamily="34" charset="-122"/>
                 <a:cs typeface="Times New Roman" pitchFamily="34" charset="-120"/>
               </a:rPr>
-              <a:t>Activity 5: Answer</a:t>
+              <a:t>Board Summary</a:t>
             </a:r>
             <a:endParaRPr lang="en-US" sz="3600" dirty="0"/>
           </a:p>
@@ -13731,7 +13599,7 @@
               <a:buNone/>
             </a:pPr>
             <a:r>
-              <a:rPr lang="en-US" sz="4000" dirty="0">
+              <a:rPr lang="en-US" sz="3200" b="1" dirty="0">
                 <a:solidFill>
                   <a:srgbClr val="111111"/>
                 </a:solidFill>
@@ -13739,9 +13607,49 @@
                 <a:ea typeface="Times New Roman" pitchFamily="34" charset="-122"/>
                 <a:cs typeface="Times New Roman" pitchFamily="34" charset="-120"/>
               </a:rPr>
-              <a:t>They are fertile and keep water.</a:t>
-            </a:r>
-            <a:endParaRPr lang="en-US" sz="4000" dirty="0"/>
+              <a:t>Topic: Man in His Environment</a:t>
+            </a:r>
+            <a:endParaRPr lang="en-US" sz="3200" dirty="0"/>
+          </a:p>
+          <a:p>
+            <a:pPr algn="l" indent="0" marL="0">
+              <a:spcAft>
+                <a:spcPts val="800"/>
+              </a:spcAft>
+              <a:buNone/>
+            </a:pPr>
+            <a:r>
+              <a:rPr lang="en-US" sz="3200" b="1" dirty="0">
+                <a:solidFill>
+                  <a:srgbClr val="111111"/>
+                </a:solidFill>
+                <a:latin typeface="Times New Roman" pitchFamily="34" charset="0"/>
+                <a:ea typeface="Times New Roman" pitchFamily="34" charset="-122"/>
+                <a:cs typeface="Times New Roman" pitchFamily="34" charset="-120"/>
+              </a:rPr>
+              <a:t>Sub-topic: Natural Regions</a:t>
+            </a:r>
+            <a:endParaRPr lang="en-US" sz="3200" dirty="0"/>
+          </a:p>
+          <a:p>
+            <a:pPr algn="l" indent="0" marL="0">
+              <a:spcAft>
+                <a:spcPts val="800"/>
+              </a:spcAft>
+              <a:buNone/>
+            </a:pPr>
+            <a:r>
+              <a:rPr lang="en-US" sz="3200" b="1" dirty="0">
+                <a:solidFill>
+                  <a:srgbClr val="990011"/>
+                </a:solidFill>
+                <a:latin typeface="Times New Roman" pitchFamily="34" charset="0"/>
+                <a:ea typeface="Times New Roman" pitchFamily="34" charset="-122"/>
+                <a:cs typeface="Times New Roman" pitchFamily="34" charset="-120"/>
+              </a:rPr>
+              <a:t>Lesson 2 (Part 2): The Tropical Grassland Region: Characteristics (Soils and Vegetation)</a:t>
+            </a:r>
+            <a:endParaRPr lang="en-US" sz="3200" dirty="0"/>
           </a:p>
         </p:txBody>
       </p:sp>
@@ -13874,7 +13782,7 @@
         <p:spPr>
           <a:xfrm>
             <a:off x="0" y="658368"/>
-            <a:ext cx="5120640" cy="5833872"/>
+            <a:ext cx="3840480" cy="5833872"/>
           </a:xfrm>
           <a:prstGeom prst="rect">
             <a:avLst/>
@@ -13889,8 +13797,8 @@
         </p:nvSpPr>
         <p:spPr>
           <a:xfrm>
-            <a:off x="5349240" y="1005840"/>
-            <a:ext cx="6522415" cy="731520"/>
+            <a:off x="4069080" y="1005840"/>
+            <a:ext cx="7802575" cy="731520"/>
           </a:xfrm>
           <a:prstGeom prst="rect">
             <a:avLst/>
@@ -13916,7 +13824,7 @@
                 <a:ea typeface="Times New Roman" pitchFamily="34" charset="-122"/>
                 <a:cs typeface="Times New Roman" pitchFamily="34" charset="-120"/>
               </a:rPr>
-              <a:t>Board Summary</a:t>
+              <a:t>DEFINITIONS</a:t>
             </a:r>
             <a:endParaRPr lang="en-US" sz="3600" dirty="0"/>
           </a:p>
@@ -13930,8 +13838,8 @@
         </p:nvSpPr>
         <p:spPr>
           <a:xfrm>
-            <a:off x="5349240" y="1783080"/>
-            <a:ext cx="6522415" cy="4663440"/>
+            <a:off x="4069080" y="1783080"/>
+            <a:ext cx="7802575" cy="4663440"/>
           </a:xfrm>
           <a:prstGeom prst="rect">
             <a:avLst/>
@@ -13950,7 +13858,7 @@
               <a:buNone/>
             </a:pPr>
             <a:r>
-              <a:rPr lang="en-US" sz="3200" b="1" dirty="0">
+              <a:rPr lang="en-US" sz="4000" i="1" dirty="0">
                 <a:solidFill>
                   <a:srgbClr val="111111"/>
                 </a:solidFill>
@@ -13958,19 +13866,20 @@
                 <a:ea typeface="Times New Roman" pitchFamily="34" charset="-122"/>
                 <a:cs typeface="Times New Roman" pitchFamily="34" charset="-120"/>
               </a:rPr>
-              <a:t>Topic: Man in His Environment</a:t>
-            </a:r>
-            <a:endParaRPr lang="en-US" sz="3200" dirty="0"/>
-          </a:p>
-          <a:p>
-            <a:pPr algn="l" indent="0" marL="0">
+              <a:t>The key terms of this lesson are defined as follows:</a:t>
+            </a:r>
+            <a:endParaRPr lang="en-US" sz="4000" dirty="0"/>
+          </a:p>
+          <a:p>
+            <a:pPr algn="l" marL="342900" indent="-342900">
               <a:spcAft>
                 <a:spcPts val="800"/>
               </a:spcAft>
-              <a:buNone/>
+              <a:buSzPct val="100000"/>
+              <a:buChar char="•"/>
             </a:pPr>
             <a:r>
-              <a:rPr lang="en-US" sz="3200" b="1" dirty="0">
+              <a:rPr lang="en-US" sz="4000" b="1" dirty="0">
                 <a:solidFill>
                   <a:srgbClr val="111111"/>
                 </a:solidFill>
@@ -13978,29 +13887,66 @@
                 <a:ea typeface="Times New Roman" pitchFamily="34" charset="-122"/>
                 <a:cs typeface="Times New Roman" pitchFamily="34" charset="-120"/>
               </a:rPr>
-              <a:t>Sub-topic: Natural Regions</a:t>
-            </a:r>
-            <a:endParaRPr lang="en-US" sz="3200" dirty="0"/>
-          </a:p>
-          <a:p>
-            <a:pPr algn="l" indent="0" marL="0">
+              <a:t>Savanna: </a:t>
+            </a:r>
+            <a:pPr algn="l" marL="342900" indent="-342900">
               <a:spcAft>
                 <a:spcPts val="800"/>
               </a:spcAft>
-              <a:buNone/>
+              <a:buSzPct val="100000"/>
+              <a:buChar char="•"/>
             </a:pPr>
             <a:r>
-              <a:rPr lang="en-US" sz="3200" b="1" dirty="0">
-                <a:solidFill>
-                  <a:srgbClr val="990011"/>
+              <a:rPr lang="en-US" sz="4000" dirty="0">
+                <a:solidFill>
+                  <a:srgbClr val="111111"/>
                 </a:solidFill>
                 <a:latin typeface="Times New Roman" pitchFamily="34" charset="0"/>
                 <a:ea typeface="Times New Roman" pitchFamily="34" charset="-122"/>
                 <a:cs typeface="Times New Roman" pitchFamily="34" charset="-120"/>
               </a:rPr>
-              <a:t>Lesson 2 (Part 2): The Tropical Grassland Region: Characteristics (Soils and Vegetation)</a:t>
-            </a:r>
-            <a:endParaRPr lang="en-US" sz="3200" dirty="0"/>
+              <a:t>It is a vegetation of tall grass with scattered trees.</a:t>
+            </a:r>
+            <a:endParaRPr lang="en-US" sz="4000" dirty="0"/>
+          </a:p>
+          <a:p>
+            <a:pPr algn="l" marL="342900" indent="-342900">
+              <a:spcAft>
+                <a:spcPts val="800"/>
+              </a:spcAft>
+              <a:buSzPct val="100000"/>
+              <a:buChar char="•"/>
+            </a:pPr>
+            <a:r>
+              <a:rPr lang="en-US" sz="4000" b="1" dirty="0">
+                <a:solidFill>
+                  <a:srgbClr val="111111"/>
+                </a:solidFill>
+                <a:latin typeface="Times New Roman" pitchFamily="34" charset="0"/>
+                <a:ea typeface="Times New Roman" pitchFamily="34" charset="-122"/>
+                <a:cs typeface="Times New Roman" pitchFamily="34" charset="-120"/>
+              </a:rPr>
+              <a:t>Laterite: </a:t>
+            </a:r>
+            <a:pPr algn="l" marL="342900" indent="-342900">
+              <a:spcAft>
+                <a:spcPts val="800"/>
+              </a:spcAft>
+              <a:buSzPct val="100000"/>
+              <a:buChar char="•"/>
+            </a:pPr>
+            <a:r>
+              <a:rPr lang="en-US" sz="4000" dirty="0">
+                <a:solidFill>
+                  <a:srgbClr val="111111"/>
+                </a:solidFill>
+                <a:latin typeface="Times New Roman" pitchFamily="34" charset="0"/>
+                <a:ea typeface="Times New Roman" pitchFamily="34" charset="-122"/>
+                <a:cs typeface="Times New Roman" pitchFamily="34" charset="-120"/>
+              </a:rPr>
+              <a:t>It is a red soil that becomes very hard when it dries.</a:t>
+            </a:r>
+            <a:endParaRPr lang="en-US" sz="4000" dirty="0"/>
           </a:p>
         </p:txBody>
       </p:sp>
@@ -14116,9 +14062,131 @@
           </a:p>
         </p:txBody>
       </p:sp>
+      <p:sp>
+        <p:nvSpPr>
+          <p:cNvPr id="3" name="Text 1"/>
+          <p:cNvSpPr/>
+          <p:nvPr/>
+        </p:nvSpPr>
+        <p:spPr>
+          <a:xfrm>
+            <a:off x="365760" y="1005840"/>
+            <a:ext cx="11460175" cy="731520"/>
+          </a:xfrm>
+          <a:prstGeom prst="rect">
+            <a:avLst/>
+          </a:prstGeom>
+          <a:noFill/>
+          <a:ln/>
+        </p:spPr>
+        <p:txBody>
+          <a:bodyPr wrap="square" lIns="0" tIns="0" rIns="0" bIns="0" rtlCol="0" anchor="ctr">
+            <a:normAutofit/>
+          </a:bodyPr>
+          <a:lstStyle/>
+          <a:p>
+            <a:pPr algn="ctr" indent="0" marL="0">
+              <a:buNone/>
+            </a:pPr>
+            <a:r>
+              <a:rPr lang="en-US" sz="3600" b="1" dirty="0">
+                <a:solidFill>
+                  <a:srgbClr val="990011"/>
+                </a:solidFill>
+                <a:latin typeface="Times New Roman" pitchFamily="34" charset="0"/>
+                <a:ea typeface="Times New Roman" pitchFamily="34" charset="-122"/>
+                <a:cs typeface="Times New Roman" pitchFamily="34" charset="-120"/>
+              </a:rPr>
+              <a:t>1. Vegetation</a:t>
+            </a:r>
+            <a:endParaRPr lang="en-US" sz="3600" dirty="0"/>
+          </a:p>
+        </p:txBody>
+      </p:sp>
+      <p:sp>
+        <p:nvSpPr>
+          <p:cNvPr id="4" name="Text 2"/>
+          <p:cNvSpPr/>
+          <p:nvPr/>
+        </p:nvSpPr>
+        <p:spPr>
+          <a:xfrm>
+            <a:off x="365760" y="1783080"/>
+            <a:ext cx="4846320" cy="4617720"/>
+          </a:xfrm>
+          <a:prstGeom prst="rect">
+            <a:avLst/>
+          </a:prstGeom>
+          <a:noFill/>
+          <a:ln/>
+        </p:spPr>
+        <p:txBody>
+          <a:bodyPr wrap="square" lIns="0" tIns="0" rIns="0" bIns="0" rtlCol="0" anchor="t"/>
+          <a:lstStyle/>
+          <a:p>
+            <a:pPr algn="l" indent="0" marL="0">
+              <a:spcAft>
+                <a:spcPts val="800"/>
+              </a:spcAft>
+              <a:buNone/>
+            </a:pPr>
+            <a:r>
+              <a:rPr lang="en-US" sz="3600" i="1" dirty="0">
+                <a:solidFill>
+                  <a:srgbClr val="111111"/>
+                </a:solidFill>
+                <a:latin typeface="Times New Roman" pitchFamily="34" charset="0"/>
+                <a:ea typeface="Times New Roman" pitchFamily="34" charset="-122"/>
+                <a:cs typeface="Times New Roman" pitchFamily="34" charset="-120"/>
+              </a:rPr>
+              <a:t>The savanna vegetation has the following characteristics:</a:t>
+            </a:r>
+            <a:endParaRPr lang="en-US" sz="3600" dirty="0"/>
+          </a:p>
+          <a:p>
+            <a:pPr algn="l" marL="342900" indent="-342900">
+              <a:spcAft>
+                <a:spcPts val="800"/>
+              </a:spcAft>
+              <a:buSzPct val="100000"/>
+              <a:buChar char="•"/>
+            </a:pPr>
+            <a:r>
+              <a:rPr lang="en-US" sz="3600" b="1" dirty="0">
+                <a:solidFill>
+                  <a:srgbClr val="111111"/>
+                </a:solidFill>
+                <a:latin typeface="Times New Roman" pitchFamily="34" charset="0"/>
+                <a:ea typeface="Times New Roman" pitchFamily="34" charset="-122"/>
+                <a:cs typeface="Times New Roman" pitchFamily="34" charset="-120"/>
+              </a:rPr>
+              <a:t>Tall grass: </a:t>
+            </a:r>
+            <a:pPr algn="l" marL="342900" indent="-342900">
+              <a:spcAft>
+                <a:spcPts val="800"/>
+              </a:spcAft>
+              <a:buSzPct val="100000"/>
+              <a:buChar char="•"/>
+            </a:pPr>
+            <a:r>
+              <a:rPr lang="en-US" sz="3600" dirty="0">
+                <a:solidFill>
+                  <a:srgbClr val="111111"/>
+                </a:solidFill>
+                <a:latin typeface="Times New Roman" pitchFamily="34" charset="0"/>
+                <a:ea typeface="Times New Roman" pitchFamily="34" charset="-122"/>
+                <a:cs typeface="Times New Roman" pitchFamily="34" charset="-120"/>
+              </a:rPr>
+              <a:t>Elephant grass grows up to 3 m high.</a:t>
+            </a:r>
+            <a:endParaRPr lang="en-US" sz="3600" dirty="0"/>
+          </a:p>
+        </p:txBody>
+      </p:sp>
       <p:pic>
         <p:nvPicPr>
-          <p:cNvPr id="3" name="Image 0" descr="/home/claude/f4/img/minesec_sheet.png">    </p:cNvPr>
+          <p:cNvPr id="5" name="Image 0" descr="/home/claude/f4/img/v2/f2t_savanna.jpg">    </p:cNvPr>
           <p:cNvPicPr>
             <a:picLocks noChangeAspect="1"/>
           </p:cNvPicPr>
@@ -14132,8 +14200,8 @@
         </p:blipFill>
         <p:spPr>
           <a:xfrm>
-            <a:off x="0" y="658368"/>
-            <a:ext cx="3840480" cy="5833872"/>
+            <a:off x="5349240" y="2695548"/>
+            <a:ext cx="6659575" cy="2445313"/>
           </a:xfrm>
           <a:prstGeom prst="rect">
             <a:avLst/>
@@ -14142,14 +14210,14 @@
       </p:pic>
       <p:sp>
         <p:nvSpPr>
-          <p:cNvPr id="4" name="Text 1"/>
+          <p:cNvPr id="6" name="Text 3"/>
           <p:cNvSpPr/>
           <p:nvPr/>
         </p:nvSpPr>
         <p:spPr>
           <a:xfrm>
-            <a:off x="4069080" y="1005840"/>
-            <a:ext cx="7802575" cy="731520"/>
+            <a:off x="5349240" y="6089904"/>
+            <a:ext cx="6659575" cy="347472"/>
           </a:xfrm>
           <a:prstGeom prst="rect">
             <a:avLst/>
@@ -14158,146 +14226,24 @@
           <a:ln/>
         </p:spPr>
         <p:txBody>
-          <a:bodyPr wrap="square" lIns="0" tIns="0" rIns="0" bIns="0" rtlCol="0" anchor="ctr">
-            <a:normAutofit/>
-          </a:bodyPr>
+          <a:bodyPr wrap="square" lIns="0" tIns="0" rIns="0" bIns="0" rtlCol="0" anchor="ctr"/>
           <a:lstStyle/>
           <a:p>
             <a:pPr algn="ctr" indent="0" marL="0">
               <a:buNone/>
             </a:pPr>
             <a:r>
-              <a:rPr lang="en-US" sz="3600" b="1" dirty="0">
-                <a:solidFill>
-                  <a:srgbClr val="990011"/>
+              <a:rPr lang="en-US" sz="1600" i="1" dirty="0">
+                <a:solidFill>
+                  <a:srgbClr val="555555"/>
                 </a:solidFill>
                 <a:latin typeface="Times New Roman" pitchFamily="34" charset="0"/>
                 <a:ea typeface="Times New Roman" pitchFamily="34" charset="-122"/>
                 <a:cs typeface="Times New Roman" pitchFamily="34" charset="-120"/>
               </a:rPr>
-              <a:t>DEFINITIONS</a:t>
-            </a:r>
-            <a:endParaRPr lang="en-US" sz="3600" dirty="0"/>
-          </a:p>
-        </p:txBody>
-      </p:sp>
-      <p:sp>
-        <p:nvSpPr>
-          <p:cNvPr id="5" name="Text 2"/>
-          <p:cNvSpPr/>
-          <p:nvPr/>
-        </p:nvSpPr>
-        <p:spPr>
-          <a:xfrm>
-            <a:off x="4069080" y="1783080"/>
-            <a:ext cx="7802575" cy="4663440"/>
-          </a:xfrm>
-          <a:prstGeom prst="rect">
-            <a:avLst/>
-          </a:prstGeom>
-          <a:noFill/>
-          <a:ln/>
-        </p:spPr>
-        <p:txBody>
-          <a:bodyPr wrap="square" lIns="0" tIns="0" rIns="0" bIns="0" rtlCol="0" anchor="t"/>
-          <a:lstStyle/>
-          <a:p>
-            <a:pPr algn="l" indent="0" marL="0">
-              <a:spcAft>
-                <a:spcPts val="800"/>
-              </a:spcAft>
-              <a:buNone/>
-            </a:pPr>
-            <a:r>
-              <a:rPr lang="en-US" sz="4000" i="1" dirty="0">
-                <a:solidFill>
-                  <a:srgbClr val="111111"/>
-                </a:solidFill>
-                <a:latin typeface="Times New Roman" pitchFamily="34" charset="0"/>
-                <a:ea typeface="Times New Roman" pitchFamily="34" charset="-122"/>
-                <a:cs typeface="Times New Roman" pitchFamily="34" charset="-120"/>
-              </a:rPr>
-              <a:t>The key terms of this lesson are defined as follows:</a:t>
-            </a:r>
-            <a:endParaRPr lang="en-US" sz="4000" dirty="0"/>
-          </a:p>
-          <a:p>
-            <a:pPr algn="l" marL="342900" indent="-342900">
-              <a:spcAft>
-                <a:spcPts val="800"/>
-              </a:spcAft>
-              <a:buSzPct val="100000"/>
-              <a:buChar char="•"/>
-            </a:pPr>
-            <a:r>
-              <a:rPr lang="en-US" sz="4000" b="1" dirty="0">
-                <a:solidFill>
-                  <a:srgbClr val="111111"/>
-                </a:solidFill>
-                <a:latin typeface="Times New Roman" pitchFamily="34" charset="0"/>
-                <a:ea typeface="Times New Roman" pitchFamily="34" charset="-122"/>
-                <a:cs typeface="Times New Roman" pitchFamily="34" charset="-120"/>
-              </a:rPr>
-              <a:t>Savanna: </a:t>
-            </a:r>
-            <a:pPr algn="l" marL="342900" indent="-342900">
-              <a:spcAft>
-                <a:spcPts val="800"/>
-              </a:spcAft>
-              <a:buSzPct val="100000"/>
-              <a:buChar char="•"/>
-            </a:pPr>
-            <a:r>
-              <a:rPr lang="en-US" sz="4000" dirty="0">
-                <a:solidFill>
-                  <a:srgbClr val="111111"/>
-                </a:solidFill>
-                <a:latin typeface="Times New Roman" pitchFamily="34" charset="0"/>
-                <a:ea typeface="Times New Roman" pitchFamily="34" charset="-122"/>
-                <a:cs typeface="Times New Roman" pitchFamily="34" charset="-120"/>
-              </a:rPr>
-              <a:t>It is a vegetation of tall grass with scattered trees.</a:t>
-            </a:r>
-            <a:endParaRPr lang="en-US" sz="4000" dirty="0"/>
-          </a:p>
-          <a:p>
-            <a:pPr algn="l" marL="342900" indent="-342900">
-              <a:spcAft>
-                <a:spcPts val="800"/>
-              </a:spcAft>
-              <a:buSzPct val="100000"/>
-              <a:buChar char="•"/>
-            </a:pPr>
-            <a:r>
-              <a:rPr lang="en-US" sz="4000" b="1" dirty="0">
-                <a:solidFill>
-                  <a:srgbClr val="111111"/>
-                </a:solidFill>
-                <a:latin typeface="Times New Roman" pitchFamily="34" charset="0"/>
-                <a:ea typeface="Times New Roman" pitchFamily="34" charset="-122"/>
-                <a:cs typeface="Times New Roman" pitchFamily="34" charset="-120"/>
-              </a:rPr>
-              <a:t>Laterite: </a:t>
-            </a:r>
-            <a:pPr algn="l" marL="342900" indent="-342900">
-              <a:spcAft>
-                <a:spcPts val="800"/>
-              </a:spcAft>
-              <a:buSzPct val="100000"/>
-              <a:buChar char="•"/>
-            </a:pPr>
-            <a:r>
-              <a:rPr lang="en-US" sz="4000" dirty="0">
-                <a:solidFill>
-                  <a:srgbClr val="111111"/>
-                </a:solidFill>
-                <a:latin typeface="Times New Roman" pitchFamily="34" charset="0"/>
-                <a:ea typeface="Times New Roman" pitchFamily="34" charset="-122"/>
-                <a:cs typeface="Times New Roman" pitchFamily="34" charset="-120"/>
-              </a:rPr>
-              <a:t>It is a red soil that becomes very hard when it dries.</a:t>
-            </a:r>
-            <a:endParaRPr lang="en-US" sz="4000" dirty="0"/>
+              <a:t>Illustration: the savanna</a:t>
+            </a:r>
+            <a:endParaRPr lang="en-US" sz="1600" dirty="0"/>
           </a:p>
         </p:txBody>
       </p:sp>
@@ -14413,131 +14359,9 @@
           </a:p>
         </p:txBody>
       </p:sp>
-      <p:sp>
-        <p:nvSpPr>
-          <p:cNvPr id="3" name="Text 1"/>
-          <p:cNvSpPr/>
-          <p:nvPr/>
-        </p:nvSpPr>
-        <p:spPr>
-          <a:xfrm>
-            <a:off x="365760" y="1005840"/>
-            <a:ext cx="11460175" cy="731520"/>
-          </a:xfrm>
-          <a:prstGeom prst="rect">
-            <a:avLst/>
-          </a:prstGeom>
-          <a:noFill/>
-          <a:ln/>
-        </p:spPr>
-        <p:txBody>
-          <a:bodyPr wrap="square" lIns="0" tIns="0" rIns="0" bIns="0" rtlCol="0" anchor="ctr">
-            <a:normAutofit/>
-          </a:bodyPr>
-          <a:lstStyle/>
-          <a:p>
-            <a:pPr algn="ctr" indent="0" marL="0">
-              <a:buNone/>
-            </a:pPr>
-            <a:r>
-              <a:rPr lang="en-US" sz="3600" b="1" dirty="0">
-                <a:solidFill>
-                  <a:srgbClr val="990011"/>
-                </a:solidFill>
-                <a:latin typeface="Times New Roman" pitchFamily="34" charset="0"/>
-                <a:ea typeface="Times New Roman" pitchFamily="34" charset="-122"/>
-                <a:cs typeface="Times New Roman" pitchFamily="34" charset="-120"/>
-              </a:rPr>
-              <a:t>1. Vegetation</a:t>
-            </a:r>
-            <a:endParaRPr lang="en-US" sz="3600" dirty="0"/>
-          </a:p>
-        </p:txBody>
-      </p:sp>
-      <p:sp>
-        <p:nvSpPr>
-          <p:cNvPr id="4" name="Text 2"/>
-          <p:cNvSpPr/>
-          <p:nvPr/>
-        </p:nvSpPr>
-        <p:spPr>
-          <a:xfrm>
-            <a:off x="365760" y="1783080"/>
-            <a:ext cx="4846320" cy="4617720"/>
-          </a:xfrm>
-          <a:prstGeom prst="rect">
-            <a:avLst/>
-          </a:prstGeom>
-          <a:noFill/>
-          <a:ln/>
-        </p:spPr>
-        <p:txBody>
-          <a:bodyPr wrap="square" lIns="0" tIns="0" rIns="0" bIns="0" rtlCol="0" anchor="t"/>
-          <a:lstStyle/>
-          <a:p>
-            <a:pPr algn="l" indent="0" marL="0">
-              <a:spcAft>
-                <a:spcPts val="800"/>
-              </a:spcAft>
-              <a:buNone/>
-            </a:pPr>
-            <a:r>
-              <a:rPr lang="en-US" sz="3600" i="1" dirty="0">
-                <a:solidFill>
-                  <a:srgbClr val="111111"/>
-                </a:solidFill>
-                <a:latin typeface="Times New Roman" pitchFamily="34" charset="0"/>
-                <a:ea typeface="Times New Roman" pitchFamily="34" charset="-122"/>
-                <a:cs typeface="Times New Roman" pitchFamily="34" charset="-120"/>
-              </a:rPr>
-              <a:t>The savanna vegetation has the following characteristics:</a:t>
-            </a:r>
-            <a:endParaRPr lang="en-US" sz="3600" dirty="0"/>
-          </a:p>
-          <a:p>
-            <a:pPr algn="l" marL="342900" indent="-342900">
-              <a:spcAft>
-                <a:spcPts val="800"/>
-              </a:spcAft>
-              <a:buSzPct val="100000"/>
-              <a:buChar char="•"/>
-            </a:pPr>
-            <a:r>
-              <a:rPr lang="en-US" sz="3600" b="1" dirty="0">
-                <a:solidFill>
-                  <a:srgbClr val="111111"/>
-                </a:solidFill>
-                <a:latin typeface="Times New Roman" pitchFamily="34" charset="0"/>
-                <a:ea typeface="Times New Roman" pitchFamily="34" charset="-122"/>
-                <a:cs typeface="Times New Roman" pitchFamily="34" charset="-120"/>
-              </a:rPr>
-              <a:t>Tall grass: </a:t>
-            </a:r>
-            <a:pPr algn="l" marL="342900" indent="-342900">
-              <a:spcAft>
-                <a:spcPts val="800"/>
-              </a:spcAft>
-              <a:buSzPct val="100000"/>
-              <a:buChar char="•"/>
-            </a:pPr>
-            <a:r>
-              <a:rPr lang="en-US" sz="3600" dirty="0">
-                <a:solidFill>
-                  <a:srgbClr val="111111"/>
-                </a:solidFill>
-                <a:latin typeface="Times New Roman" pitchFamily="34" charset="0"/>
-                <a:ea typeface="Times New Roman" pitchFamily="34" charset="-122"/>
-                <a:cs typeface="Times New Roman" pitchFamily="34" charset="-120"/>
-              </a:rPr>
-              <a:t>Elephant grass grows up to 3 m high.</a:t>
-            </a:r>
-            <a:endParaRPr lang="en-US" sz="3600" dirty="0"/>
-          </a:p>
-        </p:txBody>
-      </p:sp>
       <p:pic>
         <p:nvPicPr>
-          <p:cNvPr id="5" name="Image 0" descr="/home/claude/f4/img/v2/f2t_savanna.jpg">    </p:cNvPr>
+          <p:cNvPr id="3" name="Image 0" descr="/home/claude/f4/img/minesec_sheet.png">    </p:cNvPr>
           <p:cNvPicPr>
             <a:picLocks noChangeAspect="1"/>
           </p:cNvPicPr>
@@ -14551,8 +14375,8 @@
         </p:blipFill>
         <p:spPr>
           <a:xfrm>
-            <a:off x="5349240" y="2695548"/>
-            <a:ext cx="6659575" cy="2445313"/>
+            <a:off x="0" y="658368"/>
+            <a:ext cx="5120640" cy="5833872"/>
           </a:xfrm>
           <a:prstGeom prst="rect">
             <a:avLst/>
@@ -14561,14 +14385,14 @@
       </p:pic>
       <p:sp>
         <p:nvSpPr>
-          <p:cNvPr id="6" name="Text 3"/>
+          <p:cNvPr id="4" name="Text 1"/>
           <p:cNvSpPr/>
           <p:nvPr/>
         </p:nvSpPr>
         <p:spPr>
           <a:xfrm>
-            <a:off x="5349240" y="6089904"/>
-            <a:ext cx="6659575" cy="347472"/>
+            <a:off x="5349240" y="1005840"/>
+            <a:ext cx="6522415" cy="731520"/>
           </a:xfrm>
           <a:prstGeom prst="rect">
             <a:avLst/>
@@ -14577,24 +14401,126 @@
           <a:ln/>
         </p:spPr>
         <p:txBody>
-          <a:bodyPr wrap="square" lIns="0" tIns="0" rIns="0" bIns="0" rtlCol="0" anchor="ctr"/>
+          <a:bodyPr wrap="square" lIns="0" tIns="0" rIns="0" bIns="0" rtlCol="0" anchor="ctr">
+            <a:normAutofit/>
+          </a:bodyPr>
           <a:lstStyle/>
           <a:p>
             <a:pPr algn="ctr" indent="0" marL="0">
               <a:buNone/>
             </a:pPr>
             <a:r>
-              <a:rPr lang="en-US" sz="1600" i="1" dirty="0">
-                <a:solidFill>
-                  <a:srgbClr val="555555"/>
+              <a:rPr lang="en-US" sz="3600" b="1" dirty="0">
+                <a:solidFill>
+                  <a:srgbClr val="990011"/>
                 </a:solidFill>
                 <a:latin typeface="Times New Roman" pitchFamily="34" charset="0"/>
                 <a:ea typeface="Times New Roman" pitchFamily="34" charset="-122"/>
                 <a:cs typeface="Times New Roman" pitchFamily="34" charset="-120"/>
               </a:rPr>
-              <a:t>Illustration: the savanna</a:t>
-            </a:r>
-            <a:endParaRPr lang="en-US" sz="1600" dirty="0"/>
+              <a:t>1. Vegetation</a:t>
+            </a:r>
+            <a:endParaRPr lang="en-US" sz="3600" dirty="0"/>
+          </a:p>
+        </p:txBody>
+      </p:sp>
+      <p:sp>
+        <p:nvSpPr>
+          <p:cNvPr id="5" name="Text 2"/>
+          <p:cNvSpPr/>
+          <p:nvPr/>
+        </p:nvSpPr>
+        <p:spPr>
+          <a:xfrm>
+            <a:off x="5349240" y="1783080"/>
+            <a:ext cx="6522415" cy="4663440"/>
+          </a:xfrm>
+          <a:prstGeom prst="rect">
+            <a:avLst/>
+          </a:prstGeom>
+          <a:noFill/>
+          <a:ln/>
+        </p:spPr>
+        <p:txBody>
+          <a:bodyPr wrap="square" lIns="0" tIns="0" rIns="0" bIns="0" rtlCol="0" anchor="t"/>
+          <a:lstStyle/>
+          <a:p>
+            <a:pPr algn="l" marL="342900" indent="-342900">
+              <a:spcAft>
+                <a:spcPts val="800"/>
+              </a:spcAft>
+              <a:buSzPct val="100000"/>
+              <a:buChar char="•"/>
+            </a:pPr>
+            <a:r>
+              <a:rPr lang="en-US" sz="4000" b="1" dirty="0">
+                <a:solidFill>
+                  <a:srgbClr val="111111"/>
+                </a:solidFill>
+                <a:latin typeface="Times New Roman" pitchFamily="34" charset="0"/>
+                <a:ea typeface="Times New Roman" pitchFamily="34" charset="-122"/>
+                <a:cs typeface="Times New Roman" pitchFamily="34" charset="-120"/>
+              </a:rPr>
+              <a:t>Scattered trees: </a:t>
+            </a:r>
+            <a:pPr algn="l" marL="342900" indent="-342900">
+              <a:spcAft>
+                <a:spcPts val="800"/>
+              </a:spcAft>
+              <a:buSzPct val="100000"/>
+              <a:buChar char="•"/>
+            </a:pPr>
+            <a:r>
+              <a:rPr lang="en-US" sz="4000" dirty="0">
+                <a:solidFill>
+                  <a:srgbClr val="111111"/>
+                </a:solidFill>
+                <a:latin typeface="Times New Roman" pitchFamily="34" charset="0"/>
+                <a:ea typeface="Times New Roman" pitchFamily="34" charset="-122"/>
+                <a:cs typeface="Times New Roman" pitchFamily="34" charset="-120"/>
+              </a:rPr>
+              <a:t>Baobab, acacia and shea trees.</a:t>
+            </a:r>
+            <a:endParaRPr lang="en-US" sz="4000" dirty="0"/>
+          </a:p>
+          <a:p>
+            <a:pPr algn="l" marL="342900" indent="-342900">
+              <a:spcAft>
+                <a:spcPts val="800"/>
+              </a:spcAft>
+              <a:buSzPct val="100000"/>
+              <a:buChar char="•"/>
+            </a:pPr>
+            <a:r>
+              <a:rPr lang="en-US" sz="4000" b="1" dirty="0">
+                <a:solidFill>
+                  <a:srgbClr val="111111"/>
+                </a:solidFill>
+                <a:latin typeface="Times New Roman" pitchFamily="34" charset="0"/>
+                <a:ea typeface="Times New Roman" pitchFamily="34" charset="-122"/>
+                <a:cs typeface="Times New Roman" pitchFamily="34" charset="-120"/>
+              </a:rPr>
+              <a:t>Deciduous trees: </a:t>
+            </a:r>
+            <a:pPr algn="l" marL="342900" indent="-342900">
+              <a:spcAft>
+                <a:spcPts val="800"/>
+              </a:spcAft>
+              <a:buSzPct val="100000"/>
+              <a:buChar char="•"/>
+            </a:pPr>
+            <a:r>
+              <a:rPr lang="en-US" sz="4000" dirty="0">
+                <a:solidFill>
+                  <a:srgbClr val="111111"/>
+                </a:solidFill>
+                <a:latin typeface="Times New Roman" pitchFamily="34" charset="0"/>
+                <a:ea typeface="Times New Roman" pitchFamily="34" charset="-122"/>
+                <a:cs typeface="Times New Roman" pitchFamily="34" charset="-120"/>
+              </a:rPr>
+              <a:t>Many trees lose their leaves in the dry season.</a:t>
+            </a:r>
+            <a:endParaRPr lang="en-US" sz="4000" dirty="0"/>
           </a:p>
         </p:txBody>
       </p:sp>
@@ -14710,9 +14636,111 @@
           </a:p>
         </p:txBody>
       </p:sp>
+      <p:sp>
+        <p:nvSpPr>
+          <p:cNvPr id="3" name="Text 1"/>
+          <p:cNvSpPr/>
+          <p:nvPr/>
+        </p:nvSpPr>
+        <p:spPr>
+          <a:xfrm>
+            <a:off x="365760" y="1005840"/>
+            <a:ext cx="11460175" cy="731520"/>
+          </a:xfrm>
+          <a:prstGeom prst="rect">
+            <a:avLst/>
+          </a:prstGeom>
+          <a:noFill/>
+          <a:ln/>
+        </p:spPr>
+        <p:txBody>
+          <a:bodyPr wrap="square" lIns="0" tIns="0" rIns="0" bIns="0" rtlCol="0" anchor="ctr">
+            <a:normAutofit/>
+          </a:bodyPr>
+          <a:lstStyle/>
+          <a:p>
+            <a:pPr algn="ctr" indent="0" marL="0">
+              <a:buNone/>
+            </a:pPr>
+            <a:r>
+              <a:rPr lang="en-US" sz="3600" b="1" dirty="0">
+                <a:solidFill>
+                  <a:srgbClr val="990011"/>
+                </a:solidFill>
+                <a:latin typeface="Times New Roman" pitchFamily="34" charset="0"/>
+                <a:ea typeface="Times New Roman" pitchFamily="34" charset="-122"/>
+                <a:cs typeface="Times New Roman" pitchFamily="34" charset="-120"/>
+              </a:rPr>
+              <a:t>1. Vegetation</a:t>
+            </a:r>
+            <a:endParaRPr lang="en-US" sz="3600" dirty="0"/>
+          </a:p>
+        </p:txBody>
+      </p:sp>
+      <p:sp>
+        <p:nvSpPr>
+          <p:cNvPr id="4" name="Text 2"/>
+          <p:cNvSpPr/>
+          <p:nvPr/>
+        </p:nvSpPr>
+        <p:spPr>
+          <a:xfrm>
+            <a:off x="365760" y="1783080"/>
+            <a:ext cx="4846320" cy="4617720"/>
+          </a:xfrm>
+          <a:prstGeom prst="rect">
+            <a:avLst/>
+          </a:prstGeom>
+          <a:noFill/>
+          <a:ln/>
+        </p:spPr>
+        <p:txBody>
+          <a:bodyPr wrap="square" lIns="0" tIns="0" rIns="0" bIns="0" rtlCol="0" anchor="t"/>
+          <a:lstStyle/>
+          <a:p>
+            <a:pPr algn="l" marL="342900" indent="-342900">
+              <a:spcAft>
+                <a:spcPts val="800"/>
+              </a:spcAft>
+              <a:buSzPct val="100000"/>
+              <a:buChar char="•"/>
+            </a:pPr>
+            <a:r>
+              <a:rPr lang="en-US" sz="3600" b="1" dirty="0">
+                <a:solidFill>
+                  <a:srgbClr val="111111"/>
+                </a:solidFill>
+                <a:latin typeface="Times New Roman" pitchFamily="34" charset="0"/>
+                <a:ea typeface="Times New Roman" pitchFamily="34" charset="-122"/>
+                <a:cs typeface="Times New Roman" pitchFamily="34" charset="-120"/>
+              </a:rPr>
+              <a:t>Water storage: </a:t>
+            </a:r>
+            <a:pPr algn="l" marL="342900" indent="-342900">
+              <a:spcAft>
+                <a:spcPts val="800"/>
+              </a:spcAft>
+              <a:buSzPct val="100000"/>
+              <a:buChar char="•"/>
+            </a:pPr>
+            <a:r>
+              <a:rPr lang="en-US" sz="3600" dirty="0">
+                <a:solidFill>
+                  <a:srgbClr val="111111"/>
+                </a:solidFill>
+                <a:latin typeface="Times New Roman" pitchFamily="34" charset="0"/>
+                <a:ea typeface="Times New Roman" pitchFamily="34" charset="-122"/>
+                <a:cs typeface="Times New Roman" pitchFamily="34" charset="-120"/>
+              </a:rPr>
+              <a:t>The baobab stores water in its trunk.</a:t>
+            </a:r>
+            <a:endParaRPr lang="en-US" sz="3600" dirty="0"/>
+          </a:p>
+        </p:txBody>
+      </p:sp>
       <p:pic>
         <p:nvPicPr>
-          <p:cNvPr id="3" name="Image 0" descr="/home/claude/f4/img/minesec_sheet.png">    </p:cNvPr>
+          <p:cNvPr id="5" name="Image 0" descr="/home/claude/f4/img/v2/f2t_baobab.jpg">    </p:cNvPr>
           <p:cNvPicPr>
             <a:picLocks noChangeAspect="1"/>
           </p:cNvPicPr>
@@ -14726,8 +14754,8 @@
         </p:blipFill>
         <p:spPr>
           <a:xfrm>
-            <a:off x="0" y="658368"/>
-            <a:ext cx="5120640" cy="5833872"/>
+            <a:off x="5349240" y="2071212"/>
+            <a:ext cx="6659575" cy="3693983"/>
           </a:xfrm>
           <a:prstGeom prst="rect">
             <a:avLst/>
@@ -14736,14 +14764,14 @@
       </p:pic>
       <p:sp>
         <p:nvSpPr>
-          <p:cNvPr id="4" name="Text 1"/>
+          <p:cNvPr id="6" name="Text 3"/>
           <p:cNvSpPr/>
           <p:nvPr/>
         </p:nvSpPr>
         <p:spPr>
           <a:xfrm>
-            <a:off x="5349240" y="1005840"/>
-            <a:ext cx="6522415" cy="731520"/>
+            <a:off x="5349240" y="6089904"/>
+            <a:ext cx="6659575" cy="347472"/>
           </a:xfrm>
           <a:prstGeom prst="rect">
             <a:avLst/>
@@ -14752,126 +14780,24 @@
           <a:ln/>
         </p:spPr>
         <p:txBody>
-          <a:bodyPr wrap="square" lIns="0" tIns="0" rIns="0" bIns="0" rtlCol="0" anchor="ctr">
-            <a:normAutofit/>
-          </a:bodyPr>
+          <a:bodyPr wrap="square" lIns="0" tIns="0" rIns="0" bIns="0" rtlCol="0" anchor="ctr"/>
           <a:lstStyle/>
           <a:p>
             <a:pPr algn="ctr" indent="0" marL="0">
               <a:buNone/>
             </a:pPr>
             <a:r>
-              <a:rPr lang="en-US" sz="3600" b="1" dirty="0">
-                <a:solidFill>
-                  <a:srgbClr val="990011"/>
+              <a:rPr lang="en-US" sz="1600" i="1" dirty="0">
+                <a:solidFill>
+                  <a:srgbClr val="555555"/>
                 </a:solidFill>
                 <a:latin typeface="Times New Roman" pitchFamily="34" charset="0"/>
                 <a:ea typeface="Times New Roman" pitchFamily="34" charset="-122"/>
                 <a:cs typeface="Times New Roman" pitchFamily="34" charset="-120"/>
               </a:rPr>
-              <a:t>1. Vegetation</a:t>
-            </a:r>
-            <a:endParaRPr lang="en-US" sz="3600" dirty="0"/>
-          </a:p>
-        </p:txBody>
-      </p:sp>
-      <p:sp>
-        <p:nvSpPr>
-          <p:cNvPr id="5" name="Text 2"/>
-          <p:cNvSpPr/>
-          <p:nvPr/>
-        </p:nvSpPr>
-        <p:spPr>
-          <a:xfrm>
-            <a:off x="5349240" y="1783080"/>
-            <a:ext cx="6522415" cy="4663440"/>
-          </a:xfrm>
-          <a:prstGeom prst="rect">
-            <a:avLst/>
-          </a:prstGeom>
-          <a:noFill/>
-          <a:ln/>
-        </p:spPr>
-        <p:txBody>
-          <a:bodyPr wrap="square" lIns="0" tIns="0" rIns="0" bIns="0" rtlCol="0" anchor="t"/>
-          <a:lstStyle/>
-          <a:p>
-            <a:pPr algn="l" marL="342900" indent="-342900">
-              <a:spcAft>
-                <a:spcPts val="800"/>
-              </a:spcAft>
-              <a:buSzPct val="100000"/>
-              <a:buChar char="•"/>
-            </a:pPr>
-            <a:r>
-              <a:rPr lang="en-US" sz="4000" b="1" dirty="0">
-                <a:solidFill>
-                  <a:srgbClr val="111111"/>
-                </a:solidFill>
-                <a:latin typeface="Times New Roman" pitchFamily="34" charset="0"/>
-                <a:ea typeface="Times New Roman" pitchFamily="34" charset="-122"/>
-                <a:cs typeface="Times New Roman" pitchFamily="34" charset="-120"/>
-              </a:rPr>
-              <a:t>Scattered trees: </a:t>
-            </a:r>
-            <a:pPr algn="l" marL="342900" indent="-342900">
-              <a:spcAft>
-                <a:spcPts val="800"/>
-              </a:spcAft>
-              <a:buSzPct val="100000"/>
-              <a:buChar char="•"/>
-            </a:pPr>
-            <a:r>
-              <a:rPr lang="en-US" sz="4000" dirty="0">
-                <a:solidFill>
-                  <a:srgbClr val="111111"/>
-                </a:solidFill>
-                <a:latin typeface="Times New Roman" pitchFamily="34" charset="0"/>
-                <a:ea typeface="Times New Roman" pitchFamily="34" charset="-122"/>
-                <a:cs typeface="Times New Roman" pitchFamily="34" charset="-120"/>
-              </a:rPr>
-              <a:t>Baobab, acacia and shea trees.</a:t>
-            </a:r>
-            <a:endParaRPr lang="en-US" sz="4000" dirty="0"/>
-          </a:p>
-          <a:p>
-            <a:pPr algn="l" marL="342900" indent="-342900">
-              <a:spcAft>
-                <a:spcPts val="800"/>
-              </a:spcAft>
-              <a:buSzPct val="100000"/>
-              <a:buChar char="•"/>
-            </a:pPr>
-            <a:r>
-              <a:rPr lang="en-US" sz="4000" b="1" dirty="0">
-                <a:solidFill>
-                  <a:srgbClr val="111111"/>
-                </a:solidFill>
-                <a:latin typeface="Times New Roman" pitchFamily="34" charset="0"/>
-                <a:ea typeface="Times New Roman" pitchFamily="34" charset="-122"/>
-                <a:cs typeface="Times New Roman" pitchFamily="34" charset="-120"/>
-              </a:rPr>
-              <a:t>Deciduous trees: </a:t>
-            </a:r>
-            <a:pPr algn="l" marL="342900" indent="-342900">
-              <a:spcAft>
-                <a:spcPts val="800"/>
-              </a:spcAft>
-              <a:buSzPct val="100000"/>
-              <a:buChar char="•"/>
-            </a:pPr>
-            <a:r>
-              <a:rPr lang="en-US" sz="4000" dirty="0">
-                <a:solidFill>
-                  <a:srgbClr val="111111"/>
-                </a:solidFill>
-                <a:latin typeface="Times New Roman" pitchFamily="34" charset="0"/>
-                <a:ea typeface="Times New Roman" pitchFamily="34" charset="-122"/>
-                <a:cs typeface="Times New Roman" pitchFamily="34" charset="-120"/>
-              </a:rPr>
-              <a:t>Many trees lose their leaves in the dry season.</a:t>
-            </a:r>
-            <a:endParaRPr lang="en-US" sz="4000" dirty="0"/>
+              <a:t>Illustration: a baobab</a:t>
+            </a:r>
+            <a:endParaRPr lang="en-US" sz="1600" dirty="0"/>
           </a:p>
         </p:txBody>
       </p:sp>
@@ -14987,111 +14913,9 @@
           </a:p>
         </p:txBody>
       </p:sp>
-      <p:sp>
-        <p:nvSpPr>
-          <p:cNvPr id="3" name="Text 1"/>
-          <p:cNvSpPr/>
-          <p:nvPr/>
-        </p:nvSpPr>
-        <p:spPr>
-          <a:xfrm>
-            <a:off x="365760" y="1005840"/>
-            <a:ext cx="11460175" cy="731520"/>
-          </a:xfrm>
-          <a:prstGeom prst="rect">
-            <a:avLst/>
-          </a:prstGeom>
-          <a:noFill/>
-          <a:ln/>
-        </p:spPr>
-        <p:txBody>
-          <a:bodyPr wrap="square" lIns="0" tIns="0" rIns="0" bIns="0" rtlCol="0" anchor="ctr">
-            <a:normAutofit/>
-          </a:bodyPr>
-          <a:lstStyle/>
-          <a:p>
-            <a:pPr algn="ctr" indent="0" marL="0">
-              <a:buNone/>
-            </a:pPr>
-            <a:r>
-              <a:rPr lang="en-US" sz="3600" b="1" dirty="0">
-                <a:solidFill>
-                  <a:srgbClr val="990011"/>
-                </a:solidFill>
-                <a:latin typeface="Times New Roman" pitchFamily="34" charset="0"/>
-                <a:ea typeface="Times New Roman" pitchFamily="34" charset="-122"/>
-                <a:cs typeface="Times New Roman" pitchFamily="34" charset="-120"/>
-              </a:rPr>
-              <a:t>1. Vegetation</a:t>
-            </a:r>
-            <a:endParaRPr lang="en-US" sz="3600" dirty="0"/>
-          </a:p>
-        </p:txBody>
-      </p:sp>
-      <p:sp>
-        <p:nvSpPr>
-          <p:cNvPr id="4" name="Text 2"/>
-          <p:cNvSpPr/>
-          <p:nvPr/>
-        </p:nvSpPr>
-        <p:spPr>
-          <a:xfrm>
-            <a:off x="365760" y="1783080"/>
-            <a:ext cx="4846320" cy="4617720"/>
-          </a:xfrm>
-          <a:prstGeom prst="rect">
-            <a:avLst/>
-          </a:prstGeom>
-          <a:noFill/>
-          <a:ln/>
-        </p:spPr>
-        <p:txBody>
-          <a:bodyPr wrap="square" lIns="0" tIns="0" rIns="0" bIns="0" rtlCol="0" anchor="t"/>
-          <a:lstStyle/>
-          <a:p>
-            <a:pPr algn="l" marL="342900" indent="-342900">
-              <a:spcAft>
-                <a:spcPts val="800"/>
-              </a:spcAft>
-              <a:buSzPct val="100000"/>
-              <a:buChar char="•"/>
-            </a:pPr>
-            <a:r>
-              <a:rPr lang="en-US" sz="3600" b="1" dirty="0">
-                <a:solidFill>
-                  <a:srgbClr val="111111"/>
-                </a:solidFill>
-                <a:latin typeface="Times New Roman" pitchFamily="34" charset="0"/>
-                <a:ea typeface="Times New Roman" pitchFamily="34" charset="-122"/>
-                <a:cs typeface="Times New Roman" pitchFamily="34" charset="-120"/>
-              </a:rPr>
-              <a:t>Water storage: </a:t>
-            </a:r>
-            <a:pPr algn="l" marL="342900" indent="-342900">
-              <a:spcAft>
-                <a:spcPts val="800"/>
-              </a:spcAft>
-              <a:buSzPct val="100000"/>
-              <a:buChar char="•"/>
-            </a:pPr>
-            <a:r>
-              <a:rPr lang="en-US" sz="3600" dirty="0">
-                <a:solidFill>
-                  <a:srgbClr val="111111"/>
-                </a:solidFill>
-                <a:latin typeface="Times New Roman" pitchFamily="34" charset="0"/>
-                <a:ea typeface="Times New Roman" pitchFamily="34" charset="-122"/>
-                <a:cs typeface="Times New Roman" pitchFamily="34" charset="-120"/>
-              </a:rPr>
-              <a:t>The baobab stores water in its trunk.</a:t>
-            </a:r>
-            <a:endParaRPr lang="en-US" sz="3600" dirty="0"/>
-          </a:p>
-        </p:txBody>
-      </p:sp>
       <p:pic>
         <p:nvPicPr>
-          <p:cNvPr id="5" name="Image 0" descr="/home/claude/f4/img/v2/f2t_baobab.jpg">    </p:cNvPr>
+          <p:cNvPr id="3" name="Image 0" descr="/home/claude/f4/img/minesec_sheet.png">    </p:cNvPr>
           <p:cNvPicPr>
             <a:picLocks noChangeAspect="1"/>
           </p:cNvPicPr>
@@ -15105,8 +14929,8 @@
         </p:blipFill>
         <p:spPr>
           <a:xfrm>
-            <a:off x="5349240" y="2071212"/>
-            <a:ext cx="6659575" cy="3693983"/>
+            <a:off x="0" y="658368"/>
+            <a:ext cx="5120640" cy="5833872"/>
           </a:xfrm>
           <a:prstGeom prst="rect">
             <a:avLst/>
@@ -15115,14 +14939,14 @@
       </p:pic>
       <p:sp>
         <p:nvSpPr>
-          <p:cNvPr id="6" name="Text 3"/>
+          <p:cNvPr id="4" name="Text 1"/>
           <p:cNvSpPr/>
           <p:nvPr/>
         </p:nvSpPr>
         <p:spPr>
           <a:xfrm>
-            <a:off x="5349240" y="6089904"/>
-            <a:ext cx="6659575" cy="347472"/>
+            <a:off x="5349240" y="1005840"/>
+            <a:ext cx="6522415" cy="731520"/>
           </a:xfrm>
           <a:prstGeom prst="rect">
             <a:avLst/>
@@ -15131,24 +14955,87 @@
           <a:ln/>
         </p:spPr>
         <p:txBody>
-          <a:bodyPr wrap="square" lIns="0" tIns="0" rIns="0" bIns="0" rtlCol="0" anchor="ctr"/>
+          <a:bodyPr wrap="square" lIns="0" tIns="0" rIns="0" bIns="0" rtlCol="0" anchor="ctr">
+            <a:normAutofit/>
+          </a:bodyPr>
           <a:lstStyle/>
           <a:p>
             <a:pPr algn="ctr" indent="0" marL="0">
               <a:buNone/>
             </a:pPr>
             <a:r>
-              <a:rPr lang="en-US" sz="1600" i="1" dirty="0">
-                <a:solidFill>
-                  <a:srgbClr val="555555"/>
+              <a:rPr lang="en-US" sz="3600" b="1" dirty="0">
+                <a:solidFill>
+                  <a:srgbClr val="990011"/>
                 </a:solidFill>
                 <a:latin typeface="Times New Roman" pitchFamily="34" charset="0"/>
                 <a:ea typeface="Times New Roman" pitchFamily="34" charset="-122"/>
                 <a:cs typeface="Times New Roman" pitchFamily="34" charset="-120"/>
               </a:rPr>
-              <a:t>Illustration: a baobab</a:t>
-            </a:r>
-            <a:endParaRPr lang="en-US" sz="1600" dirty="0"/>
+              <a:t>1. Vegetation</a:t>
+            </a:r>
+            <a:endParaRPr lang="en-US" sz="3600" dirty="0"/>
+          </a:p>
+        </p:txBody>
+      </p:sp>
+      <p:sp>
+        <p:nvSpPr>
+          <p:cNvPr id="5" name="Text 2"/>
+          <p:cNvSpPr/>
+          <p:nvPr/>
+        </p:nvSpPr>
+        <p:spPr>
+          <a:xfrm>
+            <a:off x="5349240" y="1783080"/>
+            <a:ext cx="6522415" cy="4663440"/>
+          </a:xfrm>
+          <a:prstGeom prst="rect">
+            <a:avLst/>
+          </a:prstGeom>
+          <a:noFill/>
+          <a:ln/>
+        </p:spPr>
+        <p:txBody>
+          <a:bodyPr wrap="square" lIns="0" tIns="0" rIns="0" bIns="0" rtlCol="0" anchor="t"/>
+          <a:lstStyle/>
+          <a:p>
+            <a:pPr algn="l" marL="342900" indent="-342900">
+              <a:spcAft>
+                <a:spcPts val="800"/>
+              </a:spcAft>
+              <a:buSzPct val="100000"/>
+              <a:buChar char="•"/>
+            </a:pPr>
+            <a:r>
+              <a:rPr lang="en-US" sz="4000" b="1" dirty="0">
+                <a:solidFill>
+                  <a:srgbClr val="111111"/>
+                </a:solidFill>
+                <a:latin typeface="Times New Roman" pitchFamily="34" charset="0"/>
+                <a:ea typeface="Times New Roman" pitchFamily="34" charset="-122"/>
+                <a:cs typeface="Times New Roman" pitchFamily="34" charset="-120"/>
+              </a:rPr>
+              <a:t>Protection: </a:t>
+            </a:r>
+            <a:pPr algn="l" marL="342900" indent="-342900">
+              <a:spcAft>
+                <a:spcPts val="800"/>
+              </a:spcAft>
+              <a:buSzPct val="100000"/>
+              <a:buChar char="•"/>
+            </a:pPr>
+            <a:r>
+              <a:rPr lang="en-US" sz="4000" dirty="0">
+                <a:solidFill>
+                  <a:srgbClr val="111111"/>
+                </a:solidFill>
+                <a:latin typeface="Times New Roman" pitchFamily="34" charset="0"/>
+                <a:ea typeface="Times New Roman" pitchFamily="34" charset="-122"/>
+                <a:cs typeface="Times New Roman" pitchFamily="34" charset="-120"/>
+              </a:rPr>
+              <a:t>Thick bark protects trees from fire.</a:t>
+            </a:r>
+            <a:endParaRPr lang="en-US" sz="4000" dirty="0"/>
           </a:p>
         </p:txBody>
       </p:sp>
@@ -15369,6 +15256,26 @@
             </a:r>
             <a:endParaRPr lang="en-US" sz="4000" dirty="0"/>
           </a:p>
+          <a:p>
+            <a:pPr algn="l" indent="0" marL="0">
+              <a:spcAft>
+                <a:spcPts val="800"/>
+              </a:spcAft>
+              <a:buNone/>
+            </a:pPr>
+            <a:r>
+              <a:rPr lang="en-US" sz="4000" dirty="0">
+                <a:solidFill>
+                  <a:srgbClr val="111111"/>
+                </a:solidFill>
+                <a:latin typeface="Times New Roman" pitchFamily="34" charset="0"/>
+                <a:ea typeface="Times New Roman" pitchFamily="34" charset="-122"/>
+                <a:cs typeface="Times New Roman" pitchFamily="34" charset="-120"/>
+              </a:rPr>
+              <a:t>Name two trees of the savanna.</a:t>
+            </a:r>
+            <a:endParaRPr lang="en-US" sz="4000" dirty="0"/>
+          </a:p>
         </p:txBody>
       </p:sp>
       <p:sp>
@@ -15542,7 +15449,7 @@
                 <a:ea typeface="Times New Roman" pitchFamily="34" charset="-122"/>
                 <a:cs typeface="Times New Roman" pitchFamily="34" charset="-120"/>
               </a:rPr>
-              <a:t>1. Vegetation</a:t>
+              <a:t>2. Soils</a:t>
             </a:r>
             <a:endParaRPr lang="en-US" sz="3600" dirty="0"/>
           </a:p>
@@ -15568,6 +15475,26 @@
         <p:txBody>
           <a:bodyPr wrap="square" lIns="0" tIns="0" rIns="0" bIns="0" rtlCol="0" anchor="t"/>
           <a:lstStyle/>
+          <a:p>
+            <a:pPr algn="l" indent="0" marL="0">
+              <a:spcAft>
+                <a:spcPts val="800"/>
+              </a:spcAft>
+              <a:buNone/>
+            </a:pPr>
+            <a:r>
+              <a:rPr lang="en-US" sz="4000" i="1" dirty="0">
+                <a:solidFill>
+                  <a:srgbClr val="111111"/>
+                </a:solidFill>
+                <a:latin typeface="Times New Roman" pitchFamily="34" charset="0"/>
+                <a:ea typeface="Times New Roman" pitchFamily="34" charset="-122"/>
+                <a:cs typeface="Times New Roman" pitchFamily="34" charset="-120"/>
+              </a:rPr>
+              <a:t>The savanna soils have the following characteristics:</a:t>
+            </a:r>
+            <a:endParaRPr lang="en-US" sz="4000" dirty="0"/>
+          </a:p>
           <a:p>
             <a:pPr algn="l" marL="342900" indent="-342900">
               <a:spcAft>
@@ -15585,7 +15512,7 @@
                 <a:ea typeface="Times New Roman" pitchFamily="34" charset="-122"/>
                 <a:cs typeface="Times New Roman" pitchFamily="34" charset="-120"/>
               </a:rPr>
-              <a:t>Protection: </a:t>
+              <a:t>Ferruginous soils: </a:t>
             </a:r>
             <a:pPr algn="l" marL="342900" indent="-342900">
               <a:spcAft>
@@ -15603,7 +15530,7 @@
                 <a:ea typeface="Times New Roman" pitchFamily="34" charset="-122"/>
                 <a:cs typeface="Times New Roman" pitchFamily="34" charset="-120"/>
               </a:rPr>
-              <a:t>Thick bark protects trees from fire.</a:t>
+              <a:t>Red soils rich in iron.</a:t>
             </a:r>
             <a:endParaRPr lang="en-US" sz="4000" dirty="0"/>
           </a:p>
@@ -15721,9 +15648,111 @@
           </a:p>
         </p:txBody>
       </p:sp>
+      <p:sp>
+        <p:nvSpPr>
+          <p:cNvPr id="3" name="Text 1"/>
+          <p:cNvSpPr/>
+          <p:nvPr/>
+        </p:nvSpPr>
+        <p:spPr>
+          <a:xfrm>
+            <a:off x="365760" y="1005840"/>
+            <a:ext cx="11460175" cy="731520"/>
+          </a:xfrm>
+          <a:prstGeom prst="rect">
+            <a:avLst/>
+          </a:prstGeom>
+          <a:noFill/>
+          <a:ln/>
+        </p:spPr>
+        <p:txBody>
+          <a:bodyPr wrap="square" lIns="0" tIns="0" rIns="0" bIns="0" rtlCol="0" anchor="ctr">
+            <a:normAutofit/>
+          </a:bodyPr>
+          <a:lstStyle/>
+          <a:p>
+            <a:pPr algn="ctr" indent="0" marL="0">
+              <a:buNone/>
+            </a:pPr>
+            <a:r>
+              <a:rPr lang="en-US" sz="3600" b="1" dirty="0">
+                <a:solidFill>
+                  <a:srgbClr val="990011"/>
+                </a:solidFill>
+                <a:latin typeface="Times New Roman" pitchFamily="34" charset="0"/>
+                <a:ea typeface="Times New Roman" pitchFamily="34" charset="-122"/>
+                <a:cs typeface="Times New Roman" pitchFamily="34" charset="-120"/>
+              </a:rPr>
+              <a:t>2. Soils</a:t>
+            </a:r>
+            <a:endParaRPr lang="en-US" sz="3600" dirty="0"/>
+          </a:p>
+        </p:txBody>
+      </p:sp>
+      <p:sp>
+        <p:nvSpPr>
+          <p:cNvPr id="4" name="Text 2"/>
+          <p:cNvSpPr/>
+          <p:nvPr/>
+        </p:nvSpPr>
+        <p:spPr>
+          <a:xfrm>
+            <a:off x="365760" y="1783080"/>
+            <a:ext cx="4846320" cy="4617720"/>
+          </a:xfrm>
+          <a:prstGeom prst="rect">
+            <a:avLst/>
+          </a:prstGeom>
+          <a:noFill/>
+          <a:ln/>
+        </p:spPr>
+        <p:txBody>
+          <a:bodyPr wrap="square" lIns="0" tIns="0" rIns="0" bIns="0" rtlCol="0" anchor="t"/>
+          <a:lstStyle/>
+          <a:p>
+            <a:pPr algn="l" marL="342900" indent="-342900">
+              <a:spcAft>
+                <a:spcPts val="800"/>
+              </a:spcAft>
+              <a:buSzPct val="100000"/>
+              <a:buChar char="•"/>
+            </a:pPr>
+            <a:r>
+              <a:rPr lang="en-US" sz="3600" b="1" dirty="0">
+                <a:solidFill>
+                  <a:srgbClr val="111111"/>
+                </a:solidFill>
+                <a:latin typeface="Times New Roman" pitchFamily="34" charset="0"/>
+                <a:ea typeface="Times New Roman" pitchFamily="34" charset="-122"/>
+                <a:cs typeface="Times New Roman" pitchFamily="34" charset="-120"/>
+              </a:rPr>
+              <a:t>Laterite: </a:t>
+            </a:r>
+            <a:pPr algn="l" marL="342900" indent="-342900">
+              <a:spcAft>
+                <a:spcPts val="800"/>
+              </a:spcAft>
+              <a:buSzPct val="100000"/>
+              <a:buChar char="•"/>
+            </a:pPr>
+            <a:r>
+              <a:rPr lang="en-US" sz="3600" dirty="0">
+                <a:solidFill>
+                  <a:srgbClr val="111111"/>
+                </a:solidFill>
+                <a:latin typeface="Times New Roman" pitchFamily="34" charset="0"/>
+                <a:ea typeface="Times New Roman" pitchFamily="34" charset="-122"/>
+                <a:cs typeface="Times New Roman" pitchFamily="34" charset="-120"/>
+              </a:rPr>
+              <a:t>A hard red crust used for roads and bricks.</a:t>
+            </a:r>
+            <a:endParaRPr lang="en-US" sz="3600" dirty="0"/>
+          </a:p>
+        </p:txBody>
+      </p:sp>
       <p:pic>
         <p:nvPicPr>
-          <p:cNvPr id="3" name="Image 0" descr="/home/claude/f4/img/minesec_sheet.png">    </p:cNvPr>
+          <p:cNvPr id="5" name="Image 0" descr="/home/claude/f4/img/v2/f2t_laterite.jpg">    </p:cNvPr>
           <p:cNvPicPr>
             <a:picLocks noChangeAspect="1"/>
           </p:cNvPicPr>
@@ -15737,8 +15766,8 @@
         </p:blipFill>
         <p:spPr>
           <a:xfrm>
-            <a:off x="0" y="658368"/>
-            <a:ext cx="5120640" cy="5833872"/>
+            <a:off x="5349240" y="2070172"/>
+            <a:ext cx="6659575" cy="3696064"/>
           </a:xfrm>
           <a:prstGeom prst="rect">
             <a:avLst/>
@@ -15747,14 +15776,14 @@
       </p:pic>
       <p:sp>
         <p:nvSpPr>
-          <p:cNvPr id="4" name="Text 1"/>
+          <p:cNvPr id="6" name="Text 3"/>
           <p:cNvSpPr/>
           <p:nvPr/>
         </p:nvSpPr>
         <p:spPr>
           <a:xfrm>
-            <a:off x="5349240" y="1005840"/>
-            <a:ext cx="6522415" cy="731520"/>
+            <a:off x="5349240" y="6089904"/>
+            <a:ext cx="6659575" cy="347472"/>
           </a:xfrm>
           <a:prstGeom prst="rect">
             <a:avLst/>
@@ -15763,107 +15792,24 @@
           <a:ln/>
         </p:spPr>
         <p:txBody>
-          <a:bodyPr wrap="square" lIns="0" tIns="0" rIns="0" bIns="0" rtlCol="0" anchor="ctr">
-            <a:normAutofit/>
-          </a:bodyPr>
+          <a:bodyPr wrap="square" lIns="0" tIns="0" rIns="0" bIns="0" rtlCol="0" anchor="ctr"/>
           <a:lstStyle/>
           <a:p>
             <a:pPr algn="ctr" indent="0" marL="0">
               <a:buNone/>
             </a:pPr>
             <a:r>
-              <a:rPr lang="en-US" sz="3600" b="1" dirty="0">
-                <a:solidFill>
-                  <a:srgbClr val="990011"/>
+              <a:rPr lang="en-US" sz="1600" i="1" dirty="0">
+                <a:solidFill>
+                  <a:srgbClr val="555555"/>
                 </a:solidFill>
                 <a:latin typeface="Times New Roman" pitchFamily="34" charset="0"/>
                 <a:ea typeface="Times New Roman" pitchFamily="34" charset="-122"/>
                 <a:cs typeface="Times New Roman" pitchFamily="34" charset="-120"/>
               </a:rPr>
-              <a:t>2. Soils</a:t>
-            </a:r>
-            <a:endParaRPr lang="en-US" sz="3600" dirty="0"/>
-          </a:p>
-        </p:txBody>
-      </p:sp>
-      <p:sp>
-        <p:nvSpPr>
-          <p:cNvPr id="5" name="Text 2"/>
-          <p:cNvSpPr/>
-          <p:nvPr/>
-        </p:nvSpPr>
-        <p:spPr>
-          <a:xfrm>
-            <a:off x="5349240" y="1783080"/>
-            <a:ext cx="6522415" cy="4663440"/>
-          </a:xfrm>
-          <a:prstGeom prst="rect">
-            <a:avLst/>
-          </a:prstGeom>
-          <a:noFill/>
-          <a:ln/>
-        </p:spPr>
-        <p:txBody>
-          <a:bodyPr wrap="square" lIns="0" tIns="0" rIns="0" bIns="0" rtlCol="0" anchor="t"/>
-          <a:lstStyle/>
-          <a:p>
-            <a:pPr algn="l" indent="0" marL="0">
-              <a:spcAft>
-                <a:spcPts val="800"/>
-              </a:spcAft>
-              <a:buNone/>
-            </a:pPr>
-            <a:r>
-              <a:rPr lang="en-US" sz="4000" i="1" dirty="0">
-                <a:solidFill>
-                  <a:srgbClr val="111111"/>
-                </a:solidFill>
-                <a:latin typeface="Times New Roman" pitchFamily="34" charset="0"/>
-                <a:ea typeface="Times New Roman" pitchFamily="34" charset="-122"/>
-                <a:cs typeface="Times New Roman" pitchFamily="34" charset="-120"/>
-              </a:rPr>
-              <a:t>The savanna soils have the following characteristics:</a:t>
-            </a:r>
-            <a:endParaRPr lang="en-US" sz="4000" dirty="0"/>
-          </a:p>
-          <a:p>
-            <a:pPr algn="l" marL="342900" indent="-342900">
-              <a:spcAft>
-                <a:spcPts val="800"/>
-              </a:spcAft>
-              <a:buSzPct val="100000"/>
-              <a:buChar char="•"/>
-            </a:pPr>
-            <a:r>
-              <a:rPr lang="en-US" sz="4000" b="1" dirty="0">
-                <a:solidFill>
-                  <a:srgbClr val="111111"/>
-                </a:solidFill>
-                <a:latin typeface="Times New Roman" pitchFamily="34" charset="0"/>
-                <a:ea typeface="Times New Roman" pitchFamily="34" charset="-122"/>
-                <a:cs typeface="Times New Roman" pitchFamily="34" charset="-120"/>
-              </a:rPr>
-              <a:t>Ferruginous soils: </a:t>
-            </a:r>
-            <a:pPr algn="l" marL="342900" indent="-342900">
-              <a:spcAft>
-                <a:spcPts val="800"/>
-              </a:spcAft>
-              <a:buSzPct val="100000"/>
-              <a:buChar char="•"/>
-            </a:pPr>
-            <a:r>
-              <a:rPr lang="en-US" sz="4000" dirty="0">
-                <a:solidFill>
-                  <a:srgbClr val="111111"/>
-                </a:solidFill>
-                <a:latin typeface="Times New Roman" pitchFamily="34" charset="0"/>
-                <a:ea typeface="Times New Roman" pitchFamily="34" charset="-122"/>
-                <a:cs typeface="Times New Roman" pitchFamily="34" charset="-120"/>
-              </a:rPr>
-              <a:t>Red soils rich in iron.</a:t>
-            </a:r>
-            <a:endParaRPr lang="en-US" sz="4000" dirty="0"/>
+              <a:t>Illustration: laterite</a:t>
+            </a:r>
+            <a:endParaRPr lang="en-US" sz="1600" dirty="0"/>
           </a:p>
         </p:txBody>
       </p:sp>
@@ -15979,111 +15925,9 @@
           </a:p>
         </p:txBody>
       </p:sp>
-      <p:sp>
-        <p:nvSpPr>
-          <p:cNvPr id="3" name="Text 1"/>
-          <p:cNvSpPr/>
-          <p:nvPr/>
-        </p:nvSpPr>
-        <p:spPr>
-          <a:xfrm>
-            <a:off x="365760" y="1005840"/>
-            <a:ext cx="11460175" cy="731520"/>
-          </a:xfrm>
-          <a:prstGeom prst="rect">
-            <a:avLst/>
-          </a:prstGeom>
-          <a:noFill/>
-          <a:ln/>
-        </p:spPr>
-        <p:txBody>
-          <a:bodyPr wrap="square" lIns="0" tIns="0" rIns="0" bIns="0" rtlCol="0" anchor="ctr">
-            <a:normAutofit/>
-          </a:bodyPr>
-          <a:lstStyle/>
-          <a:p>
-            <a:pPr algn="ctr" indent="0" marL="0">
-              <a:buNone/>
-            </a:pPr>
-            <a:r>
-              <a:rPr lang="en-US" sz="3600" b="1" dirty="0">
-                <a:solidFill>
-                  <a:srgbClr val="990011"/>
-                </a:solidFill>
-                <a:latin typeface="Times New Roman" pitchFamily="34" charset="0"/>
-                <a:ea typeface="Times New Roman" pitchFamily="34" charset="-122"/>
-                <a:cs typeface="Times New Roman" pitchFamily="34" charset="-120"/>
-              </a:rPr>
-              <a:t>2. Soils</a:t>
-            </a:r>
-            <a:endParaRPr lang="en-US" sz="3600" dirty="0"/>
-          </a:p>
-        </p:txBody>
-      </p:sp>
-      <p:sp>
-        <p:nvSpPr>
-          <p:cNvPr id="4" name="Text 2"/>
-          <p:cNvSpPr/>
-          <p:nvPr/>
-        </p:nvSpPr>
-        <p:spPr>
-          <a:xfrm>
-            <a:off x="365760" y="1783080"/>
-            <a:ext cx="4846320" cy="4617720"/>
-          </a:xfrm>
-          <a:prstGeom prst="rect">
-            <a:avLst/>
-          </a:prstGeom>
-          <a:noFill/>
-          <a:ln/>
-        </p:spPr>
-        <p:txBody>
-          <a:bodyPr wrap="square" lIns="0" tIns="0" rIns="0" bIns="0" rtlCol="0" anchor="t"/>
-          <a:lstStyle/>
-          <a:p>
-            <a:pPr algn="l" marL="342900" indent="-342900">
-              <a:spcAft>
-                <a:spcPts val="800"/>
-              </a:spcAft>
-              <a:buSzPct val="100000"/>
-              <a:buChar char="•"/>
-            </a:pPr>
-            <a:r>
-              <a:rPr lang="en-US" sz="3600" b="1" dirty="0">
-                <a:solidFill>
-                  <a:srgbClr val="111111"/>
-                </a:solidFill>
-                <a:latin typeface="Times New Roman" pitchFamily="34" charset="0"/>
-                <a:ea typeface="Times New Roman" pitchFamily="34" charset="-122"/>
-                <a:cs typeface="Times New Roman" pitchFamily="34" charset="-120"/>
-              </a:rPr>
-              <a:t>Laterite: </a:t>
-            </a:r>
-            <a:pPr algn="l" marL="342900" indent="-342900">
-              <a:spcAft>
-                <a:spcPts val="800"/>
-              </a:spcAft>
-              <a:buSzPct val="100000"/>
-              <a:buChar char="•"/>
-            </a:pPr>
-            <a:r>
-              <a:rPr lang="en-US" sz="3600" dirty="0">
-                <a:solidFill>
-                  <a:srgbClr val="111111"/>
-                </a:solidFill>
-                <a:latin typeface="Times New Roman" pitchFamily="34" charset="0"/>
-                <a:ea typeface="Times New Roman" pitchFamily="34" charset="-122"/>
-                <a:cs typeface="Times New Roman" pitchFamily="34" charset="-120"/>
-              </a:rPr>
-              <a:t>A hard red crust used for roads and bricks.</a:t>
-            </a:r>
-            <a:endParaRPr lang="en-US" sz="3600" dirty="0"/>
-          </a:p>
-        </p:txBody>
-      </p:sp>
       <p:pic>
         <p:nvPicPr>
-          <p:cNvPr id="5" name="Image 0" descr="/home/claude/f4/img/v2/f2t_laterite.jpg">    </p:cNvPr>
+          <p:cNvPr id="3" name="Image 0" descr="/home/claude/f4/img/minesec_sheet.png">    </p:cNvPr>
           <p:cNvPicPr>
             <a:picLocks noChangeAspect="1"/>
           </p:cNvPicPr>
@@ -16097,8 +15941,8 @@
         </p:blipFill>
         <p:spPr>
           <a:xfrm>
-            <a:off x="5349240" y="2070172"/>
-            <a:ext cx="6659575" cy="3696064"/>
+            <a:off x="0" y="658368"/>
+            <a:ext cx="5120640" cy="5833872"/>
           </a:xfrm>
           <a:prstGeom prst="rect">
             <a:avLst/>
@@ -16107,14 +15951,14 @@
       </p:pic>
       <p:sp>
         <p:nvSpPr>
-          <p:cNvPr id="6" name="Text 3"/>
+          <p:cNvPr id="4" name="Text 1"/>
           <p:cNvSpPr/>
           <p:nvPr/>
         </p:nvSpPr>
         <p:spPr>
           <a:xfrm>
-            <a:off x="5349240" y="6089904"/>
-            <a:ext cx="6659575" cy="347472"/>
+            <a:off x="5349240" y="1005840"/>
+            <a:ext cx="6522415" cy="731520"/>
           </a:xfrm>
           <a:prstGeom prst="rect">
             <a:avLst/>
@@ -16123,24 +15967,126 @@
           <a:ln/>
         </p:spPr>
         <p:txBody>
-          <a:bodyPr wrap="square" lIns="0" tIns="0" rIns="0" bIns="0" rtlCol="0" anchor="ctr"/>
+          <a:bodyPr wrap="square" lIns="0" tIns="0" rIns="0" bIns="0" rtlCol="0" anchor="ctr">
+            <a:normAutofit/>
+          </a:bodyPr>
           <a:lstStyle/>
           <a:p>
             <a:pPr algn="ctr" indent="0" marL="0">
               <a:buNone/>
             </a:pPr>
             <a:r>
-              <a:rPr lang="en-US" sz="1600" i="1" dirty="0">
-                <a:solidFill>
-                  <a:srgbClr val="555555"/>
+              <a:rPr lang="en-US" sz="3600" b="1" dirty="0">
+                <a:solidFill>
+                  <a:srgbClr val="990011"/>
                 </a:solidFill>
                 <a:latin typeface="Times New Roman" pitchFamily="34" charset="0"/>
                 <a:ea typeface="Times New Roman" pitchFamily="34" charset="-122"/>
                 <a:cs typeface="Times New Roman" pitchFamily="34" charset="-120"/>
               </a:rPr>
-              <a:t>Illustration: laterite</a:t>
-            </a:r>
-            <a:endParaRPr lang="en-US" sz="1600" dirty="0"/>
+              <a:t>2. Soils</a:t>
+            </a:r>
+            <a:endParaRPr lang="en-US" sz="3600" dirty="0"/>
+          </a:p>
+        </p:txBody>
+      </p:sp>
+      <p:sp>
+        <p:nvSpPr>
+          <p:cNvPr id="5" name="Text 2"/>
+          <p:cNvSpPr/>
+          <p:nvPr/>
+        </p:nvSpPr>
+        <p:spPr>
+          <a:xfrm>
+            <a:off x="5349240" y="1783080"/>
+            <a:ext cx="6522415" cy="4663440"/>
+          </a:xfrm>
+          <a:prstGeom prst="rect">
+            <a:avLst/>
+          </a:prstGeom>
+          <a:noFill/>
+          <a:ln/>
+        </p:spPr>
+        <p:txBody>
+          <a:bodyPr wrap="square" lIns="0" tIns="0" rIns="0" bIns="0" rtlCol="0" anchor="t"/>
+          <a:lstStyle/>
+          <a:p>
+            <a:pPr algn="l" marL="342900" indent="-342900">
+              <a:spcAft>
+                <a:spcPts val="800"/>
+              </a:spcAft>
+              <a:buSzPct val="100000"/>
+              <a:buChar char="•"/>
+            </a:pPr>
+            <a:r>
+              <a:rPr lang="en-US" sz="4000" b="1" dirty="0">
+                <a:solidFill>
+                  <a:srgbClr val="111111"/>
+                </a:solidFill>
+                <a:latin typeface="Times New Roman" pitchFamily="34" charset="0"/>
+                <a:ea typeface="Times New Roman" pitchFamily="34" charset="-122"/>
+                <a:cs typeface="Times New Roman" pitchFamily="34" charset="-120"/>
+              </a:rPr>
+              <a:t>Black cotton soils: </a:t>
+            </a:r>
+            <a:pPr algn="l" marL="342900" indent="-342900">
+              <a:spcAft>
+                <a:spcPts val="800"/>
+              </a:spcAft>
+              <a:buSzPct val="100000"/>
+              <a:buChar char="•"/>
+            </a:pPr>
+            <a:r>
+              <a:rPr lang="en-US" sz="4000" dirty="0">
+                <a:solidFill>
+                  <a:srgbClr val="111111"/>
+                </a:solidFill>
+                <a:latin typeface="Times New Roman" pitchFamily="34" charset="0"/>
+                <a:ea typeface="Times New Roman" pitchFamily="34" charset="-122"/>
+                <a:cs typeface="Times New Roman" pitchFamily="34" charset="-120"/>
+              </a:rPr>
+              <a:t>Fertile clay soils that crack when dry.</a:t>
+            </a:r>
+            <a:endParaRPr lang="en-US" sz="4000" dirty="0"/>
+          </a:p>
+          <a:p>
+            <a:pPr algn="l" marL="342900" indent="-342900">
+              <a:spcAft>
+                <a:spcPts val="800"/>
+              </a:spcAft>
+              <a:buSzPct val="100000"/>
+              <a:buChar char="•"/>
+            </a:pPr>
+            <a:r>
+              <a:rPr lang="en-US" sz="4000" b="1" dirty="0">
+                <a:solidFill>
+                  <a:srgbClr val="111111"/>
+                </a:solidFill>
+                <a:latin typeface="Times New Roman" pitchFamily="34" charset="0"/>
+                <a:ea typeface="Times New Roman" pitchFamily="34" charset="-122"/>
+                <a:cs typeface="Times New Roman" pitchFamily="34" charset="-120"/>
+              </a:rPr>
+              <a:t>Little humus: </a:t>
+            </a:r>
+            <a:pPr algn="l" marL="342900" indent="-342900">
+              <a:spcAft>
+                <a:spcPts val="800"/>
+              </a:spcAft>
+              <a:buSzPct val="100000"/>
+              <a:buChar char="•"/>
+            </a:pPr>
+            <a:r>
+              <a:rPr lang="en-US" sz="4000" dirty="0">
+                <a:solidFill>
+                  <a:srgbClr val="111111"/>
+                </a:solidFill>
+                <a:latin typeface="Times New Roman" pitchFamily="34" charset="0"/>
+                <a:ea typeface="Times New Roman" pitchFamily="34" charset="-122"/>
+                <a:cs typeface="Times New Roman" pitchFamily="34" charset="-120"/>
+              </a:rPr>
+              <a:t>Bush fires burn dead plants.</a:t>
+            </a:r>
+            <a:endParaRPr lang="en-US" sz="4000" dirty="0"/>
           </a:p>
         </p:txBody>
       </p:sp>
@@ -16250,7 +16196,7 @@
                 <a:ea typeface="Calibri" pitchFamily="34" charset="-122"/>
                 <a:cs typeface="Calibri" pitchFamily="34" charset="-120"/>
               </a:rPr>
-              <a:t>BOARD SUMMARY</a:t>
+              <a:t>FORMATIVE EVALUATION</a:t>
             </a:r>
             <a:endParaRPr lang="en-US" sz="1400" dirty="0"/>
           </a:p>
@@ -16315,7 +16261,7 @@
                 <a:ea typeface="Times New Roman" pitchFamily="34" charset="-122"/>
                 <a:cs typeface="Times New Roman" pitchFamily="34" charset="-120"/>
               </a:rPr>
-              <a:t>2. Soils</a:t>
+              <a:t>Evaluation 1</a:t>
             </a:r>
             <a:endParaRPr lang="en-US" sz="3600" dirty="0"/>
           </a:p>
@@ -16342,15 +16288,14 @@
           <a:bodyPr wrap="square" lIns="0" tIns="0" rIns="0" bIns="0" rtlCol="0" anchor="t"/>
           <a:lstStyle/>
           <a:p>
-            <a:pPr algn="l" marL="342900" indent="-342900">
+            <a:pPr algn="l" indent="0" marL="0">
               <a:spcAft>
                 <a:spcPts val="800"/>
               </a:spcAft>
-              <a:buSzPct val="100000"/>
-              <a:buChar char="•"/>
+              <a:buNone/>
             </a:pPr>
             <a:r>
-              <a:rPr lang="en-US" sz="4000" b="1" dirty="0">
+              <a:rPr lang="en-US" sz="4000" dirty="0">
                 <a:solidFill>
                   <a:srgbClr val="111111"/>
                 </a:solidFill>
@@ -16358,64 +16303,7 @@
                 <a:ea typeface="Times New Roman" pitchFamily="34" charset="-122"/>
                 <a:cs typeface="Times New Roman" pitchFamily="34" charset="-120"/>
               </a:rPr>
-              <a:t>Black cotton soils: </a:t>
-            </a:r>
-            <a:pPr algn="l" marL="342900" indent="-342900">
-              <a:spcAft>
-                <a:spcPts val="800"/>
-              </a:spcAft>
-              <a:buSzPct val="100000"/>
-              <a:buChar char="•"/>
-            </a:pPr>
-            <a:r>
-              <a:rPr lang="en-US" sz="4000" dirty="0">
-                <a:solidFill>
-                  <a:srgbClr val="111111"/>
-                </a:solidFill>
-                <a:latin typeface="Times New Roman" pitchFamily="34" charset="0"/>
-                <a:ea typeface="Times New Roman" pitchFamily="34" charset="-122"/>
-                <a:cs typeface="Times New Roman" pitchFamily="34" charset="-120"/>
-              </a:rPr>
-              <a:t>Fertile clay soils that crack when dry.</a:t>
-            </a:r>
-            <a:endParaRPr lang="en-US" sz="4000" dirty="0"/>
-          </a:p>
-          <a:p>
-            <a:pPr algn="l" marL="342900" indent="-342900">
-              <a:spcAft>
-                <a:spcPts val="800"/>
-              </a:spcAft>
-              <a:buSzPct val="100000"/>
-              <a:buChar char="•"/>
-            </a:pPr>
-            <a:r>
-              <a:rPr lang="en-US" sz="4000" b="1" dirty="0">
-                <a:solidFill>
-                  <a:srgbClr val="111111"/>
-                </a:solidFill>
-                <a:latin typeface="Times New Roman" pitchFamily="34" charset="0"/>
-                <a:ea typeface="Times New Roman" pitchFamily="34" charset="-122"/>
-                <a:cs typeface="Times New Roman" pitchFamily="34" charset="-120"/>
-              </a:rPr>
-              <a:t>Little humus: </a:t>
-            </a:r>
-            <a:pPr algn="l" marL="342900" indent="-342900">
-              <a:spcAft>
-                <a:spcPts val="800"/>
-              </a:spcAft>
-              <a:buSzPct val="100000"/>
-              <a:buChar char="•"/>
-            </a:pPr>
-            <a:r>
-              <a:rPr lang="en-US" sz="4000" dirty="0">
-                <a:solidFill>
-                  <a:srgbClr val="111111"/>
-                </a:solidFill>
-                <a:latin typeface="Times New Roman" pitchFamily="34" charset="0"/>
-                <a:ea typeface="Times New Roman" pitchFamily="34" charset="-122"/>
-                <a:cs typeface="Times New Roman" pitchFamily="34" charset="-120"/>
-              </a:rPr>
-              <a:t>Bush fires burn dead plants.</a:t>
+              <a:t>Give two ways savanna trees survive the dry season.</a:t>
             </a:r>
             <a:endParaRPr lang="en-US" sz="4000" dirty="0"/>
           </a:p>
@@ -16592,7 +16480,7 @@
                 <a:ea typeface="Times New Roman" pitchFamily="34" charset="-122"/>
                 <a:cs typeface="Times New Roman" pitchFamily="34" charset="-120"/>
               </a:rPr>
-              <a:t>Evaluation 1</a:t>
+              <a:t>Expected Answer</a:t>
             </a:r>
             <a:endParaRPr lang="en-US" sz="3600" dirty="0"/>
           </a:p>
@@ -16634,7 +16522,7 @@
                 <a:ea typeface="Times New Roman" pitchFamily="34" charset="-122"/>
                 <a:cs typeface="Times New Roman" pitchFamily="34" charset="-120"/>
               </a:rPr>
-              <a:t>Give two ways savanna trees survive the dry season.</a:t>
+              <a:t>They lose their leaves; the baobab keeps water in its trunk.</a:t>
             </a:r>
             <a:endParaRPr lang="en-US" sz="4000" dirty="0"/>
           </a:p>
@@ -16811,7 +16699,7 @@
                 <a:ea typeface="Times New Roman" pitchFamily="34" charset="-122"/>
                 <a:cs typeface="Times New Roman" pitchFamily="34" charset="-120"/>
               </a:rPr>
-              <a:t>Expected Answer</a:t>
+              <a:t>Evaluation 2</a:t>
             </a:r>
             <a:endParaRPr lang="en-US" sz="3600" dirty="0"/>
           </a:p>
@@ -16853,7 +16741,7 @@
                 <a:ea typeface="Times New Roman" pitchFamily="34" charset="-122"/>
                 <a:cs typeface="Times New Roman" pitchFamily="34" charset="-120"/>
               </a:rPr>
-              <a:t>They lose their leaves; the baobab keeps water in its trunk.</a:t>
+              <a:t>What is laterite used for?</a:t>
             </a:r>
             <a:endParaRPr lang="en-US" sz="4000" dirty="0"/>
           </a:p>
@@ -17030,7 +16918,7 @@
                 <a:ea typeface="Times New Roman" pitchFamily="34" charset="-122"/>
                 <a:cs typeface="Times New Roman" pitchFamily="34" charset="-120"/>
               </a:rPr>
-              <a:t>Evaluation 2</a:t>
+              <a:t>Expected Answer</a:t>
             </a:r>
             <a:endParaRPr lang="en-US" sz="3600" dirty="0"/>
           </a:p>
@@ -17072,7 +16960,7 @@
                 <a:ea typeface="Times New Roman" pitchFamily="34" charset="-122"/>
                 <a:cs typeface="Times New Roman" pitchFamily="34" charset="-120"/>
               </a:rPr>
-              <a:t>What is laterite used for?</a:t>
+              <a:t>For roads and bricks.</a:t>
             </a:r>
             <a:endParaRPr lang="en-US" sz="4000" dirty="0"/>
           </a:p>
@@ -17184,7 +17072,7 @@
                 <a:ea typeface="Calibri" pitchFamily="34" charset="-122"/>
                 <a:cs typeface="Calibri" pitchFamily="34" charset="-120"/>
               </a:rPr>
-              <a:t>FORMATIVE EVALUATION</a:t>
+              <a:t>REMEDIATION</a:t>
             </a:r>
             <a:endParaRPr lang="en-US" sz="1400" dirty="0"/>
           </a:p>
@@ -17207,7 +17095,7 @@
         <p:spPr>
           <a:xfrm>
             <a:off x="0" y="658368"/>
-            <a:ext cx="5120640" cy="5833872"/>
+            <a:ext cx="1463040" cy="5833872"/>
           </a:xfrm>
           <a:prstGeom prst="rect">
             <a:avLst/>
@@ -17222,8 +17110,8 @@
         </p:nvSpPr>
         <p:spPr>
           <a:xfrm>
-            <a:off x="5349240" y="1005840"/>
-            <a:ext cx="6522415" cy="731520"/>
+            <a:off x="1691640" y="1005840"/>
+            <a:ext cx="10180015" cy="731520"/>
           </a:xfrm>
           <a:prstGeom prst="rect">
             <a:avLst/>
@@ -17249,7 +17137,7 @@
                 <a:ea typeface="Times New Roman" pitchFamily="34" charset="-122"/>
                 <a:cs typeface="Times New Roman" pitchFamily="34" charset="-120"/>
               </a:rPr>
-              <a:t>Expected Answer</a:t>
+              <a:t>Remediation</a:t>
             </a:r>
             <a:endParaRPr lang="en-US" sz="3600" dirty="0"/>
           </a:p>
@@ -17263,8 +17151,8 @@
         </p:nvSpPr>
         <p:spPr>
           <a:xfrm>
-            <a:off x="5349240" y="1783080"/>
-            <a:ext cx="6522415" cy="4663440"/>
+            <a:off x="1691640" y="1783080"/>
+            <a:ext cx="10180015" cy="4663440"/>
           </a:xfrm>
           <a:prstGeom prst="rect">
             <a:avLst/>
@@ -17283,7 +17171,7 @@
               <a:buNone/>
             </a:pPr>
             <a:r>
-              <a:rPr lang="en-US" sz="4000" dirty="0">
+              <a:rPr lang="en-US" sz="4000" b="1" dirty="0">
                 <a:solidFill>
                   <a:srgbClr val="111111"/>
                 </a:solidFill>
@@ -17291,7 +17179,73 @@
                 <a:ea typeface="Times New Roman" pitchFamily="34" charset="-122"/>
                 <a:cs typeface="Times New Roman" pitchFamily="34" charset="-120"/>
               </a:rPr>
-              <a:t>For roads and bricks.</a:t>
+              <a:t>Fill in the blanks:</a:t>
+            </a:r>
+            <a:endParaRPr lang="en-US" sz="4000" dirty="0"/>
+          </a:p>
+          <a:p>
+            <a:pPr algn="l" marL="342900" indent="-342900">
+              <a:spcAft>
+                <a:spcPts val="800"/>
+              </a:spcAft>
+              <a:buSzPct val="100000"/>
+              <a:buFont typeface="+mj-lt"/>
+              <a:buAutoNum type="arabicPeriod" startAt="1"/>
+            </a:pPr>
+            <a:r>
+              <a:rPr lang="en-US" sz="4000" dirty="0">
+                <a:solidFill>
+                  <a:srgbClr val="111111"/>
+                </a:solidFill>
+                <a:latin typeface="Times New Roman" pitchFamily="34" charset="0"/>
+                <a:ea typeface="Times New Roman" pitchFamily="34" charset="-122"/>
+                <a:cs typeface="Times New Roman" pitchFamily="34" charset="-120"/>
+              </a:rPr>
+              <a:t>Trees that lose their leaves are ______ trees.</a:t>
+            </a:r>
+            <a:endParaRPr lang="en-US" sz="4000" dirty="0"/>
+          </a:p>
+          <a:p>
+            <a:pPr algn="l" marL="342900" indent="-342900">
+              <a:spcAft>
+                <a:spcPts val="800"/>
+              </a:spcAft>
+              <a:buSzPct val="100000"/>
+              <a:buFont typeface="+mj-lt"/>
+              <a:buAutoNum type="arabicPeriod" startAt="1"/>
+            </a:pPr>
+            <a:r>
+              <a:rPr lang="en-US" sz="4000" dirty="0">
+                <a:solidFill>
+                  <a:srgbClr val="111111"/>
+                </a:solidFill>
+                <a:latin typeface="Times New Roman" pitchFamily="34" charset="0"/>
+                <a:ea typeface="Times New Roman" pitchFamily="34" charset="-122"/>
+                <a:cs typeface="Times New Roman" pitchFamily="34" charset="-120"/>
+              </a:rPr>
+              <a:t>The tree that keeps water in its trunk is the ______.</a:t>
+            </a:r>
+            <a:endParaRPr lang="en-US" sz="4000" dirty="0"/>
+          </a:p>
+          <a:p>
+            <a:pPr algn="l" marL="342900" indent="-342900">
+              <a:spcAft>
+                <a:spcPts val="800"/>
+              </a:spcAft>
+              <a:buSzPct val="100000"/>
+              <a:buFont typeface="+mj-lt"/>
+              <a:buAutoNum type="arabicPeriod" startAt="1"/>
+            </a:pPr>
+            <a:r>
+              <a:rPr lang="en-US" sz="4000" dirty="0">
+                <a:solidFill>
+                  <a:srgbClr val="111111"/>
+                </a:solidFill>
+                <a:latin typeface="Times New Roman" pitchFamily="34" charset="0"/>
+                <a:ea typeface="Times New Roman" pitchFamily="34" charset="-122"/>
+                <a:cs typeface="Times New Roman" pitchFamily="34" charset="-120"/>
+              </a:rPr>
+              <a:t>The hard red layer in the soil is ______.</a:t>
             </a:r>
             <a:endParaRPr lang="en-US" sz="4000" dirty="0"/>
           </a:p>
@@ -17403,7 +17357,7 @@
                 <a:ea typeface="Calibri" pitchFamily="34" charset="-122"/>
                 <a:cs typeface="Calibri" pitchFamily="34" charset="-120"/>
               </a:rPr>
-              <a:t>REMEDIATION</a:t>
+              <a:t>HOMEWORK</a:t>
             </a:r>
             <a:endParaRPr lang="en-US" sz="1400" dirty="0"/>
           </a:p>
@@ -17426,7 +17380,7 @@
         <p:spPr>
           <a:xfrm>
             <a:off x="0" y="658368"/>
-            <a:ext cx="1463040" cy="5833872"/>
+            <a:ext cx="5120640" cy="5833872"/>
           </a:xfrm>
           <a:prstGeom prst="rect">
             <a:avLst/>
@@ -17441,8 +17395,8 @@
         </p:nvSpPr>
         <p:spPr>
           <a:xfrm>
-            <a:off x="1691640" y="1005840"/>
-            <a:ext cx="10180015" cy="731520"/>
+            <a:off x="5349240" y="1005840"/>
+            <a:ext cx="6522415" cy="731520"/>
           </a:xfrm>
           <a:prstGeom prst="rect">
             <a:avLst/>
@@ -17468,7 +17422,7 @@
                 <a:ea typeface="Times New Roman" pitchFamily="34" charset="-122"/>
                 <a:cs typeface="Times New Roman" pitchFamily="34" charset="-120"/>
               </a:rPr>
-              <a:t>Remediation</a:t>
+              <a:t>Homework</a:t>
             </a:r>
             <a:endParaRPr lang="en-US" sz="3600" dirty="0"/>
           </a:p>
@@ -17482,8 +17436,8 @@
         </p:nvSpPr>
         <p:spPr>
           <a:xfrm>
-            <a:off x="1691640" y="1783080"/>
-            <a:ext cx="10180015" cy="4663440"/>
+            <a:off x="5349240" y="1783080"/>
+            <a:ext cx="6522415" cy="4663440"/>
           </a:xfrm>
           <a:prstGeom prst="rect">
             <a:avLst/>
@@ -17502,7 +17456,7 @@
               <a:buNone/>
             </a:pPr>
             <a:r>
-              <a:rPr lang="en-US" sz="4000" b="1" dirty="0">
+              <a:rPr lang="en-US" sz="4000" dirty="0">
                 <a:solidFill>
                   <a:srgbClr val="111111"/>
                 </a:solidFill>
@@ -17510,73 +17464,7 @@
                 <a:ea typeface="Times New Roman" pitchFamily="34" charset="-122"/>
                 <a:cs typeface="Times New Roman" pitchFamily="34" charset="-120"/>
               </a:rPr>
-              <a:t>Fill in the blanks:</a:t>
-            </a:r>
-            <a:endParaRPr lang="en-US" sz="4000" dirty="0"/>
-          </a:p>
-          <a:p>
-            <a:pPr algn="l" marL="342900" indent="-342900">
-              <a:spcAft>
-                <a:spcPts val="800"/>
-              </a:spcAft>
-              <a:buSzPct val="100000"/>
-              <a:buFont typeface="+mj-lt"/>
-              <a:buAutoNum type="arabicPeriod" startAt="1"/>
-            </a:pPr>
-            <a:r>
-              <a:rPr lang="en-US" sz="4000" dirty="0">
-                <a:solidFill>
-                  <a:srgbClr val="111111"/>
-                </a:solidFill>
-                <a:latin typeface="Times New Roman" pitchFamily="34" charset="0"/>
-                <a:ea typeface="Times New Roman" pitchFamily="34" charset="-122"/>
-                <a:cs typeface="Times New Roman" pitchFamily="34" charset="-120"/>
-              </a:rPr>
-              <a:t>Trees that lose their leaves are ______ trees.</a:t>
-            </a:r>
-            <a:endParaRPr lang="en-US" sz="4000" dirty="0"/>
-          </a:p>
-          <a:p>
-            <a:pPr algn="l" marL="342900" indent="-342900">
-              <a:spcAft>
-                <a:spcPts val="800"/>
-              </a:spcAft>
-              <a:buSzPct val="100000"/>
-              <a:buFont typeface="+mj-lt"/>
-              <a:buAutoNum type="arabicPeriod" startAt="1"/>
-            </a:pPr>
-            <a:r>
-              <a:rPr lang="en-US" sz="4000" dirty="0">
-                <a:solidFill>
-                  <a:srgbClr val="111111"/>
-                </a:solidFill>
-                <a:latin typeface="Times New Roman" pitchFamily="34" charset="0"/>
-                <a:ea typeface="Times New Roman" pitchFamily="34" charset="-122"/>
-                <a:cs typeface="Times New Roman" pitchFamily="34" charset="-120"/>
-              </a:rPr>
-              <a:t>The tree that keeps water in its trunk is the ______.</a:t>
-            </a:r>
-            <a:endParaRPr lang="en-US" sz="4000" dirty="0"/>
-          </a:p>
-          <a:p>
-            <a:pPr algn="l" marL="342900" indent="-342900">
-              <a:spcAft>
-                <a:spcPts val="800"/>
-              </a:spcAft>
-              <a:buSzPct val="100000"/>
-              <a:buFont typeface="+mj-lt"/>
-              <a:buAutoNum type="arabicPeriod" startAt="1"/>
-            </a:pPr>
-            <a:r>
-              <a:rPr lang="en-US" sz="4000" dirty="0">
-                <a:solidFill>
-                  <a:srgbClr val="111111"/>
-                </a:solidFill>
-                <a:latin typeface="Times New Roman" pitchFamily="34" charset="0"/>
-                <a:ea typeface="Times New Roman" pitchFamily="34" charset="-122"/>
-                <a:cs typeface="Times New Roman" pitchFamily="34" charset="-120"/>
-              </a:rPr>
-              <a:t>The hard red layer in the soil is ______.</a:t>
+              <a:t>Name three resources of the savanna.</a:t>
             </a:r>
             <a:endParaRPr lang="en-US" sz="4000" dirty="0"/>
           </a:p>
@@ -17688,7 +17576,7 @@
                 <a:ea typeface="Calibri" pitchFamily="34" charset="-122"/>
                 <a:cs typeface="Calibri" pitchFamily="34" charset="-120"/>
               </a:rPr>
-              <a:t>HOMEWORK</a:t>
+              <a:t>NEXT LESSON</a:t>
             </a:r>
             <a:endParaRPr lang="en-US" sz="1400" dirty="0"/>
           </a:p>
@@ -17753,7 +17641,7 @@
                 <a:ea typeface="Times New Roman" pitchFamily="34" charset="-122"/>
                 <a:cs typeface="Times New Roman" pitchFamily="34" charset="-120"/>
               </a:rPr>
-              <a:t>Homework</a:t>
+              <a:t>Next Lesson</a:t>
             </a:r>
             <a:endParaRPr lang="en-US" sz="3600" dirty="0"/>
           </a:p>
@@ -17777,17 +17665,17 @@
           <a:ln/>
         </p:spPr>
         <p:txBody>
-          <a:bodyPr wrap="square" lIns="0" tIns="0" rIns="0" bIns="0" rtlCol="0" anchor="t"/>
-          <a:lstStyle/>
-          <a:p>
-            <a:pPr algn="l" indent="0" marL="0">
+          <a:bodyPr wrap="square" lIns="0" tIns="0" rIns="0" bIns="0" rtlCol="0" anchor="ctr"/>
+          <a:lstStyle/>
+          <a:p>
+            <a:pPr algn="ctr" indent="0" marL="0">
               <a:spcAft>
                 <a:spcPts val="800"/>
               </a:spcAft>
               <a:buNone/>
             </a:pPr>
             <a:r>
-              <a:rPr lang="en-US" sz="4000" dirty="0">
+              <a:rPr lang="en-US" sz="4000" b="1" dirty="0">
                 <a:solidFill>
                   <a:srgbClr val="111111"/>
                 </a:solidFill>
@@ -17795,7 +17683,27 @@
                 <a:ea typeface="Times New Roman" pitchFamily="34" charset="-122"/>
                 <a:cs typeface="Times New Roman" pitchFamily="34" charset="-120"/>
               </a:rPr>
-              <a:t>List three things that people in your family get from the savanna around Garoua, for example food, wood or animals.</a:t>
+              <a:t>Our next lesson will be on:</a:t>
+            </a:r>
+            <a:endParaRPr lang="en-US" sz="4000" dirty="0"/>
+          </a:p>
+          <a:p>
+            <a:pPr algn="ctr" indent="0" marL="0">
+              <a:spcAft>
+                <a:spcPts val="800"/>
+              </a:spcAft>
+              <a:buNone/>
+            </a:pPr>
+            <a:r>
+              <a:rPr lang="en-US" sz="4000" b="1" dirty="0">
+                <a:solidFill>
+                  <a:srgbClr val="990011"/>
+                </a:solidFill>
+                <a:latin typeface="Times New Roman" pitchFamily="34" charset="0"/>
+                <a:ea typeface="Times New Roman" pitchFamily="34" charset="-122"/>
+                <a:cs typeface="Times New Roman" pitchFamily="34" charset="-120"/>
+              </a:rPr>
+              <a:t>Lesson 2 (Part 3): The Tropical Grassland Region: Types of Resources and Methods of Exploitation</a:t>
             </a:r>
             <a:endParaRPr lang="en-US" sz="4000" dirty="0"/>
           </a:p>
@@ -17972,7 +17880,7 @@
                 <a:ea typeface="Times New Roman" pitchFamily="34" charset="-122"/>
                 <a:cs typeface="Times New Roman" pitchFamily="34" charset="-120"/>
               </a:rPr>
-              <a:t>Correction of the Homework (continued)</a:t>
+              <a:t>Correction: Possible Answer</a:t>
             </a:r>
             <a:endParaRPr lang="en-US" sz="3600" dirty="0"/>
           </a:p>
@@ -18014,7 +17922,7 @@
                 <a:ea typeface="Times New Roman" pitchFamily="34" charset="-122"/>
                 <a:cs typeface="Times New Roman" pitchFamily="34" charset="-120"/>
               </a:rPr>
-              <a:t>Look at the trees and grass around your home. Which trees keep their leaves in the dry season, and which lose them? Is the grass green or dry now? Write your observations.</a:t>
+              <a:t>The baobab and the shea tree (also the acacia).</a:t>
             </a:r>
             <a:endParaRPr lang="en-US" sz="4000" dirty="0"/>
           </a:p>
@@ -18126,245 +18034,6 @@
                 <a:ea typeface="Calibri" pitchFamily="34" charset="-122"/>
                 <a:cs typeface="Calibri" pitchFamily="34" charset="-120"/>
               </a:rPr>
-              <a:t>NEXT LESSON</a:t>
-            </a:r>
-            <a:endParaRPr lang="en-US" sz="1400" dirty="0"/>
-          </a:p>
-        </p:txBody>
-      </p:sp>
-      <p:pic>
-        <p:nvPicPr>
-          <p:cNvPr id="3" name="Image 0" descr="/home/claude/f4/img/minesec_sheet.png">    </p:cNvPr>
-          <p:cNvPicPr>
-            <a:picLocks noChangeAspect="1"/>
-          </p:cNvPicPr>
-          <p:nvPr/>
-        </p:nvPicPr>
-        <p:blipFill>
-          <a:blip r:embed="rId1"/>
-          <a:stretch>
-            <a:fillRect/>
-          </a:stretch>
-        </p:blipFill>
-        <p:spPr>
-          <a:xfrm>
-            <a:off x="0" y="658368"/>
-            <a:ext cx="5120640" cy="5833872"/>
-          </a:xfrm>
-          <a:prstGeom prst="rect">
-            <a:avLst/>
-          </a:prstGeom>
-        </p:spPr>
-      </p:pic>
-      <p:sp>
-        <p:nvSpPr>
-          <p:cNvPr id="4" name="Text 1"/>
-          <p:cNvSpPr/>
-          <p:nvPr/>
-        </p:nvSpPr>
-        <p:spPr>
-          <a:xfrm>
-            <a:off x="5349240" y="1005840"/>
-            <a:ext cx="6522415" cy="731520"/>
-          </a:xfrm>
-          <a:prstGeom prst="rect">
-            <a:avLst/>
-          </a:prstGeom>
-          <a:noFill/>
-          <a:ln/>
-        </p:spPr>
-        <p:txBody>
-          <a:bodyPr wrap="square" lIns="0" tIns="0" rIns="0" bIns="0" rtlCol="0" anchor="ctr">
-            <a:normAutofit/>
-          </a:bodyPr>
-          <a:lstStyle/>
-          <a:p>
-            <a:pPr algn="ctr" indent="0" marL="0">
-              <a:buNone/>
-            </a:pPr>
-            <a:r>
-              <a:rPr lang="en-US" sz="3600" b="1" dirty="0">
-                <a:solidFill>
-                  <a:srgbClr val="990011"/>
-                </a:solidFill>
-                <a:latin typeface="Times New Roman" pitchFamily="34" charset="0"/>
-                <a:ea typeface="Times New Roman" pitchFamily="34" charset="-122"/>
-                <a:cs typeface="Times New Roman" pitchFamily="34" charset="-120"/>
-              </a:rPr>
-              <a:t>Next Lesson</a:t>
-            </a:r>
-            <a:endParaRPr lang="en-US" sz="3600" dirty="0"/>
-          </a:p>
-        </p:txBody>
-      </p:sp>
-      <p:sp>
-        <p:nvSpPr>
-          <p:cNvPr id="5" name="Text 2"/>
-          <p:cNvSpPr/>
-          <p:nvPr/>
-        </p:nvSpPr>
-        <p:spPr>
-          <a:xfrm>
-            <a:off x="5349240" y="1783080"/>
-            <a:ext cx="6522415" cy="4663440"/>
-          </a:xfrm>
-          <a:prstGeom prst="rect">
-            <a:avLst/>
-          </a:prstGeom>
-          <a:noFill/>
-          <a:ln/>
-        </p:spPr>
-        <p:txBody>
-          <a:bodyPr wrap="square" lIns="0" tIns="0" rIns="0" bIns="0" rtlCol="0" anchor="ctr"/>
-          <a:lstStyle/>
-          <a:p>
-            <a:pPr algn="ctr" indent="0" marL="0">
-              <a:spcAft>
-                <a:spcPts val="800"/>
-              </a:spcAft>
-              <a:buNone/>
-            </a:pPr>
-            <a:r>
-              <a:rPr lang="en-US" sz="4000" b="1" dirty="0">
-                <a:solidFill>
-                  <a:srgbClr val="111111"/>
-                </a:solidFill>
-                <a:latin typeface="Times New Roman" pitchFamily="34" charset="0"/>
-                <a:ea typeface="Times New Roman" pitchFamily="34" charset="-122"/>
-                <a:cs typeface="Times New Roman" pitchFamily="34" charset="-120"/>
-              </a:rPr>
-              <a:t>Our next lesson will be on:</a:t>
-            </a:r>
-            <a:endParaRPr lang="en-US" sz="4000" dirty="0"/>
-          </a:p>
-          <a:p>
-            <a:pPr algn="ctr" indent="0" marL="0">
-              <a:spcAft>
-                <a:spcPts val="800"/>
-              </a:spcAft>
-              <a:buNone/>
-            </a:pPr>
-            <a:r>
-              <a:rPr lang="en-US" sz="4000" b="1" dirty="0">
-                <a:solidFill>
-                  <a:srgbClr val="990011"/>
-                </a:solidFill>
-                <a:latin typeface="Times New Roman" pitchFamily="34" charset="0"/>
-                <a:ea typeface="Times New Roman" pitchFamily="34" charset="-122"/>
-                <a:cs typeface="Times New Roman" pitchFamily="34" charset="-120"/>
-              </a:rPr>
-              <a:t>Lesson 2 (Part 3): The Tropical Grassland Region: Types of Resources and Methods of Exploitation</a:t>
-            </a:r>
-            <a:endParaRPr lang="en-US" sz="4000" dirty="0"/>
-          </a:p>
-        </p:txBody>
-      </p:sp>
-      <p:sp>
-        <p:nvSpPr>
-          <p:cNvPr id="25" name="Slide Number Placeholder 0"/>
-          <p:cNvSpPr>
-            <a:spLocks noGrp="1"/>
-          </p:cNvSpPr>
-          <p:nvPr>
-            <p:ph type="sldNum" sz="quarter" idx="4294967295"/>
-          </p:nvPr>
-        </p:nvSpPr>
-        <p:spPr>
-          <a:xfrm>
-            <a:off x="27432" y="91440"/>
-            <a:ext cx="585216" cy="475488"/>
-          </a:xfrm>
-          <a:prstGeom prst="rect">
-            <a:avLst/>
-          </a:prstGeom>
-          <a:extLst>
-            <a:ext uri="{C572A759-6A51-4108-AA02-DFA0A04FC94B}">
-              <ma14:wrappingTextBoxFlag xmlns:ma14="http://schemas.microsoft.com/office/mac/drawingml/2011/main" val="0"/>
-            </a:ext>
-          </a:extLst>
-        </p:spPr>
-        <p:txBody>
-          <a:bodyPr/>
-          <a:lstStyle>
-            <a:lvl1pPr>
-              <a:defRPr sz="2000">
-                <a:solidFill>
-                  <a:srgbClr val="FFFFFF"/>
-                </a:solidFill>
-                <a:latin typeface="Calibri"/>
-                <a:ea typeface="Calibri"/>
-                <a:cs typeface="Calibri"/>
-              </a:defRPr>
-            </a:lvl1pPr>
-          </a:lstStyle>
-          <a:p>
-            <a:pPr algn="ctr"/>
-            <a:fld id="{F7021451-1387-4CA6-816F-3879F97B5CBC}" type="slidenum">
-              <a:rPr b="1" lang="en-US"/>
-              <a:t>50</a:t>
-            </a:fld>
-            <a:endParaRPr lang="en-US"/>
-          </a:p>
-        </p:txBody>
-      </p:sp>
-    </p:spTree>
-  </p:cSld>
-  <p:clrMapOvr>
-    <a:masterClrMapping/>
-  </p:clrMapOvr>
-</p:sld>
-</file>
-
-<file path=ppt/slides/slide51.xml><?xml version="1.0" encoding="utf-8"?>
-<p:sld xmlns:a="http://schemas.openxmlformats.org/drawingml/2006/main" xmlns:r="http://schemas.openxmlformats.org/officeDocument/2006/relationships" xmlns:p="http://schemas.openxmlformats.org/presentationml/2006/main">
-  <p:cSld name="Slide 51">
-    <p:spTree>
-      <p:nvGrpSpPr>
-        <p:cNvPr id="1" name=""/>
-        <p:cNvGrpSpPr/>
-        <p:nvPr/>
-      </p:nvGrpSpPr>
-      <p:grpSpPr>
-        <a:xfrm>
-          <a:off x="0" y="0"/>
-          <a:ext cx="0" cy="0"/>
-          <a:chOff x="0" y="0"/>
-          <a:chExt cx="0" cy="0"/>
-        </a:xfrm>
-      </p:grpSpPr>
-      <p:sp>
-        <p:nvSpPr>
-          <p:cNvPr id="2" name="Text 0"/>
-          <p:cNvSpPr/>
-          <p:nvPr/>
-        </p:nvSpPr>
-        <p:spPr>
-          <a:xfrm>
-            <a:off x="457200" y="713232"/>
-            <a:ext cx="11368735" cy="274320"/>
-          </a:xfrm>
-          <a:prstGeom prst="rect">
-            <a:avLst/>
-          </a:prstGeom>
-          <a:noFill/>
-          <a:ln/>
-        </p:spPr>
-        <p:txBody>
-          <a:bodyPr wrap="square" lIns="0" tIns="0" rIns="0" bIns="0" rtlCol="0" anchor="ctr"/>
-          <a:lstStyle/>
-          <a:p>
-            <a:pPr algn="r" indent="0" marL="0">
-              <a:buNone/>
-            </a:pPr>
-            <a:r>
-              <a:rPr lang="en-US" sz="1400" b="1" dirty="0">
-                <a:solidFill>
-                  <a:srgbClr val="1C3F6E"/>
-                </a:solidFill>
-                <a:latin typeface="Calibri" pitchFamily="34" charset="0"/>
-                <a:ea typeface="Calibri" pitchFamily="34" charset="-122"/>
-                <a:cs typeface="Calibri" pitchFamily="34" charset="-120"/>
-              </a:rPr>
               <a:t>BILINGUAL GAME</a:t>
             </a:r>
             <a:endParaRPr lang="en-US" sz="1400" dirty="0"/>
@@ -18412,7 +18081,7 @@
       </p:sp>
       <p:graphicFrame>
         <p:nvGraphicFramePr>
-          <p:cNvPr id="52" name="Table 0"/>
+          <p:cNvPr id="51" name="Table 0"/>
           <p:cNvGraphicFramePr>
             <a:graphicFrameLocks noGrp="1"/>
           </p:cNvGraphicFramePr>
@@ -19724,7 +19393,7 @@
             <a:pPr algn="ctr"/>
             <a:fld id="{F7021451-1387-4CA6-816F-3879F97B5CBC}" type="slidenum">
               <a:rPr b="1" lang="en-US"/>
-              <a:t>51</a:t>
+              <a:t>50</a:t>
             </a:fld>
             <a:endParaRPr lang="en-US"/>
           </a:p>
@@ -19738,9 +19407,9 @@
 </p:sld>
 </file>
 
-<file path=ppt/slides/slide52.xml><?xml version="1.0" encoding="utf-8"?>
+<file path=ppt/slides/slide51.xml><?xml version="1.0" encoding="utf-8"?>
 <p:sld xmlns:a="http://schemas.openxmlformats.org/drawingml/2006/main" xmlns:r="http://schemas.openxmlformats.org/officeDocument/2006/relationships" xmlns:p="http://schemas.openxmlformats.org/presentationml/2006/main">
-  <p:cSld name="Slide 52">
+  <p:cSld name="Slide 51">
     <p:spTree>
       <p:nvGrpSpPr>
         <p:cNvPr id="1" name=""/>
@@ -19835,7 +19504,7 @@
       </p:sp>
       <p:graphicFrame>
         <p:nvGraphicFramePr>
-          <p:cNvPr id="53" name="Table 0"/>
+          <p:cNvPr id="52" name="Table 0"/>
           <p:cNvGraphicFramePr>
             <a:graphicFrameLocks noGrp="1"/>
           </p:cNvGraphicFramePr>
@@ -20457,7 +20126,7 @@
             <a:pPr algn="ctr"/>
             <a:fld id="{F7021451-1387-4CA6-816F-3879F97B5CBC}" type="slidenum">
               <a:rPr b="1" lang="en-US"/>
-              <a:t>52</a:t>
+              <a:t>51</a:t>
             </a:fld>
             <a:endParaRPr lang="en-US"/>
           </a:p>
@@ -20471,9 +20140,9 @@
 </p:sld>
 </file>
 
-<file path=ppt/slides/slide53.xml><?xml version="1.0" encoding="utf-8"?>
+<file path=ppt/slides/slide52.xml><?xml version="1.0" encoding="utf-8"?>
 <p:sld xmlns:a="http://schemas.openxmlformats.org/drawingml/2006/main" xmlns:r="http://schemas.openxmlformats.org/officeDocument/2006/relationships" xmlns:p="http://schemas.openxmlformats.org/presentationml/2006/main">
-  <p:cSld name="Slide 53">
+  <p:cSld name="Slide 52">
     <p:spTree>
       <p:nvGrpSpPr>
         <p:cNvPr id="1" name=""/>
@@ -20568,7 +20237,7 @@
       </p:sp>
       <p:graphicFrame>
         <p:nvGraphicFramePr>
-          <p:cNvPr id="54" name="Table 0"/>
+          <p:cNvPr id="53" name="Table 0"/>
           <p:cNvGraphicFramePr>
             <a:graphicFrameLocks noGrp="1"/>
           </p:cNvGraphicFramePr>
@@ -20954,7 +20623,7 @@
                           <a:ea typeface="Calibri" pitchFamily="34" charset="-122"/>
                           <a:cs typeface="Calibri" pitchFamily="34" charset="-120"/>
                         </a:rPr>
-                        <a:t>List three things that people in your family get from the savanna around Garoua, for example food, wood or animals.</a:t>
+                        <a:t>Name three resources of the savanna.</a:t>
                       </a:r>
                       <a:endParaRPr lang="en-US" sz="1600" dirty="0">
                         <a:latin typeface="Calibri" charset="0"/>
@@ -21328,6 +20997,331 @@
             <a:pPr algn="ctr"/>
             <a:fld id="{F7021451-1387-4CA6-816F-3879F97B5CBC}" type="slidenum">
               <a:rPr b="1" lang="en-US"/>
+              <a:t>52</a:t>
+            </a:fld>
+            <a:endParaRPr lang="en-US"/>
+          </a:p>
+        </p:txBody>
+      </p:sp>
+    </p:spTree>
+  </p:cSld>
+  <p:clrMapOvr>
+    <a:masterClrMapping/>
+  </p:clrMapOvr>
+</p:sld>
+</file>
+
+<file path=ppt/slides/slide53.xml><?xml version="1.0" encoding="utf-8"?>
+<p:sld xmlns:a="http://schemas.openxmlformats.org/drawingml/2006/main" xmlns:r="http://schemas.openxmlformats.org/officeDocument/2006/relationships" xmlns:p="http://schemas.openxmlformats.org/presentationml/2006/main">
+  <p:cSld name="Slide 53">
+    <p:spTree>
+      <p:nvGrpSpPr>
+        <p:cNvPr id="1" name=""/>
+        <p:cNvGrpSpPr/>
+        <p:nvPr/>
+      </p:nvGrpSpPr>
+      <p:grpSpPr>
+        <a:xfrm>
+          <a:off x="0" y="0"/>
+          <a:ext cx="0" cy="0"/>
+          <a:chOff x="0" y="0"/>
+          <a:chExt cx="0" cy="0"/>
+        </a:xfrm>
+      </p:grpSpPr>
+      <p:sp>
+        <p:nvSpPr>
+          <p:cNvPr id="2" name="Text 0"/>
+          <p:cNvSpPr/>
+          <p:nvPr/>
+        </p:nvSpPr>
+        <p:spPr>
+          <a:xfrm>
+            <a:off x="457200" y="713232"/>
+            <a:ext cx="11368735" cy="274320"/>
+          </a:xfrm>
+          <a:prstGeom prst="rect">
+            <a:avLst/>
+          </a:prstGeom>
+          <a:noFill/>
+          <a:ln/>
+        </p:spPr>
+        <p:txBody>
+          <a:bodyPr wrap="square" lIns="0" tIns="0" rIns="0" bIns="0" rtlCol="0" anchor="ctr"/>
+          <a:lstStyle/>
+          <a:p>
+            <a:pPr algn="r" indent="0" marL="0">
+              <a:buNone/>
+            </a:pPr>
+            <a:r>
+              <a:rPr lang="en-US" sz="1400" b="1" dirty="0">
+                <a:solidFill>
+                  <a:srgbClr val="1C3F6E"/>
+                </a:solidFill>
+                <a:latin typeface="Calibri" pitchFamily="34" charset="0"/>
+                <a:ea typeface="Calibri" pitchFamily="34" charset="-122"/>
+                <a:cs typeface="Calibri" pitchFamily="34" charset="-120"/>
+              </a:rPr>
+              <a:t>TEACHER'S NOTE</a:t>
+            </a:r>
+            <a:endParaRPr lang="en-US" sz="1400" dirty="0"/>
+          </a:p>
+        </p:txBody>
+      </p:sp>
+      <p:pic>
+        <p:nvPicPr>
+          <p:cNvPr id="3" name="Image 0" descr="/home/claude/f4/img/minesec_sheet.png">    </p:cNvPr>
+          <p:cNvPicPr>
+            <a:picLocks noChangeAspect="1"/>
+          </p:cNvPicPr>
+          <p:nvPr/>
+        </p:nvPicPr>
+        <p:blipFill>
+          <a:blip r:embed="rId1"/>
+          <a:stretch>
+            <a:fillRect/>
+          </a:stretch>
+        </p:blipFill>
+        <p:spPr>
+          <a:xfrm>
+            <a:off x="0" y="658368"/>
+            <a:ext cx="3840480" cy="5833872"/>
+          </a:xfrm>
+          <a:prstGeom prst="rect">
+            <a:avLst/>
+          </a:prstGeom>
+        </p:spPr>
+      </p:pic>
+      <p:sp>
+        <p:nvSpPr>
+          <p:cNvPr id="4" name="Text 1"/>
+          <p:cNvSpPr/>
+          <p:nvPr/>
+        </p:nvSpPr>
+        <p:spPr>
+          <a:xfrm>
+            <a:off x="4069080" y="1005840"/>
+            <a:ext cx="7802575" cy="731520"/>
+          </a:xfrm>
+          <a:prstGeom prst="rect">
+            <a:avLst/>
+          </a:prstGeom>
+          <a:noFill/>
+          <a:ln/>
+        </p:spPr>
+        <p:txBody>
+          <a:bodyPr wrap="square" lIns="0" tIns="0" rIns="0" bIns="0" rtlCol="0" anchor="ctr">
+            <a:normAutofit/>
+          </a:bodyPr>
+          <a:lstStyle/>
+          <a:p>
+            <a:pPr algn="ctr" indent="0" marL="0">
+              <a:buNone/>
+            </a:pPr>
+            <a:r>
+              <a:rPr lang="en-US" sz="3600" b="1" dirty="0">
+                <a:solidFill>
+                  <a:srgbClr val="990011"/>
+                </a:solidFill>
+                <a:latin typeface="Times New Roman" pitchFamily="34" charset="0"/>
+                <a:ea typeface="Times New Roman" pitchFamily="34" charset="-122"/>
+                <a:cs typeface="Times New Roman" pitchFamily="34" charset="-120"/>
+              </a:rPr>
+              <a:t>Teacher's Note</a:t>
+            </a:r>
+            <a:endParaRPr lang="en-US" sz="3600" dirty="0"/>
+          </a:p>
+        </p:txBody>
+      </p:sp>
+      <p:sp>
+        <p:nvSpPr>
+          <p:cNvPr id="5" name="Text 2"/>
+          <p:cNvSpPr/>
+          <p:nvPr/>
+        </p:nvSpPr>
+        <p:spPr>
+          <a:xfrm>
+            <a:off x="4069080" y="1783080"/>
+            <a:ext cx="7802575" cy="4663440"/>
+          </a:xfrm>
+          <a:prstGeom prst="rect">
+            <a:avLst/>
+          </a:prstGeom>
+          <a:noFill/>
+          <a:ln/>
+        </p:spPr>
+        <p:txBody>
+          <a:bodyPr wrap="square" lIns="0" tIns="0" rIns="0" bIns="0" rtlCol="0" anchor="t"/>
+          <a:lstStyle/>
+          <a:p>
+            <a:pPr algn="l" marL="342900" indent="-342900">
+              <a:spcAft>
+                <a:spcPts val="800"/>
+              </a:spcAft>
+              <a:buSzPct val="100000"/>
+              <a:buChar char="•"/>
+            </a:pPr>
+            <a:r>
+              <a:rPr lang="en-US" sz="2000" dirty="0">
+                <a:solidFill>
+                  <a:srgbClr val="111111"/>
+                </a:solidFill>
+                <a:latin typeface="Calibri" pitchFamily="34" charset="0"/>
+                <a:ea typeface="Calibri" pitchFamily="34" charset="-122"/>
+                <a:cs typeface="Calibri" pitchFamily="34" charset="-120"/>
+              </a:rPr>
+              <a:t>Timing: Homework correction, plan, objectives 8 min | Recall, situation, action 10 min | 5 activities 30 min | Board summary (copying) 30 min | Evaluation, remediation 10 min | Homework, next lesson 5 min | Logbook 7 min</a:t>
+            </a:r>
+            <a:endParaRPr lang="en-US" sz="2000" dirty="0"/>
+          </a:p>
+          <a:p>
+            <a:pPr algn="l" marL="342900" indent="-342900">
+              <a:spcAft>
+                <a:spcPts val="800"/>
+              </a:spcAft>
+              <a:buSzPct val="100000"/>
+              <a:buChar char="•"/>
+            </a:pPr>
+            <a:r>
+              <a:rPr lang="en-US" sz="2000" dirty="0">
+                <a:solidFill>
+                  <a:srgbClr val="111111"/>
+                </a:solidFill>
+                <a:latin typeface="Calibri" pitchFamily="34" charset="0"/>
+                <a:ea typeface="Calibri" pitchFamily="34" charset="-122"/>
+                <a:cs typeface="Calibri" pitchFamily="34" charset="-120"/>
+              </a:rPr>
+              <a:t>Without the projector (Activity 1): describe a baobab.</a:t>
+            </a:r>
+            <a:endParaRPr lang="en-US" sz="2000" dirty="0"/>
+          </a:p>
+          <a:p>
+            <a:pPr algn="l" marL="342900" indent="-342900">
+              <a:spcAft>
+                <a:spcPts val="800"/>
+              </a:spcAft>
+              <a:buSzPct val="100000"/>
+              <a:buChar char="•"/>
+            </a:pPr>
+            <a:r>
+              <a:rPr lang="en-US" sz="2000" dirty="0">
+                <a:solidFill>
+                  <a:srgbClr val="111111"/>
+                </a:solidFill>
+                <a:latin typeface="Calibri" pitchFamily="34" charset="0"/>
+                <a:ea typeface="Calibri" pitchFamily="34" charset="-122"/>
+                <a:cs typeface="Calibri" pitchFamily="34" charset="-120"/>
+              </a:rPr>
+              <a:t>Without the projector (Activity 2): look at the trees of the school.</a:t>
+            </a:r>
+            <a:endParaRPr lang="en-US" sz="2000" dirty="0"/>
+          </a:p>
+          <a:p>
+            <a:pPr algn="l" marL="342900" indent="-342900">
+              <a:spcAft>
+                <a:spcPts val="800"/>
+              </a:spcAft>
+              <a:buSzPct val="100000"/>
+              <a:buChar char="•"/>
+            </a:pPr>
+            <a:r>
+              <a:rPr lang="en-US" sz="2000" dirty="0">
+                <a:solidFill>
+                  <a:srgbClr val="111111"/>
+                </a:solidFill>
+                <a:latin typeface="Calibri" pitchFamily="34" charset="0"/>
+                <a:ea typeface="Calibri" pitchFamily="34" charset="-122"/>
+                <a:cs typeface="Calibri" pitchFamily="34" charset="-120"/>
+              </a:rPr>
+              <a:t>Without the projector (Activity 3): touch the bark of a tree.</a:t>
+            </a:r>
+            <a:endParaRPr lang="en-US" sz="2000" dirty="0"/>
+          </a:p>
+          <a:p>
+            <a:pPr algn="l" marL="342900" indent="-342900">
+              <a:spcAft>
+                <a:spcPts val="800"/>
+              </a:spcAft>
+              <a:buSzPct val="100000"/>
+              <a:buChar char="•"/>
+            </a:pPr>
+            <a:r>
+              <a:rPr lang="en-US" sz="2000" dirty="0">
+                <a:solidFill>
+                  <a:srgbClr val="111111"/>
+                </a:solidFill>
+                <a:latin typeface="Calibri" pitchFamily="34" charset="0"/>
+                <a:ea typeface="Calibri" pitchFamily="34" charset="-122"/>
+                <a:cs typeface="Calibri" pitchFamily="34" charset="-120"/>
+              </a:rPr>
+              <a:t>Without the projector (Activity 4): show a laterite road.</a:t>
+            </a:r>
+            <a:endParaRPr lang="en-US" sz="2000" dirty="0"/>
+          </a:p>
+          <a:p>
+            <a:pPr algn="l" marL="342900" indent="-342900">
+              <a:spcAft>
+                <a:spcPts val="800"/>
+              </a:spcAft>
+              <a:buSzPct val="100000"/>
+              <a:buChar char="•"/>
+            </a:pPr>
+            <a:r>
+              <a:rPr lang="en-US" sz="2000" dirty="0">
+                <a:solidFill>
+                  <a:srgbClr val="111111"/>
+                </a:solidFill>
+                <a:latin typeface="Calibri" pitchFamily="34" charset="0"/>
+                <a:ea typeface="Calibri" pitchFamily="34" charset="-122"/>
+                <a:cs typeface="Calibri" pitchFamily="34" charset="-120"/>
+              </a:rPr>
+              <a:t>Without the projector (Activity 5): name crops grown on black soils.</a:t>
+            </a:r>
+            <a:endParaRPr lang="en-US" sz="2000" dirty="0"/>
+          </a:p>
+        </p:txBody>
+      </p:sp>
+      <p:sp>
+        <p:nvSpPr>
+          <p:cNvPr id="25" name="Slide Number Placeholder 0"/>
+          <p:cNvSpPr>
+            <a:spLocks noGrp="1"/>
+          </p:cNvSpPr>
+          <p:nvPr>
+            <p:ph type="sldNum" sz="quarter" idx="4294967295"/>
+          </p:nvPr>
+        </p:nvSpPr>
+        <p:spPr>
+          <a:xfrm>
+            <a:off x="27432" y="91440"/>
+            <a:ext cx="585216" cy="475488"/>
+          </a:xfrm>
+          <a:prstGeom prst="rect">
+            <a:avLst/>
+          </a:prstGeom>
+          <a:extLst>
+            <a:ext uri="{C572A759-6A51-4108-AA02-DFA0A04FC94B}">
+              <ma14:wrappingTextBoxFlag xmlns:ma14="http://schemas.microsoft.com/office/mac/drawingml/2011/main" val="0"/>
+            </a:ext>
+          </a:extLst>
+        </p:spPr>
+        <p:txBody>
+          <a:bodyPr/>
+          <a:lstStyle>
+            <a:lvl1pPr>
+              <a:defRPr sz="2000">
+                <a:solidFill>
+                  <a:srgbClr val="FFFFFF"/>
+                </a:solidFill>
+                <a:latin typeface="Calibri"/>
+                <a:ea typeface="Calibri"/>
+                <a:cs typeface="Calibri"/>
+              </a:defRPr>
+            </a:lvl1pPr>
+          </a:lstStyle>
+          <a:p>
+            <a:pPr algn="ctr"/>
+            <a:fld id="{F7021451-1387-4CA6-816F-3879F97B5CBC}" type="slidenum">
+              <a:rPr b="1" lang="en-US"/>
               <a:t>53</a:t>
             </a:fld>
             <a:endParaRPr lang="en-US"/>
@@ -21392,7 +21386,7 @@
                 <a:ea typeface="Calibri" pitchFamily="34" charset="-122"/>
                 <a:cs typeface="Calibri" pitchFamily="34" charset="-120"/>
               </a:rPr>
-              <a:t>TEACHER'S NOTE</a:t>
+              <a:t>REFERENCES</a:t>
             </a:r>
             <a:endParaRPr lang="en-US" sz="1400" dirty="0"/>
           </a:p>
@@ -21415,7 +21409,7 @@
         <p:spPr>
           <a:xfrm>
             <a:off x="0" y="658368"/>
-            <a:ext cx="3840480" cy="5833872"/>
+            <a:ext cx="1463040" cy="5833872"/>
           </a:xfrm>
           <a:prstGeom prst="rect">
             <a:avLst/>
@@ -21430,8 +21424,8 @@
         </p:nvSpPr>
         <p:spPr>
           <a:xfrm>
-            <a:off x="4069080" y="1005840"/>
-            <a:ext cx="7802575" cy="731520"/>
+            <a:off x="1691640" y="1005840"/>
+            <a:ext cx="10180015" cy="731520"/>
           </a:xfrm>
           <a:prstGeom prst="rect">
             <a:avLst/>
@@ -21457,7 +21451,7 @@
                 <a:ea typeface="Times New Roman" pitchFamily="34" charset="-122"/>
                 <a:cs typeface="Times New Roman" pitchFamily="34" charset="-120"/>
               </a:rPr>
-              <a:t>Teacher's Note</a:t>
+              <a:t>References</a:t>
             </a:r>
             <a:endParaRPr lang="en-US" sz="3600" dirty="0"/>
           </a:p>
@@ -21471,8 +21465,8 @@
         </p:nvSpPr>
         <p:spPr>
           <a:xfrm>
-            <a:off x="4069080" y="1783080"/>
-            <a:ext cx="7802575" cy="4663440"/>
+            <a:off x="1691640" y="1783080"/>
+            <a:ext cx="10180015" cy="4663440"/>
           </a:xfrm>
           <a:prstGeom prst="rect">
             <a:avLst/>
@@ -21492,7 +21486,7 @@
               <a:buChar char="•"/>
             </a:pPr>
             <a:r>
-              <a:rPr lang="en-US" sz="2000" dirty="0">
+              <a:rPr lang="en-US" sz="1800" dirty="0">
                 <a:solidFill>
                   <a:srgbClr val="111111"/>
                 </a:solidFill>
@@ -21500,9 +21494,9 @@
                 <a:ea typeface="Calibri" pitchFamily="34" charset="-122"/>
                 <a:cs typeface="Calibri" pitchFamily="34" charset="-120"/>
               </a:rPr>
-              <a:t>Timing: Homework correction, plan, objectives 8 min | Recall, situation, action 10 min | 5 activities 30 min | Board summary (copying) 30 min | Evaluation, remediation 10 min | Homework, next lesson 5 min | Logbook 7 min</a:t>
-            </a:r>
-            <a:endParaRPr lang="en-US" sz="2000" dirty="0"/>
+              <a:t>Harmonised Progression Sheet, Economic Geography (5051), Form 2.</a:t>
+            </a:r>
+            <a:endParaRPr lang="en-US" sz="1800" dirty="0"/>
           </a:p>
           <a:p>
             <a:pPr algn="l" marL="342900" indent="-342900">
@@ -21513,7 +21507,7 @@
               <a:buChar char="•"/>
             </a:pPr>
             <a:r>
-              <a:rPr lang="en-US" sz="2000" dirty="0">
+              <a:rPr lang="en-US" sz="1800" dirty="0">
                 <a:solidFill>
                   <a:srgbClr val="111111"/>
                 </a:solidFill>
@@ -21521,9 +21515,9 @@
                 <a:ea typeface="Calibri" pitchFamily="34" charset="-122"/>
                 <a:cs typeface="Calibri" pitchFamily="34" charset="-120"/>
               </a:rPr>
-              <a:t>Without the projector (Activity 1): describe a baobab.</a:t>
-            </a:r>
-            <a:endParaRPr lang="en-US" sz="2000" dirty="0"/>
+              <a:t>Class textbook: The major biomes of the world (tropical grassland).</a:t>
+            </a:r>
+            <a:endParaRPr lang="en-US" sz="1800" dirty="0"/>
           </a:p>
           <a:p>
             <a:pPr algn="l" marL="342900" indent="-342900">
@@ -21534,7 +21528,7 @@
               <a:buChar char="•"/>
             </a:pPr>
             <a:r>
-              <a:rPr lang="en-US" sz="2000" dirty="0">
+              <a:rPr lang="en-US" sz="1800" dirty="0">
                 <a:solidFill>
                   <a:srgbClr val="111111"/>
                 </a:solidFill>
@@ -21542,9 +21536,9 @@
                 <a:ea typeface="Calibri" pitchFamily="34" charset="-122"/>
                 <a:cs typeface="Calibri" pitchFamily="34" charset="-120"/>
               </a:rPr>
-              <a:t>Without the projector (Activity 2): look at the trees of the school.</a:t>
-            </a:r>
-            <a:endParaRPr lang="en-US" sz="2000" dirty="0"/>
+              <a:t>Photo, Activity 1: “What happens if you let weeds grow in centre of road, Dakar, Senegal” by ambabheg, CC BY 2.0, via Flickr (https://www.flickr.com/photos/31518985@N04/5627872663)</a:t>
+            </a:r>
+            <a:endParaRPr lang="en-US" sz="1800" dirty="0"/>
           </a:p>
           <a:p>
             <a:pPr algn="l" marL="342900" indent="-342900">
@@ -21555,7 +21549,7 @@
               <a:buChar char="•"/>
             </a:pPr>
             <a:r>
-              <a:rPr lang="en-US" sz="2000" dirty="0">
+              <a:rPr lang="en-US" sz="1800" dirty="0">
                 <a:solidFill>
                   <a:srgbClr val="111111"/>
                 </a:solidFill>
@@ -21563,9 +21557,9 @@
                 <a:ea typeface="Calibri" pitchFamily="34" charset="-122"/>
                 <a:cs typeface="Calibri" pitchFamily="34" charset="-120"/>
               </a:rPr>
-              <a:t>Without the projector (Activity 3): touch the bark of a tree.</a:t>
-            </a:r>
-            <a:endParaRPr lang="en-US" sz="2000" dirty="0"/>
+              <a:t>Photo, Activity 2: “'Pain de singe' (monkey's bread) in a baobab, Senegal” by Milamber's portfolio, CC BY-NC-ND 2.0, via Flickr (https://www.flickr.com/photos/90956808@N00/420120264)</a:t>
+            </a:r>
+            <a:endParaRPr lang="en-US" sz="1800" dirty="0"/>
           </a:p>
           <a:p>
             <a:pPr algn="l" marL="342900" indent="-342900">
@@ -21576,7 +21570,7 @@
               <a:buChar char="•"/>
             </a:pPr>
             <a:r>
-              <a:rPr lang="en-US" sz="2000" dirty="0">
+              <a:rPr lang="en-US" sz="1800" dirty="0">
                 <a:solidFill>
                   <a:srgbClr val="111111"/>
                 </a:solidFill>
@@ -21584,9 +21578,9 @@
                 <a:ea typeface="Calibri" pitchFamily="34" charset="-122"/>
                 <a:cs typeface="Calibri" pitchFamily="34" charset="-120"/>
               </a:rPr>
-              <a:t>Without the projector (Activity 4): show a laterite road.</a:t>
-            </a:r>
-            <a:endParaRPr lang="en-US" sz="2000" dirty="0"/>
+              <a:t>Photo, Activity 3: “Female shea tree (Vitellaria paradoxa) in full flower” by Joel Abroad, CC BY-NC-SA 2.0, via Flickr (https://www.flickr.com/photos/40295335@N00/5603751456)</a:t>
+            </a:r>
+            <a:endParaRPr lang="en-US" sz="1800" dirty="0"/>
           </a:p>
           <a:p>
             <a:pPr algn="l" marL="342900" indent="-342900">
@@ -21597,7 +21591,7 @@
               <a:buChar char="•"/>
             </a:pPr>
             <a:r>
-              <a:rPr lang="en-US" sz="2000" dirty="0">
+              <a:rPr lang="en-US" sz="1800" dirty="0">
                 <a:solidFill>
                   <a:srgbClr val="111111"/>
                 </a:solidFill>
@@ -21605,9 +21599,30 @@
                 <a:ea typeface="Calibri" pitchFamily="34" charset="-122"/>
                 <a:cs typeface="Calibri" pitchFamily="34" charset="-120"/>
               </a:rPr>
-              <a:t>Without the projector (Activity 5): name crops grown on black soils.</a:t>
-            </a:r>
-            <a:endParaRPr lang="en-US" sz="2000" dirty="0"/>
+              <a:t>Photo, Activity 4: “Laterite soil bricks in Richard Rebello's farm” by India Water Portal, CC BY-NC-SA 2.0, via Flickr (https://www.flickr.com/photos/21623815@N03/10720461943)</a:t>
+            </a:r>
+            <a:endParaRPr lang="en-US" sz="1800" dirty="0"/>
+          </a:p>
+          <a:p>
+            <a:pPr algn="l" marL="342900" indent="-342900">
+              <a:spcAft>
+                <a:spcPts val="800"/>
+              </a:spcAft>
+              <a:buSzPct val="100000"/>
+              <a:buChar char="•"/>
+            </a:pPr>
+            <a:r>
+              <a:rPr lang="en-US" sz="1800" dirty="0">
+                <a:solidFill>
+                  <a:srgbClr val="111111"/>
+                </a:solidFill>
+                <a:latin typeface="Calibri" pitchFamily="34" charset="0"/>
+                <a:ea typeface="Calibri" pitchFamily="34" charset="-122"/>
+                <a:cs typeface="Calibri" pitchFamily="34" charset="-120"/>
+              </a:rPr>
+              <a:t>Photo, Activity 5: “Cracked Earth” by Aleatoric Consonance, CC BY 2.0, via Flickr (https://www.flickr.com/photos/93921318@N00/3772011444)</a:t>
+            </a:r>
+            <a:endParaRPr lang="en-US" sz="1800" dirty="0"/>
           </a:p>
         </p:txBody>
       </p:sp>
@@ -21740,7 +21755,7 @@
         <p:spPr>
           <a:xfrm>
             <a:off x="0" y="658368"/>
-            <a:ext cx="1463040" cy="5833872"/>
+            <a:ext cx="5120640" cy="5833872"/>
           </a:xfrm>
           <a:prstGeom prst="rect">
             <a:avLst/>
@@ -21755,8 +21770,8 @@
         </p:nvSpPr>
         <p:spPr>
           <a:xfrm>
-            <a:off x="1691640" y="1005840"/>
-            <a:ext cx="10180015" cy="731520"/>
+            <a:off x="5349240" y="1005840"/>
+            <a:ext cx="6522415" cy="731520"/>
           </a:xfrm>
           <a:prstGeom prst="rect">
             <a:avLst/>
@@ -21782,7 +21797,7 @@
                 <a:ea typeface="Times New Roman" pitchFamily="34" charset="-122"/>
                 <a:cs typeface="Times New Roman" pitchFamily="34" charset="-120"/>
               </a:rPr>
-              <a:t>References</a:t>
+              <a:t>References (continued)</a:t>
             </a:r>
             <a:endParaRPr lang="en-US" sz="3600" dirty="0"/>
           </a:p>
@@ -21796,8 +21811,8 @@
         </p:nvSpPr>
         <p:spPr>
           <a:xfrm>
-            <a:off x="1691640" y="1783080"/>
-            <a:ext cx="10180015" cy="4663440"/>
+            <a:off x="5349240" y="1783080"/>
+            <a:ext cx="6522415" cy="4663440"/>
           </a:xfrm>
           <a:prstGeom prst="rect">
             <a:avLst/>
@@ -21825,7 +21840,7 @@
                 <a:ea typeface="Calibri" pitchFamily="34" charset="-122"/>
                 <a:cs typeface="Calibri" pitchFamily="34" charset="-120"/>
               </a:rPr>
-              <a:t>Harmonised Progression Sheet, Economic Geography (5051), Form 2.</a:t>
+              <a:t>Photo, board summary (Tall grass): “Blue Wildebeest in the Lowveld” by Martin_Heigan, CC BY-NC-ND 2.0, via Flickr (https://www.flickr.com/photos/97303475@N00/2089079933)</a:t>
             </a:r>
             <a:endParaRPr lang="en-US" sz="1800" dirty="0"/>
           </a:p>
@@ -21846,112 +21861,7 @@
                 <a:ea typeface="Calibri" pitchFamily="34" charset="-122"/>
                 <a:cs typeface="Calibri" pitchFamily="34" charset="-120"/>
               </a:rPr>
-              <a:t>Class textbook: The major biomes of the world (tropical grassland).</a:t>
-            </a:r>
-            <a:endParaRPr lang="en-US" sz="1800" dirty="0"/>
-          </a:p>
-          <a:p>
-            <a:pPr algn="l" marL="342900" indent="-342900">
-              <a:spcAft>
-                <a:spcPts val="800"/>
-              </a:spcAft>
-              <a:buSzPct val="100000"/>
-              <a:buChar char="•"/>
-            </a:pPr>
-            <a:r>
-              <a:rPr lang="en-US" sz="1800" dirty="0">
-                <a:solidFill>
-                  <a:srgbClr val="111111"/>
-                </a:solidFill>
-                <a:latin typeface="Calibri" pitchFamily="34" charset="0"/>
-                <a:ea typeface="Calibri" pitchFamily="34" charset="-122"/>
-                <a:cs typeface="Calibri" pitchFamily="34" charset="-120"/>
-              </a:rPr>
-              <a:t>Photo, Activity 1: “What happens if you let weeds grow in centre of road, Dakar, Senegal” by ambabheg, CC BY 2.0, via Flickr (https://www.flickr.com/photos/31518985@N04/5627872663)</a:t>
-            </a:r>
-            <a:endParaRPr lang="en-US" sz="1800" dirty="0"/>
-          </a:p>
-          <a:p>
-            <a:pPr algn="l" marL="342900" indent="-342900">
-              <a:spcAft>
-                <a:spcPts val="800"/>
-              </a:spcAft>
-              <a:buSzPct val="100000"/>
-              <a:buChar char="•"/>
-            </a:pPr>
-            <a:r>
-              <a:rPr lang="en-US" sz="1800" dirty="0">
-                <a:solidFill>
-                  <a:srgbClr val="111111"/>
-                </a:solidFill>
-                <a:latin typeface="Calibri" pitchFamily="34" charset="0"/>
-                <a:ea typeface="Calibri" pitchFamily="34" charset="-122"/>
-                <a:cs typeface="Calibri" pitchFamily="34" charset="-120"/>
-              </a:rPr>
-              <a:t>Photo, Activity 2: “'Pain de singe' (monkey's bread) in a baobab, Senegal” by Milamber's portfolio, CC BY-NC-ND 2.0, via Flickr (https://www.flickr.com/photos/90956808@N00/420120264)</a:t>
-            </a:r>
-            <a:endParaRPr lang="en-US" sz="1800" dirty="0"/>
-          </a:p>
-          <a:p>
-            <a:pPr algn="l" marL="342900" indent="-342900">
-              <a:spcAft>
-                <a:spcPts val="800"/>
-              </a:spcAft>
-              <a:buSzPct val="100000"/>
-              <a:buChar char="•"/>
-            </a:pPr>
-            <a:r>
-              <a:rPr lang="en-US" sz="1800" dirty="0">
-                <a:solidFill>
-                  <a:srgbClr val="111111"/>
-                </a:solidFill>
-                <a:latin typeface="Calibri" pitchFamily="34" charset="0"/>
-                <a:ea typeface="Calibri" pitchFamily="34" charset="-122"/>
-                <a:cs typeface="Calibri" pitchFamily="34" charset="-120"/>
-              </a:rPr>
-              <a:t>Photo, Activity 3: “Female shea tree (Vitellaria paradoxa) in full flower” by Joel Abroad, CC BY-NC-SA 2.0, via Flickr (https://www.flickr.com/photos/40295335@N00/5603751456)</a:t>
-            </a:r>
-            <a:endParaRPr lang="en-US" sz="1800" dirty="0"/>
-          </a:p>
-          <a:p>
-            <a:pPr algn="l" marL="342900" indent="-342900">
-              <a:spcAft>
-                <a:spcPts val="800"/>
-              </a:spcAft>
-              <a:buSzPct val="100000"/>
-              <a:buChar char="•"/>
-            </a:pPr>
-            <a:r>
-              <a:rPr lang="en-US" sz="1800" dirty="0">
-                <a:solidFill>
-                  <a:srgbClr val="111111"/>
-                </a:solidFill>
-                <a:latin typeface="Calibri" pitchFamily="34" charset="0"/>
-                <a:ea typeface="Calibri" pitchFamily="34" charset="-122"/>
-                <a:cs typeface="Calibri" pitchFamily="34" charset="-120"/>
-              </a:rPr>
-              <a:t>Photo, Activity 4: “Laterite soil bricks in Richard Rebello's farm” by India Water Portal, CC BY-NC-SA 2.0, via Flickr (https://www.flickr.com/photos/21623815@N03/10720461943)</a:t>
-            </a:r>
-            <a:endParaRPr lang="en-US" sz="1800" dirty="0"/>
-          </a:p>
-          <a:p>
-            <a:pPr algn="l" marL="342900" indent="-342900">
-              <a:spcAft>
-                <a:spcPts val="800"/>
-              </a:spcAft>
-              <a:buSzPct val="100000"/>
-              <a:buChar char="•"/>
-            </a:pPr>
-            <a:r>
-              <a:rPr lang="en-US" sz="1800" dirty="0">
-                <a:solidFill>
-                  <a:srgbClr val="111111"/>
-                </a:solidFill>
-                <a:latin typeface="Calibri" pitchFamily="34" charset="0"/>
-                <a:ea typeface="Calibri" pitchFamily="34" charset="-122"/>
-                <a:cs typeface="Calibri" pitchFamily="34" charset="-120"/>
-              </a:rPr>
-              <a:t>Photo, Activity 5: “Cracked Earth” by Aleatoric Consonance, CC BY 2.0, via Flickr (https://www.flickr.com/photos/93921318@N00/3772011444)</a:t>
+              <a:t>Diagrams and animations: drawn for this lesson (Geography Department).</a:t>
             </a:r>
             <a:endParaRPr lang="en-US" sz="1800" dirty="0"/>
           </a:p>
@@ -22000,247 +21910,6 @@
             <a:fld id="{F7021451-1387-4CA6-816F-3879F97B5CBC}" type="slidenum">
               <a:rPr b="1" lang="en-US"/>
               <a:t>55</a:t>
-            </a:fld>
-            <a:endParaRPr lang="en-US"/>
-          </a:p>
-        </p:txBody>
-      </p:sp>
-    </p:spTree>
-  </p:cSld>
-  <p:clrMapOvr>
-    <a:masterClrMapping/>
-  </p:clrMapOvr>
-</p:sld>
-</file>
-
-<file path=ppt/slides/slide56.xml><?xml version="1.0" encoding="utf-8"?>
-<p:sld xmlns:a="http://schemas.openxmlformats.org/drawingml/2006/main" xmlns:r="http://schemas.openxmlformats.org/officeDocument/2006/relationships" xmlns:p="http://schemas.openxmlformats.org/presentationml/2006/main">
-  <p:cSld name="Slide 56">
-    <p:spTree>
-      <p:nvGrpSpPr>
-        <p:cNvPr id="1" name=""/>
-        <p:cNvGrpSpPr/>
-        <p:nvPr/>
-      </p:nvGrpSpPr>
-      <p:grpSpPr>
-        <a:xfrm>
-          <a:off x="0" y="0"/>
-          <a:ext cx="0" cy="0"/>
-          <a:chOff x="0" y="0"/>
-          <a:chExt cx="0" cy="0"/>
-        </a:xfrm>
-      </p:grpSpPr>
-      <p:sp>
-        <p:nvSpPr>
-          <p:cNvPr id="2" name="Text 0"/>
-          <p:cNvSpPr/>
-          <p:nvPr/>
-        </p:nvSpPr>
-        <p:spPr>
-          <a:xfrm>
-            <a:off x="457200" y="713232"/>
-            <a:ext cx="11368735" cy="274320"/>
-          </a:xfrm>
-          <a:prstGeom prst="rect">
-            <a:avLst/>
-          </a:prstGeom>
-          <a:noFill/>
-          <a:ln/>
-        </p:spPr>
-        <p:txBody>
-          <a:bodyPr wrap="square" lIns="0" tIns="0" rIns="0" bIns="0" rtlCol="0" anchor="ctr"/>
-          <a:lstStyle/>
-          <a:p>
-            <a:pPr algn="r" indent="0" marL="0">
-              <a:buNone/>
-            </a:pPr>
-            <a:r>
-              <a:rPr lang="en-US" sz="1400" b="1" dirty="0">
-                <a:solidFill>
-                  <a:srgbClr val="1C3F6E"/>
-                </a:solidFill>
-                <a:latin typeface="Calibri" pitchFamily="34" charset="0"/>
-                <a:ea typeface="Calibri" pitchFamily="34" charset="-122"/>
-                <a:cs typeface="Calibri" pitchFamily="34" charset="-120"/>
-              </a:rPr>
-              <a:t>REFERENCES</a:t>
-            </a:r>
-            <a:endParaRPr lang="en-US" sz="1400" dirty="0"/>
-          </a:p>
-        </p:txBody>
-      </p:sp>
-      <p:pic>
-        <p:nvPicPr>
-          <p:cNvPr id="3" name="Image 0" descr="/home/claude/f4/img/minesec_sheet.png">    </p:cNvPr>
-          <p:cNvPicPr>
-            <a:picLocks noChangeAspect="1"/>
-          </p:cNvPicPr>
-          <p:nvPr/>
-        </p:nvPicPr>
-        <p:blipFill>
-          <a:blip r:embed="rId1"/>
-          <a:stretch>
-            <a:fillRect/>
-          </a:stretch>
-        </p:blipFill>
-        <p:spPr>
-          <a:xfrm>
-            <a:off x="0" y="658368"/>
-            <a:ext cx="5120640" cy="5833872"/>
-          </a:xfrm>
-          <a:prstGeom prst="rect">
-            <a:avLst/>
-          </a:prstGeom>
-        </p:spPr>
-      </p:pic>
-      <p:sp>
-        <p:nvSpPr>
-          <p:cNvPr id="4" name="Text 1"/>
-          <p:cNvSpPr/>
-          <p:nvPr/>
-        </p:nvSpPr>
-        <p:spPr>
-          <a:xfrm>
-            <a:off x="5349240" y="1005840"/>
-            <a:ext cx="6522415" cy="731520"/>
-          </a:xfrm>
-          <a:prstGeom prst="rect">
-            <a:avLst/>
-          </a:prstGeom>
-          <a:noFill/>
-          <a:ln/>
-        </p:spPr>
-        <p:txBody>
-          <a:bodyPr wrap="square" lIns="0" tIns="0" rIns="0" bIns="0" rtlCol="0" anchor="ctr">
-            <a:normAutofit/>
-          </a:bodyPr>
-          <a:lstStyle/>
-          <a:p>
-            <a:pPr algn="ctr" indent="0" marL="0">
-              <a:buNone/>
-            </a:pPr>
-            <a:r>
-              <a:rPr lang="en-US" sz="3600" b="1" dirty="0">
-                <a:solidFill>
-                  <a:srgbClr val="990011"/>
-                </a:solidFill>
-                <a:latin typeface="Times New Roman" pitchFamily="34" charset="0"/>
-                <a:ea typeface="Times New Roman" pitchFamily="34" charset="-122"/>
-                <a:cs typeface="Times New Roman" pitchFamily="34" charset="-120"/>
-              </a:rPr>
-              <a:t>References (continued)</a:t>
-            </a:r>
-            <a:endParaRPr lang="en-US" sz="3600" dirty="0"/>
-          </a:p>
-        </p:txBody>
-      </p:sp>
-      <p:sp>
-        <p:nvSpPr>
-          <p:cNvPr id="5" name="Text 2"/>
-          <p:cNvSpPr/>
-          <p:nvPr/>
-        </p:nvSpPr>
-        <p:spPr>
-          <a:xfrm>
-            <a:off x="5349240" y="1783080"/>
-            <a:ext cx="6522415" cy="4663440"/>
-          </a:xfrm>
-          <a:prstGeom prst="rect">
-            <a:avLst/>
-          </a:prstGeom>
-          <a:noFill/>
-          <a:ln/>
-        </p:spPr>
-        <p:txBody>
-          <a:bodyPr wrap="square" lIns="0" tIns="0" rIns="0" bIns="0" rtlCol="0" anchor="t"/>
-          <a:lstStyle/>
-          <a:p>
-            <a:pPr algn="l" marL="342900" indent="-342900">
-              <a:spcAft>
-                <a:spcPts val="800"/>
-              </a:spcAft>
-              <a:buSzPct val="100000"/>
-              <a:buChar char="•"/>
-            </a:pPr>
-            <a:r>
-              <a:rPr lang="en-US" sz="1800" dirty="0">
-                <a:solidFill>
-                  <a:srgbClr val="111111"/>
-                </a:solidFill>
-                <a:latin typeface="Calibri" pitchFamily="34" charset="0"/>
-                <a:ea typeface="Calibri" pitchFamily="34" charset="-122"/>
-                <a:cs typeface="Calibri" pitchFamily="34" charset="-120"/>
-              </a:rPr>
-              <a:t>Photo, board summary (Tall grass): “Blue Wildebeest in the Lowveld” by Martin_Heigan, CC BY-NC-ND 2.0, via Flickr (https://www.flickr.com/photos/97303475@N00/2089079933)</a:t>
-            </a:r>
-            <a:endParaRPr lang="en-US" sz="1800" dirty="0"/>
-          </a:p>
-          <a:p>
-            <a:pPr algn="l" marL="342900" indent="-342900">
-              <a:spcAft>
-                <a:spcPts val="800"/>
-              </a:spcAft>
-              <a:buSzPct val="100000"/>
-              <a:buChar char="•"/>
-            </a:pPr>
-            <a:r>
-              <a:rPr lang="en-US" sz="1800" dirty="0">
-                <a:solidFill>
-                  <a:srgbClr val="111111"/>
-                </a:solidFill>
-                <a:latin typeface="Calibri" pitchFamily="34" charset="0"/>
-                <a:ea typeface="Calibri" pitchFamily="34" charset="-122"/>
-                <a:cs typeface="Calibri" pitchFamily="34" charset="-120"/>
-              </a:rPr>
-              <a:t>Diagrams and animations: drawn for this lesson (Geography Department).</a:t>
-            </a:r>
-            <a:endParaRPr lang="en-US" sz="1800" dirty="0"/>
-          </a:p>
-        </p:txBody>
-      </p:sp>
-      <p:sp>
-        <p:nvSpPr>
-          <p:cNvPr id="25" name="Slide Number Placeholder 0"/>
-          <p:cNvSpPr>
-            <a:spLocks noGrp="1"/>
-          </p:cNvSpPr>
-          <p:nvPr>
-            <p:ph type="sldNum" sz="quarter" idx="4294967295"/>
-          </p:nvPr>
-        </p:nvSpPr>
-        <p:spPr>
-          <a:xfrm>
-            <a:off x="27432" y="91440"/>
-            <a:ext cx="585216" cy="475488"/>
-          </a:xfrm>
-          <a:prstGeom prst="rect">
-            <a:avLst/>
-          </a:prstGeom>
-          <a:extLst>
-            <a:ext uri="{C572A759-6A51-4108-AA02-DFA0A04FC94B}">
-              <ma14:wrappingTextBoxFlag xmlns:ma14="http://schemas.microsoft.com/office/mac/drawingml/2011/main" val="0"/>
-            </a:ext>
-          </a:extLst>
-        </p:spPr>
-        <p:txBody>
-          <a:bodyPr/>
-          <a:lstStyle>
-            <a:lvl1pPr>
-              <a:defRPr sz="2000">
-                <a:solidFill>
-                  <a:srgbClr val="FFFFFF"/>
-                </a:solidFill>
-                <a:latin typeface="Calibri"/>
-                <a:ea typeface="Calibri"/>
-                <a:cs typeface="Calibri"/>
-              </a:defRPr>
-            </a:lvl1pPr>
-          </a:lstStyle>
-          <a:p>
-            <a:pPr algn="ctr"/>
-            <a:fld id="{F7021451-1387-4CA6-816F-3879F97B5CBC}" type="slidenum">
-              <a:rPr b="1" lang="en-US"/>
-              <a:t>56</a:t>
             </a:fld>
             <a:endParaRPr lang="en-US"/>
           </a:p>
@@ -22304,7 +21973,7 @@
                 <a:ea typeface="Calibri" pitchFamily="34" charset="-122"/>
                 <a:cs typeface="Calibri" pitchFamily="34" charset="-120"/>
               </a:rPr>
-              <a:t>HOMEWORK CORRECTION</a:t>
+              <a:t>LESSON PLAN</a:t>
             </a:r>
             <a:endParaRPr lang="en-US" sz="1400" dirty="0"/>
           </a:p>
@@ -22327,7 +21996,7 @@
         <p:spPr>
           <a:xfrm>
             <a:off x="0" y="658368"/>
-            <a:ext cx="5120640" cy="5833872"/>
+            <a:ext cx="2468880" cy="5833872"/>
           </a:xfrm>
           <a:prstGeom prst="rect">
             <a:avLst/>
@@ -22342,8 +22011,8 @@
         </p:nvSpPr>
         <p:spPr>
           <a:xfrm>
-            <a:off x="5349240" y="1005840"/>
-            <a:ext cx="6522415" cy="731520"/>
+            <a:off x="2697480" y="1005840"/>
+            <a:ext cx="9174175" cy="731520"/>
           </a:xfrm>
           <a:prstGeom prst="rect">
             <a:avLst/>
@@ -22369,7 +22038,7 @@
                 <a:ea typeface="Times New Roman" pitchFamily="34" charset="-122"/>
                 <a:cs typeface="Times New Roman" pitchFamily="34" charset="-120"/>
               </a:rPr>
-              <a:t>Correction: Possible Answer</a:t>
+              <a:t>Lesson Plan</a:t>
             </a:r>
             <a:endParaRPr lang="en-US" sz="3600" dirty="0"/>
           </a:p>
@@ -22383,8 +22052,8 @@
         </p:nvSpPr>
         <p:spPr>
           <a:xfrm>
-            <a:off x="5349240" y="1783080"/>
-            <a:ext cx="6522415" cy="4663440"/>
+            <a:off x="2697480" y="1783080"/>
+            <a:ext cx="9174175" cy="4663440"/>
           </a:xfrm>
           <a:prstGeom prst="rect">
             <a:avLst/>
@@ -22396,11 +22065,13 @@
           <a:bodyPr wrap="square" lIns="0" tIns="0" rIns="0" bIns="0" rtlCol="0" anchor="t"/>
           <a:lstStyle/>
           <a:p>
-            <a:pPr algn="l" indent="0" marL="0">
+            <a:pPr algn="l" marL="342900" indent="-342900">
               <a:spcAft>
                 <a:spcPts val="800"/>
               </a:spcAft>
-              <a:buNone/>
+              <a:buSzPct val="100000"/>
+              <a:buFont typeface="+mj-lt"/>
+              <a:buAutoNum type="arabicPeriod" startAt="1"/>
             </a:pPr>
             <a:r>
               <a:rPr lang="en-US" sz="4000" dirty="0">
@@ -22411,7 +22082,117 @@
                 <a:ea typeface="Times New Roman" pitchFamily="34" charset="-122"/>
                 <a:cs typeface="Times New Roman" pitchFamily="34" charset="-120"/>
               </a:rPr>
-              <a:t>Answers vary. Trees like the mango and the neem keep their leaves, while many trees such as the shea tree and acacias lose them. In the dry season the grass is yellow and dry.</a:t>
+              <a:t>Correction of the homework</a:t>
+            </a:r>
+            <a:endParaRPr lang="en-US" sz="4000" dirty="0"/>
+          </a:p>
+          <a:p>
+            <a:pPr algn="l" marL="342900" indent="-342900">
+              <a:spcAft>
+                <a:spcPts val="800"/>
+              </a:spcAft>
+              <a:buSzPct val="100000"/>
+              <a:buFont typeface="+mj-lt"/>
+              <a:buAutoNum type="arabicPeriod" startAt="1"/>
+            </a:pPr>
+            <a:r>
+              <a:rPr lang="en-US" sz="4000" dirty="0">
+                <a:solidFill>
+                  <a:srgbClr val="111111"/>
+                </a:solidFill>
+                <a:latin typeface="Times New Roman" pitchFamily="34" charset="0"/>
+                <a:ea typeface="Times New Roman" pitchFamily="34" charset="-122"/>
+                <a:cs typeface="Times New Roman" pitchFamily="34" charset="-120"/>
+              </a:rPr>
+              <a:t>Objectives and recall</a:t>
+            </a:r>
+            <a:endParaRPr lang="en-US" sz="4000" dirty="0"/>
+          </a:p>
+          <a:p>
+            <a:pPr algn="l" marL="342900" indent="-342900">
+              <a:spcAft>
+                <a:spcPts val="800"/>
+              </a:spcAft>
+              <a:buSzPct val="100000"/>
+              <a:buFont typeface="+mj-lt"/>
+              <a:buAutoNum type="arabicPeriod" startAt="1"/>
+            </a:pPr>
+            <a:r>
+              <a:rPr lang="en-US" sz="4000" dirty="0">
+                <a:solidFill>
+                  <a:srgbClr val="111111"/>
+                </a:solidFill>
+                <a:latin typeface="Times New Roman" pitchFamily="34" charset="0"/>
+                <a:ea typeface="Times New Roman" pitchFamily="34" charset="-122"/>
+                <a:cs typeface="Times New Roman" pitchFamily="34" charset="-120"/>
+              </a:rPr>
+              <a:t>Real-life situation and action to take</a:t>
+            </a:r>
+            <a:endParaRPr lang="en-US" sz="4000" dirty="0"/>
+          </a:p>
+          <a:p>
+            <a:pPr algn="l" marL="342900" indent="-342900">
+              <a:spcAft>
+                <a:spcPts val="800"/>
+              </a:spcAft>
+              <a:buSzPct val="100000"/>
+              <a:buFont typeface="+mj-lt"/>
+              <a:buAutoNum type="arabicPeriod" startAt="1"/>
+            </a:pPr>
+            <a:r>
+              <a:rPr lang="en-US" sz="4000" dirty="0">
+                <a:solidFill>
+                  <a:srgbClr val="111111"/>
+                </a:solidFill>
+                <a:latin typeface="Times New Roman" pitchFamily="34" charset="0"/>
+                <a:ea typeface="Times New Roman" pitchFamily="34" charset="-122"/>
+                <a:cs typeface="Times New Roman" pitchFamily="34" charset="-120"/>
+              </a:rPr>
+              <a:t>Learning activities</a:t>
+            </a:r>
+            <a:endParaRPr lang="en-US" sz="4000" dirty="0"/>
+          </a:p>
+          <a:p>
+            <a:pPr algn="l" marL="342900" indent="-342900">
+              <a:spcAft>
+                <a:spcPts val="800"/>
+              </a:spcAft>
+              <a:buSzPct val="100000"/>
+              <a:buFont typeface="+mj-lt"/>
+              <a:buAutoNum type="arabicPeriod" startAt="1"/>
+            </a:pPr>
+            <a:r>
+              <a:rPr lang="en-US" sz="4000" dirty="0">
+                <a:solidFill>
+                  <a:srgbClr val="111111"/>
+                </a:solidFill>
+                <a:latin typeface="Times New Roman" pitchFamily="34" charset="0"/>
+                <a:ea typeface="Times New Roman" pitchFamily="34" charset="-122"/>
+                <a:cs typeface="Times New Roman" pitchFamily="34" charset="-120"/>
+              </a:rPr>
+              <a:t>Board summary</a:t>
+            </a:r>
+            <a:endParaRPr lang="en-US" sz="4000" dirty="0"/>
+          </a:p>
+          <a:p>
+            <a:pPr algn="l" marL="342900" indent="-342900">
+              <a:spcAft>
+                <a:spcPts val="800"/>
+              </a:spcAft>
+              <a:buSzPct val="100000"/>
+              <a:buFont typeface="+mj-lt"/>
+              <a:buAutoNum type="arabicPeriod" startAt="1"/>
+            </a:pPr>
+            <a:r>
+              <a:rPr lang="en-US" sz="4000" dirty="0">
+                <a:solidFill>
+                  <a:srgbClr val="111111"/>
+                </a:solidFill>
+                <a:latin typeface="Times New Roman" pitchFamily="34" charset="0"/>
+                <a:ea typeface="Times New Roman" pitchFamily="34" charset="-122"/>
+                <a:cs typeface="Times New Roman" pitchFamily="34" charset="-120"/>
+              </a:rPr>
+              <a:t>Evaluation, remediation and homework</a:t>
             </a:r>
             <a:endParaRPr lang="en-US" sz="4000" dirty="0"/>
           </a:p>
@@ -22523,7 +22304,7 @@
                 <a:ea typeface="Calibri" pitchFamily="34" charset="-122"/>
                 <a:cs typeface="Calibri" pitchFamily="34" charset="-120"/>
               </a:rPr>
-              <a:t>LESSON PLAN</a:t>
+              <a:t>OBJECTIVES</a:t>
             </a:r>
             <a:endParaRPr lang="en-US" sz="1400" dirty="0"/>
           </a:p>
@@ -22546,7 +22327,7 @@
         <p:spPr>
           <a:xfrm>
             <a:off x="0" y="658368"/>
-            <a:ext cx="2468880" cy="5833872"/>
+            <a:ext cx="3840480" cy="5833872"/>
           </a:xfrm>
           <a:prstGeom prst="rect">
             <a:avLst/>
@@ -22561,8 +22342,8 @@
         </p:nvSpPr>
         <p:spPr>
           <a:xfrm>
-            <a:off x="2697480" y="1005840"/>
-            <a:ext cx="9174175" cy="731520"/>
+            <a:off x="4069080" y="1005840"/>
+            <a:ext cx="7802575" cy="731520"/>
           </a:xfrm>
           <a:prstGeom prst="rect">
             <a:avLst/>
@@ -22588,7 +22369,7 @@
                 <a:ea typeface="Times New Roman" pitchFamily="34" charset="-122"/>
                 <a:cs typeface="Times New Roman" pitchFamily="34" charset="-120"/>
               </a:rPr>
-              <a:t>Lesson Plan</a:t>
+              <a:t>Objectives</a:t>
             </a:r>
             <a:endParaRPr lang="en-US" sz="3600" dirty="0"/>
           </a:p>
@@ -22602,8 +22383,8 @@
         </p:nvSpPr>
         <p:spPr>
           <a:xfrm>
-            <a:off x="2697480" y="1783080"/>
-            <a:ext cx="9174175" cy="4663440"/>
+            <a:off x="4069080" y="1783080"/>
+            <a:ext cx="7802575" cy="4663440"/>
           </a:xfrm>
           <a:prstGeom prst="rect">
             <a:avLst/>
@@ -22614,6 +22395,26 @@
         <p:txBody>
           <a:bodyPr wrap="square" lIns="0" tIns="0" rIns="0" bIns="0" rtlCol="0" anchor="t"/>
           <a:lstStyle/>
+          <a:p>
+            <a:pPr algn="l" indent="0" marL="0">
+              <a:spcAft>
+                <a:spcPts val="800"/>
+              </a:spcAft>
+              <a:buNone/>
+            </a:pPr>
+            <a:r>
+              <a:rPr lang="en-US" sz="4000" b="1" dirty="0">
+                <a:solidFill>
+                  <a:srgbClr val="111111"/>
+                </a:solidFill>
+                <a:latin typeface="Times New Roman" pitchFamily="34" charset="0"/>
+                <a:ea typeface="Times New Roman" pitchFamily="34" charset="-122"/>
+                <a:cs typeface="Times New Roman" pitchFamily="34" charset="-120"/>
+              </a:rPr>
+              <a:t>By the end of this lesson, you should be able to:</a:t>
+            </a:r>
+            <a:endParaRPr lang="en-US" sz="4000" dirty="0"/>
+          </a:p>
           <a:p>
             <a:pPr algn="l" marL="342900" indent="-342900">
               <a:spcAft>
@@ -22632,7 +22433,7 @@
                 <a:ea typeface="Times New Roman" pitchFamily="34" charset="-122"/>
                 <a:cs typeface="Times New Roman" pitchFamily="34" charset="-120"/>
               </a:rPr>
-              <a:t>Correction of the homework</a:t>
+              <a:t>Describe the vegetation of the Tropical Grassland region.</a:t>
             </a:r>
             <a:endParaRPr lang="en-US" sz="4000" dirty="0"/>
           </a:p>
@@ -22654,95 +22455,7 @@
                 <a:ea typeface="Times New Roman" pitchFamily="34" charset="-122"/>
                 <a:cs typeface="Times New Roman" pitchFamily="34" charset="-120"/>
               </a:rPr>
-              <a:t>Objectives and recall</a:t>
-            </a:r>
-            <a:endParaRPr lang="en-US" sz="4000" dirty="0"/>
-          </a:p>
-          <a:p>
-            <a:pPr algn="l" marL="342900" indent="-342900">
-              <a:spcAft>
-                <a:spcPts val="800"/>
-              </a:spcAft>
-              <a:buSzPct val="100000"/>
-              <a:buFont typeface="+mj-lt"/>
-              <a:buAutoNum type="arabicPeriod" startAt="1"/>
-            </a:pPr>
-            <a:r>
-              <a:rPr lang="en-US" sz="4000" dirty="0">
-                <a:solidFill>
-                  <a:srgbClr val="111111"/>
-                </a:solidFill>
-                <a:latin typeface="Times New Roman" pitchFamily="34" charset="0"/>
-                <a:ea typeface="Times New Roman" pitchFamily="34" charset="-122"/>
-                <a:cs typeface="Times New Roman" pitchFamily="34" charset="-120"/>
-              </a:rPr>
-              <a:t>Real-life situation and action to take</a:t>
-            </a:r>
-            <a:endParaRPr lang="en-US" sz="4000" dirty="0"/>
-          </a:p>
-          <a:p>
-            <a:pPr algn="l" marL="342900" indent="-342900">
-              <a:spcAft>
-                <a:spcPts val="800"/>
-              </a:spcAft>
-              <a:buSzPct val="100000"/>
-              <a:buFont typeface="+mj-lt"/>
-              <a:buAutoNum type="arabicPeriod" startAt="1"/>
-            </a:pPr>
-            <a:r>
-              <a:rPr lang="en-US" sz="4000" dirty="0">
-                <a:solidFill>
-                  <a:srgbClr val="111111"/>
-                </a:solidFill>
-                <a:latin typeface="Times New Roman" pitchFamily="34" charset="0"/>
-                <a:ea typeface="Times New Roman" pitchFamily="34" charset="-122"/>
-                <a:cs typeface="Times New Roman" pitchFamily="34" charset="-120"/>
-              </a:rPr>
-              <a:t>Learning activities</a:t>
-            </a:r>
-            <a:endParaRPr lang="en-US" sz="4000" dirty="0"/>
-          </a:p>
-          <a:p>
-            <a:pPr algn="l" marL="342900" indent="-342900">
-              <a:spcAft>
-                <a:spcPts val="800"/>
-              </a:spcAft>
-              <a:buSzPct val="100000"/>
-              <a:buFont typeface="+mj-lt"/>
-              <a:buAutoNum type="arabicPeriod" startAt="1"/>
-            </a:pPr>
-            <a:r>
-              <a:rPr lang="en-US" sz="4000" dirty="0">
-                <a:solidFill>
-                  <a:srgbClr val="111111"/>
-                </a:solidFill>
-                <a:latin typeface="Times New Roman" pitchFamily="34" charset="0"/>
-                <a:ea typeface="Times New Roman" pitchFamily="34" charset="-122"/>
-                <a:cs typeface="Times New Roman" pitchFamily="34" charset="-120"/>
-              </a:rPr>
-              <a:t>Board summary</a:t>
-            </a:r>
-            <a:endParaRPr lang="en-US" sz="4000" dirty="0"/>
-          </a:p>
-          <a:p>
-            <a:pPr algn="l" marL="342900" indent="-342900">
-              <a:spcAft>
-                <a:spcPts val="800"/>
-              </a:spcAft>
-              <a:buSzPct val="100000"/>
-              <a:buFont typeface="+mj-lt"/>
-              <a:buAutoNum type="arabicPeriod" startAt="1"/>
-            </a:pPr>
-            <a:r>
-              <a:rPr lang="en-US" sz="4000" dirty="0">
-                <a:solidFill>
-                  <a:srgbClr val="111111"/>
-                </a:solidFill>
-                <a:latin typeface="Times New Roman" pitchFamily="34" charset="0"/>
-                <a:ea typeface="Times New Roman" pitchFamily="34" charset="-122"/>
-                <a:cs typeface="Times New Roman" pitchFamily="34" charset="-120"/>
-              </a:rPr>
-              <a:t>Evaluation, remediation and homework</a:t>
+              <a:t>Explain how savanna plants are adapted to the dry season and to bush fires.</a:t>
             </a:r>
             <a:endParaRPr lang="en-US" sz="4000" dirty="0"/>
           </a:p>
@@ -22877,7 +22590,7 @@
         <p:spPr>
           <a:xfrm>
             <a:off x="0" y="658368"/>
-            <a:ext cx="3840480" cy="5833872"/>
+            <a:ext cx="5120640" cy="5833872"/>
           </a:xfrm>
           <a:prstGeom prst="rect">
             <a:avLst/>
@@ -22892,8 +22605,8 @@
         </p:nvSpPr>
         <p:spPr>
           <a:xfrm>
-            <a:off x="4069080" y="1005840"/>
-            <a:ext cx="7802575" cy="731520"/>
+            <a:off x="5349240" y="1005840"/>
+            <a:ext cx="6522415" cy="731520"/>
           </a:xfrm>
           <a:prstGeom prst="rect">
             <a:avLst/>
@@ -22919,7 +22632,7 @@
                 <a:ea typeface="Times New Roman" pitchFamily="34" charset="-122"/>
                 <a:cs typeface="Times New Roman" pitchFamily="34" charset="-120"/>
               </a:rPr>
-              <a:t>Objectives</a:t>
+              <a:t>Objectives (continued)</a:t>
             </a:r>
             <a:endParaRPr lang="en-US" sz="3600" dirty="0"/>
           </a:p>
@@ -22933,8 +22646,8 @@
         </p:nvSpPr>
         <p:spPr>
           <a:xfrm>
-            <a:off x="4069080" y="1783080"/>
-            <a:ext cx="7802575" cy="4663440"/>
+            <a:off x="5349240" y="1783080"/>
+            <a:ext cx="6522415" cy="4663440"/>
           </a:xfrm>
           <a:prstGeom prst="rect">
             <a:avLst/>
@@ -22945,26 +22658,6 @@
         <p:txBody>
           <a:bodyPr wrap="square" lIns="0" tIns="0" rIns="0" bIns="0" rtlCol="0" anchor="t"/>
           <a:lstStyle/>
-          <a:p>
-            <a:pPr algn="l" indent="0" marL="0">
-              <a:spcAft>
-                <a:spcPts val="800"/>
-              </a:spcAft>
-              <a:buNone/>
-            </a:pPr>
-            <a:r>
-              <a:rPr lang="en-US" sz="4000" b="1" dirty="0">
-                <a:solidFill>
-                  <a:srgbClr val="111111"/>
-                </a:solidFill>
-                <a:latin typeface="Times New Roman" pitchFamily="34" charset="0"/>
-                <a:ea typeface="Times New Roman" pitchFamily="34" charset="-122"/>
-                <a:cs typeface="Times New Roman" pitchFamily="34" charset="-120"/>
-              </a:rPr>
-              <a:t>By the end of this lesson, you should be able to:</a:t>
-            </a:r>
-            <a:endParaRPr lang="en-US" sz="4000" dirty="0"/>
-          </a:p>
           <a:p>
             <a:pPr algn="l" marL="342900" indent="-342900">
               <a:spcAft>
@@ -22983,29 +22676,7 @@
                 <a:ea typeface="Times New Roman" pitchFamily="34" charset="-122"/>
                 <a:cs typeface="Times New Roman" pitchFamily="34" charset="-120"/>
               </a:rPr>
-              <a:t>Describe the vegetation of the Tropical Grassland region.</a:t>
-            </a:r>
-            <a:endParaRPr lang="en-US" sz="4000" dirty="0"/>
-          </a:p>
-          <a:p>
-            <a:pPr algn="l" marL="342900" indent="-342900">
-              <a:spcAft>
-                <a:spcPts val="800"/>
-              </a:spcAft>
-              <a:buSzPct val="100000"/>
-              <a:buFont typeface="+mj-lt"/>
-              <a:buAutoNum type="arabicPeriod" startAt="1"/>
-            </a:pPr>
-            <a:r>
-              <a:rPr lang="en-US" sz="4000" dirty="0">
-                <a:solidFill>
-                  <a:srgbClr val="111111"/>
-                </a:solidFill>
-                <a:latin typeface="Times New Roman" pitchFamily="34" charset="0"/>
-                <a:ea typeface="Times New Roman" pitchFamily="34" charset="-122"/>
-                <a:cs typeface="Times New Roman" pitchFamily="34" charset="-120"/>
-              </a:rPr>
-              <a:t>Explain how savanna plants are adapted to the dry season and to bush fires.</a:t>
+              <a:t>Describe the main soils of the Tropical Grassland region.</a:t>
             </a:r>
             <a:endParaRPr lang="en-US" sz="4000" dirty="0"/>
           </a:p>
@@ -23117,7 +22788,7 @@
                 <a:ea typeface="Calibri" pitchFamily="34" charset="-122"/>
                 <a:cs typeface="Calibri" pitchFamily="34" charset="-120"/>
               </a:rPr>
-              <a:t>OBJECTIVES</a:t>
+              <a:t>PREVIOUS KNOWLEDGE</a:t>
             </a:r>
             <a:endParaRPr lang="en-US" sz="1400" dirty="0"/>
           </a:p>
@@ -23140,7 +22811,7 @@
         <p:spPr>
           <a:xfrm>
             <a:off x="0" y="658368"/>
-            <a:ext cx="5120640" cy="5833872"/>
+            <a:ext cx="2468880" cy="5833872"/>
           </a:xfrm>
           <a:prstGeom prst="rect">
             <a:avLst/>
@@ -23155,8 +22826,8 @@
         </p:nvSpPr>
         <p:spPr>
           <a:xfrm>
-            <a:off x="5349240" y="1005840"/>
-            <a:ext cx="6522415" cy="731520"/>
+            <a:off x="2697480" y="1005840"/>
+            <a:ext cx="9174175" cy="731520"/>
           </a:xfrm>
           <a:prstGeom prst="rect">
             <a:avLst/>
@@ -23182,7 +22853,7 @@
                 <a:ea typeface="Times New Roman" pitchFamily="34" charset="-122"/>
                 <a:cs typeface="Times New Roman" pitchFamily="34" charset="-120"/>
               </a:rPr>
-              <a:t>Objectives (continued)</a:t>
+              <a:t>Previous Knowledge</a:t>
             </a:r>
             <a:endParaRPr lang="en-US" sz="3600" dirty="0"/>
           </a:p>
@@ -23196,8 +22867,8 @@
         </p:nvSpPr>
         <p:spPr>
           <a:xfrm>
-            <a:off x="5349240" y="1783080"/>
-            <a:ext cx="6522415" cy="4663440"/>
+            <a:off x="2697480" y="1783080"/>
+            <a:ext cx="9174175" cy="4663440"/>
           </a:xfrm>
           <a:prstGeom prst="rect">
             <a:avLst/>
@@ -23214,8 +22885,7 @@
                 <a:spcPts val="800"/>
               </a:spcAft>
               <a:buSzPct val="100000"/>
-              <a:buFont typeface="+mj-lt"/>
-              <a:buAutoNum type="arabicPeriod" startAt="1"/>
+              <a:buChar char="•"/>
             </a:pPr>
             <a:r>
               <a:rPr lang="en-US" sz="4000" dirty="0">
@@ -23226,7 +22896,49 @@
                 <a:ea typeface="Times New Roman" pitchFamily="34" charset="-122"/>
                 <a:cs typeface="Times New Roman" pitchFamily="34" charset="-120"/>
               </a:rPr>
-              <a:t>Describe the main soils of the Tropical Grassland region.</a:t>
+              <a:t>The Tropical Grassland lies between 5° and 15° north and south of the Equator.</a:t>
+            </a:r>
+            <a:endParaRPr lang="en-US" sz="4000" dirty="0"/>
+          </a:p>
+          <a:p>
+            <a:pPr algn="l" marL="342900" indent="-342900">
+              <a:spcAft>
+                <a:spcPts val="800"/>
+              </a:spcAft>
+              <a:buSzPct val="100000"/>
+              <a:buChar char="•"/>
+            </a:pPr>
+            <a:r>
+              <a:rPr lang="en-US" sz="4000" dirty="0">
+                <a:solidFill>
+                  <a:srgbClr val="111111"/>
+                </a:solidFill>
+                <a:latin typeface="Times New Roman" pitchFamily="34" charset="0"/>
+                <a:ea typeface="Times New Roman" pitchFamily="34" charset="-122"/>
+                <a:cs typeface="Times New Roman" pitchFamily="34" charset="-120"/>
+              </a:rPr>
+              <a:t>It has a wet season and a dry season, with 500 to 1,500 mm of rain.</a:t>
+            </a:r>
+            <a:endParaRPr lang="en-US" sz="4000" dirty="0"/>
+          </a:p>
+          <a:p>
+            <a:pPr algn="l" marL="342900" indent="-342900">
+              <a:spcAft>
+                <a:spcPts val="800"/>
+              </a:spcAft>
+              <a:buSzPct val="100000"/>
+              <a:buChar char="•"/>
+            </a:pPr>
+            <a:r>
+              <a:rPr lang="en-US" sz="4000" dirty="0">
+                <a:solidFill>
+                  <a:srgbClr val="111111"/>
+                </a:solidFill>
+                <a:latin typeface="Times New Roman" pitchFamily="34" charset="0"/>
+                <a:ea typeface="Times New Roman" pitchFamily="34" charset="-122"/>
+                <a:cs typeface="Times New Roman" pitchFamily="34" charset="-120"/>
+              </a:rPr>
+              <a:t>Garoua has a dry season from November to March.</a:t>
             </a:r>
             <a:endParaRPr lang="en-US" sz="4000" dirty="0"/>
           </a:p>
